--- a/presentation/RIVET-WM_seminar.pptx
+++ b/presentation/RIVET-WM_seminar.pptx
@@ -134,7 +134,7 @@
   <p:extLst>
     <p:ext uri="{521415D9-36F7-43E2-AB2F-B90AF26B5E84}">
       <p14:sectionLst xmlns:p14="http://schemas.microsoft.com/office/powerpoint/2010/main">
-        <p14:section name="Introduction" id="{9b8ed217-5233-efe9-50ee-d6f38a59c10b}">
+        <p14:section name="Introduction" id="{b6cbcbd6-b67c-02ba-76e3-12f3c7bcf57e}">
           <p14:sldIdLst>
             <p14:sldId id="256"/>
             <p14:sldId id="257"/>
@@ -142,13 +142,13 @@
             <p14:sldId id="259"/>
           </p14:sldIdLst>
         </p14:section>
-        <p14:section name="데이터 진단" id="{f06591ff-5210-4708-158c-adac52c7c45f}">
+        <p14:section name="데이터 진단" id="{3313319d-bdb5-2525-4ac7-55c24dfd8266}">
           <p14:sldIdLst>
             <p14:sldId id="260"/>
             <p14:sldId id="261"/>
           </p14:sldIdLst>
         </p14:section>
-        <p14:section name="유형 1 판정" id="{1048e16c-1bdf-5962-9207-c214899a5d24}">
+        <p14:section name="유형 1 판정" id="{9853514a-85f2-a6ac-b3b6-b9847560a5cf}">
           <p14:sldIdLst>
             <p14:sldId id="262"/>
             <p14:sldId id="263"/>
@@ -160,7 +160,7 @@
             <p14:sldId id="269"/>
           </p14:sldIdLst>
         </p14:section>
-        <p14:section name="실험 결과" id="{160789bb-c7cf-6da1-bb6d-ea6537380c94}">
+        <p14:section name="실험 결과" id="{fdcc10e1-af1a-61ad-3489-c85029cc35d6}">
           <p14:sldIdLst>
             <p14:sldId id="270"/>
             <p14:sldId id="271"/>
@@ -169,7 +169,7 @@
             <p14:sldId id="274"/>
           </p14:sldIdLst>
         </p14:section>
-        <p14:section name="유형 2" id="{6d847cef-9c3e-47ec-2de9-ec98a0f1dde1}">
+        <p14:section name="유형 2" id="{34ddad87-200d-ee0e-188c-f8ef8a8dc64f}">
           <p14:sldIdLst>
             <p14:sldId id="275"/>
             <p14:sldId id="276"/>
@@ -178,7 +178,7 @@
             <p14:sldId id="279"/>
           </p14:sldIdLst>
         </p14:section>
-        <p14:section name="현장 적용 및 결론" id="{c952da17-0d83-0c43-7b9a-2c10b793e1ea}">
+        <p14:section name="현장 적용 및 결론" id="{b05c0c86-d0c3-f812-0145-585fca553bd6}">
           <p14:sldIdLst>
             <p14:sldId id="280"/>
             <p14:sldId id="281"/>
@@ -221,7 +221,7 @@
                 </a:solidFill>
                 <a:latin typeface="+mn-lt"/>
               </a:rPr>
-              <a:t>버스트 길이별 오분류율 (%)</a:t>
+              <a:t>관측 행 수별 오분류율 (%)</a:t>
             </a:r>
           </a:p>
         </c:rich>
@@ -481,7 +481,7 @@
                 </a:solidFill>
                 <a:latin typeface="+mn-lt"/>
               </a:rPr>
-              <a:t>최종 구간 이상 135행의 판정 분담 (행)</a:t>
+              <a:t>이상 135행을 누가 잡았나 (행)</a:t>
             </a:r>
           </a:p>
         </c:rich>
@@ -747,7 +747,7 @@
                 </a:solidFill>
                 <a:latin typeface="+mn-lt"/>
               </a:rPr>
-              <a:t>질문 20쌍 평가 결과 (%)</a:t>
+              <a:t>도입 전 → 후 (질문 20쌍, %)</a:t>
             </a:r>
           </a:p>
         </c:rich>
@@ -814,10 +814,10 @@
                 <c:ptCount val="2"/>
                 <c:lvl>
                   <c:pt idx="0">
-                    <c:v>근거 표기 (citation)</c:v>
+                    <c:v>근거 인용</c:v>
                   </c:pt>
                   <c:pt idx="1">
-                    <c:v>정책 등급 일치</c:v>
+                    <c:v>규칙표와 등급 일치</c:v>
                   </c:pt>
                 </c:lvl>
               </c:multiLvlStrCache>
@@ -848,7 +848,7 @@
               <c:strCache>
                 <c:ptCount val="1"/>
                 <c:pt idx="0">
-                  <c:v>도입 후 (지식그래프 + 정책표)</c:v>
+                  <c:v>도입 후 (지식그래프 + 규칙표)</c:v>
                 </c:pt>
               </c:strCache>
             </c:strRef>
@@ -891,10 +891,10 @@
                 <c:ptCount val="2"/>
                 <c:lvl>
                   <c:pt idx="0">
-                    <c:v>근거 표기 (citation)</c:v>
+                    <c:v>근거 인용</c:v>
                   </c:pt>
                   <c:pt idx="1">
-                    <c:v>정책 등급 일치</c:v>
+                    <c:v>규칙표와 등급 일치</c:v>
                   </c:pt>
                 </c:lvl>
               </c:multiLvlStrCache>
@@ -4729,21 +4729,7 @@
                   <a:schemeClr val="tx1"/>
                 </a:solidFill>
               </a:rPr>
-              <a:t>고장 증거를 지키며 적응하는 산업용 </a:t>
-            </a:r>
-            <a:pPr algn="ctr" indent="0" marL="0">
-              <a:buNone/>
-            </a:pPr>
-            <a:r>
-              <a:rPr lang="en-US" sz="2800" dirty="0">
-                <a:solidFill>
-                  <a:schemeClr val="tx1"/>
-                </a:solidFill>
-                <a:latin typeface="Georgia" pitchFamily="34" charset="0"/>
-                <a:ea typeface="Georgia" pitchFamily="34" charset="-122"/>
-                <a:cs typeface="Georgia" pitchFamily="34" charset="-120"/>
-              </a:rPr>
-              <a:t>World Model</a:t>
+              <a:t>전류로 운전상태를 읽어 진동 이상을 판정하는 유압펌프 감시 모델</a:t>
             </a:r>
             <a:endParaRPr lang="en-US" sz="2800" dirty="0"/>
           </a:p>
@@ -4918,7 +4904,7 @@
                   <a:schemeClr val="tx1"/>
                 </a:solidFill>
               </a:rPr>
-              <a:t>전문가 A ② 부하 상태 추정</a:t>
+              <a:t>전문가 A ② 전류로 부하 읽기</a:t>
             </a:r>
             <a:endParaRPr lang="en-US" sz="2400" dirty="0"/>
           </a:p>
@@ -4956,7 +4942,7 @@
                   <a:schemeClr val="tx1"/>
                 </a:solidFill>
               </a:rPr>
-              <a:t>전류 진폭이 부하 구간을 결정 — 10행이면 부하 구간 확정, 그 전 행은 판단 보류</a:t>
+              <a:t>전류는 한 구간 안에서 하나의 사인파 — 진폭이 클수록 무거운 부하</a:t>
             </a:r>
             <a:endParaRPr lang="en-US" sz="1400" dirty="0"/>
           </a:p>
@@ -4992,7 +4978,7 @@
                   <a:schemeClr val="tx1"/>
                 </a:solidFill>
               </a:rPr>
-              <a:t>① 전류 방출 모델 : </a:t>
+              <a:t>① 전류 = 사인파 : </a:t>
             </a:r>
             <a:pPr algn="l" indent="0" marL="0">
               <a:buNone/>
@@ -5042,7 +5028,7 @@
         <p:spPr>
           <a:xfrm>
             <a:off x="457200" y="2971800"/>
-            <a:ext cx="6949440" cy="365760"/>
+            <a:ext cx="7132320" cy="365760"/>
           </a:xfrm>
           <a:prstGeom prst="rect">
             <a:avLst/>
@@ -5063,7 +5049,7 @@
                   <a:schemeClr val="tx1"/>
                 </a:solidFill>
               </a:rPr>
-              <a:t>② phase-marginalized likelihood : </a:t>
+              <a:t>② 시작 위상은 몰라도 됨 : </a:t>
             </a:r>
             <a:pPr algn="l" indent="0" marL="0">
               <a:buNone/>
@@ -5074,7 +5060,7 @@
                   <a:schemeClr val="tx1"/>
                 </a:solidFill>
               </a:rPr>
-              <a:t>위상 72점 격자 평균</a:t>
+              <a:t>72개 위상 후보를 평균 (phase-marginalized)</a:t>
             </a:r>
             <a:endParaRPr lang="en-US" sz="1400" dirty="0"/>
           </a:p>
@@ -5151,7 +5137,7 @@
                   <a:schemeClr val="tx1"/>
                 </a:solidFill>
               </a:rPr>
-              <a:t>BIC로 1–6 중 선택, 진폭 119 / 146 / 202 / 245</a:t>
+              <a:t>진폭 약 119 / 146 / 202 / 245 (BIC로 개수 선택)</a:t>
             </a:r>
             <a:endParaRPr lang="en-US" sz="1400" dirty="0"/>
           </a:p>
@@ -5168,7 +5154,7 @@
                   <a:schemeClr val="tx1"/>
                 </a:solidFill>
               </a:rPr>
-              <a:t>④ 공백 인지 전이 : </a:t>
+              <a:t>④ 앞 구간에서 이어받기 : </a:t>
             </a:r>
             <a:pPr algn="l" indent="0" marL="0">
               <a:spcAft>
@@ -5182,7 +5168,7 @@
                   <a:schemeClr val="tx1"/>
                 </a:solidFill>
               </a:rPr>
-              <a:t>직전 구간에서 prior 생성, 18초 넘는 공백은 연결 끊음</a:t>
+              <a:t>직전 구간의 부하로 다음 부하를 예측, 18초 넘게 끊기면 새로 시작</a:t>
             </a:r>
             <a:endParaRPr lang="en-US" sz="1400" dirty="0"/>
           </a:p>
@@ -5237,7 +5223,7 @@
                   <a:schemeClr val="tx1"/>
                 </a:solidFill>
               </a:rPr>
-              <a:t>readiness rule</a:t>
+              <a:t>1초(10행)면 97% 정확</a:t>
             </a:r>
             <a:endParaRPr lang="en-US" sz="1400" dirty="0"/>
           </a:p>
@@ -5254,7 +5240,7 @@
                   <a:schemeClr val="tx1"/>
                 </a:solidFill>
               </a:rPr>
-              <a:t>확신 ≥ 0.9 또는 10행이면 확정, 그 전에는 판단 보류가 흡수</a:t>
+              <a:t>확신 0.9 이상 또는 10행이면 부하 확정, 그 전에는 '판단 보류'</a:t>
             </a:r>
             <a:endParaRPr lang="en-US" sz="1400" dirty="0"/>
           </a:p>
@@ -5317,7 +5303,7 @@
                   <a:schemeClr val="tx1"/>
                 </a:solidFill>
               </a:rPr>
-              <a:t>전문가 A ③ 보정 · 경보 예산 · 판정 규칙</a:t>
+              <a:t>전문가 A ③ 경보 예산과 판정 규칙</a:t>
             </a:r>
             <a:endParaRPr lang="en-US" sz="2400" dirty="0"/>
           </a:p>
@@ -5355,7 +5341,7 @@
                   <a:schemeClr val="tx1"/>
                 </a:solidFill>
               </a:rPr>
-              <a:t>경보 예산 α = 0.01 하나로 세 경로를 묶고, 부하 변화는 '운전변화 알림'으로 분리</a:t>
+              <a:t>'정상에서 100번 중 1번 나올 만큼 이상한가'로 판정 — 이 1%를 세 경로가 나눠 쓴다</a:t>
             </a:r>
             <a:endParaRPr lang="en-US" sz="1400" dirty="0"/>
           </a:p>
@@ -5391,7 +5377,7 @@
                   <a:schemeClr val="tx1"/>
                 </a:solidFill>
               </a:rPr>
-              <a:t>경보 예산 α = 0.01</a:t>
+              <a:t>경보 예산 α = 0.01 (1%)</a:t>
             </a:r>
             <a:endParaRPr lang="en-US" sz="1600" dirty="0"/>
           </a:p>
@@ -5480,7 +5466,7 @@
         </p:nvSpPr>
         <p:spPr>
           <a:xfrm>
-            <a:off x="457200" y="2761488"/>
+            <a:off x="457200" y="2734056"/>
             <a:ext cx="182880" cy="182880"/>
           </a:xfrm>
           <a:prstGeom prst="rect">
@@ -5505,8 +5491,8 @@
         </p:nvSpPr>
         <p:spPr>
           <a:xfrm>
-            <a:off x="749808" y="2697480"/>
-            <a:ext cx="3108960" cy="310896"/>
+            <a:off x="749808" y="2670048"/>
+            <a:ext cx="3291840" cy="457200"/>
           </a:xfrm>
           <a:prstGeom prst="rect">
             <a:avLst/>
@@ -5515,7 +5501,7 @@
           <a:ln/>
         </p:spPr>
         <p:txBody>
-          <a:bodyPr wrap="square" lIns="0" tIns="0" rIns="0" bIns="0" rtlCol="0" anchor="ctr"/>
+          <a:bodyPr wrap="square" lIns="0" tIns="0" rIns="0" bIns="0" rtlCol="0" anchor="t"/>
           <a:lstStyle/>
           <a:p>
             <a:pPr algn="l" indent="0" marL="0">
@@ -5539,6 +5525,20 @@
                 </a:solidFill>
               </a:rPr>
               <a:t>0.8 α</a:t>
+            </a:r>
+            <a:endParaRPr lang="en-US" sz="1400" dirty="0"/>
+          </a:p>
+          <a:p>
+            <a:pPr algn="l" indent="0" marL="0">
+              <a:buNone/>
+            </a:pPr>
+            <a:r>
+              <a:rPr lang="en-US" sz="1200" dirty="0">
+                <a:solidFill>
+                  <a:schemeClr val="tx2"/>
+                </a:solidFill>
+              </a:rPr>
+              <a:t>같은 부하 대비 진동 상승</a:t>
             </a:r>
             <a:endParaRPr lang="en-US" sz="1400" dirty="0"/>
           </a:p>
@@ -5552,7 +5552,7 @@
         </p:nvSpPr>
         <p:spPr>
           <a:xfrm>
-            <a:off x="457200" y="3108960"/>
+            <a:off x="457200" y="3209544"/>
             <a:ext cx="182880" cy="182880"/>
           </a:xfrm>
           <a:prstGeom prst="rect">
@@ -5577,8 +5577,8 @@
         </p:nvSpPr>
         <p:spPr>
           <a:xfrm>
-            <a:off x="749808" y="3044952"/>
-            <a:ext cx="3108960" cy="310896"/>
+            <a:off x="749808" y="3145536"/>
+            <a:ext cx="3291840" cy="457200"/>
           </a:xfrm>
           <a:prstGeom prst="rect">
             <a:avLst/>
@@ -5587,7 +5587,7 @@
           <a:ln/>
         </p:spPr>
         <p:txBody>
-          <a:bodyPr wrap="square" lIns="0" tIns="0" rIns="0" bIns="0" rtlCol="0" anchor="ctr"/>
+          <a:bodyPr wrap="square" lIns="0" tIns="0" rIns="0" bIns="0" rtlCol="0" anchor="t"/>
           <a:lstStyle/>
           <a:p>
             <a:pPr algn="l" indent="0" marL="0">
@@ -5611,6 +5611,20 @@
                 </a:solidFill>
               </a:rPr>
               <a:t>0.1 α</a:t>
+            </a:r>
+            <a:endParaRPr lang="en-US" sz="1400" dirty="0"/>
+          </a:p>
+          <a:p>
+            <a:pPr algn="l" indent="0" marL="0">
+              <a:buNone/>
+            </a:pPr>
+            <a:r>
+              <a:rPr lang="en-US" sz="1200" dirty="0">
+                <a:solidFill>
+                  <a:schemeClr val="tx2"/>
+                </a:solidFill>
+              </a:rPr>
+              <a:t>전류 센서가 죽어도 잡는 안전망</a:t>
             </a:r>
             <a:endParaRPr lang="en-US" sz="1400" dirty="0"/>
           </a:p>
@@ -5624,7 +5638,7 @@
         </p:nvSpPr>
         <p:spPr>
           <a:xfrm>
-            <a:off x="457200" y="3456432"/>
+            <a:off x="457200" y="3685032"/>
             <a:ext cx="182880" cy="182880"/>
           </a:xfrm>
           <a:prstGeom prst="rect">
@@ -5649,8 +5663,8 @@
         </p:nvSpPr>
         <p:spPr>
           <a:xfrm>
-            <a:off x="749808" y="3392424"/>
-            <a:ext cx="3108960" cy="310896"/>
+            <a:off x="749808" y="3621024"/>
+            <a:ext cx="3291840" cy="457200"/>
           </a:xfrm>
           <a:prstGeom prst="rect">
             <a:avLst/>
@@ -5659,7 +5673,7 @@
           <a:ln/>
         </p:spPr>
         <p:txBody>
-          <a:bodyPr wrap="square" lIns="0" tIns="0" rIns="0" bIns="0" rtlCol="0" anchor="ctr"/>
+          <a:bodyPr wrap="square" lIns="0" tIns="0" rIns="0" bIns="0" rtlCol="0" anchor="t"/>
           <a:lstStyle/>
           <a:p>
             <a:pPr algn="l" indent="0" marL="0">
@@ -5683,6 +5697,20 @@
                 </a:solidFill>
               </a:rPr>
               <a:t>0.1 α</a:t>
+            </a:r>
+            <a:endParaRPr lang="en-US" sz="1400" dirty="0"/>
+          </a:p>
+          <a:p>
+            <a:pPr algn="l" indent="0" marL="0">
+              <a:buNone/>
+            </a:pPr>
+            <a:r>
+              <a:rPr lang="en-US" sz="1200" dirty="0">
+                <a:solidFill>
+                  <a:schemeClr val="tx2"/>
+                </a:solidFill>
+              </a:rPr>
+              <a:t>전류 파형이 깨졌는지</a:t>
             </a:r>
             <a:endParaRPr lang="en-US" sz="1400" dirty="0"/>
           </a:p>
@@ -5704,7 +5732,7 @@
         </p:blipFill>
         <p:spPr>
           <a:xfrm>
-            <a:off x="457200" y="3886200"/>
+            <a:off x="457200" y="4160520"/>
             <a:ext cx="3566160" cy="986180"/>
           </a:xfrm>
           <a:prstGeom prst="rect">
@@ -5720,7 +5748,7 @@
         </p:nvSpPr>
         <p:spPr>
           <a:xfrm>
-            <a:off x="457200" y="4937760"/>
+            <a:off x="457200" y="5212080"/>
             <a:ext cx="3566160" cy="274320"/>
           </a:xfrm>
           <a:prstGeom prst="rect">
@@ -5742,7 +5770,7 @@
                   <a:schemeClr val="tx2"/>
                 </a:solidFill>
               </a:rPr>
-              <a:t>행 위치 구간별 split-conformal p-value</a:t>
+              <a:t>p값 = 정상 기록 중 이보다 더 이상한 비율</a:t>
             </a:r>
             <a:endParaRPr lang="en-US" sz="1200" dirty="0"/>
           </a:p>
@@ -5820,7 +5848,7 @@
                   <a:schemeClr val="tx1"/>
                 </a:solidFill>
               </a:rPr>
-              <a:t>1  센서 품질 실패</a:t>
+              <a:t>1  전류 파형이 깨짐</a:t>
             </a:r>
             <a:endParaRPr lang="en-US" sz="1400" dirty="0"/>
           </a:p>
@@ -5900,7 +5928,7 @@
                   <a:schemeClr val="tx1"/>
                 </a:solidFill>
               </a:rPr>
-              <a:t>2  새 운전 상태</a:t>
+              <a:t>2  처음 보는 운전 상태</a:t>
             </a:r>
             <a:endParaRPr lang="en-US" sz="1400" dirty="0"/>
           </a:p>
@@ -5914,7 +5942,7 @@
                   <a:schemeClr val="tx1"/>
                 </a:solidFill>
               </a:rPr>
-              <a:t>→ 물리 일치 검사</a:t>
+              <a:t>→ 물리 예측과 맞으면 운전변화 알림</a:t>
             </a:r>
             <a:endParaRPr lang="en-US" sz="1400" dirty="0"/>
           </a:p>
@@ -5980,7 +6008,7 @@
                   <a:schemeClr val="tx1"/>
                 </a:solidFill>
               </a:rPr>
-              <a:t>3  readiness 전</a:t>
+              <a:t>3  부하 확정 전</a:t>
             </a:r>
             <a:endParaRPr lang="en-US" sz="1400" dirty="0"/>
           </a:p>
@@ -5994,7 +6022,7 @@
                   <a:schemeClr val="tx1"/>
                 </a:solidFill>
               </a:rPr>
-              <a:t>→ 판단 보류 포함</a:t>
+              <a:t>→ 판단 보류 가능</a:t>
             </a:r>
             <a:endParaRPr lang="en-US" sz="1400" dirty="0"/>
           </a:p>
@@ -6060,7 +6088,7 @@
                   <a:schemeClr val="tx1"/>
                 </a:solidFill>
               </a:rPr>
-              <a:t>4  readiness 후</a:t>
+              <a:t>4  부하 확정 후</a:t>
             </a:r>
             <a:endParaRPr lang="en-US" sz="1400" dirty="0"/>
           </a:p>
@@ -6074,7 +6102,7 @@
                   <a:schemeClr val="tx1"/>
                 </a:solidFill>
               </a:rPr>
-              <a:t>→ 예산 초과 시 경보 후보</a:t>
+              <a:t>→ 예산을 넘으면 경보 후보</a:t>
             </a:r>
             <a:endParaRPr lang="en-US" sz="1400" dirty="0"/>
           </a:p>
@@ -6130,7 +6158,7 @@
                   <a:schemeClr val="tx1"/>
                 </a:solidFill>
               </a:rPr>
-              <a:t>30초 안의 경보는 하나의 alarm episode로 묶음</a:t>
+              <a:t>한 번 튄 값은 무시, 30초 안의 경보는 한 건으로 묶음</a:t>
             </a:r>
             <a:endParaRPr lang="en-US" sz="1400" dirty="0"/>
           </a:p>
@@ -6215,7 +6243,7 @@
         <p:spPr>
           <a:xfrm>
             <a:off x="9189720" y="2148840"/>
-            <a:ext cx="2651760" cy="365760"/>
+            <a:ext cx="2697480" cy="365760"/>
           </a:xfrm>
           <a:prstGeom prst="rect">
             <a:avLst/>
@@ -6231,14 +6259,17 @@
               <a:buNone/>
             </a:pPr>
             <a:r>
-              <a:rPr lang="en-US" sz="1600" dirty="0">
+              <a:rPr lang="en-US" sz="1600" b="1" dirty="0">
                 <a:solidFill>
                   <a:schemeClr val="tx1"/>
                 </a:solidFill>
               </a:rPr>
               <a:t>정상</a:t>
             </a:r>
-            <a:endParaRPr lang="en-US" sz="1600" dirty="0"/>
+            <a:pPr algn="l" indent="0" marL="0">
+              <a:buNone/>
+            </a:pPr>
+            <a:endParaRPr lang="en-US" sz="1400" dirty="0"/>
           </a:p>
         </p:txBody>
       </p:sp>
@@ -6285,7 +6316,7 @@
         <p:spPr>
           <a:xfrm>
             <a:off x="9189720" y="2715768"/>
-            <a:ext cx="2651760" cy="365760"/>
+            <a:ext cx="2697480" cy="365760"/>
           </a:xfrm>
           <a:prstGeom prst="rect">
             <a:avLst/>
@@ -6301,14 +6332,25 @@
               <a:buNone/>
             </a:pPr>
             <a:r>
-              <a:rPr lang="en-US" sz="1600" dirty="0">
+              <a:rPr lang="en-US" sz="1600" b="1" dirty="0">
                 <a:solidFill>
                   <a:schemeClr val="tx1"/>
                 </a:solidFill>
               </a:rPr>
               <a:t>운전변화 알림</a:t>
             </a:r>
-            <a:endParaRPr lang="en-US" sz="1600" dirty="0"/>
+            <a:pPr algn="l" indent="0" marL="0">
+              <a:buNone/>
+            </a:pPr>
+            <a:r>
+              <a:rPr lang="en-US" sz="1200" dirty="0">
+                <a:solidFill>
+                  <a:schemeClr val="tx2"/>
+                </a:solidFill>
+              </a:rPr>
+              <a:t>  부하만 바뀜</a:t>
+            </a:r>
+            <a:endParaRPr lang="en-US" sz="1400" dirty="0"/>
           </a:p>
         </p:txBody>
       </p:sp>
@@ -6355,7 +6397,7 @@
         <p:spPr>
           <a:xfrm>
             <a:off x="9189720" y="3282696"/>
-            <a:ext cx="2651760" cy="365760"/>
+            <a:ext cx="2697480" cy="365760"/>
           </a:xfrm>
           <a:prstGeom prst="rect">
             <a:avLst/>
@@ -6371,14 +6413,25 @@
               <a:buNone/>
             </a:pPr>
             <a:r>
-              <a:rPr lang="en-US" sz="1600" dirty="0">
+              <a:rPr lang="en-US" sz="1600" b="1" dirty="0">
                 <a:solidFill>
                   <a:schemeClr val="tx1"/>
                 </a:solidFill>
               </a:rPr>
               <a:t>센서 점검</a:t>
             </a:r>
-            <a:endParaRPr lang="en-US" sz="1600" dirty="0"/>
+            <a:pPr algn="l" indent="0" marL="0">
+              <a:buNone/>
+            </a:pPr>
+            <a:r>
+              <a:rPr lang="en-US" sz="1200" dirty="0">
+                <a:solidFill>
+                  <a:schemeClr val="tx2"/>
+                </a:solidFill>
+              </a:rPr>
+              <a:t>  측정 문제</a:t>
+            </a:r>
+            <a:endParaRPr lang="en-US" sz="1400" dirty="0"/>
           </a:p>
         </p:txBody>
       </p:sp>
@@ -6425,7 +6478,7 @@
         <p:spPr>
           <a:xfrm>
             <a:off x="9189720" y="3849624"/>
-            <a:ext cx="2651760" cy="365760"/>
+            <a:ext cx="2697480" cy="365760"/>
           </a:xfrm>
           <a:prstGeom prst="rect">
             <a:avLst/>
@@ -6441,14 +6494,25 @@
               <a:buNone/>
             </a:pPr>
             <a:r>
-              <a:rPr lang="en-US" sz="1600" dirty="0">
+              <a:rPr lang="en-US" sz="1600" b="1" dirty="0">
                 <a:solidFill>
                   <a:schemeClr val="tx1"/>
                 </a:solidFill>
               </a:rPr>
               <a:t>경보</a:t>
             </a:r>
-            <a:endParaRPr lang="en-US" sz="1600" dirty="0"/>
+            <a:pPr algn="l" indent="0" marL="0">
+              <a:buNone/>
+            </a:pPr>
+            <a:r>
+              <a:rPr lang="en-US" sz="1200" dirty="0">
+                <a:solidFill>
+                  <a:schemeClr val="tx2"/>
+                </a:solidFill>
+              </a:rPr>
+              <a:t>  이상 의심</a:t>
+            </a:r>
+            <a:endParaRPr lang="en-US" sz="1400" dirty="0"/>
           </a:p>
         </p:txBody>
       </p:sp>
@@ -6495,7 +6559,7 @@
         <p:spPr>
           <a:xfrm>
             <a:off x="9189720" y="4416552"/>
-            <a:ext cx="2651760" cy="365760"/>
+            <a:ext cx="2697480" cy="365760"/>
           </a:xfrm>
           <a:prstGeom prst="rect">
             <a:avLst/>
@@ -6511,14 +6575,25 @@
               <a:buNone/>
             </a:pPr>
             <a:r>
-              <a:rPr lang="en-US" sz="1600" dirty="0">
+              <a:rPr lang="en-US" sz="1600" b="1" dirty="0">
                 <a:solidFill>
                   <a:schemeClr val="tx1"/>
                 </a:solidFill>
               </a:rPr>
               <a:t>판단 보류</a:t>
             </a:r>
-            <a:endParaRPr lang="en-US" sz="1600" dirty="0"/>
+            <a:pPr algn="l" indent="0" marL="0">
+              <a:buNone/>
+            </a:pPr>
+            <a:r>
+              <a:rPr lang="en-US" sz="1200" dirty="0">
+                <a:solidFill>
+                  <a:schemeClr val="tx2"/>
+                </a:solidFill>
+              </a:rPr>
+              <a:t>  정보 부족</a:t>
+            </a:r>
+            <a:endParaRPr lang="en-US" sz="1400" dirty="0"/>
           </a:p>
         </p:txBody>
       </p:sp>
@@ -6552,7 +6627,7 @@
                   <a:schemeClr val="tx1"/>
                 </a:solidFill>
               </a:rPr>
-              <a:t>정상 보정 구간 플래그율 : </a:t>
+              <a:t>정상 보정 구간의 경보 후보 비율 : </a:t>
             </a:r>
             <a:pPr algn="l" indent="0" marL="0">
               <a:buNone/>
@@ -6563,7 +6638,7 @@
                   <a:schemeClr val="tx1"/>
                 </a:solidFill>
               </a:rPr>
-              <a:t>평균 0.42% (상한 약 1.02% 이하)</a:t>
+              <a:t>평균 0.42% (목표 1% 이하)</a:t>
             </a:r>
             <a:endParaRPr lang="en-US" sz="1400" dirty="0"/>
           </a:p>
@@ -6626,7 +6701,7 @@
                   <a:schemeClr val="tx1"/>
                 </a:solidFill>
               </a:rPr>
-              <a:t>전문가 B ① 전류 파형 판정기</a:t>
+              <a:t>전문가 B ① 전류 파형 모양 보기</a:t>
             </a:r>
             <a:endParaRPr lang="en-US" sz="2400" dirty="0"/>
           </a:p>
@@ -6664,7 +6739,7 @@
                   <a:schemeClr val="tx1"/>
                 </a:solidFill>
               </a:rPr>
-              <a:t>이력 길이 16관측을 기준으로 두 경로 — 파형 모양으로 진폭이 정상인 이상도 포착</a:t>
+              <a:t>진폭이 정상이어도 파형 모양이 깨진 이상을 잡는다 — 전류 한 주기(약 1.65초)가 쌓이면 모양 전체를 비교</a:t>
             </a:r>
             <a:endParaRPr lang="en-US" sz="1400" dirty="0"/>
           </a:p>
@@ -6720,7 +6795,7 @@
                   <a:schemeClr val="tx1"/>
                 </a:solidFill>
               </a:rPr>
-              <a:t>최근 기록</a:t>
+              <a:t>현재 + 과거 행</a:t>
             </a:r>
             <a:endParaRPr lang="en-US" sz="1400" dirty="0"/>
           </a:p>
@@ -6776,7 +6851,7 @@
                   <a:schemeClr val="tx1"/>
                 </a:solidFill>
               </a:rPr>
-              <a:t>16관측 기준</a:t>
+              <a:t>16관측 ≈ 1.65초</a:t>
             </a:r>
             <a:endParaRPr lang="en-US" sz="1400" dirty="0"/>
           </a:p>
@@ -6832,7 +6907,7 @@
                   <a:schemeClr val="tx1"/>
                 </a:solidFill>
               </a:rPr>
-              <a:t>16관측 이상</a:t>
+              <a:t>길 때 : 파형 전체 모양</a:t>
             </a:r>
             <a:endParaRPr lang="en-US" sz="1400" dirty="0"/>
           </a:p>
@@ -6888,7 +6963,7 @@
                   <a:schemeClr val="tx1"/>
                 </a:solidFill>
               </a:rPr>
-              <a:t>16관측 미만 · 33개 특징</a:t>
+              <a:t>짧을 때 : 요약 특징 33개</a:t>
             </a:r>
             <a:endParaRPr lang="en-US" sz="1400" dirty="0"/>
           </a:p>
@@ -6930,21 +7005,21 @@
                   <a:schemeClr val="tx1"/>
                 </a:solidFill>
               </a:rPr>
+              <a:t>확률 보정</a:t>
+            </a:r>
+            <a:endParaRPr lang="en-US" sz="1400" dirty="0"/>
+          </a:p>
+          <a:p>
+            <a:pPr algn="ctr" indent="0" marL="0">
+              <a:buNone/>
+            </a:pPr>
+            <a:r>
+              <a:rPr lang="en-US" sz="1200" dirty="0">
+                <a:solidFill>
+                  <a:schemeClr val="tx1"/>
+                </a:solidFill>
+              </a:rPr>
               <a:t>Platt scaling</a:t>
-            </a:r>
-            <a:endParaRPr lang="en-US" sz="1400" dirty="0"/>
-          </a:p>
-          <a:p>
-            <a:pPr algn="ctr" indent="0" marL="0">
-              <a:buNone/>
-            </a:pPr>
-            <a:r>
-              <a:rPr lang="en-US" sz="1200" dirty="0">
-                <a:solidFill>
-                  <a:schemeClr val="tx1"/>
-                </a:solidFill>
-              </a:rPr>
-              <a:t>확률 보정</a:t>
             </a:r>
             <a:endParaRPr lang="en-US" sz="1400" dirty="0"/>
           </a:p>
@@ -7000,7 +7075,7 @@
                   <a:schemeClr val="tx1"/>
                 </a:solidFill>
               </a:rPr>
-              <a:t>지속 규칙</a:t>
+              <a:t>이어질 때만</a:t>
             </a:r>
             <a:endParaRPr lang="en-US" sz="1400" dirty="0"/>
           </a:p>
@@ -7340,7 +7415,7 @@
         <p:spPr>
           <a:xfrm>
             <a:off x="457200" y="5029200"/>
-            <a:ext cx="5852160" cy="594360"/>
+            <a:ext cx="5943600" cy="640080"/>
           </a:xfrm>
           <a:prstGeom prst="rect">
             <a:avLst/>
@@ -7359,16 +7434,13 @@
               <a:buNone/>
             </a:pPr>
             <a:r>
-              <a:rPr lang="en-US" sz="1400" dirty="0">
-                <a:solidFill>
-                  <a:schemeClr val="tx1"/>
-                </a:solidFill>
-              </a:rPr>
-              <a:t>정상 전류는 정현파 → crest ≈ √2 ≈ 1.414</a:t>
-            </a:r>
-            <a:endParaRPr lang="en-US" sz="1400" dirty="0"/>
-          </a:p>
-          <a:p>
+              <a:rPr lang="en-US" sz="1400" b="1" dirty="0">
+                <a:solidFill>
+                  <a:schemeClr val="tx1"/>
+                </a:solidFill>
+              </a:rPr>
+              <a:t>crest factor : </a:t>
+            </a:r>
             <a:pPr algn="l" indent="0" marL="0">
               <a:spcAft>
                 <a:spcPts val="200"/>
@@ -7381,32 +7453,10 @@
                   <a:schemeClr val="tx1"/>
                 </a:solidFill>
               </a:rPr>
-              <a:t>정상 1.32–1.54,  이상 1.5–3.5</a:t>
+              <a:t>최댓값 ÷ RMS → 매끈한 사인파면 √2 ≈ 1.414</a:t>
             </a:r>
             <a:endParaRPr lang="en-US" sz="1400" dirty="0"/>
           </a:p>
-        </p:txBody>
-      </p:sp>
-      <p:sp>
-        <p:nvSpPr>
-          <p:cNvPr id="25" name="Text 21"/>
-          <p:cNvSpPr txBox="1"/>
-          <p:nvPr/>
-        </p:nvSpPr>
-        <p:spPr>
-          <a:xfrm>
-            <a:off x="457200" y="5715000"/>
-            <a:ext cx="5852160" cy="594360"/>
-          </a:xfrm>
-          <a:prstGeom prst="rect">
-            <a:avLst/>
-          </a:prstGeom>
-          <a:noFill/>
-          <a:ln/>
-        </p:spPr>
-        <p:txBody>
-          <a:bodyPr wrap="square" lIns="0" tIns="0" rIns="0" bIns="0" rtlCol="0" anchor="t"/>
-          <a:lstStyle/>
           <a:p>
             <a:pPr algn="l" indent="0" marL="0">
               <a:spcAft>
@@ -7415,17 +7465,50 @@
               <a:buNone/>
             </a:pPr>
             <a:r>
+              <a:rPr lang="en-US" sz="1400" dirty="0">
+                <a:solidFill>
+                  <a:schemeClr val="tx1"/>
+                </a:solidFill>
+              </a:rPr>
+              <a:t>정상 1.32–1.54,  모양이 깨진 이상 1.5–3.5</a:t>
+            </a:r>
+            <a:endParaRPr lang="en-US" sz="1400" dirty="0"/>
+          </a:p>
+        </p:txBody>
+      </p:sp>
+      <p:sp>
+        <p:nvSpPr>
+          <p:cNvPr id="25" name="Text 21"/>
+          <p:cNvSpPr txBox="1"/>
+          <p:nvPr/>
+        </p:nvSpPr>
+        <p:spPr>
+          <a:xfrm>
+            <a:off x="457200" y="5760720"/>
+            <a:ext cx="5943600" cy="594360"/>
+          </a:xfrm>
+          <a:prstGeom prst="rect">
+            <a:avLst/>
+          </a:prstGeom>
+          <a:noFill/>
+          <a:ln/>
+        </p:spPr>
+        <p:txBody>
+          <a:bodyPr wrap="square" lIns="0" tIns="0" rIns="0" bIns="0" rtlCol="0" anchor="t"/>
+          <a:lstStyle/>
+          <a:p>
+            <a:pPr algn="l" indent="0" marL="0">
+              <a:buNone/>
+            </a:pPr>
+            <a:r>
               <a:rPr lang="en-US" sz="1400" b="1" dirty="0">
                 <a:solidFill>
                   <a:schemeClr val="tx1"/>
                 </a:solidFill>
               </a:rPr>
-              <a:t>특징 : </a:t>
-            </a:r>
-            <a:pPr algn="l" indent="0" marL="0">
-              <a:spcAft>
-                <a:spcPts val="200"/>
-              </a:spcAft>
+              <a:t>MiniRocket : </a:t>
+            </a:r>
+            <a:pPr algn="l" indent="0" marL="0">
               <a:buNone/>
             </a:pPr>
             <a:r>
@@ -7434,24 +7517,7 @@
                   <a:schemeClr val="tx1"/>
                 </a:solidFill>
               </a:rPr>
-              <a:t>요약 통계 27 + crest factor 6 = 33개 (GBDT)</a:t>
-            </a:r>
-            <a:endParaRPr lang="en-US" sz="1400" dirty="0"/>
-          </a:p>
-          <a:p>
-            <a:pPr algn="l" indent="0" marL="0">
-              <a:spcAft>
-                <a:spcPts val="200"/>
-              </a:spcAft>
-              <a:buNone/>
-            </a:pPr>
-            <a:r>
-              <a:rPr lang="en-US" sz="1400" dirty="0">
-                <a:solidFill>
-                  <a:schemeClr val="tx1"/>
-                </a:solidFill>
-              </a:rPr>
-              <a:t>MiniRocket 경로 9,996개</a:t>
+              <a:t>9,996개 특징으로 '매끈하게 반복하는가'를 봄</a:t>
             </a:r>
             <a:endParaRPr lang="en-US" sz="1400" dirty="0"/>
           </a:p>
@@ -7487,7 +7553,7 @@
                   <a:schemeClr val="tx1"/>
                 </a:solidFill>
               </a:rPr>
-              <a:t>개발 시간순 검증 AP</a:t>
+              <a:t>모양 정보를 더할수록 정확해짐 (개발 검증 AP)</a:t>
             </a:r>
             <a:endParaRPr lang="en-US" sz="1600" dirty="0"/>
           </a:p>
@@ -7751,7 +7817,7 @@
                   <a:schemeClr val="tx1"/>
                 </a:solidFill>
               </a:rPr>
-              <a:t>+ 파형 경로</a:t>
+              <a:t>+ 파형 모양</a:t>
             </a:r>
             <a:endParaRPr lang="en-US" sz="1400" dirty="0"/>
           </a:p>
@@ -7814,7 +7880,7 @@
                   <a:schemeClr val="tx1"/>
                 </a:solidFill>
               </a:rPr>
-              <a:t>전문가 B ② 보정과 모델 선택</a:t>
+              <a:t>전문가 B ② 확률 보정과 모델 선택</a:t>
             </a:r>
             <a:endParaRPr lang="en-US" sz="2400" dirty="0"/>
           </a:p>
@@ -7852,7 +7918,7 @@
                   <a:schemeClr val="tx1"/>
                 </a:solidFill>
               </a:rPr>
-              <a:t>확률은 Platt로 보정, 임계값 0.40은 세 원리가 일치 — 선정 규칙은 후보 확인 전에 문서로 고정</a:t>
+              <a:t>점수를 믿을 수 있는 확률로 바꾸고, 경보 기준 0.40은 세 가지 근거에서 같은 값이 나온다</a:t>
             </a:r>
             <a:endParaRPr lang="en-US" sz="1400" dirty="0"/>
           </a:p>
@@ -7899,7 +7965,7 @@
                   <a:schemeClr val="tx1"/>
                 </a:solidFill>
               </a:rPr>
-              <a:t>Platt (CV Brier 최저)</a:t>
+              <a:t>Platt scaling — 확률 오차(Brier)가 가장 작음</a:t>
             </a:r>
             <a:endParaRPr lang="en-US" sz="1400" dirty="0"/>
           </a:p>
@@ -7930,14 +7996,14 @@
               <a:buNone/>
             </a:pPr>
             <a:r>
-              <a:rPr lang="en-US" sz="1400" dirty="0">
-                <a:solidFill>
-                  <a:schemeClr val="tx1"/>
-                </a:solidFill>
-              </a:rPr>
-              <a:t>Brier : 보정 전 0.00434 · isotonic 0.00355 · Platt 0.00338</a:t>
-            </a:r>
-            <a:endParaRPr lang="en-US" sz="1400" dirty="0"/>
+              <a:rPr lang="en-US" sz="1300" dirty="0">
+                <a:solidFill>
+                  <a:schemeClr val="tx1"/>
+                </a:solidFill>
+              </a:rPr>
+              <a:t>Brier (낮을수록 좋음) : 보정 전 0.00434 → Platt 0.00338</a:t>
+            </a:r>
+            <a:endParaRPr lang="en-US" sz="1300" dirty="0"/>
           </a:p>
         </p:txBody>
       </p:sp>
@@ -7995,7 +8061,7 @@
                   <a:schemeClr val="tx1"/>
                 </a:solidFill>
               </a:rPr>
-              <a:t>임계값 0.40, 세 원리가 일치</a:t>
+              <a:t>경보 기준 0.40, 세 근거가 일치</a:t>
             </a:r>
             <a:endParaRPr lang="en-US" sz="1600" dirty="0"/>
           </a:p>
@@ -8010,7 +8076,7 @@
         <p:spPr>
           <a:xfrm>
             <a:off x="457200" y="4023360"/>
-            <a:ext cx="5394960" cy="1097280"/>
+            <a:ext cx="5394960" cy="1417320"/>
           </a:xfrm>
           <a:prstGeom prst="rect">
             <a:avLst/>
@@ -8024,7 +8090,7 @@
           <a:p>
             <a:pPr algn="l" indent="0" marL="0">
               <a:spcAft>
-                <a:spcPts val="600"/>
+                <a:spcPts val="500"/>
               </a:spcAft>
               <a:buNone/>
             </a:pPr>
@@ -8034,11 +8100,11 @@
                   <a:schemeClr val="tx1"/>
                 </a:solidFill>
               </a:rPr>
-              <a:t>비용비 : </a:t>
+              <a:t>비용 : </a:t>
             </a:r>
             <a:pPr algn="l" indent="0" marL="0">
               <a:spcAft>
-                <a:spcPts val="600"/>
+                <a:spcPts val="500"/>
               </a:spcAft>
               <a:buNone/>
             </a:pPr>
@@ -8048,14 +8114,14 @@
                   <a:schemeClr val="tx1"/>
                 </a:solidFill>
               </a:rPr>
-              <a:t>오경보 : 미탐 = 1.5</a:t>
+              <a:t>놓침 비용을 오경보의 1.5배로 보면 1 / (1 + 1.5) = 0.40</a:t>
             </a:r>
             <a:endParaRPr lang="en-US" sz="1400" dirty="0"/>
           </a:p>
           <a:p>
             <a:pPr algn="l" indent="0" marL="0">
               <a:spcAft>
-                <a:spcPts val="600"/>
+                <a:spcPts val="500"/>
               </a:spcAft>
               <a:buNone/>
             </a:pPr>
@@ -8065,11 +8131,11 @@
                   <a:schemeClr val="tx1"/>
                 </a:solidFill>
               </a:rPr>
-              <a:t>F1 최적 정리 : </a:t>
+              <a:t>F1 최적 : </a:t>
             </a:r>
             <a:pPr algn="l" indent="0" marL="0">
               <a:spcAft>
-                <a:spcPts val="600"/>
+                <a:spcPts val="500"/>
               </a:spcAft>
               <a:buNone/>
             </a:pPr>
@@ -8079,14 +8145,14 @@
                   <a:schemeClr val="tx1"/>
                 </a:solidFill>
               </a:rPr>
-              <a:t>이론값 0.469</a:t>
+              <a:t>이론값 0.469 (F1이 평평한 구간 안)</a:t>
             </a:r>
             <a:endParaRPr lang="en-US" sz="1400" dirty="0"/>
           </a:p>
           <a:p>
             <a:pPr algn="l" indent="0" marL="0">
               <a:spcAft>
-                <a:spcPts val="600"/>
+                <a:spcPts val="500"/>
               </a:spcAft>
               <a:buNone/>
             </a:pPr>
@@ -8096,11 +8162,11 @@
                   <a:schemeClr val="tx1"/>
                 </a:solidFill>
               </a:rPr>
-              <a:t>구간 conformal 보장 1% : </a:t>
+              <a:t>정상 구간 1% 보장 : </a:t>
             </a:r>
             <a:pPr algn="l" indent="0" marL="0">
               <a:spcAft>
-                <a:spcPts val="600"/>
+                <a:spcPts val="500"/>
               </a:spcAft>
               <a:buNone/>
             </a:pPr>
@@ -8111,6 +8177,23 @@
                 </a:solidFill>
               </a:rPr>
               <a:t>0.354</a:t>
+            </a:r>
+            <a:endParaRPr lang="en-US" sz="1400" dirty="0"/>
+          </a:p>
+          <a:p>
+            <a:pPr algn="l" indent="0" marL="0">
+              <a:spcAft>
+                <a:spcPts val="500"/>
+              </a:spcAft>
+              <a:buNone/>
+            </a:pPr>
+            <a:r>
+              <a:rPr lang="en-US" sz="1300" dirty="0">
+                <a:solidFill>
+                  <a:schemeClr val="tx2"/>
+                </a:solidFill>
+              </a:rPr>
+              <a:t>정답을 보고 고른 최적값 0.248과도 F1 차이 0.003</a:t>
             </a:r>
             <a:endParaRPr lang="en-US" sz="1400" dirty="0"/>
           </a:p>
@@ -8146,7 +8229,7 @@
                   <a:schemeClr val="tx1"/>
                 </a:solidFill>
               </a:rPr>
-              <a:t>후보 확인 구간 : 7계열 20개 구성에서 선정</a:t>
+              <a:t>7계열 20개 구성 비교 → 후보 확인 구간에서 선정</a:t>
             </a:r>
             <a:endParaRPr lang="en-US" sz="1600" dirty="0"/>
           </a:p>
@@ -8856,7 +8939,7 @@
                   <a:schemeClr val="tx1"/>
                 </a:solidFill>
               </a:rPr>
-              <a:t>선정 규칙 : </a:t>
+              <a:t>선정 규칙 (결과 보기 전에 문서로 고정) : </a:t>
             </a:r>
             <a:pPr algn="l" indent="0" marL="0">
               <a:buNone/>
@@ -8867,7 +8950,7 @@
                   <a:schemeClr val="tx1"/>
                 </a:solidFill>
               </a:rPr>
-              <a:t>후보 ≤ 3개, 경보 ≤ 기준 모델의 1.5배 (100구간당 20.3건) 중 AP 최고</a:t>
+              <a:t>후보 ≤ 3개, 경보 ≤ 기준의 1.5배 중 AP 최고</a:t>
             </a:r>
             <a:endParaRPr lang="en-US" sz="1400" dirty="0"/>
           </a:p>
@@ -8881,8 +8964,8 @@
         </p:nvSpPr>
         <p:spPr>
           <a:xfrm>
-            <a:off x="457200" y="5577840"/>
-            <a:ext cx="11338560" cy="457200"/>
+            <a:off x="457200" y="5532120"/>
+            <a:ext cx="11338560" cy="777240"/>
           </a:xfrm>
           <a:prstGeom prst="rect">
             <a:avLst/>
@@ -8891,10 +8974,13 @@
           <a:ln/>
         </p:spPr>
         <p:txBody>
-          <a:bodyPr wrap="square" lIns="0" tIns="0" rIns="0" bIns="0" rtlCol="0" anchor="ctr"/>
-          <a:lstStyle/>
-          <a:p>
-            <a:pPr algn="l" indent="0" marL="0">
+          <a:bodyPr wrap="square" lIns="0" tIns="0" rIns="0" bIns="0" rtlCol="0" anchor="t"/>
+          <a:lstStyle/>
+          <a:p>
+            <a:pPr algn="l" indent="0" marL="0">
+              <a:spcAft>
+                <a:spcPts val="400"/>
+              </a:spcAft>
               <a:buNone/>
             </a:pPr>
             <a:r>
@@ -8903,9 +8989,12 @@
                   <a:schemeClr val="tx1"/>
                 </a:solidFill>
               </a:rPr>
-              <a:t>최종 구간 (1회 평가) : </a:t>
-            </a:r>
-            <a:pPr algn="l" indent="0" marL="0">
+              <a:t>최종 구간 (1회만 평가) : </a:t>
+            </a:r>
+            <a:pPr algn="l" indent="0" marL="0">
+              <a:spcAft>
+                <a:spcPts val="400"/>
+              </a:spcAft>
               <a:buNone/>
             </a:pPr>
             <a:r>
@@ -8914,7 +9003,24 @@
                   <a:schemeClr val="tx1"/>
                 </a:solidFill>
               </a:rPr>
-              <a:t>F1 0.841 · 정밀도 1.000 · 재현율 0.726 · 오경보 0 / 4,090행</a:t>
+              <a:t>정밀도 1.000 · 오경보 0 / 4,090행 · 재현율 0.726 · F1 0.841</a:t>
+            </a:r>
+            <a:endParaRPr lang="en-US" sz="1400" dirty="0"/>
+          </a:p>
+          <a:p>
+            <a:pPr algn="l" indent="0" marL="0">
+              <a:spcAft>
+                <a:spcPts val="400"/>
+              </a:spcAft>
+              <a:buNone/>
+            </a:pPr>
+            <a:r>
+              <a:rPr lang="en-US" sz="1400" dirty="0">
+                <a:solidFill>
+                  <a:schemeClr val="tx1"/>
+                </a:solidFill>
+              </a:rPr>
+              <a:t>정상의 70%가 처음 보는 저부하 운전이었지만, 정상의 최대 확률은 0.245로 기준 0.40에 한참 못 미침</a:t>
             </a:r>
             <a:endParaRPr lang="en-US" sz="1400" dirty="0"/>
           </a:p>
@@ -8977,7 +9083,7 @@
                   <a:schemeClr val="tx1"/>
                 </a:solidFill>
               </a:rPr>
-              <a:t>두 전문가 결합 : OR 규칙과 상보성</a:t>
+              <a:t>두 전문가 결합 : 서로의 빈틈을 메운다</a:t>
             </a:r>
             <a:endParaRPr lang="en-US" sz="2400" dirty="0"/>
           </a:p>
@@ -9015,7 +9121,7 @@
                   <a:schemeClr val="tx1"/>
                 </a:solidFill>
               </a:rPr>
-              <a:t>재현율 전문가 A + 정밀도 전문가 B → 이상 구간 5/5, 재현율 0.993</a:t>
+              <a:t>A는 놓치지 않는 쪽(재현율), B는 틀리지 않는 쪽(정밀도) — 합치면 이상 구간 5개 모두 탐지</a:t>
             </a:r>
             <a:endParaRPr lang="en-US" sz="1400" dirty="0"/>
           </a:p>
@@ -9054,7 +9160,7 @@
         <p:spPr>
           <a:xfrm>
             <a:off x="7132320" y="1691640"/>
-            <a:ext cx="3657600" cy="411480"/>
+            <a:ext cx="4663440" cy="411480"/>
           </a:xfrm>
           <a:prstGeom prst="rect">
             <a:avLst/>
@@ -9075,7 +9181,7 @@
                   <a:schemeClr val="tx2"/>
                 </a:solidFill>
               </a:rPr>
-              <a:t>계산 전에 선언한 결합 규칙</a:t>
+              <a:t>계산 전에 정한 규칙 : A 경보 또는 B 확률 ≥ 0.40</a:t>
             </a:r>
             <a:endParaRPr lang="en-US" sz="1200" dirty="0"/>
           </a:p>
@@ -10157,8 +10263,8 @@
         </p:nvSpPr>
         <p:spPr>
           <a:xfrm>
-            <a:off x="457200" y="4023360"/>
-            <a:ext cx="6035040" cy="2011680"/>
+            <a:off x="457200" y="3977640"/>
+            <a:ext cx="6035040" cy="2103120"/>
           </a:xfrm>
           <a:prstGeom prst="rect">
             <a:avLst/>
@@ -10172,7 +10278,7 @@
           <a:p>
             <a:pPr algn="l" indent="0" marL="0">
               <a:spcAft>
-                <a:spcPts val="800"/>
+                <a:spcPts val="700"/>
               </a:spcAft>
               <a:buNone/>
             </a:pPr>
@@ -10186,7 +10292,7 @@
             </a:r>
             <a:pPr algn="l" indent="0" marL="0">
               <a:spcAft>
-                <a:spcPts val="800"/>
+                <a:spcPts val="700"/>
               </a:spcAft>
               <a:buNone/>
             </a:pPr>
@@ -10196,14 +10302,14 @@
                   <a:schemeClr val="tx1"/>
                 </a:solidFill>
               </a:rPr>
-              <a:t>B가 놓친 진폭 정상 구간 2개를 포착 (재현율 담당)</a:t>
+              <a:t>B가 전혀 못 본 저진폭 이상 구간 2곳을 잡음</a:t>
             </a:r>
             <a:endParaRPr lang="en-US" sz="1400" dirty="0"/>
           </a:p>
           <a:p>
             <a:pPr algn="l" indent="0" marL="0">
               <a:spcAft>
-                <a:spcPts val="800"/>
+                <a:spcPts val="700"/>
               </a:spcAft>
               <a:buNone/>
             </a:pPr>
@@ -10217,7 +10323,7 @@
             </a:r>
             <a:pPr algn="l" indent="0" marL="0">
               <a:spcAft>
-                <a:spcPts val="800"/>
+                <a:spcPts val="700"/>
               </a:spcAft>
               <a:buNone/>
             </a:pPr>
@@ -10227,31 +10333,45 @@
                   <a:schemeClr val="tx1"/>
                 </a:solidFill>
               </a:rPr>
-              <a:t>정밀도 1.000, 오경보 0행 (정밀도 담당)</a:t>
+              <a:t>오경보 0행 — A의 오경보 24행이 몰린 정상 구간에서도 조용</a:t>
             </a:r>
             <a:endParaRPr lang="en-US" sz="1400" dirty="0"/>
           </a:p>
           <a:p>
             <a:pPr algn="l" indent="0" marL="0">
               <a:spcAft>
-                <a:spcPts val="800"/>
+                <a:spcPts val="700"/>
               </a:spcAft>
               <a:buNone/>
             </a:pPr>
             <a:r>
+              <a:rPr lang="en-US" sz="1400" b="1" dirty="0">
+                <a:solidFill>
+                  <a:schemeClr val="tx1"/>
+                </a:solidFill>
+              </a:rPr>
+              <a:t>현장 선택 : </a:t>
+            </a:r>
+            <a:pPr algn="l" indent="0" marL="0">
+              <a:spcAft>
+                <a:spcPts val="700"/>
+              </a:spcAft>
+              <a:buNone/>
+            </a:pPr>
+            <a:r>
               <a:rPr lang="en-US" sz="1400" dirty="0">
                 <a:solidFill>
                   <a:schemeClr val="tx1"/>
                 </a:solidFill>
               </a:rPr>
-              <a:t>A의 오경보 24행은 정상 한 구간에 집중, B는 그 구간에서 경보 없음</a:t>
+              <a:t>오경보가 부담이면 B 단독, 놓침이 치명적이면 A+B</a:t>
             </a:r>
             <a:endParaRPr lang="en-US" sz="1400" dirty="0"/>
           </a:p>
           <a:p>
             <a:pPr algn="l" indent="0" marL="0">
               <a:spcAft>
-                <a:spcPts val="800"/>
+                <a:spcPts val="700"/>
               </a:spcAft>
               <a:buNone/>
             </a:pPr>
@@ -10265,7 +10385,7 @@
             </a:r>
             <a:pPr algn="l" indent="0" marL="0">
               <a:spcAft>
-                <a:spcPts val="800"/>
+                <a:spcPts val="700"/>
               </a:spcAft>
               <a:buNone/>
             </a:pPr>
@@ -10354,7 +10474,7 @@
                   <a:schemeClr val="tx1"/>
                 </a:solidFill>
               </a:rPr>
-              <a:t>결과 ① 부하 조건화의 효과</a:t>
+              <a:t>결과 ① 같은 부하끼리 비교하면</a:t>
             </a:r>
             <a:endParaRPr lang="en-US" sz="2400" dirty="0"/>
           </a:p>
@@ -10392,7 +10512,7 @@
                   <a:schemeClr val="tx1"/>
                 </a:solidFill>
               </a:rPr>
-              <a:t>같은 부하의 정상과 비교하면 부하 변화가 오경보로 이어지지 않는다</a:t>
+              <a:t>부하 변화가 더 이상 오경보로 이어지지 않는다</a:t>
             </a:r>
             <a:endParaRPr lang="en-US" sz="1400" dirty="0"/>
           </a:p>
@@ -10467,7 +10587,7 @@
         <p:spPr>
           <a:xfrm>
             <a:off x="8001000" y="2267712"/>
-            <a:ext cx="3794760" cy="320040"/>
+            <a:ext cx="3794760" cy="548640"/>
           </a:xfrm>
           <a:prstGeom prst="rect">
             <a:avLst/>
@@ -10488,7 +10608,7 @@
                   <a:schemeClr val="tx1"/>
                 </a:solidFill>
               </a:rPr>
-              <a:t>부하 구간이 설명하는 하부 진동 변동</a:t>
+              <a:t>하부 진동 변동 중 부하 구간이 설명하는 몫</a:t>
             </a:r>
             <a:endParaRPr lang="en-US" sz="1400" dirty="0"/>
           </a:p>
@@ -10539,7 +10659,7 @@
         <p:spPr>
           <a:xfrm>
             <a:off x="8001000" y="3593592"/>
-            <a:ext cx="3794760" cy="320040"/>
+            <a:ext cx="3794760" cy="548640"/>
           </a:xfrm>
           <a:prstGeom prst="rect">
             <a:avLst/>
@@ -10560,7 +10680,7 @@
                   <a:schemeClr val="tx1"/>
                 </a:solidFill>
               </a:rPr>
-              <a:t>정상 구간 오경보 (고정 기준 → 부하 조건)</a:t>
+              <a:t>고부하 정상 구간의 오경보 (고정 기준 → 부하 조건)</a:t>
             </a:r>
             <a:endParaRPr lang="en-US" sz="1400" dirty="0"/>
           </a:p>
@@ -10632,7 +10752,7 @@
                   <a:schemeClr val="tx1"/>
                 </a:solidFill>
               </a:rPr>
-              <a:t>처음 보는 정상 운전상태 오표시율 (버스트 기준)</a:t>
+              <a:t>처음 보는 정상 운전을 이상으로 오인한 비율</a:t>
             </a:r>
             <a:endParaRPr lang="en-US" sz="1400" dirty="0"/>
           </a:p>
@@ -10731,7 +10851,7 @@
                   <a:schemeClr val="tx1"/>
                 </a:solidFill>
               </a:rPr>
-              <a:t>결과 ② 공식 라벨 시간순 최종 평가</a:t>
+              <a:t>결과 ② 공식 라벨 최종 평가</a:t>
             </a:r>
             <a:endParaRPr lang="en-US" sz="2400" dirty="0"/>
           </a:p>
@@ -10769,7 +10889,7 @@
                   <a:schemeClr val="tx1"/>
                 </a:solidFill>
               </a:rPr>
-              <a:t>최종 구간 1회 평가, point-adjust 없음 — 정상 4,090행 · 이상 135행 · 이상 구간 5개</a:t>
+              <a:t>시간순으로 나눈 마지막 구간을 단 한 번 평가 (점 보정 없음) — 정상 4,090행 · 이상 135행 · 이상 구간 5개</a:t>
             </a:r>
             <a:endParaRPr lang="en-US" sz="1400" dirty="0"/>
           </a:p>
@@ -10832,7 +10952,7 @@
                   <a:schemeClr val="tx1"/>
                 </a:solidFill>
               </a:rPr>
-              <a:t>A가 B의 미탐 36행, B가 A의 미탐 1행을 보완 → 결합 F1 0.915, 재현율 0.993</a:t>
+              <a:t>A+B : 이상 구간 5개 모두 탐지 — A가 B의 놓침 36행을, B가 A의 놓침 1행을 메움 (재현율 0.993, F1 0.915)</a:t>
             </a:r>
             <a:endParaRPr lang="en-US" sz="1400" dirty="0"/>
           </a:p>
@@ -10849,7 +10969,7 @@
                   <a:schemeClr val="tx1"/>
                 </a:solidFill>
               </a:rPr>
-              <a:t>각 구간 첫 관측부터 첫 경보까지 지연 최대 0.1초, 중앙값 0초 · B에도 지속 규칙 적용 시 결합 F1 0.911</a:t>
+              <a:t>이상 시작부터 첫 경보까지 최대 0.1초 (중앙값 0초) · 비교 : 기준 GBDT는 F1 0.660, 구간 4/5</a:t>
             </a:r>
             <a:endParaRPr lang="en-US" sz="1400" dirty="0"/>
           </a:p>
@@ -10912,7 +11032,7 @@
                   <a:schemeClr val="tx1"/>
                 </a:solidFill>
               </a:rPr>
-              <a:t>결과 ③ 탐지와 경보 부담 : 10개 방법 비교</a:t>
+              <a:t>결과 ③ 10개 방법 비교 : 경보는 가장 적게</a:t>
             </a:r>
             <a:endParaRPr lang="en-US" sz="2400" dirty="0"/>
           </a:p>
@@ -10950,7 +11070,7 @@
                   <a:schemeClr val="tx1"/>
                 </a:solidFill>
               </a:rPr>
-              <a:t>하나의 경보 예산 아래 경보 부담은 최소, 약한 고장 탐지는 상위권</a:t>
+              <a:t>같은 데이터 · 같은 경보 예산에서 비교 — 경보 부담은 가장 적고, 약한 고장 탐지는 상위권</a:t>
             </a:r>
             <a:endParaRPr lang="en-US" sz="1400" dirty="0"/>
           </a:p>
@@ -11013,7 +11133,7 @@
                   <a:schemeClr val="tx1"/>
                 </a:solidFill>
               </a:rPr>
-              <a:t>경보 부담 최소</a:t>
+              <a:t>경보가 가장 적음</a:t>
             </a:r>
             <a:endParaRPr lang="en-US" sz="1400" dirty="0"/>
           </a:p>
@@ -11030,7 +11150,7 @@
                   <a:schemeClr val="tx1"/>
                 </a:solidFill>
               </a:rPr>
-              <a:t>정상 스트림 alarm episode 11.7건/시간</a:t>
+              <a:t>정상 운전 중 경보 11.7건/시간</a:t>
             </a:r>
             <a:endParaRPr lang="en-US" sz="1400" dirty="0"/>
           </a:p>
@@ -11047,7 +11167,7 @@
                   <a:schemeClr val="tx1"/>
                 </a:solidFill>
               </a:rPr>
-              <a:t>10개 방법 중 최소</a:t>
+              <a:t>(같은 전류를 쓰는 연속 회귀 33.6건)</a:t>
             </a:r>
             <a:endParaRPr lang="en-US" sz="1400" dirty="0"/>
           </a:p>
@@ -11086,7 +11206,7 @@
                   <a:schemeClr val="tx1"/>
                 </a:solidFill>
               </a:rPr>
-              <a:t>약한 고장 탐지 상위권</a:t>
+              <a:t>약한 고장도 잡음</a:t>
             </a:r>
             <a:endParaRPr lang="en-US" sz="1400" dirty="0"/>
           </a:p>
@@ -11103,32 +11223,10 @@
                   <a:schemeClr val="tx1"/>
                 </a:solidFill>
               </a:rPr>
-              <a:t>semi-synthetic net detection 0.256</a:t>
+              <a:t>가상 고장 순탐지 0.256, 상위권</a:t>
             </a:r>
             <a:endParaRPr lang="en-US" sz="1400" dirty="0"/>
           </a:p>
-        </p:txBody>
-      </p:sp>
-      <p:sp>
-        <p:nvSpPr>
-          <p:cNvPr id="8" name="Text 4"/>
-          <p:cNvSpPr txBox="1"/>
-          <p:nvPr/>
-        </p:nvSpPr>
-        <p:spPr>
-          <a:xfrm>
-            <a:off x="8001000" y="3749040"/>
-            <a:ext cx="3794760" cy="914400"/>
-          </a:xfrm>
-          <a:prstGeom prst="rect">
-            <a:avLst/>
-          </a:prstGeom>
-          <a:noFill/>
-          <a:ln/>
-        </p:spPr>
-        <p:txBody>
-          <a:bodyPr wrap="square" lIns="0" tIns="0" rIns="0" bIns="0" rtlCol="0" anchor="t"/>
-          <a:lstStyle/>
           <a:p>
             <a:pPr algn="l" indent="0" marL="0">
               <a:spcAft>
@@ -11137,15 +11235,37 @@
               <a:buNone/>
             </a:pPr>
             <a:r>
-              <a:rPr lang="en-US" sz="1600" b="1" dirty="0">
-                <a:solidFill>
-                  <a:schemeClr val="tx1"/>
-                </a:solidFill>
-              </a:rPr>
-              <a:t>5가지 상태 출력</a:t>
+              <a:rPr lang="en-US" sz="1400" dirty="0">
+                <a:solidFill>
+                  <a:schemeClr val="tx1"/>
+                </a:solidFill>
+              </a:rPr>
+              <a:t>(시계열 기반 모델 Chronos-2 0.039)</a:t>
             </a:r>
             <a:endParaRPr lang="en-US" sz="1400" dirty="0"/>
           </a:p>
+        </p:txBody>
+      </p:sp>
+      <p:sp>
+        <p:nvSpPr>
+          <p:cNvPr id="8" name="Text 4"/>
+          <p:cNvSpPr txBox="1"/>
+          <p:nvPr/>
+        </p:nvSpPr>
+        <p:spPr>
+          <a:xfrm>
+            <a:off x="8001000" y="3749040"/>
+            <a:ext cx="3794760" cy="914400"/>
+          </a:xfrm>
+          <a:prstGeom prst="rect">
+            <a:avLst/>
+          </a:prstGeom>
+          <a:noFill/>
+          <a:ln/>
+        </p:spPr>
+        <p:txBody>
+          <a:bodyPr wrap="square" lIns="0" tIns="0" rIns="0" bIns="0" rtlCol="0" anchor="t"/>
+          <a:lstStyle/>
           <a:p>
             <a:pPr algn="l" indent="0" marL="0">
               <a:spcAft>
@@ -11154,37 +11274,15 @@
               <a:buNone/>
             </a:pPr>
             <a:r>
-              <a:rPr lang="en-US" sz="1400" dirty="0">
-                <a:solidFill>
-                  <a:schemeClr val="tx1"/>
-                </a:solidFill>
-              </a:rPr>
-              <a:t>정상 · 운전변화 알림 · 센서 점검 · 경보 · 판단 보류</a:t>
+              <a:rPr lang="en-US" sz="1600" b="1" dirty="0">
+                <a:solidFill>
+                  <a:schemeClr val="tx1"/>
+                </a:solidFill>
+              </a:rPr>
+              <a:t>정상 오경보 1%대</a:t>
             </a:r>
             <a:endParaRPr lang="en-US" sz="1400" dirty="0"/>
           </a:p>
-        </p:txBody>
-      </p:sp>
-      <p:sp>
-        <p:nvSpPr>
-          <p:cNvPr id="9" name="Text 5"/>
-          <p:cNvSpPr txBox="1"/>
-          <p:nvPr/>
-        </p:nvSpPr>
-        <p:spPr>
-          <a:xfrm>
-            <a:off x="8001000" y="4800600"/>
-            <a:ext cx="3794760" cy="914400"/>
-          </a:xfrm>
-          <a:prstGeom prst="rect">
-            <a:avLst/>
-          </a:prstGeom>
-          <a:noFill/>
-          <a:ln/>
-        </p:spPr>
-        <p:txBody>
-          <a:bodyPr wrap="square" lIns="0" tIns="0" rIns="0" bIns="0" rtlCol="0" anchor="t"/>
-          <a:lstStyle/>
           <a:p>
             <a:pPr algn="l" indent="0" marL="0">
               <a:spcAft>
@@ -11193,15 +11291,37 @@
               <a:buNone/>
             </a:pPr>
             <a:r>
-              <a:rPr lang="en-US" sz="1600" b="1" dirty="0">
-                <a:solidFill>
-                  <a:schemeClr val="tx1"/>
-                </a:solidFill>
-              </a:rPr>
-              <a:t>정상 오경보 1%대</a:t>
+              <a:rPr lang="en-US" sz="1400" dirty="0">
+                <a:solidFill>
+                  <a:schemeClr val="tx1"/>
+                </a:solidFill>
+              </a:rPr>
+              <a:t>전체 1.14% · 가동 구간 1.35%</a:t>
             </a:r>
             <a:endParaRPr lang="en-US" sz="1400" dirty="0"/>
           </a:p>
+        </p:txBody>
+      </p:sp>
+      <p:sp>
+        <p:nvSpPr>
+          <p:cNvPr id="9" name="Text 5"/>
+          <p:cNvSpPr txBox="1"/>
+          <p:nvPr/>
+        </p:nvSpPr>
+        <p:spPr>
+          <a:xfrm>
+            <a:off x="8001000" y="4800600"/>
+            <a:ext cx="3794760" cy="914400"/>
+          </a:xfrm>
+          <a:prstGeom prst="rect">
+            <a:avLst/>
+          </a:prstGeom>
+          <a:noFill/>
+          <a:ln/>
+        </p:spPr>
+        <p:txBody>
+          <a:bodyPr wrap="square" lIns="0" tIns="0" rIns="0" bIns="0" rtlCol="0" anchor="t"/>
+          <a:lstStyle/>
           <a:p>
             <a:pPr algn="l" indent="0" marL="0">
               <a:spcAft>
@@ -11210,12 +11330,29 @@
               <a:buNone/>
             </a:pPr>
             <a:r>
+              <a:rPr lang="en-US" sz="1600" b="1" dirty="0">
+                <a:solidFill>
+                  <a:schemeClr val="tx1"/>
+                </a:solidFill>
+              </a:rPr>
+              <a:t>상태를 나눠 알림</a:t>
+            </a:r>
+            <a:endParaRPr lang="en-US" sz="1400" dirty="0"/>
+          </a:p>
+          <a:p>
+            <a:pPr algn="l" indent="0" marL="0">
+              <a:spcAft>
+                <a:spcPts val="300"/>
+              </a:spcAft>
+              <a:buNone/>
+            </a:pPr>
+            <a:r>
               <a:rPr lang="en-US" sz="1400" dirty="0">
                 <a:solidFill>
                   <a:schemeClr val="tx1"/>
                 </a:solidFill>
               </a:rPr>
-              <a:t>전체 1.14% · 가동 구간 1.35%</a:t>
+              <a:t>운전변화 · 판단 보류는 경보와 따로 셈</a:t>
             </a:r>
             <a:endParaRPr lang="en-US" sz="1400" dirty="0"/>
           </a:p>
@@ -11251,7 +11388,7 @@
                   <a:schemeClr val="tx2"/>
                 </a:solidFill>
               </a:rPr>
-              <a:t>비교 : LightGBM, Isolation Forest, 오토인코더, 마할라노비스 거리, 연속 공변량 회귀, Chronos-2(zero-shot), 상태조건 신경망 등 · 새 운전상태의 운전변화 알림 80.9–89.4%는 경보와 별도 집계</a:t>
+              <a:t>순탐지 = 고장 탐지율 − 정상 오표시율 · 비교 : LightGBM, Isolation Forest, 오토인코더, 마할라노비스 거리, 연속 공변량 회귀, Chronos-2(zero-shot), 상태조건 신경망 등</a:t>
             </a:r>
             <a:endParaRPr lang="en-US" sz="1200" dirty="0"/>
           </a:p>
@@ -11314,7 +11451,7 @@
                   <a:schemeClr val="tx1"/>
                 </a:solidFill>
               </a:rPr>
-              <a:t>결과 ④ 오경보 · 미탐 조건 분석</a:t>
+              <a:t>결과 ④ 오경보와 놓침은 어디서 생기나</a:t>
             </a:r>
             <a:endParaRPr lang="en-US" sz="2400" dirty="0"/>
           </a:p>
@@ -11352,7 +11489,7 @@
                   <a:schemeClr val="tx1"/>
                 </a:solidFill>
               </a:rPr>
-              <a:t>오경보는 구간 시작에, 미탐은 짧은 이력에 집중 → 조건마다 설계로 대응</a:t>
+              <a:t>오경보는 관측 재개 직후에, 놓침은 짧은 이력에 몰린다 → 조건마다 설계로 막음</a:t>
             </a:r>
             <a:endParaRPr lang="en-US" sz="1400" dirty="0"/>
           </a:p>
@@ -11415,7 +11552,7 @@
                   <a:schemeClr val="tx1"/>
                 </a:solidFill>
               </a:rPr>
-              <a:t>구간 시작 오경보 : </a:t>
+              <a:t>재개 직후 오경보 : </a:t>
             </a:r>
             <a:pPr algn="l" indent="0" marL="0">
               <a:spcAft>
@@ -11429,7 +11566,7 @@
                   <a:schemeClr val="tx1"/>
                 </a:solidFill>
               </a:rPr>
-              <a:t>판단 보류 + 3회 중 2회 지속 규칙 → 즉시 경보 60.8건/h → 0 (B 개발 분할)</a:t>
+              <a:t>첫 관측 3.9% → 3번째부터 0% · 3번 중 2번 규칙으로 즉시 경보 60.8건/h → 0</a:t>
             </a:r>
             <a:endParaRPr lang="en-US" sz="1400" dirty="0"/>
           </a:p>
@@ -11446,7 +11583,7 @@
                   <a:schemeClr val="tx1"/>
                 </a:solidFill>
               </a:rPr>
-              <a:t>부하 오경보 : </a:t>
+              <a:t>고부하 오경보 : </a:t>
             </a:r>
             <a:pPr algn="l" indent="0" marL="0">
               <a:spcAft>
@@ -11460,7 +11597,7 @@
                   <a:schemeClr val="tx1"/>
                 </a:solidFill>
               </a:rPr>
-              <a:t>같은 부하 비교 → 고정 기준 22.3%, 처음 보는 최고 부하 52.1% → 1.82%</a:t>
+              <a:t>같은 부하끼리 비교 → 처음 보는 최고 부하에서 52.1% → 1.82%</a:t>
             </a:r>
             <a:endParaRPr lang="en-US" sz="1400" dirty="0"/>
           </a:p>
@@ -11477,7 +11614,7 @@
                   <a:schemeClr val="tx1"/>
                 </a:solidFill>
               </a:rPr>
-              <a:t>짧은 이력 미탐 : </a:t>
+              <a:t>짧은 이력 놓침 : </a:t>
             </a:r>
             <a:pPr algn="l" indent="0" marL="0">
               <a:spcAft>
@@ -11491,7 +11628,7 @@
                   <a:schemeClr val="tx1"/>
                 </a:solidFill>
               </a:rPr>
-              <a:t>16관측 미만 구간은 A가 5개 모두 포착 · 진동 단독 상승 = 기계 변화 후보</a:t>
+              <a:t>B가 놓친 37행 중 34행이 16관측 미만 → 이 구간은 A가 5개 모두 잡음</a:t>
             </a:r>
             <a:endParaRPr lang="en-US" sz="1400" dirty="0"/>
           </a:p>
@@ -11554,7 +11691,7 @@
                   <a:schemeClr val="tx1"/>
                 </a:solidFill>
               </a:rPr>
-              <a:t>결과 ⑤ 외부 장비 전이 : 외부 유압 시험대</a:t>
+              <a:t>결과 ⑤ 다른 설비에서도 통할까</a:t>
             </a:r>
             <a:endParaRPr lang="en-US" sz="2400" dirty="0"/>
           </a:p>
@@ -11592,7 +11729,7 @@
                   <a:schemeClr val="tx1"/>
                 </a:solidFill>
               </a:rPr>
-              <a:t>부하 조건화가 처음 보는 운전 조건의 정상 오경보를 19.0% → 10.4%로 줄임</a:t>
+              <a:t>외부 유압 시험대에서도 부하 조건화가 오경보를 19.0% → 10.4%로 줄였다</a:t>
             </a:r>
             <a:endParaRPr lang="en-US" sz="1400" dirty="0"/>
           </a:p>
@@ -11686,7 +11823,7 @@
                   <a:schemeClr val="tx1"/>
                 </a:solidFill>
               </a:rPr>
-              <a:t>외부 데이터 활용 : </a:t>
+              <a:t>한계 : </a:t>
             </a:r>
             <a:pPr algn="l" indent="0" marL="0">
               <a:spcAft>
@@ -11700,7 +11837,7 @@
                   <a:schemeClr val="tx1"/>
                 </a:solidFill>
               </a:rPr>
-              <a:t>외부 모터 전류 · 엔진 진동 (파형 모양 설계 확인) · MetroPT-3 (첫 경보 시점 방법 시연)</a:t>
+              <a:t>다른 장비에서 학습한 모델을 그대로 쓰면 오경보 ≈ 100%</a:t>
             </a:r>
             <a:endParaRPr lang="en-US" sz="1400" dirty="0"/>
           </a:p>
@@ -11717,7 +11854,7 @@
                   <a:schemeClr val="tx1"/>
                 </a:solidFill>
               </a:rPr>
-              <a:t>현장 적용 : </a:t>
+              <a:t>그래서 현장에서는 : </a:t>
             </a:r>
             <a:pPr algn="l" indent="0" marL="0">
               <a:spcAft>
@@ -11731,7 +11868,7 @@
                   <a:schemeClr val="tx1"/>
                 </a:solidFill>
               </a:rPr>
-              <a:t>다른 장비 모델을 그대로 쓰면 오경보 ≈ 100% → 현장 정상 데이터로 기준 재보정 필수</a:t>
+              <a:t>현장 정상 데이터로 기준을 다시 맞춘다 (대회 자료로 재학습한 축소 모델은 이상 16/17 버스트 탐지)</a:t>
             </a:r>
             <a:endParaRPr lang="en-US" sz="1400" dirty="0"/>
           </a:p>
@@ -11808,8 +11945,8 @@
         </p:nvSpPr>
         <p:spPr>
           <a:xfrm>
-            <a:off x="3566160" y="1572768"/>
-            <a:ext cx="6583680" cy="457200"/>
+            <a:off x="3017520" y="1572768"/>
+            <a:ext cx="7772400" cy="457200"/>
           </a:xfrm>
           <a:prstGeom prst="rect">
             <a:avLst/>
@@ -11830,7 +11967,7 @@
                   <a:schemeClr val="tx1"/>
                 </a:solidFill>
               </a:rPr>
-              <a:t>1. 연구 배경 및 문제 정의</a:t>
+              <a:t>1. 문제 : 부하가 바뀌면 정상도 경보가 된다</a:t>
             </a:r>
             <a:endParaRPr lang="en-US" sz="2400" dirty="0"/>
           </a:p>
@@ -11844,8 +11981,8 @@
         </p:nvSpPr>
         <p:spPr>
           <a:xfrm>
-            <a:off x="3566160" y="2194560"/>
-            <a:ext cx="6583680" cy="457200"/>
+            <a:off x="3017520" y="2194560"/>
+            <a:ext cx="7772400" cy="457200"/>
           </a:xfrm>
           <a:prstGeom prst="rect">
             <a:avLst/>
@@ -11880,8 +12017,8 @@
         </p:nvSpPr>
         <p:spPr>
           <a:xfrm>
-            <a:off x="3566160" y="2816352"/>
-            <a:ext cx="6583680" cy="457200"/>
+            <a:off x="3017520" y="2816352"/>
+            <a:ext cx="7772400" cy="457200"/>
           </a:xfrm>
           <a:prstGeom prst="rect">
             <a:avLst/>
@@ -11902,7 +12039,7 @@
                   <a:schemeClr val="tx1"/>
                 </a:solidFill>
               </a:rPr>
-              <a:t>3. 유형 1 판정 : 두 전문가 모델</a:t>
+              <a:t>3. 유형 1 : 두 전문가가 이상을 판정</a:t>
             </a:r>
             <a:endParaRPr lang="en-US" sz="2400" dirty="0"/>
           </a:p>
@@ -11916,8 +12053,8 @@
         </p:nvSpPr>
         <p:spPr>
           <a:xfrm>
-            <a:off x="3566160" y="3438144"/>
-            <a:ext cx="6583680" cy="457200"/>
+            <a:off x="3017520" y="3438144"/>
+            <a:ext cx="7772400" cy="457200"/>
           </a:xfrm>
           <a:prstGeom prst="rect">
             <a:avLst/>
@@ -11952,8 +12089,8 @@
         </p:nvSpPr>
         <p:spPr>
           <a:xfrm>
-            <a:off x="3566160" y="4059936"/>
-            <a:ext cx="6583680" cy="457200"/>
+            <a:off x="3017520" y="4059936"/>
+            <a:ext cx="7772400" cy="457200"/>
           </a:xfrm>
           <a:prstGeom prst="rect">
             <a:avLst/>
@@ -11974,7 +12111,7 @@
                   <a:schemeClr val="tx1"/>
                 </a:solidFill>
               </a:rPr>
-              <a:t>5. 유형 2 : 교정 루프와 근거 기반 설명</a:t>
+              <a:t>5. 유형 2 : 판정을 설명하고 사람을 부르기</a:t>
             </a:r>
             <a:endParaRPr lang="en-US" sz="2400" dirty="0"/>
           </a:p>
@@ -11988,8 +12125,8 @@
         </p:nvSpPr>
         <p:spPr>
           <a:xfrm>
-            <a:off x="3566160" y="4681728"/>
-            <a:ext cx="6583680" cy="457200"/>
+            <a:off x="3017520" y="4681728"/>
+            <a:ext cx="7772400" cy="457200"/>
           </a:xfrm>
           <a:prstGeom prst="rect">
             <a:avLst/>
@@ -12073,7 +12210,7 @@
                   <a:schemeClr val="tx1"/>
                 </a:solidFill>
               </a:rPr>
-              <a:t>교정 루프 : canary test로 교정 후보 선별</a:t>
+              <a:t>교정 루프 : 배우되, 고장은 지우지 않는다</a:t>
             </a:r>
             <a:endParaRPr lang="en-US" sz="2400" dirty="0"/>
           </a:p>
@@ -12111,7 +12248,7 @@
                   <a:schemeClr val="tx1"/>
                 </a:solidFill>
               </a:rPr>
-              <a:t>운영 경험을 반영하되, 고장 증거를 지우는 교정은 통과시키지 않는다</a:t>
+              <a:t>더 민감해질 수는 있어도, 물리 기준보다 덜 민감해지지는 않는다</a:t>
             </a:r>
             <a:endParaRPr lang="en-US" sz="1400" dirty="0"/>
           </a:p>
@@ -12125,7 +12262,7 @@
         </p:nvSpPr>
         <p:spPr>
           <a:xfrm>
-            <a:off x="3926844" y="2395728"/>
+            <a:off x="4292604" y="2395728"/>
             <a:ext cx="886921" cy="512064"/>
           </a:xfrm>
           <a:prstGeom prst="line">
@@ -12149,7 +12286,7 @@
         </p:nvSpPr>
         <p:spPr>
           <a:xfrm>
-            <a:off x="5083009" y="3374136"/>
+            <a:off x="5448769" y="3374136"/>
             <a:ext cx="0" cy="1024128"/>
           </a:xfrm>
           <a:prstGeom prst="line">
@@ -12173,7 +12310,7 @@
         </p:nvSpPr>
         <p:spPr>
           <a:xfrm flipH="1">
-            <a:off x="3926844" y="4864608"/>
+            <a:off x="4292604" y="4864608"/>
             <a:ext cx="886921" cy="512064"/>
           </a:xfrm>
           <a:prstGeom prst="line">
@@ -12197,7 +12334,7 @@
         </p:nvSpPr>
         <p:spPr>
           <a:xfrm flipH="1" flipV="1">
-            <a:off x="2501435" y="4864608"/>
+            <a:off x="2867195" y="4864608"/>
             <a:ext cx="886921" cy="512064"/>
           </a:xfrm>
           <a:prstGeom prst="line">
@@ -12221,7 +12358,7 @@
         </p:nvSpPr>
         <p:spPr>
           <a:xfrm flipV="1">
-            <a:off x="2232191" y="3374136"/>
+            <a:off x="2597951" y="3374136"/>
             <a:ext cx="0" cy="1024128"/>
           </a:xfrm>
           <a:prstGeom prst="line">
@@ -12245,7 +12382,7 @@
         </p:nvSpPr>
         <p:spPr>
           <a:xfrm flipV="1">
-            <a:off x="2501435" y="2395728"/>
+            <a:off x="2867195" y="2395728"/>
             <a:ext cx="886921" cy="512064"/>
           </a:xfrm>
           <a:prstGeom prst="line">
@@ -12269,7 +12406,7 @@
         </p:nvSpPr>
         <p:spPr>
           <a:xfrm>
-            <a:off x="3374136" y="1956816"/>
+            <a:off x="3739896" y="1956816"/>
             <a:ext cx="566928" cy="566928"/>
           </a:xfrm>
           <a:prstGeom prst="ellipse">
@@ -12311,7 +12448,7 @@
         </p:nvSpPr>
         <p:spPr>
           <a:xfrm>
-            <a:off x="4078224" y="2057400"/>
+            <a:off x="4443984" y="2057400"/>
             <a:ext cx="2194560" cy="365760"/>
           </a:xfrm>
           <a:prstGeom prst="rect">
@@ -12347,7 +12484,7 @@
         </p:nvSpPr>
         <p:spPr>
           <a:xfrm>
-            <a:off x="4799545" y="2779776"/>
+            <a:off x="5165305" y="2779776"/>
             <a:ext cx="566928" cy="566928"/>
           </a:xfrm>
           <a:prstGeom prst="ellipse">
@@ -12389,7 +12526,7 @@
         </p:nvSpPr>
         <p:spPr>
           <a:xfrm>
-            <a:off x="5503633" y="2880360"/>
+            <a:off x="5869393" y="2880360"/>
             <a:ext cx="2194560" cy="365760"/>
           </a:xfrm>
           <a:prstGeom prst="rect">
@@ -12411,7 +12548,7 @@
                   <a:schemeClr val="tx1"/>
                 </a:solidFill>
               </a:rPr>
-              <a:t>작업자 피드백</a:t>
+              <a:t>작업자 확인</a:t>
             </a:r>
             <a:endParaRPr lang="en-US" sz="1600" dirty="0"/>
           </a:p>
@@ -12425,7 +12562,7 @@
         </p:nvSpPr>
         <p:spPr>
           <a:xfrm>
-            <a:off x="4799545" y="4425696"/>
+            <a:off x="5165305" y="4425696"/>
             <a:ext cx="566928" cy="566928"/>
           </a:xfrm>
           <a:prstGeom prst="ellipse">
@@ -12467,7 +12604,7 @@
         </p:nvSpPr>
         <p:spPr>
           <a:xfrm>
-            <a:off x="5503633" y="4526280"/>
+            <a:off x="5869393" y="4526280"/>
             <a:ext cx="2194560" cy="365760"/>
           </a:xfrm>
           <a:prstGeom prst="rect">
@@ -12489,7 +12626,7 @@
                   <a:schemeClr val="tx1"/>
                 </a:solidFill>
               </a:rPr>
-              <a:t>교정 후보 갱신</a:t>
+              <a:t>교정 제안</a:t>
             </a:r>
             <a:endParaRPr lang="en-US" sz="1600" dirty="0"/>
           </a:p>
@@ -12503,7 +12640,7 @@
         </p:nvSpPr>
         <p:spPr>
           <a:xfrm>
-            <a:off x="3374136" y="5248656"/>
+            <a:off x="3739896" y="5248656"/>
             <a:ext cx="566928" cy="566928"/>
           </a:xfrm>
           <a:prstGeom prst="ellipse">
@@ -12545,7 +12682,7 @@
         </p:nvSpPr>
         <p:spPr>
           <a:xfrm>
-            <a:off x="1408176" y="5349240"/>
+            <a:off x="1773936" y="5349240"/>
             <a:ext cx="1828800" cy="365760"/>
           </a:xfrm>
           <a:prstGeom prst="rect">
@@ -12581,7 +12718,7 @@
         </p:nvSpPr>
         <p:spPr>
           <a:xfrm>
-            <a:off x="1948727" y="4425696"/>
+            <a:off x="2314487" y="4425696"/>
             <a:ext cx="566928" cy="566928"/>
           </a:xfrm>
           <a:prstGeom prst="ellipse">
@@ -12623,7 +12760,7 @@
         </p:nvSpPr>
         <p:spPr>
           <a:xfrm>
-            <a:off x="-17233" y="4526280"/>
+            <a:off x="348527" y="4526280"/>
             <a:ext cx="1828800" cy="365760"/>
           </a:xfrm>
           <a:prstGeom prst="rect">
@@ -12659,7 +12796,7 @@
         </p:nvSpPr>
         <p:spPr>
           <a:xfrm>
-            <a:off x="1948727" y="2779776"/>
+            <a:off x="2314487" y="2779776"/>
             <a:ext cx="566928" cy="566928"/>
           </a:xfrm>
           <a:prstGeom prst="ellipse">
@@ -12701,7 +12838,7 @@
         </p:nvSpPr>
         <p:spPr>
           <a:xfrm>
-            <a:off x="-17233" y="2880360"/>
+            <a:off x="348527" y="2880360"/>
             <a:ext cx="1828800" cy="365760"/>
           </a:xfrm>
           <a:prstGeom prst="rect">
@@ -12737,8 +12874,8 @@
         </p:nvSpPr>
         <p:spPr>
           <a:xfrm>
-            <a:off x="3941064" y="5532120"/>
-            <a:ext cx="1911096" cy="0"/>
+            <a:off x="4306824" y="5532120"/>
+            <a:ext cx="950976" cy="0"/>
           </a:xfrm>
           <a:prstGeom prst="line">
             <a:avLst/>
@@ -12761,8 +12898,8 @@
         </p:nvSpPr>
         <p:spPr>
           <a:xfrm>
-            <a:off x="5943600" y="5367528"/>
-            <a:ext cx="2103120" cy="329184"/>
+            <a:off x="5349240" y="5257800"/>
+            <a:ext cx="2103120" cy="548640"/>
           </a:xfrm>
           <a:prstGeom prst="rect">
             <a:avLst/>
@@ -12778,14 +12915,28 @@
               <a:buNone/>
             </a:pPr>
             <a:r>
-              <a:rPr lang="en-US" sz="1300" dirty="0">
-                <a:solidFill>
-                  <a:schemeClr val="tx1"/>
-                </a:solidFill>
-              </a:rPr>
-              <a:t>고장 증거를 지우면 기각</a:t>
-            </a:r>
-            <a:endParaRPr lang="en-US" sz="1300" dirty="0"/>
+              <a:rPr lang="en-US" sz="1300" b="1" dirty="0">
+                <a:solidFill>
+                  <a:schemeClr val="tx1"/>
+                </a:solidFill>
+              </a:rPr>
+              <a:t>하나라도 실패하면 거절</a:t>
+            </a:r>
+            <a:endParaRPr lang="en-US" sz="1400" dirty="0"/>
+          </a:p>
+          <a:p>
+            <a:pPr algn="l" indent="0" marL="0">
+              <a:buNone/>
+            </a:pPr>
+            <a:r>
+              <a:rPr lang="en-US" sz="1200" dirty="0">
+                <a:solidFill>
+                  <a:schemeClr val="tx2"/>
+                </a:solidFill>
+              </a:rPr>
+              <a:t>엔지니어 검토로</a:t>
+            </a:r>
+            <a:endParaRPr lang="en-US" sz="1400" dirty="0"/>
           </a:p>
         </p:txBody>
       </p:sp>
@@ -12834,7 +12985,7 @@
         <p:spPr>
           <a:xfrm>
             <a:off x="7680960" y="2304288"/>
-            <a:ext cx="4114800" cy="320040"/>
+            <a:ext cx="4114800" cy="548640"/>
           </a:xfrm>
           <a:prstGeom prst="rect">
             <a:avLst/>
@@ -12855,7 +13006,7 @@
                   <a:schemeClr val="tx1"/>
                 </a:solidFill>
               </a:rPr>
-              <a:t>semi-synthetic 시험 : 정상 알림 비율</a:t>
+              <a:t>작업자 확인 반영 후 운전변화 알림 (운영 시험)</a:t>
             </a:r>
             <a:endParaRPr lang="en-US" sz="1400" dirty="0"/>
           </a:p>
@@ -12869,7 +13020,7 @@
         </p:nvSpPr>
         <p:spPr>
           <a:xfrm>
-            <a:off x="7680960" y="2971800"/>
+            <a:off x="7680960" y="3017520"/>
             <a:ext cx="4114800" cy="548640"/>
           </a:xfrm>
           <a:prstGeom prst="rect">
@@ -12905,7 +13056,7 @@
         </p:nvSpPr>
         <p:spPr>
           <a:xfrm>
-            <a:off x="7680960" y="3538728"/>
+            <a:off x="7680960" y="3584448"/>
             <a:ext cx="4114800" cy="320040"/>
           </a:xfrm>
           <a:prstGeom prst="rect">
@@ -12927,7 +13078,7 @@
                   <a:schemeClr val="tx1"/>
                 </a:solidFill>
               </a:rPr>
-              <a:t>고장이 섞인 확인 조건을 기각</a:t>
+              <a:t>고장이 섞인 교정 제안을 거절</a:t>
             </a:r>
             <a:endParaRPr lang="en-US" sz="1400" dirty="0"/>
           </a:p>
@@ -12942,7 +13093,7 @@
         <p:spPr>
           <a:xfrm>
             <a:off x="7680960" y="4251960"/>
-            <a:ext cx="4114800" cy="1463040"/>
+            <a:ext cx="4114800" cy="1737360"/>
           </a:xfrm>
           <a:prstGeom prst="rect">
             <a:avLst/>
@@ -12980,7 +13131,7 @@
                   <a:schemeClr val="tx1"/>
                 </a:solidFill>
               </a:rPr>
-              <a:t>약한 고장을 섞은 시험을 통과한 후보만 반영</a:t>
+              <a:t>가짜 고장(진동 +30% · +50%)을 넣어 보고, 탐지가 떨어지면 거절</a:t>
             </a:r>
             <a:endParaRPr lang="en-US" sz="1400" dirty="0"/>
           </a:p>
@@ -12997,7 +13148,7 @@
                   <a:schemeClr val="tx1"/>
                 </a:solidFill>
               </a:rPr>
-              <a:t>결과 : </a:t>
+              <a:t>시험 3종 : </a:t>
             </a:r>
             <a:pPr algn="l" indent="0" marL="0">
               <a:spcAft>
@@ -13011,7 +13162,38 @@
                   <a:schemeClr val="tx1"/>
                 </a:solidFill>
               </a:rPr>
-              <a:t>운영 경험이 고장 증거를 지우지 않는 범위에서 공정 기준으로 축적</a:t>
+              <a:t>새 운전 · 기존 운전 · 정상 확인</a:t>
+            </a:r>
+            <a:endParaRPr lang="en-US" sz="1400" dirty="0"/>
+          </a:p>
+          <a:p>
+            <a:pPr algn="l" indent="0" marL="0">
+              <a:spcAft>
+                <a:spcPts val="800"/>
+              </a:spcAft>
+              <a:buNone/>
+            </a:pPr>
+            <a:r>
+              <a:rPr lang="en-US" sz="1400" b="1" dirty="0">
+                <a:solidFill>
+                  <a:schemeClr val="tx1"/>
+                </a:solidFill>
+              </a:rPr>
+              <a:t>제안 조건 : </a:t>
+            </a:r>
+            <a:pPr algn="l" indent="0" marL="0">
+              <a:spcAft>
+                <a:spcPts val="800"/>
+              </a:spcAft>
+              <a:buNone/>
+            </a:pPr>
+            <a:r>
+              <a:rPr lang="en-US" sz="1400" dirty="0">
+                <a:solidFill>
+                  <a:schemeClr val="tx1"/>
+                </a:solidFill>
+              </a:rPr>
+              <a:t>확정 구간 ≥ 6개 (각 ≥ 12행)</a:t>
             </a:r>
             <a:endParaRPr lang="en-US" sz="1400" dirty="0"/>
           </a:p>
@@ -13074,7 +13256,7 @@
                   <a:schemeClr val="tx1"/>
                 </a:solidFill>
               </a:rPr>
-              <a:t>유형 2 : 근거 기반 설명과 실제 답변</a:t>
+              <a:t>유형 2 : 판정을 사람의 말로 설명</a:t>
             </a:r>
             <a:endParaRPr lang="en-US" sz="2400" dirty="0"/>
           </a:p>
@@ -13112,7 +13294,7 @@
                   <a:schemeClr val="tx1"/>
                 </a:solidFill>
               </a:rPr>
-              <a:t>등급은 규칙표가 정하고, AI는 근거를 설명한다 — 어디서 · 무엇이 · 왜 · 무엇을 점검</a:t>
+              <a:t>AI는 근거를 설명하고, 사람을 부를지는 규칙표가 정한다</a:t>
             </a:r>
             <a:endParaRPr lang="en-US" sz="1400" dirty="0"/>
           </a:p>
@@ -13154,7 +13336,7 @@
                   <a:schemeClr val="tx1"/>
                 </a:solidFill>
               </a:rPr>
-              <a:t>계기</a:t>
+              <a:t>깨우기</a:t>
             </a:r>
             <a:endParaRPr lang="en-US" sz="1400" dirty="0"/>
           </a:p>
@@ -13210,7 +13392,7 @@
                   <a:schemeClr val="tx1"/>
                 </a:solidFill>
               </a:rPr>
-              <a:t>context</a:t>
+              <a:t>맥락 모으기</a:t>
             </a:r>
             <a:endParaRPr lang="en-US" sz="1400" dirty="0"/>
           </a:p>
@@ -13224,7 +13406,7 @@
                   <a:schemeClr val="tx1"/>
                 </a:solidFill>
               </a:rPr>
-              <a:t>assembly</a:t>
+              <a:t>읽기 전용 도구 11개</a:t>
             </a:r>
             <a:endParaRPr lang="en-US" sz="1400" dirty="0"/>
           </a:p>
@@ -13280,7 +13462,7 @@
                   <a:schemeClr val="tx1"/>
                 </a:solidFill>
               </a:rPr>
-              <a:t>2-hop 검색</a:t>
+              <a:t>근거 검색</a:t>
             </a:r>
             <a:endParaRPr lang="en-US" sz="1400" dirty="0"/>
           </a:p>
@@ -13322,7 +13504,7 @@
                   <a:schemeClr val="tx1"/>
                 </a:solidFill>
               </a:rPr>
-              <a:t>답변 생성</a:t>
+              <a:t>답변 작성</a:t>
             </a:r>
             <a:endParaRPr lang="en-US" sz="1400" dirty="0"/>
           </a:p>
@@ -13624,7 +13806,7 @@
                   <a:schemeClr val="tx1"/>
                 </a:solidFill>
               </a:rPr>
-              <a:t>고정 규칙 13개가 점검 등급 결정 — AI가 바꿀 수 없음</a:t>
+              <a:t>13개 규칙이 등급을 정함 — AI가 바꿀 수 없음</a:t>
             </a:r>
             <a:endParaRPr lang="en-US" sz="1400" dirty="0"/>
           </a:p>
@@ -13663,7 +13845,7 @@
         <p:spPr>
           <a:xfrm>
             <a:off x="457200" y="4983480"/>
-            <a:ext cx="6035040" cy="1188720"/>
+            <a:ext cx="6035040" cy="1280160"/>
           </a:xfrm>
           <a:prstGeom prst="rect">
             <a:avLst/>
@@ -13687,7 +13869,7 @@
                   <a:schemeClr val="tx1"/>
                 </a:solidFill>
               </a:rPr>
-              <a:t>질문 : </a:t>
+              <a:t>답변 5요소 : </a:t>
             </a:r>
             <a:pPr algn="l" indent="0" marL="0">
               <a:spcAft>
@@ -13701,7 +13883,7 @@
                   <a:schemeClr val="tx1"/>
                 </a:solidFill>
               </a:rPr>
-              <a:t>“방금 알림은 왜 났어?” (화면 121초 기준)</a:t>
+              <a:t>어디서 · 무엇이 변했나 · 원인 후보 · 먼저 점검 · 긴급도</a:t>
             </a:r>
             <a:endParaRPr lang="en-US" sz="1400" dirty="0"/>
           </a:p>
@@ -13718,7 +13900,7 @@
                   <a:schemeClr val="tx1"/>
                 </a:solidFill>
               </a:rPr>
-              <a:t>판정 상태 : </a:t>
+              <a:t>예시 : </a:t>
             </a:r>
             <a:pPr algn="l" indent="0" marL="0">
               <a:spcAft>
@@ -13732,7 +13914,7 @@
                   <a:schemeClr val="tx1"/>
                 </a:solidFill>
               </a:rPr>
-              <a:t>운전변화 알림 → 등급 : 관찰 강화 (규칙표 결정)</a:t>
+              <a:t>“방금 알림은 왜 났어?” → 운전변화 알림, 등급 '관찰 강화'</a:t>
             </a:r>
             <a:endParaRPr lang="en-US" sz="1400" dirty="0"/>
           </a:p>
@@ -13749,7 +13931,7 @@
                   <a:schemeClr val="tx1"/>
                 </a:solidFill>
               </a:rPr>
-              <a:t>지식 근거 : </a:t>
+              <a:t>속도 : </a:t>
             </a:r>
             <a:pPr algn="l" indent="0" marL="0">
               <a:spcAft>
@@ -13763,7 +13945,7 @@
                   <a:schemeClr val="tx1"/>
                 </a:solidFill>
               </a:rPr>
-              <a:t>6건 · 그래프 노드 205 · 연결 320 · 출처 76</a:t>
+              <a:t>평균 30.7초 → 초 단위 보호가 아니라 운영자 지원</a:t>
             </a:r>
             <a:endParaRPr lang="en-US" sz="1400" dirty="0"/>
           </a:p>
@@ -13845,7 +14027,7 @@
                   <a:schemeClr val="tx2"/>
                 </a:solidFill>
               </a:rPr>
-              <a:t>재생 자료의 실제 답변 화면 (심사 시 시연 가능)</a:t>
+              <a:t>재생 자료의 실제 답변 화면 (화면 121초 기준 · 심사 시 시연 가능)</a:t>
             </a:r>
             <a:endParaRPr lang="en-US" sz="1200" dirty="0"/>
           </a:p>
@@ -13892,7 +14074,7 @@
                   <a:schemeClr val="tx1"/>
                 </a:solidFill>
               </a:rPr>
-              <a:t>재생 12쌍 · 시뮬레이션 8쌍에서 citation compliance 11% → 100%</a:t>
+              <a:t>질문 20쌍에서 근거 인용률 11% → 100%</a:t>
             </a:r>
             <a:endParaRPr lang="en-US" sz="1400" dirty="0"/>
           </a:p>
@@ -13955,7 +14137,7 @@
                   <a:schemeClr val="tx1"/>
                 </a:solidFill>
               </a:rPr>
-              <a:t>유형 2 ① 지식그래프 근거 검색</a:t>
+              <a:t>유형 2 ① 지식그래프에서 근거 찾기</a:t>
             </a:r>
             <a:endParaRPr lang="en-US" sz="2400" dirty="0"/>
           </a:p>
@@ -13993,7 +14175,7 @@
                   <a:schemeClr val="tx1"/>
                 </a:solidFill>
               </a:rPr>
-              <a:t>임베딩 없이 deterministic 검색 — 같은 질문에는 항상 같은 근거</a:t>
+              <a:t>임베딩 없이 정해진 규칙으로 찾는다 — 같은 질문과 상태에는 항상 같은 근거</a:t>
             </a:r>
             <a:endParaRPr lang="en-US" sz="1400" dirty="0"/>
           </a:p>
@@ -14740,7 +14922,7 @@
                   <a:schemeClr val="tx1"/>
                 </a:solidFill>
               </a:rPr>
-              <a:t>seed</a:t>
+              <a:t>출발점</a:t>
             </a:r>
             <a:endParaRPr lang="en-US" sz="1200" dirty="0"/>
           </a:p>
@@ -14810,7 +14992,7 @@
                   <a:schemeClr val="tx1"/>
                 </a:solidFill>
               </a:rPr>
-              <a:t>1-hop</a:t>
+              <a:t>1칸</a:t>
             </a:r>
             <a:endParaRPr lang="en-US" sz="1200" dirty="0"/>
           </a:p>
@@ -14882,7 +15064,7 @@
                   <a:schemeClr val="tx1"/>
                 </a:solidFill>
               </a:rPr>
-              <a:t>2-hop</a:t>
+              <a:t>2칸</a:t>
             </a:r>
             <a:endParaRPr lang="en-US" sz="1200" dirty="0"/>
           </a:p>
@@ -14967,7 +15149,7 @@
         <p:spPr>
           <a:xfrm>
             <a:off x="457200" y="5989320"/>
-            <a:ext cx="5486400" cy="274320"/>
+            <a:ext cx="5669280" cy="274320"/>
           </a:xfrm>
           <a:prstGeom prst="rect">
             <a:avLst/>
@@ -14988,7 +15170,7 @@
                   <a:schemeClr val="tx2"/>
                 </a:solidFill>
               </a:rPr>
-              <a:t>hub : 이웃이 많은 노드 → hub damping으로 점수 감쇠</a:t>
+              <a:t>hub : 연결이 많은 노드 → 점수를 깎아 한쪽으로 쏠리지 않게 함</a:t>
             </a:r>
             <a:endParaRPr lang="en-US" sz="1200" dirty="0"/>
           </a:p>
@@ -15069,7 +15251,7 @@
                   <a:schemeClr val="tx1"/>
                 </a:solidFill>
               </a:rPr>
-              <a:t>entity linking</a:t>
+              <a:t>출발점 정하기</a:t>
             </a:r>
             <a:endParaRPr lang="en-US" sz="1400" dirty="0"/>
           </a:p>
@@ -15086,7 +15268,7 @@
                   <a:schemeClr val="tx1"/>
                 </a:solidFill>
               </a:rPr>
-              <a:t>질문의 한 · 영 별칭 + 현재 판정 상태 · 경로 · 같은 부하 대비 신호에서 seed 생성</a:t>
+              <a:t>질문 속 단어(한 · 영 별칭)와 현재 판정 상태에서 시작 노드를 고름</a:t>
             </a:r>
             <a:endParaRPr lang="en-US" sz="1400" dirty="0"/>
           </a:p>
@@ -15167,7 +15349,7 @@
                   <a:schemeClr val="tx1"/>
                 </a:solidFill>
               </a:rPr>
-              <a:t>2-hop 점수 전파</a:t>
+              <a:t>두 칸까지 퍼뜨리기</a:t>
             </a:r>
             <a:endParaRPr lang="en-US" sz="1400" dirty="0"/>
           </a:p>
@@ -15184,7 +15366,7 @@
                   <a:schemeClr val="tx1"/>
                 </a:solidFill>
               </a:rPr>
-              <a:t>홉마다 ×0.55, 관계 가중(0.7–1.2) · hub damping · 의도 배율</a:t>
+              <a:t>연결을 따라 점수 전파, 한 칸마다 ×0.55 · '점검', '원인', '호출' 등 질문 의도별 가중</a:t>
             </a:r>
             <a:endParaRPr lang="en-US" sz="1400" dirty="0"/>
           </a:p>
@@ -15265,7 +15447,7 @@
                   <a:schemeClr val="tx1"/>
                 </a:solidFill>
               </a:rPr>
-              <a:t>상위 근거 선택</a:t>
+              <a:t>상위 근거 고르기</a:t>
             </a:r>
             <a:endParaRPr lang="en-US" sz="1400" dirty="0"/>
           </a:p>
@@ -15353,7 +15535,7 @@
                   <a:schemeClr val="tx1"/>
                 </a:solidFill>
               </a:rPr>
-              <a:t>  노드 · 간선 · 출처 (노드 유형 11, 간선 유형 19, 모든 노드 · 간선에 출처와 근거 등급)</a:t>
+              <a:t>  노드 · 연결 · 출처 — 설비 부위, 원인 후보, 신호, 판정 상태, 점검 순서, 문헌 근거 (모두 출처 · 근거 등급 표기)</a:t>
             </a:r>
             <a:endParaRPr lang="en-US" sz="1400" dirty="0"/>
           </a:p>
@@ -15416,7 +15598,7 @@
                   <a:schemeClr val="tx1"/>
                 </a:solidFill>
               </a:rPr>
-              <a:t>유형 2 ② tool calling LLM과 validator</a:t>
+              <a:t>유형 2 ② AI 답변 검사 (validator)</a:t>
             </a:r>
             <a:endParaRPr lang="en-US" sz="2400" dirty="0"/>
           </a:p>
@@ -15454,7 +15636,7 @@
                   <a:schemeClr val="tx1"/>
                 </a:solidFill>
               </a:rPr>
-              <a:t>AI의 답은 17개 검사를 통과해야 화면에 나간다</a:t>
+              <a:t>AI의 답은 17개 검사를 모두 통과해야 화면에 나간다 — 검사는 AI가 아니라 규칙(정규식 · 구조 비교)</a:t>
             </a:r>
             <a:endParaRPr lang="en-US" sz="1400" dirty="0"/>
           </a:p>
@@ -15490,7 +15672,7 @@
                   <a:schemeClr val="tx1"/>
                 </a:solidFill>
               </a:rPr>
-              <a:t>tool calling LLM</a:t>
+              <a:t>언어모델이 일하는 방식</a:t>
             </a:r>
             <a:endParaRPr lang="en-US" sz="1800" dirty="0"/>
           </a:p>
@@ -15543,7 +15725,7 @@
                   <a:schemeClr val="tx1"/>
                 </a:solidFill>
               </a:rPr>
-              <a:t>읽기 전용 조회 11개 + 답안 제출 1개</a:t>
+              <a:t>읽기 전용 조회 11개 + 답안 제출 1개 — 데이터 대신 도구 결과만 봄</a:t>
             </a:r>
             <a:endParaRPr lang="en-US" sz="1400" dirty="0"/>
           </a:p>
@@ -15560,7 +15742,7 @@
                   <a:schemeClr val="tx1"/>
                 </a:solidFill>
               </a:rPr>
-              <a:t>첫 턴 : </a:t>
+              <a:t>속도 : </a:t>
             </a:r>
             <a:pPr algn="l" indent="0" marL="0">
               <a:spcAft>
@@ -15574,7 +15756,7 @@
                   <a:schemeClr val="tx1"/>
                 </a:solidFill>
               </a:rPr>
-              <a:t>상태 · 같은 부하 비교 · 정책 · 지식그래프 · 공정 지식 · 점검 초안 6개 병렬 호출</a:t>
+              <a:t>첫 턴에 도구 6개를 한꺼번에 호출 → 요청 5–8회 → 2회 안팎</a:t>
             </a:r>
             <a:endParaRPr lang="en-US" sz="1400" dirty="0"/>
           </a:p>
@@ -15591,7 +15773,7 @@
                   <a:schemeClr val="tx1"/>
                 </a:solidFill>
               </a:rPr>
-              <a:t>요청 수 : </a:t>
+              <a:t>한도 : </a:t>
             </a:r>
             <a:pPr algn="l" indent="0" marL="0">
               <a:spcAft>
@@ -15605,7 +15787,7 @@
                   <a:schemeClr val="tx1"/>
                 </a:solidFill>
               </a:rPr>
-              <a:t>질문당 5–8회 → 2회 안팎 (최대 9턴, 기한 80초)</a:t>
+              <a:t>최대 9턴 · 서버 기한 80초</a:t>
             </a:r>
             <a:endParaRPr lang="en-US" sz="1400" dirty="0"/>
           </a:p>
@@ -15641,7 +15823,7 @@
                   <a:schemeClr val="tx1"/>
                 </a:solidFill>
               </a:rPr>
-              <a:t>검증 실패 시</a:t>
+              <a:t>검사에 실패하면</a:t>
             </a:r>
             <a:endParaRPr lang="en-US" sz="1600" dirty="0"/>
           </a:p>
@@ -15697,7 +15879,7 @@
                   <a:schemeClr val="tx1"/>
                 </a:solidFill>
               </a:rPr>
-              <a:t>위반 목록 반환</a:t>
+              <a:t>위반 목록 전달</a:t>
             </a:r>
             <a:endParaRPr lang="en-US" sz="1400" dirty="0"/>
           </a:p>
@@ -15739,7 +15921,7 @@
                   <a:schemeClr val="tx1"/>
                 </a:solidFill>
               </a:rPr>
-              <a:t>수리 1회</a:t>
+              <a:t>고쳐 쓰기</a:t>
             </a:r>
             <a:endParaRPr lang="en-US" sz="1400" dirty="0"/>
           </a:p>
@@ -15753,7 +15935,7 @@
                   <a:schemeClr val="tx1"/>
                 </a:solidFill>
               </a:rPr>
-              <a:t>다시 작성</a:t>
+              <a:t>1회</a:t>
             </a:r>
             <a:endParaRPr lang="en-US" sz="1400" dirty="0"/>
           </a:p>
@@ -15809,7 +15991,7 @@
                   <a:schemeClr val="tx1"/>
                 </a:solidFill>
               </a:rPr>
-              <a:t>deterministic</a:t>
+              <a:t>규칙 기반</a:t>
             </a:r>
             <a:endParaRPr lang="en-US" sz="1400" dirty="0"/>
           </a:p>
@@ -15872,7 +16054,7 @@
         <p:spPr>
           <a:xfrm>
             <a:off x="457200" y="5394960"/>
-            <a:ext cx="4937760" cy="365760"/>
+            <a:ext cx="4937760" cy="594360"/>
           </a:xfrm>
           <a:prstGeom prst="rect">
             <a:avLst/>
@@ -15885,6 +16067,9 @@
           <a:lstStyle/>
           <a:p>
             <a:pPr algn="l" indent="0" marL="0">
+              <a:spcAft>
+                <a:spcPts val="200"/>
+              </a:spcAft>
               <a:buNone/>
             </a:pPr>
             <a:r>
@@ -15893,7 +16078,24 @@
                   <a:schemeClr val="tx1"/>
                 </a:solidFill>
               </a:rPr>
-              <a:t>통과 못 한 문장은 화면에 나가지 않음</a:t>
+              <a:t>대체 답변도 같은 검사를 거침</a:t>
+            </a:r>
+            <a:endParaRPr lang="en-US" sz="1400" dirty="0"/>
+          </a:p>
+          <a:p>
+            <a:pPr algn="l" indent="0" marL="0">
+              <a:spcAft>
+                <a:spcPts val="200"/>
+              </a:spcAft>
+              <a:buNone/>
+            </a:pPr>
+            <a:r>
+              <a:rPr lang="en-US" sz="1400" b="1" dirty="0">
+                <a:solidFill>
+                  <a:schemeClr val="tx1"/>
+                </a:solidFill>
+              </a:rPr>
+              <a:t>통과 못 한 문장은 화면에 안 나감</a:t>
             </a:r>
             <a:endParaRPr lang="en-US" sz="1400" dirty="0"/>
           </a:p>
@@ -15929,7 +16131,7 @@
                   <a:schemeClr val="tx1"/>
                 </a:solidFill>
               </a:rPr>
-              <a:t>validator 17개 검사 (대표 6가지)</a:t>
+              <a:t>17개 검사 — AI가 하면 안 되는 것</a:t>
             </a:r>
             <a:endParaRPr lang="en-US" sz="1800" dirty="0"/>
           </a:p>
@@ -15950,7 +16152,7 @@
           </p:nvPr>
         </p:nvGraphicFramePr>
         <p:xfrm>
-          <a:off x="5943600" y="2148840"/>
+          <a:off x="5943600" y="2103120"/>
           <a:ext cx="5852160" cy="914400"/>
         </p:xfrm>
         <a:graphic>
@@ -15958,10 +16160,10 @@
             <a:tbl>
               <a:tblPr/>
               <a:tblGrid>
-                <a:gridCol w="1828800"/>
-                <a:gridCol w="4023360"/>
+                <a:gridCol w="1737360"/>
+                <a:gridCol w="4114800"/>
               </a:tblGrid>
-              <a:tr h="438912">
+              <a:tr h="411480">
                 <a:tc>
                   <a:txBody>
                     <a:bodyPr/>
@@ -15976,7 +16178,7 @@
                             <a:schemeClr val="tx1"/>
                           </a:solidFill>
                         </a:rPr>
-                        <a:t>검사</a:t>
+                        <a:t>묶음</a:t>
                       </a:r>
                       <a:endParaRPr lang="en-US" sz="1400" dirty="0"/>
                     </a:p>
@@ -16022,7 +16224,7 @@
                             <a:schemeClr val="tx1"/>
                           </a:solidFill>
                         </a:rPr>
-                        <a:t>강제하는 것</a:t>
+                        <a:t>막는 것</a:t>
                       </a:r>
                       <a:endParaRPr lang="en-US" sz="1400" dirty="0"/>
                     </a:p>
@@ -16055,7 +16257,7 @@
                   </a:tcPr>
                 </a:tc>
               </a:tr>
-              <a:tr h="438912">
+              <a:tr h="411480">
                 <a:tc>
                   <a:txBody>
                     <a:bodyPr/>
@@ -16110,7 +16312,7 @@
                             <a:schemeClr val="tx1"/>
                           </a:solidFill>
                         </a:rPr>
-                        <a:t>도구 값만, 단위 없음</a:t>
+                        <a:t>도구에 없는 숫자 · 단위 만들기</a:t>
                       </a:r>
                       <a:endParaRPr lang="en-US" sz="1400" dirty="0"/>
                     </a:p>
@@ -16137,7 +16339,7 @@
                   </a:tcPr>
                 </a:tc>
               </a:tr>
-              <a:tr h="438912">
+              <a:tr h="411480">
                 <a:tc>
                   <a:txBody>
                     <a:bodyPr/>
@@ -16152,7 +16354,7 @@
                             <a:schemeClr val="tx1"/>
                           </a:solidFill>
                         </a:rPr>
-                        <a:t>단정 · 수명</a:t>
+                        <a:t>단정 금지</a:t>
                       </a:r>
                       <a:endParaRPr lang="en-US" sz="1400" dirty="0"/>
                     </a:p>
@@ -16192,7 +16394,7 @@
                             <a:schemeClr val="tx1"/>
                           </a:solidFill>
                         </a:rPr>
-                        <a:t>원인 확정 · 남은 수명 금지</a:t>
+                        <a:t>원인 확정, 남은 수명 예측</a:t>
                       </a:r>
                       <a:endParaRPr lang="en-US" sz="1400" dirty="0"/>
                     </a:p>
@@ -16219,7 +16421,7 @@
                   </a:tcPr>
                 </a:tc>
               </a:tr>
-              <a:tr h="438912">
+              <a:tr h="411480">
                 <a:tc>
                   <a:txBody>
                     <a:bodyPr/>
@@ -16234,7 +16436,7 @@
                             <a:schemeClr val="tx1"/>
                           </a:solidFill>
                         </a:rPr>
-                        <a:t>제어 지시</a:t>
+                        <a:t>제어 금지</a:t>
                       </a:r>
                       <a:endParaRPr lang="en-US" sz="1400" dirty="0"/>
                     </a:p>
@@ -16274,7 +16476,7 @@
                             <a:schemeClr val="tx1"/>
                           </a:solidFill>
                         </a:rPr>
-                        <a:t>정지 · 설정 변경 권고 금지</a:t>
+                        <a:t>정지 · 재가동 · 설정 변경 권고</a:t>
                       </a:r>
                       <a:endParaRPr lang="en-US" sz="1400" dirty="0"/>
                     </a:p>
@@ -16301,7 +16503,7 @@
                   </a:tcPr>
                 </a:tc>
               </a:tr>
-              <a:tr h="438912">
+              <a:tr h="411480">
                 <a:tc>
                   <a:txBody>
                     <a:bodyPr/>
@@ -16316,7 +16518,7 @@
                             <a:schemeClr val="tx1"/>
                           </a:solidFill>
                         </a:rPr>
-                        <a:t>근거 · 신선도</a:t>
+                        <a:t>근거 연결</a:t>
                       </a:r>
                       <a:endParaRPr lang="en-US" sz="1400" dirty="0"/>
                     </a:p>
@@ -16356,7 +16558,7 @@
                             <a:schemeClr val="tx1"/>
                           </a:solidFill>
                         </a:rPr>
-                        <a:t>가설마다 근거, 120초 이내</a:t>
+                        <a:t>근거 없는 가설, 없는 출처 인용</a:t>
                       </a:r>
                       <a:endParaRPr lang="en-US" sz="1400" dirty="0"/>
                     </a:p>
@@ -16383,7 +16585,7 @@
                   </a:tcPr>
                 </a:tc>
               </a:tr>
-              <a:tr h="438912">
+              <a:tr h="411480">
                 <a:tc>
                   <a:txBody>
                     <a:bodyPr/>
@@ -16398,7 +16600,7 @@
                             <a:schemeClr val="tx1"/>
                           </a:solidFill>
                         </a:rPr>
-                        <a:t>지시문 방어</a:t>
+                        <a:t>신선도</a:t>
                       </a:r>
                       <a:endParaRPr lang="en-US" sz="1400" dirty="0"/>
                     </a:p>
@@ -16438,7 +16640,7 @@
                             <a:schemeClr val="tx1"/>
                           </a:solidFill>
                         </a:rPr>
-                        <a:t>도구 결과 속 지시문 무시 (패턴 13개)</a:t>
+                        <a:t>120초 넘은 데이터로 답하기</a:t>
                       </a:r>
                       <a:endParaRPr lang="en-US" sz="1400" dirty="0"/>
                     </a:p>
@@ -16465,7 +16667,7 @@
                   </a:tcPr>
                 </a:tc>
               </a:tr>
-              <a:tr h="438912">
+              <a:tr h="411480">
                 <a:tc>
                   <a:txBody>
                     <a:bodyPr/>
@@ -16480,7 +16682,171 @@
                             <a:schemeClr val="tx1"/>
                           </a:solidFill>
                         </a:rPr>
-                        <a:t>등급 일치</a:t>
+                        <a:t>주입 방어</a:t>
+                      </a:r>
+                      <a:endParaRPr lang="en-US" sz="1400" dirty="0"/>
+                    </a:p>
+                  </a:txBody>
+                  <a:tcPr marL="73152" marR="73152" marT="36576" marB="36576" anchor="ctr">
+                    <a:lnL w="0" cap="flat" cmpd="sng" algn="ctr">
+                      <a:noFill/>
+                    </a:lnL>
+                    <a:lnR w="0" cap="flat" cmpd="sng" algn="ctr">
+                      <a:noFill/>
+                    </a:lnR>
+                    <a:lnT w="0" cap="flat" cmpd="sng" algn="ctr">
+                      <a:noFill/>
+                    </a:lnT>
+                    <a:lnB w="6350" cap="flat" cmpd="sng" algn="ctr">
+                      <a:solidFill>
+                        <a:srgbClr val="D9D9D9"/>
+                      </a:solidFill>
+                      <a:prstDash val="solid"/>
+                      <a:round/>
+                      <a:headEnd type="none" w="med" len="med"/>
+                      <a:tailEnd type="none" w="med" len="med"/>
+                    </a:lnB>
+                  </a:tcPr>
+                </a:tc>
+                <a:tc>
+                  <a:txBody>
+                    <a:bodyPr/>
+                    <a:lstStyle/>
+                    <a:p>
+                      <a:pPr algn="l" indent="0" marL="0">
+                        <a:buNone/>
+                      </a:pPr>
+                      <a:r>
+                        <a:rPr lang="en-US" sz="1400" dirty="0">
+                          <a:solidFill>
+                            <a:schemeClr val="tx1"/>
+                          </a:solidFill>
+                        </a:rPr>
+                        <a:t>자료 속 지시문 따르기</a:t>
+                      </a:r>
+                      <a:endParaRPr lang="en-US" sz="1400" dirty="0"/>
+                    </a:p>
+                  </a:txBody>
+                  <a:tcPr marL="73152" marR="73152" marT="36576" marB="36576" anchor="ctr">
+                    <a:lnL w="0" cap="flat" cmpd="sng" algn="ctr">
+                      <a:noFill/>
+                    </a:lnL>
+                    <a:lnR w="0" cap="flat" cmpd="sng" algn="ctr">
+                      <a:noFill/>
+                    </a:lnR>
+                    <a:lnT w="0" cap="flat" cmpd="sng" algn="ctr">
+                      <a:noFill/>
+                    </a:lnT>
+                    <a:lnB w="6350" cap="flat" cmpd="sng" algn="ctr">
+                      <a:solidFill>
+                        <a:srgbClr val="D9D9D9"/>
+                      </a:solidFill>
+                      <a:prstDash val="solid"/>
+                      <a:round/>
+                      <a:headEnd type="none" w="med" len="med"/>
+                      <a:tailEnd type="none" w="med" len="med"/>
+                    </a:lnB>
+                  </a:tcPr>
+                </a:tc>
+              </a:tr>
+              <a:tr h="411480">
+                <a:tc>
+                  <a:txBody>
+                    <a:bodyPr/>
+                    <a:lstStyle/>
+                    <a:p>
+                      <a:pPr algn="l" indent="0" marL="0">
+                        <a:buNone/>
+                      </a:pPr>
+                      <a:r>
+                        <a:rPr lang="en-US" sz="1400" dirty="0">
+                          <a:solidFill>
+                            <a:schemeClr val="tx1"/>
+                          </a:solidFill>
+                        </a:rPr>
+                        <a:t>운영자 말투</a:t>
+                      </a:r>
+                      <a:endParaRPr lang="en-US" sz="1400" dirty="0"/>
+                    </a:p>
+                  </a:txBody>
+                  <a:tcPr marL="73152" marR="73152" marT="36576" marB="36576" anchor="ctr">
+                    <a:lnL w="0" cap="flat" cmpd="sng" algn="ctr">
+                      <a:noFill/>
+                    </a:lnL>
+                    <a:lnR w="0" cap="flat" cmpd="sng" algn="ctr">
+                      <a:noFill/>
+                    </a:lnR>
+                    <a:lnT w="0" cap="flat" cmpd="sng" algn="ctr">
+                      <a:noFill/>
+                    </a:lnT>
+                    <a:lnB w="6350" cap="flat" cmpd="sng" algn="ctr">
+                      <a:solidFill>
+                        <a:srgbClr val="D9D9D9"/>
+                      </a:solidFill>
+                      <a:prstDash val="solid"/>
+                      <a:round/>
+                      <a:headEnd type="none" w="med" len="med"/>
+                      <a:tailEnd type="none" w="med" len="med"/>
+                    </a:lnB>
+                  </a:tcPr>
+                </a:tc>
+                <a:tc>
+                  <a:txBody>
+                    <a:bodyPr/>
+                    <a:lstStyle/>
+                    <a:p>
+                      <a:pPr algn="l" indent="0" marL="0">
+                        <a:buNone/>
+                      </a:pPr>
+                      <a:r>
+                        <a:rPr lang="en-US" sz="1400" dirty="0">
+                          <a:solidFill>
+                            <a:schemeClr val="tx1"/>
+                          </a:solidFill>
+                        </a:rPr>
+                        <a:t>p값 · 도구 이름 같은 내부 용어</a:t>
+                      </a:r>
+                      <a:endParaRPr lang="en-US" sz="1400" dirty="0"/>
+                    </a:p>
+                  </a:txBody>
+                  <a:tcPr marL="73152" marR="73152" marT="36576" marB="36576" anchor="ctr">
+                    <a:lnL w="0" cap="flat" cmpd="sng" algn="ctr">
+                      <a:noFill/>
+                    </a:lnL>
+                    <a:lnR w="0" cap="flat" cmpd="sng" algn="ctr">
+                      <a:noFill/>
+                    </a:lnR>
+                    <a:lnT w="0" cap="flat" cmpd="sng" algn="ctr">
+                      <a:noFill/>
+                    </a:lnT>
+                    <a:lnB w="6350" cap="flat" cmpd="sng" algn="ctr">
+                      <a:solidFill>
+                        <a:srgbClr val="D9D9D9"/>
+                      </a:solidFill>
+                      <a:prstDash val="solid"/>
+                      <a:round/>
+                      <a:headEnd type="none" w="med" len="med"/>
+                      <a:tailEnd type="none" w="med" len="med"/>
+                    </a:lnB>
+                  </a:tcPr>
+                </a:tc>
+              </a:tr>
+              <a:tr h="411480">
+                <a:tc>
+                  <a:txBody>
+                    <a:bodyPr/>
+                    <a:lstStyle/>
+                    <a:p>
+                      <a:pPr algn="l" indent="0" marL="0">
+                        <a:buNone/>
+                      </a:pPr>
+                      <a:r>
+                        <a:rPr lang="en-US" sz="1400" dirty="0">
+                          <a:solidFill>
+                            <a:schemeClr val="tx1"/>
+                          </a:solidFill>
+                        </a:rPr>
+                        <a:t>호출 등급</a:t>
                       </a:r>
                       <a:endParaRPr lang="en-US" sz="1400" dirty="0"/>
                     </a:p>
@@ -16520,7 +16886,7 @@
                             <a:schemeClr val="tx1"/>
                           </a:solidFill>
                         </a:rPr>
-                        <a:t>답의 등급 = 정책표 등급</a:t>
+                        <a:t>규칙표와 다른 등급 말하기</a:t>
                       </a:r>
                       <a:endParaRPr lang="en-US" sz="1400" dirty="0"/>
                     </a:p>
@@ -16608,7 +16974,7 @@
                   <a:schemeClr val="tx1"/>
                 </a:solidFill>
               </a:rPr>
-              <a:t>유형 2 ③ deterministic escalation과 평가</a:t>
+              <a:t>유형 2 ③ 사람을 부르는 규칙표</a:t>
             </a:r>
             <a:endParaRPr lang="en-US" sz="2400" dirty="0"/>
           </a:p>
@@ -16646,7 +17012,7 @@
                   <a:schemeClr val="tx1"/>
                 </a:solidFill>
               </a:rPr>
-              <a:t>호출 등급은 모델이 아니라 13개 규칙표가 정한다 — 모델은 등급을 바꿀 수 없음</a:t>
+              <a:t>누구를 언제 부를지는 AI가 아니라 13개 규칙이 정한다 — 같은 입력이면 항상 같은 등급</a:t>
             </a:r>
             <a:endParaRPr lang="en-US" sz="1400" dirty="0"/>
           </a:p>
@@ -16682,7 +17048,7 @@
                   <a:schemeClr val="tx1"/>
                 </a:solidFill>
               </a:rPr>
-              <a:t>규칙 13개 → 등급 4개 (위에서부터 처음 맞는 규칙)</a:t>
+              <a:t>4단계 호출 등급 (위에서부터 처음 맞는 규칙)</a:t>
             </a:r>
             <a:endParaRPr lang="en-US" sz="1600" dirty="0"/>
           </a:p>
@@ -16776,7 +17142,7 @@
                             <a:schemeClr val="tx1"/>
                           </a:solidFill>
                         </a:rPr>
-                        <a:t>대표 조건</a:t>
+                        <a:t>언제</a:t>
                       </a:r>
                       <a:endParaRPr lang="en-US" sz="1400" dirty="0"/>
                     </a:p>
@@ -16822,7 +17188,7 @@
                             <a:schemeClr val="tx1"/>
                           </a:solidFill>
                         </a:rPr>
-                        <a:t>재확인</a:t>
+                        <a:t>다시 확인</a:t>
                       </a:r>
                       <a:endParaRPr lang="en-US" sz="1400" dirty="0"/>
                     </a:p>
@@ -16910,7 +17276,7 @@
                             <a:schemeClr val="tx1"/>
                           </a:solidFill>
                         </a:rPr>
-                        <a:t>경보 + 높음 지속</a:t>
+                        <a:t>경보 + 센서 정상 + 높음 지속</a:t>
                       </a:r>
                       <a:endParaRPr lang="en-US" sz="1400" dirty="0"/>
                     </a:p>
@@ -17032,7 +17398,7 @@
                             <a:schemeClr val="tx1"/>
                           </a:solidFill>
                         </a:rPr>
-                        <a:t>센서 · 수집 의심, 운전 변화 겹침</a:t>
+                        <a:t>경보지만 센서 의심 · 운전 변화와 겹침</a:t>
                       </a:r>
                       <a:endParaRPr lang="en-US" sz="1400" dirty="0"/>
                     </a:p>
@@ -17154,7 +17520,7 @@
                             <a:schemeClr val="tx1"/>
                           </a:solidFill>
                         </a:rPr>
-                        <a:t>판단 보류, 운전변화 알림</a:t>
+                        <a:t>판단 보류, 운전변화 알림만</a:t>
                       </a:r>
                       <a:endParaRPr lang="en-US" sz="1400" dirty="0"/>
                     </a:p>
@@ -17355,8 +17721,8 @@
         </p:nvSpPr>
         <p:spPr>
           <a:xfrm>
-            <a:off x="457200" y="4526280"/>
-            <a:ext cx="6309360" cy="822960"/>
+            <a:off x="457200" y="4434840"/>
+            <a:ext cx="6309360" cy="1188720"/>
           </a:xfrm>
           <a:prstGeom prst="rect">
             <a:avLst/>
@@ -17380,7 +17746,7 @@
                   <a:schemeClr val="tx1"/>
                 </a:solidFill>
               </a:rPr>
-              <a:t>경보는 어떤 입력에서도 '담당자 호출' 아래로 내려가지 않음</a:t>
+              <a:t>'즉시 현장 확인 후보'도 정지 판단이 아님 (기록 · 보류 · 알림만)</a:t>
             </a:r>
             <a:endParaRPr lang="en-US" sz="1400" dirty="0"/>
           </a:p>
@@ -17392,12 +17758,29 @@
               <a:buNone/>
             </a:pPr>
             <a:r>
+              <a:rPr lang="en-US" sz="1400" dirty="0">
+                <a:solidFill>
+                  <a:schemeClr val="tx1"/>
+                </a:solidFill>
+              </a:rPr>
+              <a:t>경보는 어떤 입력에서도 '담당자 호출' 아래로 내려가지 않음</a:t>
+            </a:r>
+            <a:endParaRPr lang="en-US" sz="1400" dirty="0"/>
+          </a:p>
+          <a:p>
+            <a:pPr algn="l" indent="0" marL="0">
+              <a:spcAft>
+                <a:spcPts val="600"/>
+              </a:spcAft>
+              <a:buNone/>
+            </a:pPr>
+            <a:r>
               <a:rPr lang="en-US" sz="1600" b="1" dirty="0">
                 <a:solidFill>
                   <a:schemeClr val="tx1"/>
                 </a:solidFill>
               </a:rPr>
-              <a:t>입력 조합 10,206칸 전수 검사 → 일관성 위반 0</a:t>
+              <a:t>입력 조합 10,206개 전수 검사 → 위반 0</a:t>
             </a:r>
             <a:endParaRPr lang="en-US" sz="1400" dirty="0"/>
           </a:p>
@@ -17427,7 +17810,7 @@
         </p:nvSpPr>
         <p:spPr>
           <a:xfrm>
-            <a:off x="457200" y="5806440"/>
+            <a:off x="457200" y="5852160"/>
             <a:ext cx="11338560" cy="365760"/>
           </a:xfrm>
           <a:prstGeom prst="rect">
@@ -17449,7 +17832,7 @@
                   <a:schemeClr val="tx1"/>
                 </a:solidFill>
               </a:rPr>
-              <a:t>질문 20쌍(실제 재생 12 + 시뮬레이션 8) : 7개 기준 충족 99% → 98% (동등) · 평균 지연 28.9초 → 30.7초 · 설비 제어 지시 0건</a:t>
+              <a:t>질문 20쌍(실제 재생 12 + 시뮬레이션 8) : 7개 채점 기준 충족 99% → 98% (동등) · 설비 제어 지시 0건</a:t>
             </a:r>
             <a:endParaRPr lang="en-US" sz="1400" dirty="0"/>
           </a:p>
@@ -17512,7 +17895,7 @@
                   <a:schemeClr val="tx1"/>
                 </a:solidFill>
               </a:rPr>
-              <a:t>현장 적용 : 3단계 대응과 단계적 도입</a:t>
+              <a:t>현장 적용 : 누가 무엇을 하나</a:t>
             </a:r>
             <a:endParaRPr lang="en-US" sz="2400" dirty="0"/>
           </a:p>
@@ -17550,7 +17933,7 @@
                   <a:schemeClr val="tx1"/>
                 </a:solidFill>
               </a:rPr>
-              <a:t>읽기 전용 병행 운영으로 시작해, 현장 시험 기준을 통과하면 운영으로 전환</a:t>
+              <a:t>알림은 3단계 + 데이터 점검 — 읽기 전용 병행 운영으로 시작해 현장 시험을 통과하면 전환</a:t>
             </a:r>
             <a:endParaRPr lang="en-US" sz="1400" dirty="0"/>
           </a:p>
@@ -17565,7 +17948,7 @@
         <p:spPr>
           <a:xfrm>
             <a:off x="457200" y="1645920"/>
-            <a:ext cx="4937760" cy="365760"/>
+            <a:ext cx="5120640" cy="365760"/>
           </a:xfrm>
           <a:prstGeom prst="rect">
             <a:avLst/>
@@ -17586,7 +17969,7 @@
                   <a:schemeClr val="tx1"/>
                 </a:solidFill>
               </a:rPr>
-              <a:t>현장 대응 : 3단계 + 별도 데이터 점검</a:t>
+              <a:t>현장 알림과 담당자 조치</a:t>
             </a:r>
             <a:endParaRPr lang="en-US" sz="1600" dirty="0"/>
           </a:p>
@@ -17634,8 +18017,8 @@
         </p:nvSpPr>
         <p:spPr>
           <a:xfrm>
-            <a:off x="1143000" y="2194560"/>
-            <a:ext cx="1371600" cy="365760"/>
+            <a:off x="1188720" y="2048256"/>
+            <a:ext cx="4663440" cy="685800"/>
           </a:xfrm>
           <a:prstGeom prst="rect">
             <a:avLst/>
@@ -17648,6 +18031,9 @@
           <a:lstStyle/>
           <a:p>
             <a:pPr algn="l" indent="0" marL="0">
+              <a:spcAft>
+                <a:spcPts val="200"/>
+              </a:spcAft>
               <a:buNone/>
             </a:pPr>
             <a:r>
@@ -17656,57 +18042,52 @@
                   <a:schemeClr val="tx1"/>
                 </a:solidFill>
               </a:rPr>
-              <a:t>정상</a:t>
-            </a:r>
-            <a:endParaRPr lang="en-US" sz="1600" dirty="0"/>
+              <a:t>특이 없음</a:t>
+            </a:r>
+            <a:pPr algn="l" indent="0" marL="0">
+              <a:spcAft>
+                <a:spcPts val="200"/>
+              </a:spcAft>
+              <a:buNone/>
+            </a:pPr>
+            <a:r>
+              <a:rPr lang="en-US" sz="1300" dirty="0">
+                <a:solidFill>
+                  <a:schemeClr val="tx2"/>
+                </a:solidFill>
+              </a:rPr>
+              <a:t>  ← 정상</a:t>
+            </a:r>
+            <a:endParaRPr lang="en-US" sz="1400" dirty="0"/>
+          </a:p>
+          <a:p>
+            <a:pPr algn="l" indent="0" marL="0">
+              <a:spcAft>
+                <a:spcPts val="200"/>
+              </a:spcAft>
+              <a:buNone/>
+            </a:pPr>
+            <a:r>
+              <a:rPr lang="en-US" sz="1400" dirty="0">
+                <a:solidFill>
+                  <a:schemeClr val="tx1"/>
+                </a:solidFill>
+              </a:rPr>
+              <a:t>→ 주기 점검 유지</a:t>
+            </a:r>
+            <a:endParaRPr lang="en-US" sz="1400" dirty="0"/>
           </a:p>
         </p:txBody>
       </p:sp>
       <p:sp>
         <p:nvSpPr>
           <p:cNvPr id="8" name="Text 5"/>
-          <p:cNvSpPr txBox="1"/>
-          <p:nvPr/>
-        </p:nvSpPr>
-        <p:spPr>
-          <a:xfrm>
-            <a:off x="2514600" y="2194560"/>
-            <a:ext cx="3108960" cy="365760"/>
-          </a:xfrm>
-          <a:prstGeom prst="rect">
-            <a:avLst/>
-          </a:prstGeom>
-          <a:noFill/>
-          <a:ln/>
-        </p:spPr>
-        <p:txBody>
-          <a:bodyPr wrap="square" lIns="0" tIns="0" rIns="0" bIns="0" rtlCol="0" anchor="ctr"/>
-          <a:lstStyle/>
-          <a:p>
-            <a:pPr algn="l" indent="0" marL="0">
-              <a:buNone/>
-            </a:pPr>
-            <a:r>
-              <a:rPr lang="en-US" sz="1400" dirty="0">
-                <a:solidFill>
-                  <a:schemeClr val="tx1"/>
-                </a:solidFill>
-              </a:rPr>
-              <a:t>특이 없음</a:t>
-            </a:r>
-            <a:endParaRPr lang="en-US" sz="1400" dirty="0"/>
-          </a:p>
-        </p:txBody>
-      </p:sp>
-      <p:sp>
-        <p:nvSpPr>
-          <p:cNvPr id="9" name="Text 6"/>
           <p:cNvSpPr/>
           <p:nvPr/>
         </p:nvSpPr>
         <p:spPr>
           <a:xfrm>
-            <a:off x="480060" y="2903220"/>
+            <a:off x="480060" y="2994660"/>
             <a:ext cx="502920" cy="502920"/>
           </a:xfrm>
           <a:prstGeom prst="ellipse">
@@ -17734,85 +18115,83 @@
       </p:sp>
       <p:sp>
         <p:nvSpPr>
+          <p:cNvPr id="9" name="Text 6"/>
+          <p:cNvSpPr txBox="1"/>
+          <p:nvPr/>
+        </p:nvSpPr>
+        <p:spPr>
+          <a:xfrm>
+            <a:off x="1188720" y="2916936"/>
+            <a:ext cx="4663440" cy="685800"/>
+          </a:xfrm>
+          <a:prstGeom prst="rect">
+            <a:avLst/>
+          </a:prstGeom>
+          <a:noFill/>
+          <a:ln/>
+        </p:spPr>
+        <p:txBody>
+          <a:bodyPr wrap="square" lIns="0" tIns="0" rIns="0" bIns="0" rtlCol="0" anchor="ctr"/>
+          <a:lstStyle/>
+          <a:p>
+            <a:pPr algn="l" indent="0" marL="0">
+              <a:spcAft>
+                <a:spcPts val="200"/>
+              </a:spcAft>
+              <a:buNone/>
+            </a:pPr>
+            <a:r>
+              <a:rPr lang="en-US" sz="1600" b="1" dirty="0">
+                <a:solidFill>
+                  <a:schemeClr val="tx1"/>
+                </a:solidFill>
+              </a:rPr>
+              <a:t>관찰</a:t>
+            </a:r>
+            <a:pPr algn="l" indent="0" marL="0">
+              <a:spcAft>
+                <a:spcPts val="200"/>
+              </a:spcAft>
+              <a:buNone/>
+            </a:pPr>
+            <a:r>
+              <a:rPr lang="en-US" sz="1300" dirty="0">
+                <a:solidFill>
+                  <a:schemeClr val="tx2"/>
+                </a:solidFill>
+              </a:rPr>
+              <a:t>  ← 운전변화 알림 · 판단 보류</a:t>
+            </a:r>
+            <a:endParaRPr lang="en-US" sz="1400" dirty="0"/>
+          </a:p>
+          <a:p>
+            <a:pPr algn="l" indent="0" marL="0">
+              <a:spcAft>
+                <a:spcPts val="200"/>
+              </a:spcAft>
+              <a:buNone/>
+            </a:pPr>
+            <a:r>
+              <a:rPr lang="en-US" sz="1400" dirty="0">
+                <a:solidFill>
+                  <a:schemeClr val="tx1"/>
+                </a:solidFill>
+              </a:rPr>
+              <a:t>→ 운전원이 작업 기록과 대조해 피드백</a:t>
+            </a:r>
+            <a:endParaRPr lang="en-US" sz="1400" dirty="0"/>
+          </a:p>
+        </p:txBody>
+      </p:sp>
+      <p:sp>
+        <p:nvSpPr>
           <p:cNvPr id="10" name="Text 7"/>
-          <p:cNvSpPr txBox="1"/>
-          <p:nvPr/>
-        </p:nvSpPr>
-        <p:spPr>
-          <a:xfrm>
-            <a:off x="1143000" y="2971800"/>
-            <a:ext cx="1371600" cy="365760"/>
-          </a:xfrm>
-          <a:prstGeom prst="rect">
-            <a:avLst/>
-          </a:prstGeom>
-          <a:noFill/>
-          <a:ln/>
-        </p:spPr>
-        <p:txBody>
-          <a:bodyPr wrap="square" lIns="0" tIns="0" rIns="0" bIns="0" rtlCol="0" anchor="ctr"/>
-          <a:lstStyle/>
-          <a:p>
-            <a:pPr algn="l" indent="0" marL="0">
-              <a:buNone/>
-            </a:pPr>
-            <a:r>
-              <a:rPr lang="en-US" sz="1600" b="1" dirty="0">
-                <a:solidFill>
-                  <a:schemeClr val="tx1"/>
-                </a:solidFill>
-              </a:rPr>
-              <a:t>관찰</a:t>
-            </a:r>
-            <a:endParaRPr lang="en-US" sz="1600" dirty="0"/>
-          </a:p>
-        </p:txBody>
-      </p:sp>
-      <p:sp>
-        <p:nvSpPr>
-          <p:cNvPr id="11" name="Text 8"/>
-          <p:cNvSpPr txBox="1"/>
-          <p:nvPr/>
-        </p:nvSpPr>
-        <p:spPr>
-          <a:xfrm>
-            <a:off x="2514600" y="2971800"/>
-            <a:ext cx="3108960" cy="365760"/>
-          </a:xfrm>
-          <a:prstGeom prst="rect">
-            <a:avLst/>
-          </a:prstGeom>
-          <a:noFill/>
-          <a:ln/>
-        </p:spPr>
-        <p:txBody>
-          <a:bodyPr wrap="square" lIns="0" tIns="0" rIns="0" bIns="0" rtlCol="0" anchor="ctr"/>
-          <a:lstStyle/>
-          <a:p>
-            <a:pPr algn="l" indent="0" marL="0">
-              <a:buNone/>
-            </a:pPr>
-            <a:r>
-              <a:rPr lang="en-US" sz="1400" dirty="0">
-                <a:solidFill>
-                  <a:schemeClr val="tx1"/>
-                </a:solidFill>
-              </a:rPr>
-              <a:t>← 운전변화 알림 · 판단 보류</a:t>
-            </a:r>
-            <a:endParaRPr lang="en-US" sz="1400" dirty="0"/>
-          </a:p>
-        </p:txBody>
-      </p:sp>
-      <p:sp>
-        <p:nvSpPr>
-          <p:cNvPr id="12" name="Text 9"/>
           <p:cNvSpPr/>
           <p:nvPr/>
         </p:nvSpPr>
         <p:spPr>
           <a:xfrm>
-            <a:off x="480060" y="3680460"/>
+            <a:off x="480060" y="3863340"/>
             <a:ext cx="502920" cy="502920"/>
           </a:xfrm>
           <a:prstGeom prst="ellipse">
@@ -17840,14 +18219,14 @@
       </p:sp>
       <p:sp>
         <p:nvSpPr>
-          <p:cNvPr id="13" name="Text 10"/>
+          <p:cNvPr id="11" name="Text 8"/>
           <p:cNvSpPr txBox="1"/>
           <p:nvPr/>
         </p:nvSpPr>
         <p:spPr>
           <a:xfrm>
-            <a:off x="1143000" y="3749040"/>
-            <a:ext cx="1371600" cy="365760"/>
+            <a:off x="1188720" y="3785616"/>
+            <a:ext cx="4663440" cy="685800"/>
           </a:xfrm>
           <a:prstGeom prst="rect">
             <a:avLst/>
@@ -17860,6 +18239,9 @@
           <a:lstStyle/>
           <a:p>
             <a:pPr algn="l" indent="0" marL="0">
+              <a:spcAft>
+                <a:spcPts val="200"/>
+              </a:spcAft>
               <a:buNone/>
             </a:pPr>
             <a:r>
@@ -17870,32 +18252,27 @@
               </a:rPr>
               <a:t>점검 권고</a:t>
             </a:r>
-            <a:endParaRPr lang="en-US" sz="1600" dirty="0"/>
-          </a:p>
-        </p:txBody>
-      </p:sp>
-      <p:sp>
-        <p:nvSpPr>
-          <p:cNvPr id="14" name="Text 11"/>
-          <p:cNvSpPr txBox="1"/>
-          <p:nvPr/>
-        </p:nvSpPr>
-        <p:spPr>
-          <a:xfrm>
-            <a:off x="2514600" y="3749040"/>
-            <a:ext cx="3108960" cy="365760"/>
-          </a:xfrm>
-          <a:prstGeom prst="rect">
-            <a:avLst/>
-          </a:prstGeom>
-          <a:noFill/>
-          <a:ln/>
-        </p:spPr>
-        <p:txBody>
-          <a:bodyPr wrap="square" lIns="0" tIns="0" rIns="0" bIns="0" rtlCol="0" anchor="ctr"/>
-          <a:lstStyle/>
-          <a:p>
-            <a:pPr algn="l" indent="0" marL="0">
+            <a:pPr algn="l" indent="0" marL="0">
+              <a:spcAft>
+                <a:spcPts val="200"/>
+              </a:spcAft>
+              <a:buNone/>
+            </a:pPr>
+            <a:r>
+              <a:rPr lang="en-US" sz="1300" dirty="0">
+                <a:solidFill>
+                  <a:schemeClr val="tx2"/>
+                </a:solidFill>
+              </a:rPr>
+              <a:t>  ← 경보</a:t>
+            </a:r>
+            <a:endParaRPr lang="en-US" sz="1400" dirty="0"/>
+          </a:p>
+          <a:p>
+            <a:pPr algn="l" indent="0" marL="0">
+              <a:spcAft>
+                <a:spcPts val="200"/>
+              </a:spcAft>
               <a:buNone/>
             </a:pPr>
             <a:r>
@@ -17904,7 +18281,7 @@
                   <a:schemeClr val="tx1"/>
                 </a:solidFill>
               </a:rPr>
-              <a:t>← 경보</a:t>
+              <a:t>→ 정비 담당이 근거 확인 후 점검</a:t>
             </a:r>
             <a:endParaRPr lang="en-US" sz="1400" dirty="0"/>
           </a:p>
@@ -17912,13 +18289,13 @@
       </p:sp>
       <p:sp>
         <p:nvSpPr>
-          <p:cNvPr id="15" name="Text 12"/>
+          <p:cNvPr id="12" name="Text 9"/>
           <p:cNvSpPr/>
           <p:nvPr/>
         </p:nvSpPr>
         <p:spPr>
           <a:xfrm>
-            <a:off x="480060" y="4457700"/>
+            <a:off x="480060" y="4732020"/>
             <a:ext cx="502920" cy="502920"/>
           </a:xfrm>
           <a:prstGeom prst="ellipse">
@@ -17946,14 +18323,14 @@
       </p:sp>
       <p:sp>
         <p:nvSpPr>
-          <p:cNvPr id="16" name="Text 13"/>
+          <p:cNvPr id="13" name="Text 10"/>
           <p:cNvSpPr txBox="1"/>
           <p:nvPr/>
         </p:nvSpPr>
         <p:spPr>
           <a:xfrm>
-            <a:off x="1143000" y="4526280"/>
-            <a:ext cx="1371600" cy="365760"/>
+            <a:off x="1188720" y="4654296"/>
+            <a:ext cx="4663440" cy="685800"/>
           </a:xfrm>
           <a:prstGeom prst="rect">
             <a:avLst/>
@@ -17966,6 +18343,9 @@
           <a:lstStyle/>
           <a:p>
             <a:pPr algn="l" indent="0" marL="0">
+              <a:spcAft>
+                <a:spcPts val="200"/>
+              </a:spcAft>
               <a:buNone/>
             </a:pPr>
             <a:r>
@@ -17976,20 +18356,51 @@
               </a:rPr>
               <a:t>데이터 점검</a:t>
             </a:r>
-            <a:endParaRPr lang="en-US" sz="1600" dirty="0"/>
-          </a:p>
-        </p:txBody>
-      </p:sp>
-      <p:sp>
-        <p:nvSpPr>
-          <p:cNvPr id="17" name="Text 14"/>
+            <a:pPr algn="l" indent="0" marL="0">
+              <a:spcAft>
+                <a:spcPts val="200"/>
+              </a:spcAft>
+              <a:buNone/>
+            </a:pPr>
+            <a:r>
+              <a:rPr lang="en-US" sz="1300" dirty="0">
+                <a:solidFill>
+                  <a:schemeClr val="tx2"/>
+                </a:solidFill>
+              </a:rPr>
+              <a:t>  ← 센서 점검 알림</a:t>
+            </a:r>
+            <a:endParaRPr lang="en-US" sz="1400" dirty="0"/>
+          </a:p>
+          <a:p>
+            <a:pPr algn="l" indent="0" marL="0">
+              <a:spcAft>
+                <a:spcPts val="200"/>
+              </a:spcAft>
+              <a:buNone/>
+            </a:pPr>
+            <a:r>
+              <a:rPr lang="en-US" sz="1400" dirty="0">
+                <a:solidFill>
+                  <a:schemeClr val="tx1"/>
+                </a:solidFill>
+              </a:rPr>
+              <a:t>→ 계측 담당이 센서 · 케이블 · 수집 장치 확인</a:t>
+            </a:r>
+            <a:endParaRPr lang="en-US" sz="1400" dirty="0"/>
+          </a:p>
+        </p:txBody>
+      </p:sp>
+      <p:sp>
+        <p:nvSpPr>
+          <p:cNvPr id="14" name="Text 11"/>
           <p:cNvSpPr txBox="1"/>
           <p:nvPr/>
         </p:nvSpPr>
         <p:spPr>
           <a:xfrm>
-            <a:off x="2514600" y="4526280"/>
-            <a:ext cx="3108960" cy="365760"/>
+            <a:off x="457200" y="5669280"/>
+            <a:ext cx="5303520" cy="594360"/>
           </a:xfrm>
           <a:prstGeom prst="rect">
             <a:avLst/>
@@ -17998,63 +18409,47 @@
           <a:ln/>
         </p:spPr>
         <p:txBody>
-          <a:bodyPr wrap="square" lIns="0" tIns="0" rIns="0" bIns="0" rtlCol="0" anchor="ctr"/>
-          <a:lstStyle/>
-          <a:p>
-            <a:pPr algn="l" indent="0" marL="0">
-              <a:buNone/>
-            </a:pPr>
-            <a:r>
-              <a:rPr lang="en-US" sz="1400" dirty="0">
-                <a:solidFill>
-                  <a:schemeClr val="tx1"/>
-                </a:solidFill>
-              </a:rPr>
-              <a:t>← 센서 점검 알림 (별도 경로)</a:t>
-            </a:r>
-            <a:endParaRPr lang="en-US" sz="1400" dirty="0"/>
-          </a:p>
-        </p:txBody>
-      </p:sp>
-      <p:sp>
-        <p:nvSpPr>
-          <p:cNvPr id="18" name="Text 15"/>
-          <p:cNvSpPr txBox="1"/>
-          <p:nvPr/>
-        </p:nvSpPr>
-        <p:spPr>
-          <a:xfrm>
-            <a:off x="457200" y="5486400"/>
-            <a:ext cx="5120640" cy="640080"/>
-          </a:xfrm>
-          <a:prstGeom prst="rect">
-            <a:avLst/>
-          </a:prstGeom>
-          <a:noFill/>
-          <a:ln/>
-        </p:spPr>
-        <p:txBody>
           <a:bodyPr wrap="square" lIns="0" tIns="0" rIns="0" bIns="0" rtlCol="0" anchor="t"/>
           <a:lstStyle/>
           <a:p>
             <a:pPr algn="l" indent="0" marL="0">
-              <a:buNone/>
-            </a:pPr>
-            <a:r>
-              <a:rPr lang="en-US" sz="1400" dirty="0">
-                <a:solidFill>
-                  <a:schemeClr val="tx1"/>
-                </a:solidFill>
-              </a:rPr>
-              <a:t>설비로 쓰는 경로 없음 · 13개 호출 규칙은 10,206개 입력 조합에서 위반 0</a:t>
-            </a:r>
-            <a:endParaRPr lang="en-US" sz="1400" dirty="0"/>
-          </a:p>
-        </p:txBody>
-      </p:sp>
-      <p:sp>
-        <p:nvSpPr>
-          <p:cNvPr id="19" name="Text 16"/>
+              <a:spcAft>
+                <a:spcPts val="200"/>
+              </a:spcAft>
+              <a:buNone/>
+            </a:pPr>
+            <a:r>
+              <a:rPr lang="en-US" sz="1300" dirty="0">
+                <a:solidFill>
+                  <a:schemeClr val="tx1"/>
+                </a:solidFill>
+              </a:rPr>
+              <a:t>설비와는 읽기 전용으로만 연동</a:t>
+            </a:r>
+            <a:endParaRPr lang="en-US" sz="1300" dirty="0"/>
+          </a:p>
+          <a:p>
+            <a:pPr algn="l" indent="0" marL="0">
+              <a:spcAft>
+                <a:spcPts val="200"/>
+              </a:spcAft>
+              <a:buNone/>
+            </a:pPr>
+            <a:r>
+              <a:rPr lang="en-US" sz="1300" dirty="0">
+                <a:solidFill>
+                  <a:schemeClr val="tx1"/>
+                </a:solidFill>
+              </a:rPr>
+              <a:t>호출 규칙 13개, 10,206개 조합에서 위반 0</a:t>
+            </a:r>
+            <a:endParaRPr lang="en-US" sz="1300" dirty="0"/>
+          </a:p>
+        </p:txBody>
+      </p:sp>
+      <p:sp>
+        <p:nvSpPr>
+          <p:cNvPr id="15" name="Text 12"/>
           <p:cNvSpPr txBox="1"/>
           <p:nvPr/>
         </p:nvSpPr>
@@ -18090,7 +18485,7 @@
       </p:sp>
       <p:sp>
         <p:nvSpPr>
-          <p:cNvPr id="20" name="Shape 17"/>
+          <p:cNvPr id="16" name="Shape 13"/>
           <p:cNvSpPr/>
           <p:nvPr/>
         </p:nvSpPr>
@@ -18113,7 +18508,7 @@
       </p:sp>
       <p:sp>
         <p:nvSpPr>
-          <p:cNvPr id="21" name="Text 18"/>
+          <p:cNvPr id="17" name="Text 14"/>
           <p:cNvSpPr/>
           <p:nvPr/>
         </p:nvSpPr>
@@ -18155,7 +18550,7 @@
       </p:sp>
       <p:sp>
         <p:nvSpPr>
-          <p:cNvPr id="22" name="Text 19"/>
+          <p:cNvPr id="18" name="Text 15"/>
           <p:cNvSpPr txBox="1"/>
           <p:nvPr/>
         </p:nvSpPr>
@@ -18197,7 +18592,7 @@
                   <a:schemeClr val="tx1"/>
                 </a:solidFill>
               </a:rPr>
-              <a:t>진동 채널 매핑 확인 · 전류 0 확인</a:t>
+              <a:t>진동 채널(AI0/AI1) 매핑 · 전류 0 확인</a:t>
             </a:r>
             <a:endParaRPr lang="en-US" sz="1400" dirty="0"/>
           </a:p>
@@ -18205,7 +18600,7 @@
       </p:sp>
       <p:sp>
         <p:nvSpPr>
-          <p:cNvPr id="23" name="Text 20"/>
+          <p:cNvPr id="19" name="Text 16"/>
           <p:cNvSpPr/>
           <p:nvPr/>
         </p:nvSpPr>
@@ -18247,7 +18642,7 @@
       </p:sp>
       <p:sp>
         <p:nvSpPr>
-          <p:cNvPr id="24" name="Text 21"/>
+          <p:cNvPr id="20" name="Text 17"/>
           <p:cNvSpPr txBox="1"/>
           <p:nvPr/>
         </p:nvSpPr>
@@ -18297,7 +18692,7 @@
       </p:sp>
       <p:sp>
         <p:nvSpPr>
-          <p:cNvPr id="25" name="Text 22"/>
+          <p:cNvPr id="21" name="Text 18"/>
           <p:cNvSpPr/>
           <p:nvPr/>
         </p:nvSpPr>
@@ -18339,7 +18734,7 @@
       </p:sp>
       <p:sp>
         <p:nvSpPr>
-          <p:cNvPr id="26" name="Text 23"/>
+          <p:cNvPr id="22" name="Text 19"/>
           <p:cNvSpPr txBox="1"/>
           <p:nvPr/>
         </p:nvSpPr>
@@ -18381,7 +18776,7 @@
                   <a:schemeClr val="tx1"/>
                 </a:solidFill>
               </a:rPr>
-              <a:t>동결한 구성으로 시험 준비</a:t>
+              <a:t>시험 중에는 바꾸지 않음</a:t>
             </a:r>
             <a:endParaRPr lang="en-US" sz="1400" dirty="0"/>
           </a:p>
@@ -18389,7 +18784,7 @@
       </p:sp>
       <p:sp>
         <p:nvSpPr>
-          <p:cNvPr id="27" name="Text 24"/>
+          <p:cNvPr id="23" name="Text 20"/>
           <p:cNvSpPr/>
           <p:nvPr/>
         </p:nvSpPr>
@@ -18431,7 +18826,7 @@
       </p:sp>
       <p:sp>
         <p:nvSpPr>
-          <p:cNvPr id="28" name="Text 25"/>
+          <p:cNvPr id="24" name="Text 21"/>
           <p:cNvSpPr txBox="1"/>
           <p:nvPr/>
         </p:nvSpPr>
@@ -18473,7 +18868,7 @@
                   <a:schemeClr val="tx1"/>
                 </a:solidFill>
               </a:rPr>
-              <a:t>정상 오경보 95% 신뢰구간 상한 ≤ 1%, ≤ 6건/시간</a:t>
+              <a:t>정상 오경보 95% 상한 ≤ 1%, 경보 ≤ 6건/시간</a:t>
             </a:r>
             <a:endParaRPr lang="en-US" sz="1400" dirty="0"/>
           </a:p>
@@ -18481,7 +18876,7 @@
       </p:sp>
       <p:sp>
         <p:nvSpPr>
-          <p:cNvPr id="29" name="Text 26"/>
+          <p:cNvPr id="25" name="Text 22"/>
           <p:cNvSpPr/>
           <p:nvPr/>
         </p:nvSpPr>
@@ -18523,7 +18918,7 @@
       </p:sp>
       <p:sp>
         <p:nvSpPr>
-          <p:cNvPr id="30" name="Text 27"/>
+          <p:cNvPr id="26" name="Text 23"/>
           <p:cNvSpPr txBox="1"/>
           <p:nvPr/>
         </p:nvSpPr>
@@ -18565,7 +18960,7 @@
                   <a:schemeClr val="tx1"/>
                 </a:solidFill>
               </a:rPr>
-              <a:t>기준 통과 후 전환</a:t>
+              <a:t>기준을 통과하면 전환</a:t>
             </a:r>
             <a:endParaRPr lang="en-US" sz="1400" dirty="0"/>
           </a:p>
@@ -18666,7 +19061,7 @@
                   <a:schemeClr val="tx1"/>
                 </a:solidFill>
               </a:rPr>
-              <a:t>심사 시 현장 시연 — 실제 시뮬레이션 화면</a:t>
+              <a:t>심사 때 현장에서 실제 시뮬레이션 화면으로 시연</a:t>
             </a:r>
             <a:endParaRPr lang="en-US" sz="1400" dirty="0"/>
           </a:p>
@@ -18943,7 +19338,7 @@
         <p:spPr>
           <a:xfrm>
             <a:off x="1188720" y="2057400"/>
-            <a:ext cx="5760720" cy="685800"/>
+            <a:ext cx="5943600" cy="685800"/>
           </a:xfrm>
           <a:prstGeom prst="rect">
             <a:avLst/>
@@ -18964,7 +19359,7 @@
                   <a:schemeClr val="tx1"/>
                 </a:solidFill>
               </a:rPr>
-              <a:t>같은 부하 정상 대비 판정</a:t>
+              <a:t>부하를 알고 비교한다</a:t>
             </a:r>
             <a:endParaRPr lang="en-US" sz="1400" dirty="0"/>
           </a:p>
@@ -18978,7 +19373,7 @@
                   <a:schemeClr val="tx1"/>
                 </a:solidFill>
               </a:rPr>
-              <a:t>처음 보는 정상 운전상태 오표시 55.5% → 8.6%</a:t>
+              <a:t>처음 보는 정상 운전 오인 55.5% → 8.6%</a:t>
             </a:r>
             <a:endParaRPr lang="en-US" sz="1400" dirty="0"/>
           </a:p>
@@ -19035,7 +19430,7 @@
         <p:spPr>
           <a:xfrm>
             <a:off x="1188720" y="2926080"/>
-            <a:ext cx="5760720" cy="685800"/>
+            <a:ext cx="5943600" cy="685800"/>
           </a:xfrm>
           <a:prstGeom prst="rect">
             <a:avLst/>
@@ -19056,7 +19451,7 @@
                   <a:schemeClr val="tx1"/>
                 </a:solidFill>
               </a:rPr>
-              <a:t>하나의 경보 예산, 5가지 상태</a:t>
+              <a:t>경보는 적게, 상태는 자세히</a:t>
             </a:r>
             <a:endParaRPr lang="en-US" sz="1400" dirty="0"/>
           </a:p>
@@ -19127,7 +19522,7 @@
         <p:spPr>
           <a:xfrm>
             <a:off x="1188720" y="3794760"/>
-            <a:ext cx="5760720" cy="685800"/>
+            <a:ext cx="5943600" cy="685800"/>
           </a:xfrm>
           <a:prstGeom prst="rect">
             <a:avLst/>
@@ -19148,7 +19543,7 @@
                   <a:schemeClr val="tx1"/>
                 </a:solidFill>
               </a:rPr>
-              <a:t>고장 증거를 지키는 교정 루프</a:t>
+              <a:t>고장은 지우지 않는 교정</a:t>
             </a:r>
             <a:endParaRPr lang="en-US" sz="1400" dirty="0"/>
           </a:p>
@@ -19162,7 +19557,7 @@
                   <a:schemeClr val="tx1"/>
                 </a:solidFill>
               </a:rPr>
-              <a:t>정상 알림 92.3% → 64.6%, 고장 섞인 조건 11/16 기각</a:t>
+              <a:t>운전변화 알림 92.3% → 64.6%, 고장 섞인 교정 11/16 거절</a:t>
             </a:r>
             <a:endParaRPr lang="en-US" sz="1400" dirty="0"/>
           </a:p>
@@ -19219,7 +19614,7 @@
         <p:spPr>
           <a:xfrm>
             <a:off x="1188720" y="4663440"/>
-            <a:ext cx="5760720" cy="685800"/>
+            <a:ext cx="5943600" cy="685800"/>
           </a:xfrm>
           <a:prstGeom prst="rect">
             <a:avLst/>
@@ -19240,7 +19635,7 @@
                   <a:schemeClr val="tx1"/>
                 </a:solidFill>
               </a:rPr>
-              <a:t>근거 설명 + 호출 규칙표</a:t>
+              <a:t>AI는 설명만, 호출은 규칙표</a:t>
             </a:r>
             <a:endParaRPr lang="en-US" sz="1400" dirty="0"/>
           </a:p>
@@ -19254,7 +19649,7 @@
                   <a:schemeClr val="tx1"/>
                 </a:solidFill>
               </a:rPr>
-              <a:t>citation compliance 11% → 100%, 위반 0</a:t>
+              <a:t>근거 인용 11% → 100%, 규칙표 위반 0</a:t>
             </a:r>
             <a:endParaRPr lang="en-US" sz="1400" dirty="0"/>
           </a:p>
@@ -19332,7 +19727,7 @@
                   <a:schemeClr val="tx1"/>
                 </a:solidFill>
               </a:rPr>
-              <a:t>현장 정상 데이터 재보정</a:t>
+              <a:t>현장 정상 데이터로 재보정</a:t>
             </a:r>
             <a:endParaRPr lang="en-US" sz="1500" dirty="0"/>
           </a:p>
@@ -19398,7 +19793,7 @@
                   <a:schemeClr val="tx1"/>
                 </a:solidFill>
               </a:rPr>
-              <a:t>현장 시험</a:t>
+              <a:t>다른 날짜 현장 시험</a:t>
             </a:r>
             <a:endParaRPr lang="en-US" sz="1500" dirty="0"/>
           </a:p>
@@ -19511,7 +19906,7 @@
                   <a:schemeClr val="tx1"/>
                 </a:solidFill>
               </a:rPr>
-              <a:t>F1 0.915 · 재현율 0.993 · 이상 구간 5/5 · 정상 오경보 24 / 4,090행</a:t>
+              <a:t>이상 구간 5/5 · 재현율 0.993 · F1 0.915 · 정상 행 오경보 0.6%</a:t>
             </a:r>
             <a:endParaRPr lang="en-US" sz="1400" dirty="0"/>
           </a:p>
@@ -19714,7 +20109,7 @@
                   <a:schemeClr val="tx1"/>
                 </a:solidFill>
               </a:rPr>
-              <a:t>판정부터 설명 · 교정까지 네 가지 기여가 하나의 파이프라인으로 이어짐</a:t>
+              <a:t>부하를 읽고 → 같은 부하의 정상과 비교해 판정하고 → 근거로 설명하고 → 작업자 확인으로 교정한다</a:t>
             </a:r>
             <a:endParaRPr lang="en-US" sz="1400" dirty="0"/>
           </a:p>
@@ -19864,7 +20259,7 @@
                   <a:schemeClr val="tx1"/>
                 </a:solidFill>
               </a:rPr>
-              <a:t>같은 부하 정상 대비 판정</a:t>
+              <a:t>부하를 알고 비교한다</a:t>
             </a:r>
             <a:endParaRPr lang="en-US" sz="1600" dirty="0"/>
           </a:p>
@@ -19939,7 +20334,7 @@
                   <a:schemeClr val="tx1"/>
                 </a:solidFill>
               </a:rPr>
-              <a:t>처음 보는 정상 운전상태 오표시율</a:t>
+              <a:t>처음 보는 정상 운전을 이상으로 오인</a:t>
             </a:r>
             <a:endParaRPr lang="en-US" sz="1300" dirty="0"/>
           </a:p>
@@ -19956,7 +20351,7 @@
                   <a:schemeClr val="tx1"/>
                 </a:solidFill>
               </a:rPr>
-              <a:t>외부 시험대 오경보 19.0% → 10.4%</a:t>
+              <a:t>외부 시험대 오경보 19.0→10.4%</a:t>
             </a:r>
             <a:endParaRPr lang="en-US" sz="1300" dirty="0"/>
           </a:p>
@@ -20034,7 +20429,7 @@
                   <a:schemeClr val="tx1"/>
                 </a:solidFill>
               </a:rPr>
-              <a:t>하나의 경보 예산, 5가지 상태</a:t>
+              <a:t>경보는 적게, 상태는 자세히</a:t>
             </a:r>
             <a:endParaRPr lang="en-US" sz="1600" dirty="0"/>
           </a:p>
@@ -20109,7 +20504,7 @@
                   <a:schemeClr val="tx1"/>
                 </a:solidFill>
               </a:rPr>
-              <a:t>경보 부담, 10개 방법 중 최소</a:t>
+              <a:t>10개 방법 중 가장 적은 경보</a:t>
             </a:r>
             <a:endParaRPr lang="en-US" sz="1300" dirty="0"/>
           </a:p>
@@ -20126,7 +20521,7 @@
                   <a:schemeClr val="tx1"/>
                 </a:solidFill>
               </a:rPr>
-              <a:t>정상 오경보 1.14% / 1.35%</a:t>
+              <a:t>5가지 상태로 나눠 알림</a:t>
             </a:r>
             <a:endParaRPr lang="en-US" sz="1300" dirty="0"/>
           </a:p>
@@ -20204,7 +20599,7 @@
                   <a:schemeClr val="tx1"/>
                 </a:solidFill>
               </a:rPr>
-              <a:t>고장 증거를 지키는 교정 루프</a:t>
+              <a:t>고장은 지우지 않는 교정</a:t>
             </a:r>
             <a:endParaRPr lang="en-US" sz="1600" dirty="0"/>
           </a:p>
@@ -20279,7 +20674,7 @@
                   <a:schemeClr val="tx1"/>
                 </a:solidFill>
               </a:rPr>
-              <a:t>semi-synthetic 정상 알림 비율</a:t>
+              <a:t>작업자 확인 후 운전변화 알림</a:t>
             </a:r>
             <a:endParaRPr lang="en-US" sz="1300" dirty="0"/>
           </a:p>
@@ -20296,7 +20691,7 @@
                   <a:schemeClr val="tx1"/>
                 </a:solidFill>
               </a:rPr>
-              <a:t>고장 섞인 조건 16개 중 11개 기각</a:t>
+              <a:t>고장 섞인 교정 11/16건 거절</a:t>
             </a:r>
             <a:endParaRPr lang="en-US" sz="1300" dirty="0"/>
           </a:p>
@@ -20374,7 +20769,7 @@
                   <a:schemeClr val="tx1"/>
                 </a:solidFill>
               </a:rPr>
-              <a:t>근거 설명 + 호출 규칙표</a:t>
+              <a:t>AI는 설명만, 호출은 규칙표</a:t>
             </a:r>
             <a:endParaRPr lang="en-US" sz="1600" dirty="0"/>
           </a:p>
@@ -20410,7 +20805,7 @@
                   <a:schemeClr val="tx1"/>
                 </a:solidFill>
               </a:rPr>
-              <a:t>205 · 320 · 76</a:t>
+              <a:t>11% → 100%</a:t>
             </a:r>
             <a:endParaRPr lang="en-US" sz="2400" dirty="0"/>
           </a:p>
@@ -20449,7 +20844,7 @@
                   <a:schemeClr val="tx1"/>
                 </a:solidFill>
               </a:rPr>
-              <a:t>지식그래프 노드 · 연결 · 출처</a:t>
+              <a:t>답변의 근거 인용률</a:t>
             </a:r>
             <a:endParaRPr lang="en-US" sz="1300" dirty="0"/>
           </a:p>
@@ -20466,7 +20861,7 @@
                   <a:schemeClr val="tx1"/>
                 </a:solidFill>
               </a:rPr>
-              <a:t>호출 규칙 13개, 조합 10,206개 위반 0</a:t>
+              <a:t>규칙표 10,206개 조합 위반 0</a:t>
             </a:r>
             <a:endParaRPr lang="en-US" sz="1300" dirty="0"/>
           </a:p>
@@ -20505,7 +20900,7 @@
                   <a:schemeClr val="tx1"/>
                 </a:solidFill>
               </a:rPr>
-              <a:t>최종 결합(A+B), 공식 라벨 시간순 최종 분할</a:t>
+              <a:t>최종 결합(A+B), 공식 라벨 시간순 평가</a:t>
             </a:r>
             <a:endParaRPr lang="en-US" sz="1400" dirty="0"/>
           </a:p>
@@ -20522,7 +20917,7 @@
                   <a:schemeClr val="tx1"/>
                 </a:solidFill>
               </a:rPr>
-              <a:t>F1 0.915 · 재현율 0.993 · 이상 구간 5/5 · 정상 오경보 24 / 4,090행 (한 구간)</a:t>
+              <a:t>이상 구간 5개 모두 탐지 · 재현율 0.993 · F1 0.915 · 정상 행 오경보 0.6% (24 / 4,090행, 한 구간)</a:t>
             </a:r>
             <a:endParaRPr lang="en-US" sz="1400" dirty="0"/>
           </a:p>
@@ -20623,7 +21018,7 @@
                   <a:schemeClr val="tx1"/>
                 </a:solidFill>
               </a:rPr>
-              <a:t>정상 부하 변화와 이상을 구분하지 못하면 오경보가 쌓이고, 경보는 신뢰를 잃는다</a:t>
+              <a:t>프레스가 무거운 일을 하면 진동도 커진다 — 고정 기준은 이 정상 변화를 이상으로 착각한다</a:t>
             </a:r>
             <a:endParaRPr lang="en-US" sz="1400" dirty="0"/>
           </a:p>
@@ -20872,7 +21267,7 @@
                   <a:schemeClr val="tx1"/>
                 </a:solidFill>
               </a:rPr>
-              <a:t>현재 대응 : </a:t>
+              <a:t>지금의 감시 : </a:t>
             </a:r>
             <a:pPr algn="l" indent="0" marL="0">
               <a:spcAft>
@@ -20886,7 +21281,7 @@
                   <a:schemeClr val="tx1"/>
                 </a:solidFill>
               </a:rPr>
-              <a:t>주기 점검과 작업자 노하우(내재화된 지식)에 의존</a:t>
+              <a:t>주기 점검과 작업자 경험(노하우)에 의존</a:t>
             </a:r>
             <a:endParaRPr lang="en-US" sz="1400" dirty="0"/>
           </a:p>
@@ -20903,7 +21298,7 @@
                   <a:schemeClr val="tx1"/>
                 </a:solidFill>
               </a:rPr>
-              <a:t>구분의 어려움 : </a:t>
+              <a:t>어려운 점 : </a:t>
             </a:r>
             <a:pPr algn="l" indent="0" marL="0">
               <a:spcAft>
@@ -20917,7 +21312,7 @@
                   <a:schemeClr val="tx1"/>
                 </a:solidFill>
               </a:rPr>
-              <a:t>약한 진동 변화가 정상 운전 변화와 겹침</a:t>
+              <a:t>약한 이상 진동이 정상적인 부하 변화에 묻힘</a:t>
             </a:r>
             <a:endParaRPr lang="en-US" sz="1400" dirty="0"/>
           </a:p>
@@ -20934,7 +21329,7 @@
                   <a:schemeClr val="tx1"/>
                 </a:solidFill>
               </a:rPr>
-              <a:t>오경보 불신 : </a:t>
+              <a:t>결과 : </a:t>
             </a:r>
             <a:pPr algn="l" indent="0" marL="0">
               <a:spcAft>
@@ -20948,7 +21343,7 @@
                   <a:schemeClr val="tx1"/>
                 </a:solidFill>
               </a:rPr>
-              <a:t>정상 운전 변화를 이상으로 오인 → 경보를 믿지 않게 됨</a:t>
+              <a:t>오경보가 반복되면 작업자가 경보를 믿지 않게 됨</a:t>
             </a:r>
             <a:endParaRPr lang="en-US" sz="1400" dirty="0"/>
           </a:p>
@@ -20999,7 +21394,7 @@
         <p:spPr>
           <a:xfrm>
             <a:off x="7863840" y="2651760"/>
-            <a:ext cx="3931920" cy="320040"/>
+            <a:ext cx="3931920" cy="548640"/>
           </a:xfrm>
           <a:prstGeom prst="rect">
             <a:avLst/>
@@ -21020,7 +21415,7 @@
                   <a:schemeClr val="tx1"/>
                 </a:solidFill>
               </a:rPr>
-              <a:t>고정 기준 : 최고 부하 구간 정상 창 중 경보 비율</a:t>
+              <a:t>고정 기준 : 가장 무거운 부하에서 정상인데 경보가 난 비율</a:t>
             </a:r>
             <a:endParaRPr lang="en-US" sz="1400" dirty="0"/>
           </a:p>
@@ -21034,7 +21429,7 @@
         </p:nvSpPr>
         <p:spPr>
           <a:xfrm>
-            <a:off x="7863840" y="3154680"/>
+            <a:off x="7863840" y="3337560"/>
             <a:ext cx="3931920" cy="548640"/>
           </a:xfrm>
           <a:prstGeom prst="rect">
@@ -21070,7 +21465,7 @@
         </p:nvSpPr>
         <p:spPr>
           <a:xfrm>
-            <a:off x="7863840" y="3749040"/>
+            <a:off x="7863840" y="3931920"/>
             <a:ext cx="3931920" cy="320040"/>
           </a:xfrm>
           <a:prstGeom prst="rect">
@@ -21092,7 +21487,7 @@
                   <a:schemeClr val="tx1"/>
                 </a:solidFill>
               </a:rPr>
-              <a:t>부하를 반영한 기준</a:t>
+              <a:t>부하를 반영한 기준이면</a:t>
             </a:r>
             <a:endParaRPr lang="en-US" sz="1400" dirty="0"/>
           </a:p>
@@ -21181,7 +21576,7 @@
                   <a:schemeClr val="tx1"/>
                 </a:solidFill>
               </a:rPr>
-              <a:t>이상을 놓치지 않고 감지할 것</a:t>
+              <a:t>진짜 이상은 놓치지 않는다</a:t>
             </a:r>
             <a:endParaRPr lang="en-US" sz="1400" dirty="0"/>
           </a:p>
@@ -21212,7 +21607,7 @@
                   <a:schemeClr val="tx1"/>
                 </a:solidFill>
               </a:rPr>
-              <a:t>정상 부하 변화를 이상으로 착각하지 않을 것</a:t>
+              <a:t>부하 변화는 이상으로 착각하지 않는다</a:t>
             </a:r>
             <a:endParaRPr lang="en-US" sz="1400" dirty="0"/>
           </a:p>
@@ -21275,7 +21670,7 @@
                   <a:schemeClr val="tx1"/>
                 </a:solidFill>
               </a:rPr>
-              <a:t>데이터 진단 ① 신호 특성</a:t>
+              <a:t>데이터 진단 ① 신호 들여다보기</a:t>
             </a:r>
             <a:endParaRPr lang="en-US" sz="2400" dirty="0"/>
           </a:p>
@@ -21313,7 +21708,7 @@
                   <a:schemeClr val="tx1"/>
                 </a:solidFill>
               </a:rPr>
-              <a:t>정상 전류는 매끈한 정현파, 이상은 모양이 깨지고 두 분포가 분리됨</a:t>
+              <a:t>정상 전류는 매끈한 사인파 — 이상은 파형 모양이 깨진다</a:t>
             </a:r>
             <a:endParaRPr lang="en-US" sz="1400" dirty="0"/>
           </a:p>
@@ -21335,8 +21730,8 @@
         </p:blipFill>
         <p:spPr>
           <a:xfrm>
-            <a:off x="365760" y="1600200"/>
-            <a:ext cx="11430000" cy="3780692"/>
+            <a:off x="594360" y="1554480"/>
+            <a:ext cx="10972800" cy="3629465"/>
           </a:xfrm>
           <a:prstGeom prst="rect">
             <a:avLst/>
@@ -21351,8 +21746,8 @@
         </p:nvSpPr>
         <p:spPr>
           <a:xfrm>
-            <a:off x="365760" y="5440680"/>
-            <a:ext cx="11430000" cy="320040"/>
+            <a:off x="594360" y="5230368"/>
+            <a:ext cx="10972800" cy="274320"/>
           </a:xfrm>
           <a:prstGeom prst="rect">
             <a:avLst/>
@@ -21387,8 +21782,8 @@
         </p:nvSpPr>
         <p:spPr>
           <a:xfrm>
-            <a:off x="365760" y="5897880"/>
-            <a:ext cx="11430000" cy="365760"/>
+            <a:off x="594360" y="5596128"/>
+            <a:ext cx="11155680" cy="777240"/>
           </a:xfrm>
           <a:prstGeom prst="rect">
             <a:avLst/>
@@ -21401,26 +21796,63 @@
           <a:lstStyle/>
           <a:p>
             <a:pPr algn="l" indent="0" marL="0">
-              <a:buNone/>
-            </a:pPr>
-            <a:r>
-              <a:rPr lang="en-US" sz="1600" b="1" dirty="0">
-                <a:solidFill>
-                  <a:schemeClr val="tx1"/>
-                </a:solidFill>
-              </a:rPr>
-              <a:t>샘플링 제약 : </a:t>
-            </a:r>
-            <a:pPr algn="l" indent="0" marL="0">
-              <a:buNone/>
-            </a:pPr>
-            <a:r>
-              <a:rPr lang="en-US" sz="1600" dirty="0">
-                <a:solidFill>
-                  <a:schemeClr val="tx1"/>
-                </a:solidFill>
-              </a:rPr>
-              <a:t>0.1초 표본(≤ 5 Hz) → 스펙트럼 대신 시간 영역 모양 특징(crest factor 등) 사용</a:t>
+              <a:spcAft>
+                <a:spcPts val="400"/>
+              </a:spcAft>
+              <a:buNone/>
+            </a:pPr>
+            <a:r>
+              <a:rPr lang="en-US" sz="1400" b="1" dirty="0">
+                <a:solidFill>
+                  <a:schemeClr val="tx1"/>
+                </a:solidFill>
+              </a:rPr>
+              <a:t>데이터 : </a:t>
+            </a:r>
+            <a:pPr algn="l" indent="0" marL="0">
+              <a:spcAft>
+                <a:spcPts val="400"/>
+              </a:spcAft>
+              <a:buNone/>
+            </a:pPr>
+            <a:r>
+              <a:rPr lang="en-US" sz="1400" dirty="0">
+                <a:solidFill>
+                  <a:schemeClr val="tx1"/>
+                </a:solidFill>
+              </a:rPr>
+              <a:t>정상 : 이상 = 20,000 : 600행 (불균형) · 이상 구간의 진동 표준편차 6.1배, 그러나 일부 이상은 정상 진폭 범위</a:t>
+            </a:r>
+            <a:endParaRPr lang="en-US" sz="1400" dirty="0"/>
+          </a:p>
+          <a:p>
+            <a:pPr algn="l" indent="0" marL="0">
+              <a:spcAft>
+                <a:spcPts val="400"/>
+              </a:spcAft>
+              <a:buNone/>
+            </a:pPr>
+            <a:r>
+              <a:rPr lang="en-US" sz="1400" b="1" dirty="0">
+                <a:solidFill>
+                  <a:schemeClr val="tx1"/>
+                </a:solidFill>
+              </a:rPr>
+              <a:t>측정 한계 : </a:t>
+            </a:r>
+            <a:pPr algn="l" indent="0" marL="0">
+              <a:spcAft>
+                <a:spcPts val="400"/>
+              </a:spcAft>
+              <a:buNone/>
+            </a:pPr>
+            <a:r>
+              <a:rPr lang="en-US" sz="1400" dirty="0">
+                <a:solidFill>
+                  <a:schemeClr val="tx1"/>
+                </a:solidFill>
+              </a:rPr>
+              <a:t>0.1초 간격이라 5 Hz까지만 보임 → 주파수 대신 파형 모양(crest factor 등)을 본다</a:t>
             </a:r>
             <a:endParaRPr lang="en-US" sz="1400" dirty="0"/>
           </a:p>
@@ -21483,7 +21915,7 @@
                   <a:schemeClr val="tx1"/>
                 </a:solidFill>
               </a:rPr>
-              <a:t>데이터 진단 ② 발견과 설계 대응</a:t>
+              <a:t>데이터 진단 ② 발견 → 설계</a:t>
             </a:r>
             <a:endParaRPr lang="en-US" sz="2400" dirty="0"/>
           </a:p>
@@ -21521,7 +21953,7 @@
                   <a:schemeClr val="tx1"/>
                 </a:solidFill>
               </a:rPr>
-              <a:t>데이터에서 찾은 6가지 특성을 각각 설계 결정으로 연결</a:t>
+              <a:t>데이터에서 본 6가지 특징이 각각 하나의 설계 결정이 됨</a:t>
             </a:r>
             <a:endParaRPr lang="en-US" sz="1400" dirty="0"/>
           </a:p>
@@ -21671,7 +22103,7 @@
                   <a:schemeClr val="tx1"/>
                 </a:solidFill>
               </a:rPr>
-              <a:t>5초 이하로 끊긴 구간</a:t>
+              <a:t>구간이 짧다 (최대 5초)</a:t>
             </a:r>
             <a:endParaRPr lang="en-US" sz="1600" dirty="0"/>
           </a:p>
@@ -21731,7 +22163,7 @@
                   <a:schemeClr val="tx1"/>
                 </a:solidFill>
               </a:rPr>
-              <a:t>구간 단위 · 인과적 처리</a:t>
+              <a:t>구간 단위로, 과거 정보만 써서 판정</a:t>
             </a:r>
             <a:endParaRPr lang="en-US" sz="1600" dirty="0"/>
           </a:p>
@@ -21809,7 +22241,7 @@
                   <a:schemeClr val="tx1"/>
                 </a:solidFill>
               </a:rPr>
-              <a:t>정상 전류 = 정현파</a:t>
+              <a:t>정상 전류는 사인파</a:t>
             </a:r>
             <a:endParaRPr lang="en-US" sz="1600" dirty="0"/>
           </a:p>
@@ -21869,7 +22301,7 @@
                   <a:schemeClr val="tx1"/>
                 </a:solidFill>
               </a:rPr>
-              <a:t>A : 부하 추정 · 품질 경로,  B : 파형 모양 특징</a:t>
+              <a:t>A : 전류 진폭으로 부하 추정,  B : 파형 모양 특징</a:t>
             </a:r>
             <a:endParaRPr lang="en-US" sz="1600" dirty="0"/>
           </a:p>
@@ -21947,7 +22379,7 @@
                   <a:schemeClr val="tx1"/>
                 </a:solidFill>
               </a:rPr>
-              <a:t>부하가 진동 변동의 92.6% 설명</a:t>
+              <a:t>부하가 진동 변동의 92.6%를 설명</a:t>
             </a:r>
             <a:endParaRPr lang="en-US" sz="1600" dirty="0"/>
           </a:p>
@@ -22007,7 +22439,7 @@
                   <a:schemeClr val="tx1"/>
                 </a:solidFill>
               </a:rPr>
-              <a:t>A : 같은 부하끼리 비교</a:t>
+              <a:t>A : 같은 부하의 정상 진동과 비교</a:t>
             </a:r>
             <a:endParaRPr lang="en-US" sz="1600" dirty="0"/>
           </a:p>
@@ -22085,7 +22517,7 @@
                   <a:schemeClr val="tx1"/>
                 </a:solidFill>
               </a:rPr>
-              <a:t>진폭이 정상인 이상</a:t>
+              <a:t>진폭은 정상인데 이상인 경우</a:t>
             </a:r>
             <a:endParaRPr lang="en-US" sz="1600" dirty="0"/>
           </a:p>
@@ -22145,7 +22577,7 @@
                   <a:schemeClr val="tx1"/>
                 </a:solidFill>
               </a:rPr>
-              <a:t>B : 파형 모양 + A : 상태 조건 잔차</a:t>
+              <a:t>B : 파형 모양 + A : 같은 부하 대비 잔차</a:t>
             </a:r>
             <a:endParaRPr lang="en-US" sz="1600" dirty="0"/>
           </a:p>
@@ -22223,7 +22655,7 @@
                   <a:schemeClr val="tx1"/>
                 </a:solidFill>
               </a:rPr>
-              <a:t>관측 재개 직후 오경보</a:t>
+              <a:t>관측 재개 직후 오경보가 몰림</a:t>
             </a:r>
             <a:endParaRPr lang="en-US" sz="1600" dirty="0"/>
           </a:p>
@@ -22283,7 +22715,7 @@
                   <a:schemeClr val="tx1"/>
                 </a:solidFill>
               </a:rPr>
-              <a:t>3회 중 2회 지속 규칙 · 판단 보류</a:t>
+              <a:t>3번 중 2번 이어질 때만 경보 + 판단 보류</a:t>
             </a:r>
             <a:endParaRPr lang="en-US" sz="1600" dirty="0"/>
           </a:p>
@@ -22421,7 +22853,7 @@
                   <a:schemeClr val="tx1"/>
                 </a:solidFill>
               </a:rPr>
-              <a:t>시간순 3분할 + semi-synthetic 고장</a:t>
+              <a:t>시간순 3분할 + 형식 무관 점검 + 가상 고장 주입</a:t>
             </a:r>
             <a:endParaRPr lang="en-US" sz="1600" dirty="0"/>
           </a:p>
@@ -22436,7 +22868,7 @@
         <p:spPr>
           <a:xfrm>
             <a:off x="457200" y="4937760"/>
-            <a:ext cx="11338560" cy="1188720"/>
+            <a:ext cx="11338560" cy="1280160"/>
           </a:xfrm>
           <a:prstGeom prst="rect">
             <a:avLst/>
@@ -22474,7 +22906,7 @@
                   <a:schemeClr val="tx1"/>
                 </a:solidFill>
               </a:rPr>
-              <a:t>정상 · 이상이 서로 다른 날짜와 저장 형식으로 기록 → 형식만으로도 라벨 구분 가능 (ROC-AUC 1.000)</a:t>
+              <a:t>정상과 이상이 서로 다른 날짜 · 저장 형식으로 기록 → 형식만 봐도 라벨이 갈림 (ROC-AUC 1.000)</a:t>
             </a:r>
             <a:endParaRPr lang="en-US" sz="1400" dirty="0"/>
           </a:p>
@@ -22491,7 +22923,7 @@
                   <a:schemeClr val="tx1"/>
                 </a:solidFill>
               </a:rPr>
-              <a:t>형식 변화 민감도 점검 (정상 전류 양자화 · 직류 성분 제거 · 진동만 학습) : AP 0.968–0.993</a:t>
+              <a:t>형식 차이를 없애도 분리가 유지됨을 확인 (AP 0.968–0.993) · 개발 · 후보 · 최종을 시간순으로 나누고 최종은 1회만 평가</a:t>
             </a:r>
             <a:endParaRPr lang="en-US" sz="1400" dirty="0"/>
           </a:p>
@@ -22508,7 +22940,7 @@
                   <a:schemeClr val="tx1"/>
                 </a:solidFill>
               </a:rPr>
-              <a:t>→ 데이터가 단순한 만큼, 고정된 단일 모델은 처음 보는 상황에 범용적으로 쓰기 어렵다</a:t>
+              <a:t>→ 이 데이터에 잘 맞는 것만으로는 부족하다 — 처음 보는 운전 상황에서도 버티는 구조가 필요</a:t>
             </a:r>
             <a:endParaRPr lang="en-US" sz="1400" dirty="0"/>
           </a:p>
@@ -22609,7 +23041,7 @@
                   <a:schemeClr val="tx1"/>
                 </a:solidFill>
               </a:rPr>
-              <a:t>설비 수집부터 운영자 화면까지 — 유형 2가 느려도 유형 1 판정은 멈추지 않음</a:t>
+              <a:t>설비 신호를 읽기만 하고, 판정 → 설명 → 사람 확인 → 교정으로 돈다 — 설명이 느려도 감시는 멈추지 않음</a:t>
             </a:r>
             <a:endParaRPr lang="en-US" sz="1400" dirty="0"/>
           </a:p>
@@ -22665,7 +23097,7 @@
                   <a:schemeClr val="tx1"/>
                 </a:solidFill>
               </a:rPr>
-              <a:t>0.1초 행</a:t>
+              <a:t>0.1초마다 1행</a:t>
             </a:r>
             <a:endParaRPr lang="en-US" sz="1500" dirty="0"/>
           </a:p>
@@ -22813,7 +23245,7 @@
                   <a:schemeClr val="tx1"/>
                 </a:solidFill>
               </a:rPr>
-              <a:t>스냅샷 링</a:t>
+              <a:t>판정 기록 보관</a:t>
             </a:r>
             <a:endParaRPr lang="en-US" sz="1500" dirty="0"/>
           </a:p>
@@ -22827,7 +23259,7 @@
                   <a:schemeClr val="tx1"/>
                 </a:solidFill>
               </a:rPr>
-              <a:t>번호순 보관 (4,096개)</a:t>
+              <a:t>최근 4,096개</a:t>
             </a:r>
             <a:endParaRPr lang="en-US" sz="1500" dirty="0"/>
           </a:p>
@@ -22907,7 +23339,7 @@
                   <a:schemeClr val="tx1"/>
                 </a:solidFill>
               </a:rPr>
-              <a:t>질문 · 점검 · 요청</a:t>
+              <a:t>질문 · 상태 변화 · 요청</a:t>
             </a:r>
             <a:endParaRPr lang="en-US" sz="1500" dirty="0"/>
           </a:p>
@@ -22987,7 +23419,7 @@
                   <a:schemeClr val="tx1"/>
                 </a:solidFill>
               </a:rPr>
-              <a:t>화면 · 초안 · 일지</a:t>
+              <a:t>화면 · 정비 요청 · 일지</a:t>
             </a:r>
             <a:endParaRPr lang="en-US" sz="1500" dirty="0"/>
           </a:p>
@@ -23129,7 +23561,7 @@
         </p:nvSpPr>
         <p:spPr>
           <a:xfrm>
-            <a:off x="502920" y="3886200"/>
+            <a:off x="502920" y="3840480"/>
             <a:ext cx="4572000" cy="320040"/>
           </a:xfrm>
           <a:prstGeom prst="rect">
@@ -23151,7 +23583,7 @@
                   <a:schemeClr val="tx1"/>
                 </a:solidFill>
               </a:rPr>
-              <a:t>구성별 주기 · 지연</a:t>
+              <a:t>얼마나 빠른가</a:t>
             </a:r>
             <a:endParaRPr lang="en-US" sz="1600" dirty="0"/>
           </a:p>
@@ -23172,7 +23604,7 @@
           </p:nvPr>
         </p:nvGraphicFramePr>
         <p:xfrm>
-          <a:off x="502920" y="4297680"/>
+          <a:off x="502920" y="4251960"/>
           <a:ext cx="5303520" cy="914400"/>
         </p:xfrm>
         <a:graphic>
@@ -23374,7 +23806,89 @@
                             <a:schemeClr val="tx1"/>
                           </a:solidFill>
                         </a:rPr>
-                        <a:t>지식그래프 검색</a:t>
+                        <a:t>전문가 B</a:t>
+                      </a:r>
+                      <a:endParaRPr lang="en-US" sz="1400" dirty="0"/>
+                    </a:p>
+                  </a:txBody>
+                  <a:tcPr marL="73152" marR="73152" marT="36576" marB="36576" anchor="ctr">
+                    <a:lnL w="0" cap="flat" cmpd="sng" algn="ctr">
+                      <a:noFill/>
+                    </a:lnL>
+                    <a:lnR w="0" cap="flat" cmpd="sng" algn="ctr">
+                      <a:noFill/>
+                    </a:lnR>
+                    <a:lnT w="0" cap="flat" cmpd="sng" algn="ctr">
+                      <a:noFill/>
+                    </a:lnT>
+                    <a:lnB w="6350" cap="flat" cmpd="sng" algn="ctr">
+                      <a:solidFill>
+                        <a:srgbClr val="D9D9D9"/>
+                      </a:solidFill>
+                      <a:prstDash val="solid"/>
+                      <a:round/>
+                      <a:headEnd type="none" w="med" len="med"/>
+                      <a:tailEnd type="none" w="med" len="med"/>
+                    </a:lnB>
+                  </a:tcPr>
+                </a:tc>
+                <a:tc>
+                  <a:txBody>
+                    <a:bodyPr/>
+                    <a:lstStyle/>
+                    <a:p>
+                      <a:pPr algn="l" indent="0" marL="0">
+                        <a:buNone/>
+                      </a:pPr>
+                      <a:r>
+                        <a:rPr lang="en-US" sz="1400" dirty="0">
+                          <a:solidFill>
+                            <a:schemeClr val="tx1"/>
+                          </a:solidFill>
+                        </a:rPr>
+                        <a:t>행마다 약 18 ms</a:t>
+                      </a:r>
+                      <a:endParaRPr lang="en-US" sz="1400" dirty="0"/>
+                    </a:p>
+                  </a:txBody>
+                  <a:tcPr marL="73152" marR="73152" marT="36576" marB="36576" anchor="ctr">
+                    <a:lnL w="0" cap="flat" cmpd="sng" algn="ctr">
+                      <a:noFill/>
+                    </a:lnL>
+                    <a:lnR w="0" cap="flat" cmpd="sng" algn="ctr">
+                      <a:noFill/>
+                    </a:lnR>
+                    <a:lnT w="0" cap="flat" cmpd="sng" algn="ctr">
+                      <a:noFill/>
+                    </a:lnT>
+                    <a:lnB w="6350" cap="flat" cmpd="sng" algn="ctr">
+                      <a:solidFill>
+                        <a:srgbClr val="D9D9D9"/>
+                      </a:solidFill>
+                      <a:prstDash val="solid"/>
+                      <a:round/>
+                      <a:headEnd type="none" w="med" len="med"/>
+                      <a:tailEnd type="none" w="med" len="med"/>
+                    </a:lnB>
+                  </a:tcPr>
+                </a:tc>
+              </a:tr>
+              <a:tr h="329184">
+                <a:tc>
+                  <a:txBody>
+                    <a:bodyPr/>
+                    <a:lstStyle/>
+                    <a:p>
+                      <a:pPr algn="l" indent="0" marL="0">
+                        <a:buNone/>
+                      </a:pPr>
+                      <a:r>
+                        <a:rPr lang="en-US" sz="1400" dirty="0">
+                          <a:solidFill>
+                            <a:schemeClr val="tx1"/>
+                          </a:solidFill>
+                        </a:rPr>
+                        <a:t>지식그래프 검색 · 검사</a:t>
                       </a:r>
                       <a:endParaRPr lang="en-US" sz="1400" dirty="0"/>
                     </a:p>
@@ -23456,89 +23970,7 @@
                             <a:schemeClr val="tx1"/>
                           </a:solidFill>
                         </a:rPr>
-                        <a:t>모델 호출</a:t>
-                      </a:r>
-                      <a:endParaRPr lang="en-US" sz="1400" dirty="0"/>
-                    </a:p>
-                  </a:txBody>
-                  <a:tcPr marL="73152" marR="73152" marT="36576" marB="36576" anchor="ctr">
-                    <a:lnL w="0" cap="flat" cmpd="sng" algn="ctr">
-                      <a:noFill/>
-                    </a:lnL>
-                    <a:lnR w="0" cap="flat" cmpd="sng" algn="ctr">
-                      <a:noFill/>
-                    </a:lnR>
-                    <a:lnT w="0" cap="flat" cmpd="sng" algn="ctr">
-                      <a:noFill/>
-                    </a:lnT>
-                    <a:lnB w="6350" cap="flat" cmpd="sng" algn="ctr">
-                      <a:solidFill>
-                        <a:srgbClr val="D9D9D9"/>
-                      </a:solidFill>
-                      <a:prstDash val="solid"/>
-                      <a:round/>
-                      <a:headEnd type="none" w="med" len="med"/>
-                      <a:tailEnd type="none" w="med" len="med"/>
-                    </a:lnB>
-                  </a:tcPr>
-                </a:tc>
-                <a:tc>
-                  <a:txBody>
-                    <a:bodyPr/>
-                    <a:lstStyle/>
-                    <a:p>
-                      <a:pPr algn="l" indent="0" marL="0">
-                        <a:buNone/>
-                      </a:pPr>
-                      <a:r>
-                        <a:rPr lang="en-US" sz="1400" dirty="0">
-                          <a:solidFill>
-                            <a:schemeClr val="tx1"/>
-                          </a:solidFill>
-                        </a:rPr>
-                        <a:t>질문당 약 31초</a:t>
-                      </a:r>
-                      <a:endParaRPr lang="en-US" sz="1400" dirty="0"/>
-                    </a:p>
-                  </a:txBody>
-                  <a:tcPr marL="73152" marR="73152" marT="36576" marB="36576" anchor="ctr">
-                    <a:lnL w="0" cap="flat" cmpd="sng" algn="ctr">
-                      <a:noFill/>
-                    </a:lnL>
-                    <a:lnR w="0" cap="flat" cmpd="sng" algn="ctr">
-                      <a:noFill/>
-                    </a:lnR>
-                    <a:lnT w="0" cap="flat" cmpd="sng" algn="ctr">
-                      <a:noFill/>
-                    </a:lnT>
-                    <a:lnB w="6350" cap="flat" cmpd="sng" algn="ctr">
-                      <a:solidFill>
-                        <a:srgbClr val="D9D9D9"/>
-                      </a:solidFill>
-                      <a:prstDash val="solid"/>
-                      <a:round/>
-                      <a:headEnd type="none" w="med" len="med"/>
-                      <a:tailEnd type="none" w="med" len="med"/>
-                    </a:lnB>
-                  </a:tcPr>
-                </a:tc>
-              </a:tr>
-              <a:tr h="329184">
-                <a:tc>
-                  <a:txBody>
-                    <a:bodyPr/>
-                    <a:lstStyle/>
-                    <a:p>
-                      <a:pPr algn="l" indent="0" marL="0">
-                        <a:buNone/>
-                      </a:pPr>
-                      <a:r>
-                        <a:rPr lang="en-US" sz="1400" dirty="0">
-                          <a:solidFill>
-                            <a:schemeClr val="tx1"/>
-                          </a:solidFill>
-                        </a:rPr>
-                        <a:t>validator · 정책표</a:t>
+                        <a:t>언어모델 답변</a:t>
                       </a:r>
                       <a:endParaRPr lang="en-US" sz="1400" dirty="0"/>
                     </a:p>
@@ -23578,7 +24010,7 @@
                             <a:schemeClr val="tx1"/>
                           </a:solidFill>
                         </a:rPr>
-                        <a:t>수 ms</a:t>
+                        <a:t>질문당 평균 약 31초</a:t>
                       </a:r>
                       <a:endParaRPr lang="en-US" sz="1400" dirty="0"/>
                     </a:p>
@@ -23617,7 +24049,7 @@
         </p:nvSpPr>
         <p:spPr>
           <a:xfrm>
-            <a:off x="6400800" y="3886200"/>
+            <a:off x="6400800" y="3840480"/>
             <a:ext cx="4572000" cy="320040"/>
           </a:xfrm>
           <a:prstGeom prst="rect">
@@ -23639,7 +24071,7 @@
                   <a:schemeClr val="tx1"/>
                 </a:solidFill>
               </a:rPr>
-              <a:t>에지 서버</a:t>
+              <a:t>안전하게 붙이기</a:t>
             </a:r>
             <a:endParaRPr lang="en-US" sz="1600" dirty="0"/>
           </a:p>
@@ -23653,8 +24085,8 @@
         </p:nvSpPr>
         <p:spPr>
           <a:xfrm>
-            <a:off x="6400800" y="4343400"/>
-            <a:ext cx="5394960" cy="1645920"/>
+            <a:off x="6400800" y="4297680"/>
+            <a:ext cx="5394960" cy="1737360"/>
           </a:xfrm>
           <a:prstGeom prst="rect">
             <a:avLst/>
@@ -23678,7 +24110,7 @@
                   <a:schemeClr val="tx1"/>
                 </a:solidFill>
               </a:rPr>
-              <a:t>구성 : </a:t>
+              <a:t>읽기 전용 : </a:t>
             </a:r>
             <a:pPr algn="l" indent="0" marL="0">
               <a:spcAft>
@@ -23692,7 +24124,7 @@
                   <a:schemeClr val="tx1"/>
                 </a:solidFill>
               </a:rPr>
-              <a:t>Worker 1개 + 상태 보관 객체 2개</a:t>
+              <a:t>설비로 쓰는 경로가 없음 — 값을 읽기만 함</a:t>
             </a:r>
             <a:endParaRPr lang="en-US" sz="1400" dirty="0"/>
           </a:p>
@@ -23709,7 +24141,7 @@
                   <a:schemeClr val="tx1"/>
                 </a:solidFill>
               </a:rPr>
-              <a:t>판정 모델 : </a:t>
+              <a:t>판정과 설명 분리 : </a:t>
             </a:r>
             <a:pPr algn="l" indent="0" marL="0">
               <a:spcAft>
@@ -23723,7 +24155,7 @@
                   <a:schemeClr val="tx1"/>
                 </a:solidFill>
               </a:rPr>
-              <a:t>전문가 A 탑재, 모델 호출은 별도 요청</a:t>
+              <a:t>유형 1은 유형 2를 기다리지 않음</a:t>
             </a:r>
             <a:endParaRPr lang="en-US" sz="1400" dirty="0"/>
           </a:p>
@@ -23740,7 +24172,7 @@
                   <a:schemeClr val="tx1"/>
                 </a:solidFill>
               </a:rPr>
-              <a:t>쓰기 경로 : </a:t>
+              <a:t>구현 검증 : </a:t>
             </a:r>
             <a:pPr algn="l" indent="0" marL="0">
               <a:spcAft>
@@ -23754,7 +24186,7 @@
                   <a:schemeClr val="tx1"/>
                 </a:solidFill>
               </a:rPr>
-              <a:t>설비로 쓰는 경로 없음 (읽기 전용)</a:t>
+              <a:t>기준 구현과 20,802 프레임에서 판정 100% 일치</a:t>
             </a:r>
             <a:endParaRPr lang="en-US" sz="1400" dirty="0"/>
           </a:p>
@@ -23771,7 +24203,7 @@
                   <a:schemeClr val="tx1"/>
                 </a:solidFill>
               </a:rPr>
-              <a:t>배포 검증 : </a:t>
+              <a:t>검사 통과 : </a:t>
             </a:r>
             <a:pPr algn="l" indent="0" marL="0">
               <a:spcAft>
@@ -23785,7 +24217,7 @@
                   <a:schemeClr val="tx1"/>
                 </a:solidFill>
               </a:rPr>
-              <a:t>유형 1 20,802 프레임 · 유형 2 28,901건 불일치 0</a:t>
+              <a:t>유형 2 28,901건 · 보안 103건 · 종단 32건</a:t>
             </a:r>
             <a:endParaRPr lang="en-US" sz="1400" dirty="0"/>
           </a:p>
@@ -23886,7 +24318,7 @@
                   <a:schemeClr val="tx1"/>
                 </a:solidFill>
               </a:rPr>
-              <a:t>서로 다른 근거로 서로 다른 이상을 잡는 두 전문가를 OR rule로 결합</a:t>
+              <a:t>A는 '같은 부하의 정상과 다른가', B는 '전류 파형 모양이 깨졌나'를 본다 — 둘 중 하나라도 경보면 경보</a:t>
             </a:r>
             <a:endParaRPr lang="en-US" sz="1400" dirty="0"/>
           </a:p>
@@ -23957,7 +24389,7 @@
         <p:spPr>
           <a:xfrm>
             <a:off x="2514600" y="1600200"/>
-            <a:ext cx="6400800" cy="320040"/>
+            <a:ext cx="7315200" cy="320040"/>
           </a:xfrm>
           <a:prstGeom prst="rect">
             <a:avLst/>
@@ -23978,7 +24410,7 @@
                   <a:schemeClr val="tx1"/>
                 </a:solidFill>
               </a:rPr>
-              <a:t>전문가 A : 부하 조건부 world model</a:t>
+              <a:t>전문가 A : 같은 부하의 정상과 비교 (정상 기록만 학습)</a:t>
             </a:r>
             <a:endParaRPr lang="en-US" sz="1400" dirty="0"/>
           </a:p>
@@ -23993,7 +24425,7 @@
         <p:spPr>
           <a:xfrm>
             <a:off x="2514600" y="3246120"/>
-            <a:ext cx="6400800" cy="320040"/>
+            <a:ext cx="7315200" cy="320040"/>
           </a:xfrm>
           <a:prstGeom prst="rect">
             <a:avLst/>
@@ -24014,7 +24446,7 @@
                   <a:schemeClr val="tx1"/>
                 </a:solidFill>
               </a:rPr>
-              <a:t>전문가 B : 전류 파형 판정기</a:t>
+              <a:t>전문가 B : 전류 파형 모양 판정 (라벨로 학습)</a:t>
             </a:r>
             <a:endParaRPr lang="en-US" sz="1400" dirty="0"/>
           </a:p>
@@ -24072,7 +24504,7 @@
                   <a:schemeClr val="tx1"/>
                 </a:solidFill>
               </a:rPr>
-              <a:t>전류 기반</a:t>
+              <a:t>전류 진폭</a:t>
             </a:r>
             <a:endParaRPr lang="en-US" sz="1400" dirty="0"/>
           </a:p>
@@ -24236,7 +24668,7 @@
                   <a:schemeClr val="tx1"/>
                 </a:solidFill>
               </a:rPr>
-              <a:t>칼만 누적</a:t>
+              <a:t>편차 누적</a:t>
             </a:r>
             <a:endParaRPr lang="en-US" sz="1400" dirty="0"/>
           </a:p>
@@ -24318,7 +24750,7 @@
                   <a:schemeClr val="tx1"/>
                 </a:solidFill>
               </a:rPr>
-              <a:t>conformal</a:t>
+              <a:t>경보 예산 1%</a:t>
             </a:r>
             <a:endParaRPr lang="en-US" sz="1400" dirty="0"/>
           </a:p>
@@ -24360,21 +24792,21 @@
                   <a:schemeClr val="tx1"/>
                 </a:solidFill>
               </a:rPr>
+              <a:t>모양 특징</a:t>
+            </a:r>
+            <a:endParaRPr lang="en-US" sz="1400" dirty="0"/>
+          </a:p>
+          <a:p>
+            <a:pPr algn="ctr" indent="0" marL="0">
+              <a:buNone/>
+            </a:pPr>
+            <a:r>
+              <a:rPr lang="en-US" sz="1200" dirty="0">
+                <a:solidFill>
+                  <a:schemeClr val="tx1"/>
+                </a:solidFill>
+              </a:rPr>
               <a:t>crest · shape</a:t>
-            </a:r>
-            <a:endParaRPr lang="en-US" sz="1400" dirty="0"/>
-          </a:p>
-          <a:p>
-            <a:pPr algn="ctr" indent="0" marL="0">
-              <a:buNone/>
-            </a:pPr>
-            <a:r>
-              <a:rPr lang="en-US" sz="1200" dirty="0">
-                <a:solidFill>
-                  <a:schemeClr val="tx1"/>
-                </a:solidFill>
-              </a:rPr>
-              <a:t>특징 추출</a:t>
             </a:r>
             <a:endParaRPr lang="en-US" sz="1400" dirty="0"/>
           </a:p>
@@ -24440,21 +24872,21 @@
                   <a:schemeClr val="tx1"/>
                 </a:solidFill>
               </a:rPr>
+              <a:t>파형 분류</a:t>
+            </a:r>
+            <a:endParaRPr lang="en-US" sz="1400" dirty="0"/>
+          </a:p>
+          <a:p>
+            <a:pPr algn="ctr" indent="0" marL="0">
+              <a:buNone/>
+            </a:pPr>
+            <a:r>
+              <a:rPr lang="en-US" sz="1200" dirty="0">
+                <a:solidFill>
+                  <a:schemeClr val="tx1"/>
+                </a:solidFill>
+              </a:rPr>
               <a:t>MiniRocket / GBDT</a:t>
-            </a:r>
-            <a:endParaRPr lang="en-US" sz="1400" dirty="0"/>
-          </a:p>
-          <a:p>
-            <a:pPr algn="ctr" indent="0" marL="0">
-              <a:buNone/>
-            </a:pPr>
-            <a:r>
-              <a:rPr lang="en-US" sz="1200" dirty="0">
-                <a:solidFill>
-                  <a:schemeClr val="tx1"/>
-                </a:solidFill>
-              </a:rPr>
-              <a:t>이력 길이로 분기</a:t>
             </a:r>
             <a:endParaRPr lang="en-US" sz="1400" dirty="0"/>
           </a:p>
@@ -24520,21 +24952,21 @@
                   <a:schemeClr val="tx1"/>
                 </a:solidFill>
               </a:rPr>
+              <a:t>확률 보정</a:t>
+            </a:r>
+            <a:endParaRPr lang="en-US" sz="1400" dirty="0"/>
+          </a:p>
+          <a:p>
+            <a:pPr algn="ctr" indent="0" marL="0">
+              <a:buNone/>
+            </a:pPr>
+            <a:r>
+              <a:rPr lang="en-US" sz="1200" dirty="0">
+                <a:solidFill>
+                  <a:schemeClr val="tx1"/>
+                </a:solidFill>
+              </a:rPr>
               <a:t>Platt scaling</a:t>
-            </a:r>
-            <a:endParaRPr lang="en-US" sz="1400" dirty="0"/>
-          </a:p>
-          <a:p>
-            <a:pPr algn="ctr" indent="0" marL="0">
-              <a:buNone/>
-            </a:pPr>
-            <a:r>
-              <a:rPr lang="en-US" sz="1200" dirty="0">
-                <a:solidFill>
-                  <a:schemeClr val="tx1"/>
-                </a:solidFill>
-              </a:rPr>
-              <a:t>확률 보정</a:t>
             </a:r>
             <a:endParaRPr lang="en-US" sz="1400" dirty="0"/>
           </a:p>
@@ -24590,7 +25022,7 @@
                   <a:schemeClr val="tx1"/>
                 </a:solidFill>
               </a:rPr>
-              <a:t>OR rule</a:t>
+              <a:t>A 또는 B</a:t>
             </a:r>
             <a:endParaRPr lang="en-US" sz="1600" dirty="0"/>
           </a:p>
@@ -24891,7 +25323,7 @@
                   <a:schemeClr val="tx1"/>
                 </a:solidFill>
               </a:rPr>
-              <a:t>A 부하 조건부 건강 모델 : </a:t>
+              <a:t>전문가 A : </a:t>
             </a:r>
             <a:pPr algn="l" indent="0" marL="0">
               <a:spcAft>
@@ -24905,7 +25337,7 @@
                   <a:schemeClr val="tx1"/>
                 </a:solidFill>
               </a:rPr>
-              <a:t>정상 기록만 학습 · 경보 예산 α = 0.01 · 5가지 상태 출력</a:t>
+              <a:t>부하가 바뀐 정상과 진짜 이상을 가른다 → 5가지 상태로 판정</a:t>
             </a:r>
             <a:endParaRPr lang="en-US" sz="1400" dirty="0"/>
           </a:p>
@@ -24922,7 +25354,7 @@
                   <a:schemeClr val="tx1"/>
                 </a:solidFill>
               </a:rPr>
-              <a:t>B 전류 파형 판정기 : </a:t>
+              <a:t>전문가 B : </a:t>
             </a:r>
             <a:pPr algn="l" indent="0" marL="0">
               <a:spcAft>
@@ -24936,7 +25368,7 @@
                   <a:schemeClr val="tx1"/>
                 </a:solidFill>
               </a:rPr>
-              <a:t>라벨 기반 파형 모델 · 확률 임계값 0.40</a:t>
+              <a:t>진폭이 정상이어도 파형 모양이 깨진 이상을 잡는다 → 확률 0.40 이상이면 경보</a:t>
             </a:r>
             <a:endParaRPr lang="en-US" sz="1400" dirty="0"/>
           </a:p>
@@ -24953,7 +25385,7 @@
                   <a:schemeClr val="tx1"/>
                 </a:solidFill>
               </a:rPr>
-              <a:t>결합 경보 : </a:t>
+              <a:t>결합 : </a:t>
             </a:r>
             <a:pPr algn="l" indent="0" marL="0">
               <a:spcAft>
@@ -24967,7 +25399,7 @@
                   <a:schemeClr val="tx1"/>
                 </a:solidFill>
               </a:rPr>
-              <a:t>A 경보 OR B 경보 · 기록 1행(0.1초)마다 판정</a:t>
+              <a:t>둘 중 하나라도 경보면 경보, 0.1초(1행)마다 판정</a:t>
             </a:r>
             <a:endParaRPr lang="en-US" sz="1400" dirty="0"/>
           </a:p>
@@ -25030,7 +25462,7 @@
                   <a:schemeClr val="tx1"/>
                 </a:solidFill>
               </a:rPr>
-              <a:t>전문가 A ① 확률 world model</a:t>
+              <a:t>전문가 A ① 진동을 '부하 몫'과 '건강 몫'으로 나누기</a:t>
             </a:r>
             <a:endParaRPr lang="en-US" sz="2400" dirty="0"/>
           </a:p>
@@ -25068,7 +25500,7 @@
                   <a:schemeClr val="tx1"/>
                 </a:solidFill>
               </a:rPr>
-              <a:t>부하가 진동 수준을 정하고, 건강 상태는 그 위에 얹힌 느린 편차</a:t>
+              <a:t>부하로 설명되지 않는 진동 상승만 이상 신호로 남긴다</a:t>
             </a:r>
             <a:endParaRPr lang="en-US" sz="1400" dirty="0"/>
           </a:p>
@@ -25639,8 +26071,8 @@
         </p:nvSpPr>
         <p:spPr>
           <a:xfrm>
-            <a:off x="1463040" y="1600200"/>
-            <a:ext cx="1280160" cy="274320"/>
+            <a:off x="1325880" y="1600200"/>
+            <a:ext cx="1554480" cy="274320"/>
           </a:xfrm>
           <a:prstGeom prst="rect">
             <a:avLst/>
@@ -25661,7 +26093,7 @@
                   <a:schemeClr val="tx2"/>
                 </a:solidFill>
               </a:rPr>
-              <a:t>전이</a:t>
+              <a:t>부하는 이어짐</a:t>
             </a:r>
             <a:endParaRPr lang="en-US" sz="1200" dirty="0"/>
           </a:p>
@@ -25675,7 +26107,7 @@
         </p:nvSpPr>
         <p:spPr>
           <a:xfrm>
-            <a:off x="1463040" y="4983480"/>
+            <a:off x="1463040" y="4443984"/>
             <a:ext cx="1280160" cy="274320"/>
           </a:xfrm>
           <a:prstGeom prst="rect">
@@ -25697,7 +26129,7 @@
                   <a:schemeClr val="tx2"/>
                 </a:solidFill>
               </a:rPr>
-              <a:t>OU 감쇠</a:t>
+              <a:t>천천히 변함</a:t>
             </a:r>
             <a:endParaRPr lang="en-US" sz="1200" dirty="0"/>
           </a:p>
@@ -25767,7 +26199,7 @@
                   <a:schemeClr val="tx1"/>
                 </a:solidFill>
               </a:rPr>
-              <a:t>숨은 상태 — g : 부하 구간(4수준), q : 운전 맥락(2상태), h : 건강 편차</a:t>
+              <a:t>보이지 않는 상태 — g : 부하 구간(4단계), q : 운전 맥락, h : 건강 편차</a:t>
             </a:r>
             <a:endParaRPr lang="en-US" sz="1200" dirty="0"/>
           </a:p>
@@ -25837,7 +26269,7 @@
                   <a:schemeClr val="tx1"/>
                 </a:solidFill>
               </a:rPr>
-              <a:t>관측 — x : 전류 파형, y : 진동 로그 RMS</a:t>
+              <a:t>측정값 — x : 전류 파형, y : 진동 크기(로그 RMS)</a:t>
             </a:r>
             <a:endParaRPr lang="en-US" sz="1200" dirty="0"/>
           </a:p>
@@ -25897,7 +26329,7 @@
                   <a:schemeClr val="tx1"/>
                 </a:solidFill>
               </a:rPr>
-              <a:t>진동 = 같은 부하 · 맥락의 정상 기대치 μ + 건강 편차 h + 버스트 간 변동 u + 잡음 v</a:t>
+              <a:t>진동 = 같은 부하에서 원래 나는 진동 μ + 건강 이상으로 늘어난 진동 h + 구간 간 변동 u + 잡음 v</a:t>
             </a:r>
             <a:endParaRPr lang="en-US" sz="1400" dirty="0"/>
           </a:p>
@@ -25957,29 +26389,7 @@
                   <a:schemeClr val="tx1"/>
                 </a:solidFill>
               </a:rPr>
-              <a:t>건강 편차는 공백 동안 0으로 감쇠 (τ</a:t>
-            </a:r>
-            <a:pPr algn="l" indent="0" marL="0">
-              <a:buNone/>
-            </a:pPr>
-            <a:r>
-              <a:rPr lang="en-US" sz="1400" baseline="-40000" dirty="0">
-                <a:solidFill>
-                  <a:schemeClr val="tx1"/>
-                </a:solidFill>
-              </a:rPr>
-              <a:t>h</a:t>
-            </a:r>
-            <a:pPr algn="l" indent="0" marL="0">
-              <a:buNone/>
-            </a:pPr>
-            <a:r>
-              <a:rPr lang="en-US" sz="1400" dirty="0">
-                <a:solidFill>
-                  <a:schemeClr val="tx1"/>
-                </a:solidFill>
-              </a:rPr>
-              <a:t> = 300 s), 버스트마다 Kalman update 1회</a:t>
+              <a:t>h는 칼만 필터로 추적 · 측정이 끊기면 300초 시간 상수로 0으로 돌아감 (오래된 증거는 잊음)</a:t>
             </a:r>
             <a:endParaRPr lang="en-US" sz="1400" dirty="0"/>
           </a:p>
@@ -26051,7 +26461,7 @@
                   <a:schemeClr val="tx1"/>
                 </a:solidFill>
               </a:rPr>
-              <a:t>부하 구간이 설명하는 버스트 간 진동 변동 (하부 · 상부)</a:t>
+              <a:t>하부 · 상부 진동 변동 중 부하 구간이 설명하는 몫</a:t>
             </a:r>
             <a:endParaRPr lang="en-US" sz="1400" dirty="0"/>
           </a:p>
@@ -26087,7 +26497,7 @@
                   <a:schemeClr val="tx1"/>
                 </a:solidFill>
               </a:rPr>
-              <a:t>결론 : </a:t>
+              <a:t>가벼운 모델 : </a:t>
             </a:r>
             <a:pPr algn="l" indent="0" marL="0">
               <a:buNone/>
@@ -26098,7 +26508,7 @@
                   <a:schemeClr val="tx1"/>
                 </a:solidFill>
               </a:rPr>
-              <a:t>부하로 설명되지 않는 진동 상승만 건강 편차 h로 남음 · 신경망 없이 약 320개 값, 행당 약 0.2 ms</a:t>
+              <a:t>신경망 없이 파라미터 약 320개, 정상 기록만 학습 · 한 행 약 0.2 ms</a:t>
             </a:r>
             <a:endParaRPr lang="en-US" sz="1400" dirty="0"/>
           </a:p>

--- a/presentation/RIVET-WM_seminar.pptx
+++ b/presentation/RIVET-WM_seminar.pptx
@@ -131,67 +131,6 @@
       </a:defRPr>
     </a:lvl9pPr>
   </p:defaultTextStyle>
-  <p:extLst>
-    <p:ext uri="{521415D9-36F7-43E2-AB2F-B90AF26B5E84}">
-      <p14:sectionLst xmlns:p14="http://schemas.microsoft.com/office/powerpoint/2010/main">
-        <p14:section name="Introduction" id="{b6cbcbd6-b67c-02ba-76e3-12f3c7bcf57e}">
-          <p14:sldIdLst>
-            <p14:sldId id="256"/>
-            <p14:sldId id="257"/>
-            <p14:sldId id="258"/>
-            <p14:sldId id="259"/>
-          </p14:sldIdLst>
-        </p14:section>
-        <p14:section name="데이터 진단" id="{3313319d-bdb5-2525-4ac7-55c24dfd8266}">
-          <p14:sldIdLst>
-            <p14:sldId id="260"/>
-            <p14:sldId id="261"/>
-          </p14:sldIdLst>
-        </p14:section>
-        <p14:section name="유형 1 판정" id="{9853514a-85f2-a6ac-b3b6-b9847560a5cf}">
-          <p14:sldIdLst>
-            <p14:sldId id="262"/>
-            <p14:sldId id="263"/>
-            <p14:sldId id="264"/>
-            <p14:sldId id="265"/>
-            <p14:sldId id="266"/>
-            <p14:sldId id="267"/>
-            <p14:sldId id="268"/>
-            <p14:sldId id="269"/>
-          </p14:sldIdLst>
-        </p14:section>
-        <p14:section name="실험 결과" id="{fdcc10e1-af1a-61ad-3489-c85029cc35d6}">
-          <p14:sldIdLst>
-            <p14:sldId id="270"/>
-            <p14:sldId id="271"/>
-            <p14:sldId id="272"/>
-            <p14:sldId id="273"/>
-            <p14:sldId id="274"/>
-          </p14:sldIdLst>
-        </p14:section>
-        <p14:section name="유형 2" id="{34ddad87-200d-ee0e-188c-f8ef8a8dc64f}">
-          <p14:sldIdLst>
-            <p14:sldId id="275"/>
-            <p14:sldId id="276"/>
-            <p14:sldId id="277"/>
-            <p14:sldId id="278"/>
-            <p14:sldId id="279"/>
-          </p14:sldIdLst>
-        </p14:section>
-        <p14:section name="현장 적용 및 결론" id="{b05c0c86-d0c3-f812-0145-585fca553bd6}">
-          <p14:sldIdLst>
-            <p14:sldId id="280"/>
-            <p14:sldId id="281"/>
-            <p14:sldId id="282"/>
-            <p14:sldId id="283"/>
-          </p14:sldIdLst>
-        </p14:section>
-      </p14:sectionLst>
-    </p:ext>
-    <p:ext uri="{EFAFB233-063F-42B5-8137-9DF3F51BA10A}">
-      <p15:sldGuideLst xmlns:p15="http://schemas.microsoft.com/office/powerpoint/2012/main"/>
-    </p:ext>
-  </p:extLst>
 </p:presentation>
 </file>
 
@@ -4108,77 +4047,6 @@
 
 <file path=ppt/slideLayouts/slideLayout3.xml><?xml version="1.0" encoding="utf-8"?>
 <p:sldLayout xmlns:a="http://schemas.openxmlformats.org/drawingml/2006/main" xmlns:r="http://schemas.openxmlformats.org/officeDocument/2006/relationships" xmlns:p="http://schemas.openxmlformats.org/presentationml/2006/main" preserve="1">
-  <p:cSld name="TOC">
-    <p:bg>
-      <p:bgPr>
-        <a:solidFill>
-          <a:schemeClr val="bg1"/>
-        </a:solidFill>
-      </p:bgPr>
-    </p:bg>
-    <p:spTree>
-      <p:nvGrpSpPr>
-        <p:cNvPr id="1" name=""/>
-        <p:cNvGrpSpPr/>
-        <p:nvPr/>
-      </p:nvGrpSpPr>
-      <p:grpSpPr>
-        <a:xfrm>
-          <a:off x="0" y="0"/>
-          <a:ext cx="0" cy="0"/>
-          <a:chOff x="0" y="0"/>
-          <a:chExt cx="0" cy="0"/>
-        </a:xfrm>
-      </p:grpSpPr>
-      <p:sp>
-        <p:nvSpPr>
-          <p:cNvPr id="2" name="Text 0"/>
-          <p:cNvSpPr/>
-          <p:nvPr>
-            <p:ph idx="100" type="title" hasCustomPrompt="1"/>
-          </p:nvPr>
-        </p:nvSpPr>
-        <p:spPr>
-          <a:xfrm>
-            <a:off x="201168" y="210312"/>
-            <a:ext cx="3657600" cy="585216"/>
-          </a:xfrm>
-          <a:prstGeom prst="rect">
-            <a:avLst/>
-          </a:prstGeom>
-          <a:noFill/>
-          <a:ln/>
-        </p:spPr>
-        <p:txBody>
-          <a:bodyPr wrap="square" rtlCol="0"/>
-          <a:lstStyle>
-            <a:lvl1pPr algn="l" indent="0" marL="0">
-              <a:buNone/>
-              <a:defRPr lang="en-US" sz="3200" b="1" dirty="0">
-                <a:solidFill>
-                  <a:schemeClr val="tx1"/>
-                </a:solidFill>
-              </a:defRPr>
-            </a:lvl1pPr>
-          </a:lstStyle>
-          <a:p>
-            <a:pPr algn="l" indent="0" marL="0">
-              <a:buNone/>
-            </a:pPr>
-            <a:endParaRPr lang="en-US" sz="3200" dirty="0"/>
-          </a:p>
-        </p:txBody>
-      </p:sp>
-    </p:spTree>
-  </p:cSld>
-  <p:clrMapOvr>
-    <a:masterClrMapping/>
-  </p:clrMapOvr>
-</p:sldLayout>
-</file>
-
-<file path=ppt/slideLayouts/slideLayout4.xml><?xml version="1.0" encoding="utf-8"?>
-<p:sldLayout xmlns:a="http://schemas.openxmlformats.org/drawingml/2006/main" xmlns:r="http://schemas.openxmlformats.org/officeDocument/2006/relationships" xmlns:p="http://schemas.openxmlformats.org/presentationml/2006/main" preserve="1">
   <p:cSld name="CONTENT">
     <p:bg>
       <p:bgPr>
@@ -4211,8 +4079,8 @@
         </p:nvSpPr>
         <p:spPr>
           <a:xfrm>
-            <a:off x="347472" y="438912"/>
-            <a:ext cx="11430000" cy="457200"/>
+            <a:off x="347472" y="384048"/>
+            <a:ext cx="11494008" cy="457200"/>
           </a:xfrm>
           <a:prstGeom prst="rect">
             <a:avLst/>
@@ -4242,16 +4110,39 @@
       </p:sp>
       <p:sp>
         <p:nvSpPr>
-          <p:cNvPr id="3" name="Text 0"/>
+          <p:cNvPr id="3" name="Shape 0"/>
+          <p:cNvSpPr/>
+          <p:nvPr/>
+        </p:nvSpPr>
+        <p:spPr>
+          <a:xfrm>
+            <a:off x="347472" y="896112"/>
+            <a:ext cx="11494008" cy="0"/>
+          </a:xfrm>
+          <a:prstGeom prst="line">
+            <a:avLst/>
+          </a:prstGeom>
+          <a:noFill/>
+          <a:ln w="28575">
+            <a:solidFill>
+              <a:schemeClr val="tx1"/>
+            </a:solidFill>
+            <a:prstDash val="solid"/>
+          </a:ln>
+        </p:spPr>
+      </p:sp>
+      <p:sp>
+        <p:nvSpPr>
+          <p:cNvPr id="4" name="Text 1"/>
           <p:cNvSpPr/>
           <p:nvPr>
-            <p:ph idx="101" type="body" hasCustomPrompt="1"/>
+            <p:ph idx="102" type="body" hasCustomPrompt="1"/>
           </p:nvPr>
         </p:nvSpPr>
         <p:spPr>
           <a:xfrm>
-            <a:off x="347472" y="1014984"/>
-            <a:ext cx="11430000" cy="365760"/>
+            <a:off x="347472" y="978408"/>
+            <a:ext cx="11494008" cy="365760"/>
           </a:xfrm>
           <a:prstGeom prst="rect">
             <a:avLst/>
@@ -4287,7 +4178,7 @@
 </p:sldLayout>
 </file>
 
-<file path=ppt/slideLayouts/slideLayout5.xml><?xml version="1.0" encoding="utf-8"?>
+<file path=ppt/slideLayouts/slideLayout4.xml><?xml version="1.0" encoding="utf-8"?>
 <p:sldLayout xmlns:a="http://schemas.openxmlformats.org/drawingml/2006/main" xmlns:r="http://schemas.openxmlformats.org/officeDocument/2006/relationships" xmlns:p="http://schemas.openxmlformats.org/presentationml/2006/main" preserve="1">
   <p:cSld name="CLOSING">
     <p:bg>
@@ -4383,7 +4274,6 @@
     <p:sldLayoutId id="2147483650" r:id="rId2"/>
     <p:sldLayoutId id="2147483651" r:id="rId3"/>
     <p:sldLayoutId id="2147483652" r:id="rId4"/>
-    <p:sldLayoutId id="2147483653" r:id="rId5"/>
   </p:sldLayoutIdLst>
   <p:hf sldNum="0" hdr="0" ftr="0" dt="0"/>
   <p:txStyles>
@@ -4882,8 +4772,8 @@
         </p:nvSpPr>
         <p:spPr>
           <a:xfrm>
-            <a:off x="347472" y="438912"/>
-            <a:ext cx="11430000" cy="457200"/>
+            <a:off x="347472" y="384048"/>
+            <a:ext cx="11494008" cy="457200"/>
           </a:xfrm>
           <a:prstGeom prst="rect">
             <a:avLst/>
@@ -4912,16 +4802,16 @@
       </p:sp>
       <p:sp>
         <p:nvSpPr>
-          <p:cNvPr id="3" name="Text 0"/>
+          <p:cNvPr id="3" name="Text 1"/>
           <p:cNvSpPr/>
           <p:nvPr>
-            <p:ph idx="101" type="body" hasCustomPrompt="1"/>
+            <p:ph idx="102" type="body" hasCustomPrompt="1"/>
           </p:nvPr>
         </p:nvSpPr>
         <p:spPr>
           <a:xfrm>
-            <a:off x="347472" y="1014984"/>
-            <a:ext cx="11430000" cy="365760"/>
+            <a:off x="347472" y="978408"/>
+            <a:ext cx="11494008" cy="365760"/>
           </a:xfrm>
           <a:prstGeom prst="rect">
             <a:avLst/>
@@ -4956,8 +4846,8 @@
         </p:nvSpPr>
         <p:spPr>
           <a:xfrm>
-            <a:off x="457200" y="1645920"/>
-            <a:ext cx="6949440" cy="365760"/>
+            <a:off x="347472" y="1645920"/>
+            <a:ext cx="7287768" cy="365760"/>
           </a:xfrm>
           <a:prstGeom prst="rect">
             <a:avLst/>
@@ -5011,7 +4901,7 @@
         </p:blipFill>
         <p:spPr>
           <a:xfrm>
-            <a:off x="640080" y="2057400"/>
+            <a:off x="621792" y="2057400"/>
             <a:ext cx="6309360" cy="764403"/>
           </a:xfrm>
           <a:prstGeom prst="rect">
@@ -5027,8 +4917,8 @@
         </p:nvSpPr>
         <p:spPr>
           <a:xfrm>
-            <a:off x="457200" y="2971800"/>
-            <a:ext cx="7132320" cy="365760"/>
+            <a:off x="347472" y="2971800"/>
+            <a:ext cx="7287768" cy="365760"/>
           </a:xfrm>
           <a:prstGeom prst="rect">
             <a:avLst/>
@@ -5082,7 +4972,7 @@
         </p:blipFill>
         <p:spPr>
           <a:xfrm>
-            <a:off x="640080" y="3401568"/>
+            <a:off x="621792" y="3401568"/>
             <a:ext cx="5852160" cy="1019626"/>
           </a:xfrm>
           <a:prstGeom prst="rect">
@@ -5098,8 +4988,8 @@
         </p:nvSpPr>
         <p:spPr>
           <a:xfrm>
-            <a:off x="457200" y="4617720"/>
-            <a:ext cx="7132320" cy="914400"/>
+            <a:off x="347472" y="4617720"/>
+            <a:ext cx="7287768" cy="914400"/>
           </a:xfrm>
           <a:prstGeom prst="rect">
             <a:avLst/>
@@ -5181,8 +5071,8 @@
           <p:nvPr/>
         </p:nvGraphicFramePr>
         <p:xfrm>
-          <a:off x="7863840" y="1600200"/>
-          <a:ext cx="3931920" cy="3566160"/>
+          <a:off x="8001000" y="1600200"/>
+          <a:ext cx="3840480" cy="3566160"/>
         </p:xfrm>
         <a:graphic xmlns:a="http://schemas.openxmlformats.org/drawingml/2006/main">
           <a:graphicData uri="http://schemas.openxmlformats.org/drawingml/2006/chart">
@@ -5199,7 +5089,7 @@
         <p:spPr>
           <a:xfrm>
             <a:off x="8001000" y="5303520"/>
-            <a:ext cx="3794760" cy="868680"/>
+            <a:ext cx="3840480" cy="868680"/>
           </a:xfrm>
           <a:prstGeom prst="rect">
             <a:avLst/>
@@ -5281,8 +5171,8 @@
         </p:nvSpPr>
         <p:spPr>
           <a:xfrm>
-            <a:off x="347472" y="438912"/>
-            <a:ext cx="11430000" cy="457200"/>
+            <a:off x="347472" y="384048"/>
+            <a:ext cx="11494008" cy="457200"/>
           </a:xfrm>
           <a:prstGeom prst="rect">
             <a:avLst/>
@@ -5311,16 +5201,16 @@
       </p:sp>
       <p:sp>
         <p:nvSpPr>
-          <p:cNvPr id="3" name="Text 0"/>
+          <p:cNvPr id="3" name="Text 1"/>
           <p:cNvSpPr/>
           <p:nvPr>
-            <p:ph idx="101" type="body" hasCustomPrompt="1"/>
+            <p:ph idx="102" type="body" hasCustomPrompt="1"/>
           </p:nvPr>
         </p:nvSpPr>
         <p:spPr>
           <a:xfrm>
-            <a:off x="347472" y="1014984"/>
-            <a:ext cx="11430000" cy="365760"/>
+            <a:off x="347472" y="978408"/>
+            <a:ext cx="11494008" cy="365760"/>
           </a:xfrm>
           <a:prstGeom prst="rect">
             <a:avLst/>
@@ -5355,7 +5245,7 @@
         </p:nvSpPr>
         <p:spPr>
           <a:xfrm>
-            <a:off x="457200" y="1645920"/>
+            <a:off x="347472" y="1645920"/>
             <a:ext cx="3566160" cy="365760"/>
           </a:xfrm>
           <a:prstGeom prst="rect">
@@ -5391,7 +5281,7 @@
         </p:nvSpPr>
         <p:spPr>
           <a:xfrm>
-            <a:off x="457200" y="2103120"/>
+            <a:off x="347472" y="2103120"/>
             <a:ext cx="2852928" cy="365760"/>
           </a:xfrm>
           <a:prstGeom prst="rect">
@@ -5416,7 +5306,7 @@
         </p:nvSpPr>
         <p:spPr>
           <a:xfrm>
-            <a:off x="3310128" y="2103120"/>
+            <a:off x="3200400" y="2103120"/>
             <a:ext cx="356616" cy="365760"/>
           </a:xfrm>
           <a:prstGeom prst="rect">
@@ -5441,7 +5331,7 @@
         </p:nvSpPr>
         <p:spPr>
           <a:xfrm>
-            <a:off x="3666744" y="2103120"/>
+            <a:off x="3557016" y="2103120"/>
             <a:ext cx="356616" cy="365760"/>
           </a:xfrm>
           <a:prstGeom prst="rect">
@@ -5466,7 +5356,7 @@
         </p:nvSpPr>
         <p:spPr>
           <a:xfrm>
-            <a:off x="457200" y="2734056"/>
+            <a:off x="347472" y="2734056"/>
             <a:ext cx="182880" cy="182880"/>
           </a:xfrm>
           <a:prstGeom prst="rect">
@@ -5491,8 +5381,8 @@
         </p:nvSpPr>
         <p:spPr>
           <a:xfrm>
-            <a:off x="749808" y="2670048"/>
-            <a:ext cx="3291840" cy="457200"/>
+            <a:off x="640080" y="2670048"/>
+            <a:ext cx="3273552" cy="457200"/>
           </a:xfrm>
           <a:prstGeom prst="rect">
             <a:avLst/>
@@ -5552,7 +5442,7 @@
         </p:nvSpPr>
         <p:spPr>
           <a:xfrm>
-            <a:off x="457200" y="3209544"/>
+            <a:off x="347472" y="3209544"/>
             <a:ext cx="182880" cy="182880"/>
           </a:xfrm>
           <a:prstGeom prst="rect">
@@ -5577,8 +5467,8 @@
         </p:nvSpPr>
         <p:spPr>
           <a:xfrm>
-            <a:off x="749808" y="3145536"/>
-            <a:ext cx="3291840" cy="457200"/>
+            <a:off x="640080" y="3145536"/>
+            <a:ext cx="3273552" cy="457200"/>
           </a:xfrm>
           <a:prstGeom prst="rect">
             <a:avLst/>
@@ -5638,7 +5528,7 @@
         </p:nvSpPr>
         <p:spPr>
           <a:xfrm>
-            <a:off x="457200" y="3685032"/>
+            <a:off x="347472" y="3685032"/>
             <a:ext cx="182880" cy="182880"/>
           </a:xfrm>
           <a:prstGeom prst="rect">
@@ -5663,8 +5553,8 @@
         </p:nvSpPr>
         <p:spPr>
           <a:xfrm>
-            <a:off x="749808" y="3621024"/>
-            <a:ext cx="3291840" cy="457200"/>
+            <a:off x="640080" y="3621024"/>
+            <a:ext cx="3273552" cy="457200"/>
           </a:xfrm>
           <a:prstGeom prst="rect">
             <a:avLst/>
@@ -5732,7 +5622,7 @@
         </p:blipFill>
         <p:spPr>
           <a:xfrm>
-            <a:off x="457200" y="4160520"/>
+            <a:off x="347472" y="4160520"/>
             <a:ext cx="3566160" cy="986180"/>
           </a:xfrm>
           <a:prstGeom prst="rect">
@@ -5748,7 +5638,7 @@
         </p:nvSpPr>
         <p:spPr>
           <a:xfrm>
-            <a:off x="457200" y="5212080"/>
+            <a:off x="347472" y="5212080"/>
             <a:ext cx="3566160" cy="274320"/>
           </a:xfrm>
           <a:prstGeom prst="rect">
@@ -5784,8 +5674,8 @@
         </p:nvSpPr>
         <p:spPr>
           <a:xfrm>
-            <a:off x="4526280" y="1645920"/>
-            <a:ext cx="3429000" cy="365760"/>
+            <a:off x="4311396" y="1645920"/>
+            <a:ext cx="3566160" cy="365760"/>
           </a:xfrm>
           <a:prstGeom prst="rect">
             <a:avLst/>
@@ -5820,8 +5710,8 @@
         </p:nvSpPr>
         <p:spPr>
           <a:xfrm>
-            <a:off x="4526280" y="2103120"/>
-            <a:ext cx="3429000" cy="566928"/>
+            <a:off x="4311396" y="2103120"/>
+            <a:ext cx="3566160" cy="566928"/>
           </a:xfrm>
           <a:prstGeom prst="rect">
             <a:avLst/>
@@ -5876,7 +5766,7 @@
         </p:nvSpPr>
         <p:spPr>
           <a:xfrm>
-            <a:off x="6240780" y="2670048"/>
+            <a:off x="6094476" y="2670048"/>
             <a:ext cx="0" cy="146304"/>
           </a:xfrm>
           <a:prstGeom prst="line">
@@ -5900,8 +5790,8 @@
         </p:nvSpPr>
         <p:spPr>
           <a:xfrm>
-            <a:off x="4526280" y="2816352"/>
-            <a:ext cx="3429000" cy="566928"/>
+            <a:off x="4311396" y="2816352"/>
+            <a:ext cx="3566160" cy="566928"/>
           </a:xfrm>
           <a:prstGeom prst="rect">
             <a:avLst/>
@@ -5956,7 +5846,7 @@
         </p:nvSpPr>
         <p:spPr>
           <a:xfrm>
-            <a:off x="6240780" y="3383280"/>
+            <a:off x="6094476" y="3383280"/>
             <a:ext cx="0" cy="146304"/>
           </a:xfrm>
           <a:prstGeom prst="line">
@@ -5980,8 +5870,8 @@
         </p:nvSpPr>
         <p:spPr>
           <a:xfrm>
-            <a:off x="4526280" y="3529584"/>
-            <a:ext cx="3429000" cy="566928"/>
+            <a:off x="4311396" y="3529584"/>
+            <a:ext cx="3566160" cy="566928"/>
           </a:xfrm>
           <a:prstGeom prst="rect">
             <a:avLst/>
@@ -6036,7 +5926,7 @@
         </p:nvSpPr>
         <p:spPr>
           <a:xfrm>
-            <a:off x="6240780" y="4096512"/>
+            <a:off x="6094476" y="4096512"/>
             <a:ext cx="0" cy="146304"/>
           </a:xfrm>
           <a:prstGeom prst="line">
@@ -6060,8 +5950,8 @@
         </p:nvSpPr>
         <p:spPr>
           <a:xfrm>
-            <a:off x="4526280" y="4242816"/>
-            <a:ext cx="3429000" cy="566928"/>
+            <a:off x="4311396" y="4242816"/>
+            <a:ext cx="3566160" cy="566928"/>
           </a:xfrm>
           <a:prstGeom prst="rect">
             <a:avLst/>
@@ -6116,8 +6006,8 @@
         </p:nvSpPr>
         <p:spPr>
           <a:xfrm>
-            <a:off x="4526280" y="5029200"/>
-            <a:ext cx="3703320" cy="822960"/>
+            <a:off x="4311396" y="5029200"/>
+            <a:ext cx="3566160" cy="822960"/>
           </a:xfrm>
           <a:prstGeom prst="rect">
             <a:avLst/>
@@ -6172,8 +6062,8 @@
         </p:nvSpPr>
         <p:spPr>
           <a:xfrm>
-            <a:off x="8549640" y="1645920"/>
-            <a:ext cx="3200400" cy="365760"/>
+            <a:off x="8275320" y="1645920"/>
+            <a:ext cx="3566160" cy="365760"/>
           </a:xfrm>
           <a:prstGeom prst="rect">
             <a:avLst/>
@@ -6208,7 +6098,7 @@
         </p:nvSpPr>
         <p:spPr>
           <a:xfrm>
-            <a:off x="8567928" y="2103120"/>
+            <a:off x="8275320" y="2103120"/>
             <a:ext cx="457200" cy="457200"/>
           </a:xfrm>
           <a:prstGeom prst="ellipse">
@@ -6242,8 +6132,8 @@
         </p:nvSpPr>
         <p:spPr>
           <a:xfrm>
-            <a:off x="9189720" y="2148840"/>
-            <a:ext cx="2697480" cy="365760"/>
+            <a:off x="8915400" y="2148840"/>
+            <a:ext cx="2926080" cy="365760"/>
           </a:xfrm>
           <a:prstGeom prst="rect">
             <a:avLst/>
@@ -6281,7 +6171,7 @@
         </p:nvSpPr>
         <p:spPr>
           <a:xfrm>
-            <a:off x="8567928" y="2670048"/>
+            <a:off x="8275320" y="2670048"/>
             <a:ext cx="457200" cy="457200"/>
           </a:xfrm>
           <a:prstGeom prst="ellipse">
@@ -6315,8 +6205,8 @@
         </p:nvSpPr>
         <p:spPr>
           <a:xfrm>
-            <a:off x="9189720" y="2715768"/>
-            <a:ext cx="2697480" cy="365760"/>
+            <a:off x="8915400" y="2715768"/>
+            <a:ext cx="2926080" cy="365760"/>
           </a:xfrm>
           <a:prstGeom prst="rect">
             <a:avLst/>
@@ -6362,7 +6252,7 @@
         </p:nvSpPr>
         <p:spPr>
           <a:xfrm>
-            <a:off x="8567928" y="3236976"/>
+            <a:off x="8275320" y="3236976"/>
             <a:ext cx="457200" cy="457200"/>
           </a:xfrm>
           <a:prstGeom prst="ellipse">
@@ -6396,8 +6286,8 @@
         </p:nvSpPr>
         <p:spPr>
           <a:xfrm>
-            <a:off x="9189720" y="3282696"/>
-            <a:ext cx="2697480" cy="365760"/>
+            <a:off x="8915400" y="3282696"/>
+            <a:ext cx="2926080" cy="365760"/>
           </a:xfrm>
           <a:prstGeom prst="rect">
             <a:avLst/>
@@ -6443,7 +6333,7 @@
         </p:nvSpPr>
         <p:spPr>
           <a:xfrm>
-            <a:off x="8567928" y="3803904"/>
+            <a:off x="8275320" y="3803904"/>
             <a:ext cx="457200" cy="457200"/>
           </a:xfrm>
           <a:prstGeom prst="ellipse">
@@ -6477,8 +6367,8 @@
         </p:nvSpPr>
         <p:spPr>
           <a:xfrm>
-            <a:off x="9189720" y="3849624"/>
-            <a:ext cx="2697480" cy="365760"/>
+            <a:off x="8915400" y="3849624"/>
+            <a:ext cx="2926080" cy="365760"/>
           </a:xfrm>
           <a:prstGeom prst="rect">
             <a:avLst/>
@@ -6524,7 +6414,7 @@
         </p:nvSpPr>
         <p:spPr>
           <a:xfrm>
-            <a:off x="8567928" y="4370832"/>
+            <a:off x="8275320" y="4370832"/>
             <a:ext cx="457200" cy="457200"/>
           </a:xfrm>
           <a:prstGeom prst="ellipse">
@@ -6558,8 +6448,8 @@
         </p:nvSpPr>
         <p:spPr>
           <a:xfrm>
-            <a:off x="9189720" y="4416552"/>
-            <a:ext cx="2697480" cy="365760"/>
+            <a:off x="8915400" y="4416552"/>
+            <a:ext cx="2926080" cy="365760"/>
           </a:xfrm>
           <a:prstGeom prst="rect">
             <a:avLst/>
@@ -6605,8 +6495,8 @@
         </p:nvSpPr>
         <p:spPr>
           <a:xfrm>
-            <a:off x="457200" y="5897880"/>
-            <a:ext cx="11338560" cy="365760"/>
+            <a:off x="347472" y="5897880"/>
+            <a:ext cx="11494008" cy="365760"/>
           </a:xfrm>
           <a:prstGeom prst="rect">
             <a:avLst/>
@@ -6679,8 +6569,8 @@
         </p:nvSpPr>
         <p:spPr>
           <a:xfrm>
-            <a:off x="347472" y="438912"/>
-            <a:ext cx="11430000" cy="457200"/>
+            <a:off x="347472" y="384048"/>
+            <a:ext cx="11494008" cy="457200"/>
           </a:xfrm>
           <a:prstGeom prst="rect">
             <a:avLst/>
@@ -6709,16 +6599,16 @@
       </p:sp>
       <p:sp>
         <p:nvSpPr>
-          <p:cNvPr id="3" name="Text 0"/>
+          <p:cNvPr id="3" name="Text 1"/>
           <p:cNvSpPr/>
           <p:nvPr>
-            <p:ph idx="101" type="body" hasCustomPrompt="1"/>
+            <p:ph idx="102" type="body" hasCustomPrompt="1"/>
           </p:nvPr>
         </p:nvSpPr>
         <p:spPr>
           <a:xfrm>
-            <a:off x="347472" y="1014984"/>
-            <a:ext cx="11430000" cy="365760"/>
+            <a:off x="347472" y="978408"/>
+            <a:ext cx="11494008" cy="365760"/>
           </a:xfrm>
           <a:prstGeom prst="rect">
             <a:avLst/>
@@ -6753,7 +6643,7 @@
         </p:nvSpPr>
         <p:spPr>
           <a:xfrm>
-            <a:off x="457200" y="2331720"/>
+            <a:off x="347472" y="2331720"/>
             <a:ext cx="1463040" cy="731520"/>
           </a:xfrm>
           <a:prstGeom prst="rect">
@@ -6809,7 +6699,7 @@
         </p:nvSpPr>
         <p:spPr>
           <a:xfrm>
-            <a:off x="2331720" y="2331720"/>
+            <a:off x="2298802" y="2331720"/>
             <a:ext cx="1463040" cy="731520"/>
           </a:xfrm>
           <a:prstGeom prst="rect">
@@ -6865,7 +6755,7 @@
         </p:nvSpPr>
         <p:spPr>
           <a:xfrm>
-            <a:off x="4251960" y="1691640"/>
+            <a:off x="4250131" y="1691640"/>
             <a:ext cx="1920240" cy="731520"/>
           </a:xfrm>
           <a:prstGeom prst="rect">
@@ -6921,7 +6811,7 @@
         </p:nvSpPr>
         <p:spPr>
           <a:xfrm>
-            <a:off x="4251960" y="2971800"/>
+            <a:off x="4250131" y="2971800"/>
             <a:ext cx="1920240" cy="731520"/>
           </a:xfrm>
           <a:prstGeom prst="rect">
@@ -6977,7 +6867,7 @@
         </p:nvSpPr>
         <p:spPr>
           <a:xfrm>
-            <a:off x="6629400" y="2331720"/>
+            <a:off x="6658661" y="2331720"/>
             <a:ext cx="1463040" cy="731520"/>
           </a:xfrm>
           <a:prstGeom prst="rect">
@@ -7033,7 +6923,7 @@
         </p:nvSpPr>
         <p:spPr>
           <a:xfrm>
-            <a:off x="8503920" y="2331720"/>
+            <a:off x="8609990" y="2331720"/>
             <a:ext cx="1463040" cy="731520"/>
           </a:xfrm>
           <a:prstGeom prst="rect">
@@ -7089,7 +6979,7 @@
         </p:nvSpPr>
         <p:spPr>
           <a:xfrm>
-            <a:off x="10378440" y="2331720"/>
+            <a:off x="10561320" y="2331720"/>
             <a:ext cx="1280160" cy="731520"/>
           </a:xfrm>
           <a:prstGeom prst="rect">
@@ -7131,8 +7021,8 @@
         </p:nvSpPr>
         <p:spPr>
           <a:xfrm>
-            <a:off x="1920240" y="2697480"/>
-            <a:ext cx="411480" cy="0"/>
+            <a:off x="1810512" y="2697480"/>
+            <a:ext cx="488290" cy="0"/>
           </a:xfrm>
           <a:prstGeom prst="line">
             <a:avLst/>
@@ -7155,8 +7045,8 @@
         </p:nvSpPr>
         <p:spPr>
           <a:xfrm>
-            <a:off x="3794760" y="2697480"/>
-            <a:ext cx="182880" cy="0"/>
+            <a:off x="3761842" y="2697480"/>
+            <a:ext cx="244145" cy="0"/>
           </a:xfrm>
           <a:prstGeom prst="line">
             <a:avLst/>
@@ -7178,7 +7068,7 @@
         </p:nvSpPr>
         <p:spPr>
           <a:xfrm>
-            <a:off x="3977640" y="2057400"/>
+            <a:off x="4005986" y="2057400"/>
             <a:ext cx="0" cy="1280160"/>
           </a:xfrm>
           <a:prstGeom prst="line">
@@ -7201,8 +7091,8 @@
         </p:nvSpPr>
         <p:spPr>
           <a:xfrm>
-            <a:off x="3977640" y="2057400"/>
-            <a:ext cx="274320" cy="0"/>
+            <a:off x="4005986" y="2057400"/>
+            <a:ext cx="244145" cy="0"/>
           </a:xfrm>
           <a:prstGeom prst="line">
             <a:avLst/>
@@ -7225,8 +7115,8 @@
         </p:nvSpPr>
         <p:spPr>
           <a:xfrm>
-            <a:off x="3977640" y="3337560"/>
-            <a:ext cx="274320" cy="0"/>
+            <a:off x="4005986" y="3337560"/>
+            <a:ext cx="244145" cy="0"/>
           </a:xfrm>
           <a:prstGeom prst="line">
             <a:avLst/>
@@ -7249,8 +7139,8 @@
         </p:nvSpPr>
         <p:spPr>
           <a:xfrm>
-            <a:off x="6172200" y="2057400"/>
-            <a:ext cx="228600" cy="0"/>
+            <a:off x="6170371" y="2057400"/>
+            <a:ext cx="244145" cy="0"/>
           </a:xfrm>
           <a:prstGeom prst="line">
             <a:avLst/>
@@ -7272,8 +7162,8 @@
         </p:nvSpPr>
         <p:spPr>
           <a:xfrm>
-            <a:off x="6172200" y="3337560"/>
-            <a:ext cx="228600" cy="0"/>
+            <a:off x="6170371" y="3337560"/>
+            <a:ext cx="244145" cy="0"/>
           </a:xfrm>
           <a:prstGeom prst="line">
             <a:avLst/>
@@ -7295,7 +7185,7 @@
         </p:nvSpPr>
         <p:spPr>
           <a:xfrm>
-            <a:off x="6400800" y="2057400"/>
+            <a:off x="6414516" y="2057400"/>
             <a:ext cx="0" cy="1280160"/>
           </a:xfrm>
           <a:prstGeom prst="line">
@@ -7318,8 +7208,8 @@
         </p:nvSpPr>
         <p:spPr>
           <a:xfrm>
-            <a:off x="6400800" y="2697480"/>
-            <a:ext cx="228600" cy="0"/>
+            <a:off x="6414516" y="2697480"/>
+            <a:ext cx="244145" cy="0"/>
           </a:xfrm>
           <a:prstGeom prst="line">
             <a:avLst/>
@@ -7342,8 +7232,8 @@
         </p:nvSpPr>
         <p:spPr>
           <a:xfrm>
-            <a:off x="8092440" y="2697480"/>
-            <a:ext cx="411480" cy="0"/>
+            <a:off x="8121701" y="2697480"/>
+            <a:ext cx="488290" cy="0"/>
           </a:xfrm>
           <a:prstGeom prst="line">
             <a:avLst/>
@@ -7366,8 +7256,8 @@
         </p:nvSpPr>
         <p:spPr>
           <a:xfrm>
-            <a:off x="9966960" y="2697480"/>
-            <a:ext cx="411480" cy="0"/>
+            <a:off x="10073030" y="2697480"/>
+            <a:ext cx="488290" cy="0"/>
           </a:xfrm>
           <a:prstGeom prst="line">
             <a:avLst/>
@@ -7398,7 +7288,7 @@
         </p:blipFill>
         <p:spPr>
           <a:xfrm>
-            <a:off x="457200" y="4114800"/>
+            <a:off x="347472" y="4114800"/>
             <a:ext cx="5486400" cy="837731"/>
           </a:xfrm>
           <a:prstGeom prst="rect">
@@ -7414,8 +7304,8 @@
         </p:nvSpPr>
         <p:spPr>
           <a:xfrm>
-            <a:off x="457200" y="5029200"/>
-            <a:ext cx="5943600" cy="640080"/>
+            <a:off x="347472" y="5029200"/>
+            <a:ext cx="5486400" cy="640080"/>
           </a:xfrm>
           <a:prstGeom prst="rect">
             <a:avLst/>
@@ -7484,8 +7374,8 @@
         </p:nvSpPr>
         <p:spPr>
           <a:xfrm>
-            <a:off x="457200" y="5760720"/>
-            <a:ext cx="5943600" cy="594360"/>
+            <a:off x="347472" y="5760720"/>
+            <a:ext cx="5486400" cy="365760"/>
           </a:xfrm>
           <a:prstGeom prst="rect">
             <a:avLst/>
@@ -7531,8 +7421,8 @@
         </p:nvSpPr>
         <p:spPr>
           <a:xfrm>
-            <a:off x="6766560" y="4160520"/>
-            <a:ext cx="5029200" cy="365760"/>
+            <a:off x="6355080" y="4114800"/>
+            <a:ext cx="5486400" cy="365760"/>
           </a:xfrm>
           <a:prstGeom prst="rect">
             <a:avLst/>
@@ -7567,7 +7457,7 @@
         </p:nvSpPr>
         <p:spPr>
           <a:xfrm>
-            <a:off x="6766560" y="4617720"/>
+            <a:off x="6355080" y="4572000"/>
             <a:ext cx="1463040" cy="548640"/>
           </a:xfrm>
           <a:prstGeom prst="rect">
@@ -7603,8 +7493,8 @@
         </p:nvSpPr>
         <p:spPr>
           <a:xfrm>
-            <a:off x="6766560" y="5212080"/>
-            <a:ext cx="1554480" cy="320040"/>
+            <a:off x="6355080" y="5166360"/>
+            <a:ext cx="1828800" cy="320040"/>
           </a:xfrm>
           <a:prstGeom prst="rect">
             <a:avLst/>
@@ -7639,8 +7529,8 @@
         </p:nvSpPr>
         <p:spPr>
           <a:xfrm>
-            <a:off x="7909560" y="4892040"/>
-            <a:ext cx="502920" cy="0"/>
+            <a:off x="7589520" y="4846320"/>
+            <a:ext cx="457200" cy="0"/>
           </a:xfrm>
           <a:prstGeom prst="line">
             <a:avLst/>
@@ -7663,7 +7553,7 @@
         </p:nvSpPr>
         <p:spPr>
           <a:xfrm>
-            <a:off x="8503920" y="4617720"/>
+            <a:off x="8183880" y="4572000"/>
             <a:ext cx="1463040" cy="548640"/>
           </a:xfrm>
           <a:prstGeom prst="rect">
@@ -7699,8 +7589,8 @@
         </p:nvSpPr>
         <p:spPr>
           <a:xfrm>
-            <a:off x="8503920" y="5212080"/>
-            <a:ext cx="1554480" cy="320040"/>
+            <a:off x="8183880" y="5166360"/>
+            <a:ext cx="1828800" cy="320040"/>
           </a:xfrm>
           <a:prstGeom prst="rect">
             <a:avLst/>
@@ -7735,8 +7625,8 @@
         </p:nvSpPr>
         <p:spPr>
           <a:xfrm>
-            <a:off x="9646920" y="4892040"/>
-            <a:ext cx="502920" cy="0"/>
+            <a:off x="9418320" y="4846320"/>
+            <a:ext cx="457200" cy="0"/>
           </a:xfrm>
           <a:prstGeom prst="line">
             <a:avLst/>
@@ -7759,7 +7649,7 @@
         </p:nvSpPr>
         <p:spPr>
           <a:xfrm>
-            <a:off x="10241280" y="4617720"/>
+            <a:off x="10012680" y="4572000"/>
             <a:ext cx="1463040" cy="548640"/>
           </a:xfrm>
           <a:prstGeom prst="rect">
@@ -7795,8 +7685,8 @@
         </p:nvSpPr>
         <p:spPr>
           <a:xfrm>
-            <a:off x="10241280" y="5212080"/>
-            <a:ext cx="1554480" cy="320040"/>
+            <a:off x="10012680" y="5166360"/>
+            <a:ext cx="1828800" cy="320040"/>
           </a:xfrm>
           <a:prstGeom prst="rect">
             <a:avLst/>
@@ -7858,8 +7748,8 @@
         </p:nvSpPr>
         <p:spPr>
           <a:xfrm>
-            <a:off x="347472" y="438912"/>
-            <a:ext cx="11430000" cy="457200"/>
+            <a:off x="347472" y="384048"/>
+            <a:ext cx="11494008" cy="457200"/>
           </a:xfrm>
           <a:prstGeom prst="rect">
             <a:avLst/>
@@ -7888,16 +7778,16 @@
       </p:sp>
       <p:sp>
         <p:nvSpPr>
-          <p:cNvPr id="3" name="Text 0"/>
+          <p:cNvPr id="3" name="Text 1"/>
           <p:cNvSpPr/>
           <p:nvPr>
-            <p:ph idx="101" type="body" hasCustomPrompt="1"/>
+            <p:ph idx="102" type="body" hasCustomPrompt="1"/>
           </p:nvPr>
         </p:nvSpPr>
         <p:spPr>
           <a:xfrm>
-            <a:off x="347472" y="1014984"/>
-            <a:ext cx="11430000" cy="365760"/>
+            <a:off x="347472" y="978408"/>
+            <a:ext cx="11494008" cy="365760"/>
           </a:xfrm>
           <a:prstGeom prst="rect">
             <a:avLst/>
@@ -7932,8 +7822,8 @@
         </p:nvSpPr>
         <p:spPr>
           <a:xfrm>
-            <a:off x="457200" y="1645920"/>
-            <a:ext cx="5394960" cy="365760"/>
+            <a:off x="347472" y="1645920"/>
+            <a:ext cx="5486400" cy="365760"/>
           </a:xfrm>
           <a:prstGeom prst="rect">
             <a:avLst/>
@@ -7979,8 +7869,8 @@
         </p:nvSpPr>
         <p:spPr>
           <a:xfrm>
-            <a:off x="457200" y="2057400"/>
-            <a:ext cx="5394960" cy="320040"/>
+            <a:off x="347472" y="2057400"/>
+            <a:ext cx="5486400" cy="320040"/>
           </a:xfrm>
           <a:prstGeom prst="rect">
             <a:avLst/>
@@ -8023,8 +7913,8 @@
         </p:blipFill>
         <p:spPr>
           <a:xfrm>
-            <a:off x="457200" y="2560320"/>
-            <a:ext cx="5394960" cy="784344"/>
+            <a:off x="347472" y="2514600"/>
+            <a:ext cx="5486400" cy="797638"/>
           </a:xfrm>
           <a:prstGeom prst="rect">
             <a:avLst/>
@@ -8039,8 +7929,8 @@
         </p:nvSpPr>
         <p:spPr>
           <a:xfrm>
-            <a:off x="457200" y="3611880"/>
-            <a:ext cx="5394960" cy="365760"/>
+            <a:off x="347472" y="3611880"/>
+            <a:ext cx="5486400" cy="365760"/>
           </a:xfrm>
           <a:prstGeom prst="rect">
             <a:avLst/>
@@ -8075,8 +7965,8 @@
         </p:nvSpPr>
         <p:spPr>
           <a:xfrm>
-            <a:off x="457200" y="4023360"/>
-            <a:ext cx="5394960" cy="1417320"/>
+            <a:off x="347472" y="4023360"/>
+            <a:ext cx="5486400" cy="1417320"/>
           </a:xfrm>
           <a:prstGeom prst="rect">
             <a:avLst/>
@@ -8207,7 +8097,7 @@
         </p:nvSpPr>
         <p:spPr>
           <a:xfrm>
-            <a:off x="6309360" y="1645920"/>
+            <a:off x="6355080" y="1645920"/>
             <a:ext cx="5486400" cy="365760"/>
           </a:xfrm>
           <a:prstGeom prst="rect">
@@ -8250,7 +8140,7 @@
           </p:nvPr>
         </p:nvGraphicFramePr>
         <p:xfrm>
-          <a:off x="6309360" y="2103120"/>
+          <a:off x="6355080" y="2103120"/>
           <a:ext cx="5486400" cy="914400"/>
         </p:xfrm>
         <a:graphic>
@@ -8917,7 +8807,7 @@
         </p:nvSpPr>
         <p:spPr>
           <a:xfrm>
-            <a:off x="6309360" y="4023360"/>
+            <a:off x="6355080" y="4023360"/>
             <a:ext cx="5486400" cy="640080"/>
           </a:xfrm>
           <a:prstGeom prst="rect">
@@ -8964,8 +8854,8 @@
         </p:nvSpPr>
         <p:spPr>
           <a:xfrm>
-            <a:off x="457200" y="5532120"/>
-            <a:ext cx="11338560" cy="777240"/>
+            <a:off x="347472" y="5532120"/>
+            <a:ext cx="11494008" cy="777240"/>
           </a:xfrm>
           <a:prstGeom prst="rect">
             <a:avLst/>
@@ -9061,8 +8951,8 @@
         </p:nvSpPr>
         <p:spPr>
           <a:xfrm>
-            <a:off x="347472" y="438912"/>
-            <a:ext cx="11430000" cy="457200"/>
+            <a:off x="347472" y="384048"/>
+            <a:ext cx="11494008" cy="457200"/>
           </a:xfrm>
           <a:prstGeom prst="rect">
             <a:avLst/>
@@ -9091,16 +8981,16 @@
       </p:sp>
       <p:sp>
         <p:nvSpPr>
-          <p:cNvPr id="3" name="Text 0"/>
+          <p:cNvPr id="3" name="Text 1"/>
           <p:cNvSpPr/>
           <p:nvPr>
-            <p:ph idx="101" type="body" hasCustomPrompt="1"/>
+            <p:ph idx="102" type="body" hasCustomPrompt="1"/>
           </p:nvPr>
         </p:nvSpPr>
         <p:spPr>
           <a:xfrm>
-            <a:off x="347472" y="1014984"/>
-            <a:ext cx="11430000" cy="365760"/>
+            <a:off x="347472" y="978408"/>
+            <a:ext cx="11494008" cy="365760"/>
           </a:xfrm>
           <a:prstGeom prst="rect">
             <a:avLst/>
@@ -9143,8 +9033,8 @@
         </p:blipFill>
         <p:spPr>
           <a:xfrm>
-            <a:off x="457200" y="1645920"/>
-            <a:ext cx="6400800" cy="489907"/>
+            <a:off x="347472" y="1645920"/>
+            <a:ext cx="5486400" cy="419921"/>
           </a:xfrm>
           <a:prstGeom prst="rect">
             <a:avLst/>
@@ -9159,8 +9049,8 @@
         </p:nvSpPr>
         <p:spPr>
           <a:xfrm>
-            <a:off x="7132320" y="1691640"/>
-            <a:ext cx="4663440" cy="411480"/>
+            <a:off x="347472" y="2120705"/>
+            <a:ext cx="5486400" cy="274320"/>
           </a:xfrm>
           <a:prstGeom prst="rect">
             <a:avLst/>
@@ -9169,7 +9059,7 @@
           <a:ln/>
         </p:spPr>
         <p:txBody>
-          <a:bodyPr wrap="square" lIns="0" tIns="0" rIns="0" bIns="0" rtlCol="0" anchor="ctr"/>
+          <a:bodyPr wrap="square" lIns="0" tIns="0" rIns="0" bIns="0" rtlCol="0" anchor="t"/>
           <a:lstStyle/>
           <a:p>
             <a:pPr algn="l" indent="0" marL="0">
@@ -9202,20 +9092,20 @@
           </p:nvPr>
         </p:nvGraphicFramePr>
         <p:xfrm>
-          <a:off x="457200" y="2423160"/>
-          <a:ext cx="6035040" cy="914400"/>
+          <a:off x="347472" y="2514600"/>
+          <a:ext cx="5486400" cy="914400"/>
         </p:xfrm>
         <a:graphic>
           <a:graphicData uri="http://schemas.openxmlformats.org/drawingml/2006/table">
             <a:tbl>
               <a:tblPr/>
               <a:tblGrid>
-                <a:gridCol w="1234440"/>
-                <a:gridCol w="868680"/>
+                <a:gridCol w="1188720"/>
+                <a:gridCol w="777240"/>
+                <a:gridCol w="822960"/>
+                <a:gridCol w="822960"/>
                 <a:gridCol w="914400"/>
-                <a:gridCol w="914400"/>
-                <a:gridCol w="1005840"/>
-                <a:gridCol w="1097280"/>
+                <a:gridCol w="960120"/>
               </a:tblGrid>
               <a:tr h="347472">
                 <a:tc>
@@ -9462,7 +9352,7 @@
                             <a:schemeClr val="tx1"/>
                           </a:solidFill>
                         </a:rPr>
-                        <a:t>정상 오경보</a:t>
+                        <a:t>오경보</a:t>
                       </a:r>
                       <a:endParaRPr lang="en-US" sz="1400" dirty="0"/>
                     </a:p>
@@ -10263,8 +10153,8 @@
         </p:nvSpPr>
         <p:spPr>
           <a:xfrm>
-            <a:off x="457200" y="3977640"/>
-            <a:ext cx="6035040" cy="2103120"/>
+            <a:off x="347472" y="4069080"/>
+            <a:ext cx="5486400" cy="2103120"/>
           </a:xfrm>
           <a:prstGeom prst="rect">
             <a:avLst/>
@@ -10408,8 +10298,8 @@
           <p:nvPr/>
         </p:nvGraphicFramePr>
         <p:xfrm>
-          <a:off x="6949440" y="2331720"/>
-          <a:ext cx="4846320" cy="3657600"/>
+          <a:off x="6355080" y="1645920"/>
+          <a:ext cx="5486400" cy="4343400"/>
         </p:xfrm>
         <a:graphic xmlns:a="http://schemas.openxmlformats.org/drawingml/2006/main">
           <a:graphicData uri="http://schemas.openxmlformats.org/drawingml/2006/chart">
@@ -10452,8 +10342,8 @@
         </p:nvSpPr>
         <p:spPr>
           <a:xfrm>
-            <a:off x="347472" y="438912"/>
-            <a:ext cx="11430000" cy="457200"/>
+            <a:off x="347472" y="384048"/>
+            <a:ext cx="11494008" cy="457200"/>
           </a:xfrm>
           <a:prstGeom prst="rect">
             <a:avLst/>
@@ -10482,16 +10372,16 @@
       </p:sp>
       <p:sp>
         <p:nvSpPr>
-          <p:cNvPr id="3" name="Text 0"/>
+          <p:cNvPr id="3" name="Text 1"/>
           <p:cNvSpPr/>
           <p:nvPr>
-            <p:ph idx="101" type="body" hasCustomPrompt="1"/>
+            <p:ph idx="102" type="body" hasCustomPrompt="1"/>
           </p:nvPr>
         </p:nvSpPr>
         <p:spPr>
           <a:xfrm>
-            <a:off x="347472" y="1014984"/>
-            <a:ext cx="11430000" cy="365760"/>
+            <a:off x="347472" y="978408"/>
+            <a:ext cx="11494008" cy="365760"/>
           </a:xfrm>
           <a:prstGeom prst="rect">
             <a:avLst/>
@@ -10534,7 +10424,7 @@
         </p:blipFill>
         <p:spPr>
           <a:xfrm>
-            <a:off x="365760" y="1600200"/>
+            <a:off x="347472" y="1600200"/>
             <a:ext cx="7314374" cy="4343400"/>
           </a:xfrm>
           <a:prstGeom prst="rect">
@@ -10550,8 +10440,8 @@
         </p:nvSpPr>
         <p:spPr>
           <a:xfrm>
-            <a:off x="8001000" y="1691640"/>
-            <a:ext cx="3794760" cy="548640"/>
+            <a:off x="8001000" y="1645920"/>
+            <a:ext cx="3840480" cy="548640"/>
           </a:xfrm>
           <a:prstGeom prst="rect">
             <a:avLst/>
@@ -10586,8 +10476,8 @@
         </p:nvSpPr>
         <p:spPr>
           <a:xfrm>
-            <a:off x="8001000" y="2267712"/>
-            <a:ext cx="3794760" cy="548640"/>
+            <a:off x="8001000" y="2221992"/>
+            <a:ext cx="3840480" cy="548640"/>
           </a:xfrm>
           <a:prstGeom prst="rect">
             <a:avLst/>
@@ -10622,8 +10512,8 @@
         </p:nvSpPr>
         <p:spPr>
           <a:xfrm>
-            <a:off x="8001000" y="3017520"/>
-            <a:ext cx="3794760" cy="548640"/>
+            <a:off x="8001000" y="2971800"/>
+            <a:ext cx="3840480" cy="548640"/>
           </a:xfrm>
           <a:prstGeom prst="rect">
             <a:avLst/>
@@ -10658,8 +10548,8 @@
         </p:nvSpPr>
         <p:spPr>
           <a:xfrm>
-            <a:off x="8001000" y="3593592"/>
-            <a:ext cx="3794760" cy="548640"/>
+            <a:off x="8001000" y="3547872"/>
+            <a:ext cx="3840480" cy="548640"/>
           </a:xfrm>
           <a:prstGeom prst="rect">
             <a:avLst/>
@@ -10694,8 +10584,8 @@
         </p:nvSpPr>
         <p:spPr>
           <a:xfrm>
-            <a:off x="8001000" y="4343400"/>
-            <a:ext cx="3794760" cy="548640"/>
+            <a:off x="8001000" y="4297680"/>
+            <a:ext cx="3840480" cy="548640"/>
           </a:xfrm>
           <a:prstGeom prst="rect">
             <a:avLst/>
@@ -10730,8 +10620,8 @@
         </p:nvSpPr>
         <p:spPr>
           <a:xfrm>
-            <a:off x="8001000" y="4919472"/>
-            <a:ext cx="3794760" cy="548640"/>
+            <a:off x="8001000" y="4873752"/>
+            <a:ext cx="3840480" cy="548640"/>
           </a:xfrm>
           <a:prstGeom prst="rect">
             <a:avLst/>
@@ -10766,8 +10656,8 @@
         </p:nvSpPr>
         <p:spPr>
           <a:xfrm>
-            <a:off x="365760" y="6080760"/>
-            <a:ext cx="11430000" cy="274320"/>
+            <a:off x="347472" y="6035040"/>
+            <a:ext cx="11494008" cy="274320"/>
           </a:xfrm>
           <a:prstGeom prst="rect">
             <a:avLst/>
@@ -10829,8 +10719,8 @@
         </p:nvSpPr>
         <p:spPr>
           <a:xfrm>
-            <a:off x="347472" y="438912"/>
-            <a:ext cx="11430000" cy="457200"/>
+            <a:off x="347472" y="384048"/>
+            <a:ext cx="11494008" cy="457200"/>
           </a:xfrm>
           <a:prstGeom prst="rect">
             <a:avLst/>
@@ -10859,16 +10749,16 @@
       </p:sp>
       <p:sp>
         <p:nvSpPr>
-          <p:cNvPr id="3" name="Text 0"/>
+          <p:cNvPr id="3" name="Text 1"/>
           <p:cNvSpPr/>
           <p:nvPr>
-            <p:ph idx="101" type="body" hasCustomPrompt="1"/>
+            <p:ph idx="102" type="body" hasCustomPrompt="1"/>
           </p:nvPr>
         </p:nvSpPr>
         <p:spPr>
           <a:xfrm>
-            <a:off x="347472" y="1014984"/>
-            <a:ext cx="11430000" cy="365760"/>
+            <a:off x="347472" y="978408"/>
+            <a:ext cx="11494008" cy="365760"/>
           </a:xfrm>
           <a:prstGeom prst="rect">
             <a:avLst/>
@@ -10911,8 +10801,8 @@
         </p:blipFill>
         <p:spPr>
           <a:xfrm>
-            <a:off x="822960" y="1554480"/>
-            <a:ext cx="10515600" cy="4262862"/>
+            <a:off x="882396" y="1554480"/>
+            <a:ext cx="10424160" cy="4225794"/>
           </a:xfrm>
           <a:prstGeom prst="rect">
             <a:avLst/>
@@ -10927,8 +10817,8 @@
         </p:nvSpPr>
         <p:spPr>
           <a:xfrm>
-            <a:off x="822960" y="5943600"/>
-            <a:ext cx="10972800" cy="685800"/>
+            <a:off x="347472" y="5870448"/>
+            <a:ext cx="11494008" cy="685800"/>
           </a:xfrm>
           <a:prstGeom prst="rect">
             <a:avLst/>
@@ -11010,8 +10900,8 @@
         </p:nvSpPr>
         <p:spPr>
           <a:xfrm>
-            <a:off x="347472" y="438912"/>
-            <a:ext cx="11430000" cy="457200"/>
+            <a:off x="347472" y="384048"/>
+            <a:ext cx="11494008" cy="457200"/>
           </a:xfrm>
           <a:prstGeom prst="rect">
             <a:avLst/>
@@ -11040,16 +10930,16 @@
       </p:sp>
       <p:sp>
         <p:nvSpPr>
-          <p:cNvPr id="3" name="Text 0"/>
+          <p:cNvPr id="3" name="Text 1"/>
           <p:cNvSpPr/>
           <p:nvPr>
-            <p:ph idx="101" type="body" hasCustomPrompt="1"/>
+            <p:ph idx="102" type="body" hasCustomPrompt="1"/>
           </p:nvPr>
         </p:nvSpPr>
         <p:spPr>
           <a:xfrm>
-            <a:off x="347472" y="1014984"/>
-            <a:ext cx="11430000" cy="365760"/>
+            <a:off x="347472" y="978408"/>
+            <a:ext cx="11494008" cy="365760"/>
           </a:xfrm>
           <a:prstGeom prst="rect">
             <a:avLst/>
@@ -11092,7 +10982,7 @@
         </p:blipFill>
         <p:spPr>
           <a:xfrm>
-            <a:off x="365760" y="1554480"/>
+            <a:off x="347472" y="1600200"/>
             <a:ext cx="7395442" cy="4343400"/>
           </a:xfrm>
           <a:prstGeom prst="rect">
@@ -11109,7 +10999,7 @@
         <p:spPr>
           <a:xfrm>
             <a:off x="8001000" y="1645920"/>
-            <a:ext cx="3794760" cy="914400"/>
+            <a:ext cx="3840480" cy="914400"/>
           </a:xfrm>
           <a:prstGeom prst="rect">
             <a:avLst/>
@@ -11182,7 +11072,7 @@
         <p:spPr>
           <a:xfrm>
             <a:off x="8001000" y="2697480"/>
-            <a:ext cx="3794760" cy="914400"/>
+            <a:ext cx="3840480" cy="914400"/>
           </a:xfrm>
           <a:prstGeom prst="rect">
             <a:avLst/>
@@ -11255,7 +11145,7 @@
         <p:spPr>
           <a:xfrm>
             <a:off x="8001000" y="3749040"/>
-            <a:ext cx="3794760" cy="914400"/>
+            <a:ext cx="3840480" cy="914400"/>
           </a:xfrm>
           <a:prstGeom prst="rect">
             <a:avLst/>
@@ -11311,7 +11201,7 @@
         <p:spPr>
           <a:xfrm>
             <a:off x="8001000" y="4800600"/>
-            <a:ext cx="3794760" cy="914400"/>
+            <a:ext cx="3840480" cy="914400"/>
           </a:xfrm>
           <a:prstGeom prst="rect">
             <a:avLst/>
@@ -11366,8 +11256,8 @@
         </p:nvSpPr>
         <p:spPr>
           <a:xfrm>
-            <a:off x="365760" y="5989320"/>
-            <a:ext cx="11430000" cy="502920"/>
+            <a:off x="347472" y="5989320"/>
+            <a:ext cx="11494008" cy="502920"/>
           </a:xfrm>
           <a:prstGeom prst="rect">
             <a:avLst/>
@@ -11429,8 +11319,8 @@
         </p:nvSpPr>
         <p:spPr>
           <a:xfrm>
-            <a:off x="347472" y="438912"/>
-            <a:ext cx="11430000" cy="457200"/>
+            <a:off x="347472" y="384048"/>
+            <a:ext cx="11494008" cy="457200"/>
           </a:xfrm>
           <a:prstGeom prst="rect">
             <a:avLst/>
@@ -11459,16 +11349,16 @@
       </p:sp>
       <p:sp>
         <p:nvSpPr>
-          <p:cNvPr id="3" name="Text 0"/>
+          <p:cNvPr id="3" name="Text 1"/>
           <p:cNvSpPr/>
           <p:nvPr>
-            <p:ph idx="101" type="body" hasCustomPrompt="1"/>
+            <p:ph idx="102" type="body" hasCustomPrompt="1"/>
           </p:nvPr>
         </p:nvSpPr>
         <p:spPr>
           <a:xfrm>
-            <a:off x="347472" y="1014984"/>
-            <a:ext cx="11430000" cy="365760"/>
+            <a:off x="347472" y="978408"/>
+            <a:ext cx="11494008" cy="365760"/>
           </a:xfrm>
           <a:prstGeom prst="rect">
             <a:avLst/>
@@ -11511,7 +11401,7 @@
         </p:blipFill>
         <p:spPr>
           <a:xfrm>
-            <a:off x="1325880" y="1508760"/>
+            <a:off x="1339596" y="1508760"/>
             <a:ext cx="9509760" cy="3855110"/>
           </a:xfrm>
           <a:prstGeom prst="rect">
@@ -11527,8 +11417,8 @@
         </p:nvSpPr>
         <p:spPr>
           <a:xfrm>
-            <a:off x="457200" y="5440680"/>
-            <a:ext cx="11338560" cy="1051560"/>
+            <a:off x="347472" y="5440680"/>
+            <a:ext cx="11494008" cy="1051560"/>
           </a:xfrm>
           <a:prstGeom prst="rect">
             <a:avLst/>
@@ -11669,8 +11559,8 @@
         </p:nvSpPr>
         <p:spPr>
           <a:xfrm>
-            <a:off x="347472" y="438912"/>
-            <a:ext cx="11430000" cy="457200"/>
+            <a:off x="347472" y="384048"/>
+            <a:ext cx="11494008" cy="457200"/>
           </a:xfrm>
           <a:prstGeom prst="rect">
             <a:avLst/>
@@ -11699,16 +11589,16 @@
       </p:sp>
       <p:sp>
         <p:nvSpPr>
-          <p:cNvPr id="3" name="Text 0"/>
+          <p:cNvPr id="3" name="Text 1"/>
           <p:cNvSpPr/>
           <p:nvPr>
-            <p:ph idx="101" type="body" hasCustomPrompt="1"/>
+            <p:ph idx="102" type="body" hasCustomPrompt="1"/>
           </p:nvPr>
         </p:nvSpPr>
         <p:spPr>
           <a:xfrm>
-            <a:off x="347472" y="1014984"/>
-            <a:ext cx="11430000" cy="365760"/>
+            <a:off x="347472" y="978408"/>
+            <a:ext cx="11494008" cy="365760"/>
           </a:xfrm>
           <a:prstGeom prst="rect">
             <a:avLst/>
@@ -11751,7 +11641,7 @@
         </p:blipFill>
         <p:spPr>
           <a:xfrm>
-            <a:off x="1508760" y="1481328"/>
+            <a:off x="1522476" y="1481328"/>
             <a:ext cx="9144000" cy="3988191"/>
           </a:xfrm>
           <a:prstGeom prst="rect">
@@ -11767,8 +11657,8 @@
         </p:nvSpPr>
         <p:spPr>
           <a:xfrm>
-            <a:off x="457200" y="5532120"/>
-            <a:ext cx="11338560" cy="1005840"/>
+            <a:off x="347472" y="5532120"/>
+            <a:ext cx="11494008" cy="1005840"/>
           </a:xfrm>
           <a:prstGeom prst="rect">
             <a:avLst/>
@@ -11909,8 +11799,8 @@
         </p:nvSpPr>
         <p:spPr>
           <a:xfrm>
-            <a:off x="201168" y="210312"/>
-            <a:ext cx="3657600" cy="585216"/>
+            <a:off x="347472" y="384048"/>
+            <a:ext cx="11494008" cy="457200"/>
           </a:xfrm>
           <a:prstGeom prst="rect">
             <a:avLst/>
@@ -11926,27 +11816,29 @@
               <a:buNone/>
             </a:pPr>
             <a:r>
-              <a:rPr lang="en-US" sz="3200" b="1" dirty="0">
+              <a:rPr lang="en-US" sz="2400" b="1" dirty="0">
                 <a:solidFill>
                   <a:schemeClr val="tx1"/>
                 </a:solidFill>
               </a:rPr>
               <a:t>목차</a:t>
             </a:r>
-            <a:endParaRPr lang="en-US" sz="3200" dirty="0"/>
+            <a:endParaRPr lang="en-US" sz="2400" dirty="0"/>
           </a:p>
         </p:txBody>
       </p:sp>
       <p:sp>
         <p:nvSpPr>
           <p:cNvPr id="3" name="Text 1"/>
-          <p:cNvSpPr txBox="1"/>
-          <p:nvPr/>
-        </p:nvSpPr>
-        <p:spPr>
-          <a:xfrm>
-            <a:off x="3017520" y="1572768"/>
-            <a:ext cx="7772400" cy="457200"/>
+          <p:cNvSpPr/>
+          <p:nvPr>
+            <p:ph idx="102" type="body" hasCustomPrompt="1"/>
+          </p:nvPr>
+        </p:nvSpPr>
+        <p:spPr>
+          <a:xfrm>
+            <a:off x="347472" y="978408"/>
+            <a:ext cx="11494008" cy="365760"/>
           </a:xfrm>
           <a:prstGeom prst="rect">
             <a:avLst/>
@@ -11962,50 +11854,56 @@
               <a:buNone/>
             </a:pPr>
             <a:r>
-              <a:rPr lang="en-US" sz="2400" dirty="0">
-                <a:solidFill>
-                  <a:schemeClr val="tx1"/>
-                </a:solidFill>
-              </a:rPr>
-              <a:t>1. 문제 : 부하가 바뀌면 정상도 경보가 된다</a:t>
-            </a:r>
-            <a:endParaRPr lang="en-US" sz="2400" dirty="0"/>
+              <a:rPr lang="en-US" sz="1400" b="1" dirty="0">
+                <a:solidFill>
+                  <a:schemeClr val="tx1"/>
+                </a:solidFill>
+              </a:rPr>
+              <a:t>문제 → 데이터 → 판정 모델 → 결과 → 설명 · 교정 → 현장 적용 순서로 진행</a:t>
+            </a:r>
+            <a:endParaRPr lang="en-US" sz="1400" dirty="0"/>
           </a:p>
         </p:txBody>
       </p:sp>
       <p:sp>
         <p:nvSpPr>
           <p:cNvPr id="4" name="Text 2"/>
-          <p:cNvSpPr txBox="1"/>
-          <p:nvPr/>
-        </p:nvSpPr>
-        <p:spPr>
-          <a:xfrm>
-            <a:off x="3017520" y="2194560"/>
-            <a:ext cx="7772400" cy="457200"/>
-          </a:xfrm>
-          <a:prstGeom prst="rect">
-            <a:avLst/>
-          </a:prstGeom>
-          <a:noFill/>
-          <a:ln/>
+          <p:cNvSpPr/>
+          <p:nvPr/>
+        </p:nvSpPr>
+        <p:spPr>
+          <a:xfrm>
+            <a:off x="347472" y="1691640"/>
+            <a:ext cx="457200" cy="457200"/>
+          </a:xfrm>
+          <a:prstGeom prst="ellipse">
+            <a:avLst/>
+          </a:prstGeom>
+          <a:solidFill>
+            <a:schemeClr val="bg1"/>
+          </a:solidFill>
+          <a:ln w="15875">
+            <a:solidFill>
+              <a:schemeClr val="tx1"/>
+            </a:solidFill>
+          </a:ln>
         </p:spPr>
         <p:txBody>
           <a:bodyPr wrap="square" lIns="0" tIns="0" rIns="0" bIns="0" rtlCol="0" anchor="ctr"/>
           <a:lstStyle/>
           <a:p>
-            <a:pPr algn="l" indent="0" marL="0">
-              <a:buNone/>
-            </a:pPr>
-            <a:r>
-              <a:rPr lang="en-US" sz="2400" dirty="0">
-                <a:solidFill>
-                  <a:schemeClr val="tx1"/>
-                </a:solidFill>
-              </a:rPr>
-              <a:t>2. 데이터 진단</a:t>
-            </a:r>
-            <a:endParaRPr lang="en-US" sz="2400" dirty="0"/>
+            <a:pPr algn="ctr" indent="0" marL="0">
+              <a:buNone/>
+            </a:pPr>
+            <a:r>
+              <a:rPr lang="en-US" sz="1600" b="1" dirty="0">
+                <a:solidFill>
+                  <a:schemeClr val="tx1"/>
+                </a:solidFill>
+              </a:rPr>
+              <a:t>1</a:t>
+            </a:r>
+            <a:endParaRPr lang="en-US" sz="1600" dirty="0"/>
           </a:p>
         </p:txBody>
       </p:sp>
@@ -12017,8 +11915,8 @@
         </p:nvSpPr>
         <p:spPr>
           <a:xfrm>
-            <a:off x="3017520" y="2816352"/>
-            <a:ext cx="7772400" cy="457200"/>
+            <a:off x="1078992" y="1691640"/>
+            <a:ext cx="10762488" cy="457200"/>
           </a:xfrm>
           <a:prstGeom prst="rect">
             <a:avLst/>
@@ -12034,50 +11932,67 @@
               <a:buNone/>
             </a:pPr>
             <a:r>
-              <a:rPr lang="en-US" sz="2400" dirty="0">
-                <a:solidFill>
-                  <a:schemeClr val="tx1"/>
-                </a:solidFill>
-              </a:rPr>
-              <a:t>3. 유형 1 : 두 전문가가 이상을 판정</a:t>
-            </a:r>
-            <a:endParaRPr lang="en-US" sz="2400" dirty="0"/>
+              <a:rPr lang="en-US" sz="2200" b="1" dirty="0">
+                <a:solidFill>
+                  <a:schemeClr val="tx1"/>
+                </a:solidFill>
+              </a:rPr>
+              <a:t>문제 정의</a:t>
+            </a:r>
+            <a:pPr algn="l" indent="0" marL="0">
+              <a:buNone/>
+            </a:pPr>
+            <a:r>
+              <a:rPr lang="en-US" sz="1600" dirty="0">
+                <a:solidFill>
+                  <a:schemeClr val="tx2"/>
+                </a:solidFill>
+              </a:rPr>
+              <a:t>   부하가 바뀌면 정상도 경보가 된다</a:t>
+            </a:r>
+            <a:endParaRPr lang="en-US" sz="1400" dirty="0"/>
           </a:p>
         </p:txBody>
       </p:sp>
       <p:sp>
         <p:nvSpPr>
           <p:cNvPr id="6" name="Text 4"/>
-          <p:cNvSpPr txBox="1"/>
-          <p:nvPr/>
-        </p:nvSpPr>
-        <p:spPr>
-          <a:xfrm>
-            <a:off x="3017520" y="3438144"/>
-            <a:ext cx="7772400" cy="457200"/>
-          </a:xfrm>
-          <a:prstGeom prst="rect">
-            <a:avLst/>
-          </a:prstGeom>
-          <a:noFill/>
-          <a:ln/>
+          <p:cNvSpPr/>
+          <p:nvPr/>
+        </p:nvSpPr>
+        <p:spPr>
+          <a:xfrm>
+            <a:off x="347472" y="2404872"/>
+            <a:ext cx="457200" cy="457200"/>
+          </a:xfrm>
+          <a:prstGeom prst="ellipse">
+            <a:avLst/>
+          </a:prstGeom>
+          <a:solidFill>
+            <a:schemeClr val="bg1"/>
+          </a:solidFill>
+          <a:ln w="15875">
+            <a:solidFill>
+              <a:schemeClr val="tx1"/>
+            </a:solidFill>
+          </a:ln>
         </p:spPr>
         <p:txBody>
           <a:bodyPr wrap="square" lIns="0" tIns="0" rIns="0" bIns="0" rtlCol="0" anchor="ctr"/>
           <a:lstStyle/>
           <a:p>
-            <a:pPr algn="l" indent="0" marL="0">
-              <a:buNone/>
-            </a:pPr>
-            <a:r>
-              <a:rPr lang="en-US" sz="2400" dirty="0">
-                <a:solidFill>
-                  <a:schemeClr val="tx1"/>
-                </a:solidFill>
-              </a:rPr>
-              <a:t>4. 실험 결과</a:t>
-            </a:r>
-            <a:endParaRPr lang="en-US" sz="2400" dirty="0"/>
+            <a:pPr algn="ctr" indent="0" marL="0">
+              <a:buNone/>
+            </a:pPr>
+            <a:r>
+              <a:rPr lang="en-US" sz="1600" b="1" dirty="0">
+                <a:solidFill>
+                  <a:schemeClr val="tx1"/>
+                </a:solidFill>
+              </a:rPr>
+              <a:t>2</a:t>
+            </a:r>
+            <a:endParaRPr lang="en-US" sz="1600" dirty="0"/>
           </a:p>
         </p:txBody>
       </p:sp>
@@ -12089,8 +12004,8 @@
         </p:nvSpPr>
         <p:spPr>
           <a:xfrm>
-            <a:off x="3017520" y="4059936"/>
-            <a:ext cx="7772400" cy="457200"/>
+            <a:off x="1078992" y="2404872"/>
+            <a:ext cx="10762488" cy="457200"/>
           </a:xfrm>
           <a:prstGeom prst="rect">
             <a:avLst/>
@@ -12106,27 +12021,80 @@
               <a:buNone/>
             </a:pPr>
             <a:r>
-              <a:rPr lang="en-US" sz="2400" dirty="0">
-                <a:solidFill>
-                  <a:schemeClr val="tx1"/>
-                </a:solidFill>
-              </a:rPr>
-              <a:t>5. 유형 2 : 판정을 설명하고 사람을 부르기</a:t>
-            </a:r>
-            <a:endParaRPr lang="en-US" sz="2400" dirty="0"/>
+              <a:rPr lang="en-US" sz="2200" b="1" dirty="0">
+                <a:solidFill>
+                  <a:schemeClr val="tx1"/>
+                </a:solidFill>
+              </a:rPr>
+              <a:t>데이터 진단</a:t>
+            </a:r>
+            <a:pPr algn="l" indent="0" marL="0">
+              <a:buNone/>
+            </a:pPr>
+            <a:r>
+              <a:rPr lang="en-US" sz="1600" dirty="0">
+                <a:solidFill>
+                  <a:schemeClr val="tx2"/>
+                </a:solidFill>
+              </a:rPr>
+              <a:t>   신호 특성과 설계 결정</a:t>
+            </a:r>
+            <a:endParaRPr lang="en-US" sz="1400" dirty="0"/>
           </a:p>
         </p:txBody>
       </p:sp>
       <p:sp>
         <p:nvSpPr>
           <p:cNvPr id="8" name="Text 6"/>
+          <p:cNvSpPr/>
+          <p:nvPr/>
+        </p:nvSpPr>
+        <p:spPr>
+          <a:xfrm>
+            <a:off x="347472" y="3118104"/>
+            <a:ext cx="457200" cy="457200"/>
+          </a:xfrm>
+          <a:prstGeom prst="ellipse">
+            <a:avLst/>
+          </a:prstGeom>
+          <a:solidFill>
+            <a:schemeClr val="bg1"/>
+          </a:solidFill>
+          <a:ln w="15875">
+            <a:solidFill>
+              <a:schemeClr val="tx1"/>
+            </a:solidFill>
+          </a:ln>
+        </p:spPr>
+        <p:txBody>
+          <a:bodyPr wrap="square" lIns="0" tIns="0" rIns="0" bIns="0" rtlCol="0" anchor="ctr"/>
+          <a:lstStyle/>
+          <a:p>
+            <a:pPr algn="ctr" indent="0" marL="0">
+              <a:buNone/>
+            </a:pPr>
+            <a:r>
+              <a:rPr lang="en-US" sz="1600" b="1" dirty="0">
+                <a:solidFill>
+                  <a:schemeClr val="tx1"/>
+                </a:solidFill>
+              </a:rPr>
+              <a:t>3</a:t>
+            </a:r>
+            <a:endParaRPr lang="en-US" sz="1600" dirty="0"/>
+          </a:p>
+        </p:txBody>
+      </p:sp>
+      <p:sp>
+        <p:nvSpPr>
+          <p:cNvPr id="9" name="Text 7"/>
           <p:cNvSpPr txBox="1"/>
           <p:nvPr/>
         </p:nvSpPr>
         <p:spPr>
           <a:xfrm>
-            <a:off x="3017520" y="4681728"/>
-            <a:ext cx="7772400" cy="457200"/>
+            <a:off x="1078992" y="3118104"/>
+            <a:ext cx="10762488" cy="457200"/>
           </a:xfrm>
           <a:prstGeom prst="rect">
             <a:avLst/>
@@ -12142,14 +12110,292 @@
               <a:buNone/>
             </a:pPr>
             <a:r>
-              <a:rPr lang="en-US" sz="2400" dirty="0">
-                <a:solidFill>
-                  <a:schemeClr val="tx1"/>
-                </a:solidFill>
-              </a:rPr>
-              <a:t>6. 현장 적용 및 결론</a:t>
-            </a:r>
-            <a:endParaRPr lang="en-US" sz="2400" dirty="0"/>
+              <a:rPr lang="en-US" sz="2200" b="1" dirty="0">
+                <a:solidFill>
+                  <a:schemeClr val="tx1"/>
+                </a:solidFill>
+              </a:rPr>
+              <a:t>유형 1 판정</a:t>
+            </a:r>
+            <a:pPr algn="l" indent="0" marL="0">
+              <a:buNone/>
+            </a:pPr>
+            <a:r>
+              <a:rPr lang="en-US" sz="1600" dirty="0">
+                <a:solidFill>
+                  <a:schemeClr val="tx2"/>
+                </a:solidFill>
+              </a:rPr>
+              <a:t>   두 전문가가 이상을 판정</a:t>
+            </a:r>
+            <a:endParaRPr lang="en-US" sz="1400" dirty="0"/>
+          </a:p>
+        </p:txBody>
+      </p:sp>
+      <p:sp>
+        <p:nvSpPr>
+          <p:cNvPr id="10" name="Text 8"/>
+          <p:cNvSpPr/>
+          <p:nvPr/>
+        </p:nvSpPr>
+        <p:spPr>
+          <a:xfrm>
+            <a:off x="347472" y="3831336"/>
+            <a:ext cx="457200" cy="457200"/>
+          </a:xfrm>
+          <a:prstGeom prst="ellipse">
+            <a:avLst/>
+          </a:prstGeom>
+          <a:solidFill>
+            <a:schemeClr val="bg1"/>
+          </a:solidFill>
+          <a:ln w="15875">
+            <a:solidFill>
+              <a:schemeClr val="tx1"/>
+            </a:solidFill>
+          </a:ln>
+        </p:spPr>
+        <p:txBody>
+          <a:bodyPr wrap="square" lIns="0" tIns="0" rIns="0" bIns="0" rtlCol="0" anchor="ctr"/>
+          <a:lstStyle/>
+          <a:p>
+            <a:pPr algn="ctr" indent="0" marL="0">
+              <a:buNone/>
+            </a:pPr>
+            <a:r>
+              <a:rPr lang="en-US" sz="1600" b="1" dirty="0">
+                <a:solidFill>
+                  <a:schemeClr val="tx1"/>
+                </a:solidFill>
+              </a:rPr>
+              <a:t>4</a:t>
+            </a:r>
+            <a:endParaRPr lang="en-US" sz="1600" dirty="0"/>
+          </a:p>
+        </p:txBody>
+      </p:sp>
+      <p:sp>
+        <p:nvSpPr>
+          <p:cNvPr id="11" name="Text 9"/>
+          <p:cNvSpPr txBox="1"/>
+          <p:nvPr/>
+        </p:nvSpPr>
+        <p:spPr>
+          <a:xfrm>
+            <a:off x="1078992" y="3831336"/>
+            <a:ext cx="10762488" cy="457200"/>
+          </a:xfrm>
+          <a:prstGeom prst="rect">
+            <a:avLst/>
+          </a:prstGeom>
+          <a:noFill/>
+          <a:ln/>
+        </p:spPr>
+        <p:txBody>
+          <a:bodyPr wrap="square" lIns="0" tIns="0" rIns="0" bIns="0" rtlCol="0" anchor="ctr"/>
+          <a:lstStyle/>
+          <a:p>
+            <a:pPr algn="l" indent="0" marL="0">
+              <a:buNone/>
+            </a:pPr>
+            <a:r>
+              <a:rPr lang="en-US" sz="2200" b="1" dirty="0">
+                <a:solidFill>
+                  <a:schemeClr val="tx1"/>
+                </a:solidFill>
+              </a:rPr>
+              <a:t>실험 결과</a:t>
+            </a:r>
+            <a:pPr algn="l" indent="0" marL="0">
+              <a:buNone/>
+            </a:pPr>
+            <a:r>
+              <a:rPr lang="en-US" sz="1600" dirty="0">
+                <a:solidFill>
+                  <a:schemeClr val="tx2"/>
+                </a:solidFill>
+              </a:rPr>
+              <a:t>   최종 평가 · 10개 방법 비교 · 외부 전이</a:t>
+            </a:r>
+            <a:endParaRPr lang="en-US" sz="1400" dirty="0"/>
+          </a:p>
+        </p:txBody>
+      </p:sp>
+      <p:sp>
+        <p:nvSpPr>
+          <p:cNvPr id="12" name="Text 10"/>
+          <p:cNvSpPr/>
+          <p:nvPr/>
+        </p:nvSpPr>
+        <p:spPr>
+          <a:xfrm>
+            <a:off x="347472" y="4544568"/>
+            <a:ext cx="457200" cy="457200"/>
+          </a:xfrm>
+          <a:prstGeom prst="ellipse">
+            <a:avLst/>
+          </a:prstGeom>
+          <a:solidFill>
+            <a:schemeClr val="bg1"/>
+          </a:solidFill>
+          <a:ln w="15875">
+            <a:solidFill>
+              <a:schemeClr val="tx1"/>
+            </a:solidFill>
+          </a:ln>
+        </p:spPr>
+        <p:txBody>
+          <a:bodyPr wrap="square" lIns="0" tIns="0" rIns="0" bIns="0" rtlCol="0" anchor="ctr"/>
+          <a:lstStyle/>
+          <a:p>
+            <a:pPr algn="ctr" indent="0" marL="0">
+              <a:buNone/>
+            </a:pPr>
+            <a:r>
+              <a:rPr lang="en-US" sz="1600" b="1" dirty="0">
+                <a:solidFill>
+                  <a:schemeClr val="tx1"/>
+                </a:solidFill>
+              </a:rPr>
+              <a:t>5</a:t>
+            </a:r>
+            <a:endParaRPr lang="en-US" sz="1600" dirty="0"/>
+          </a:p>
+        </p:txBody>
+      </p:sp>
+      <p:sp>
+        <p:nvSpPr>
+          <p:cNvPr id="13" name="Text 11"/>
+          <p:cNvSpPr txBox="1"/>
+          <p:nvPr/>
+        </p:nvSpPr>
+        <p:spPr>
+          <a:xfrm>
+            <a:off x="1078992" y="4544568"/>
+            <a:ext cx="10762488" cy="457200"/>
+          </a:xfrm>
+          <a:prstGeom prst="rect">
+            <a:avLst/>
+          </a:prstGeom>
+          <a:noFill/>
+          <a:ln/>
+        </p:spPr>
+        <p:txBody>
+          <a:bodyPr wrap="square" lIns="0" tIns="0" rIns="0" bIns="0" rtlCol="0" anchor="ctr"/>
+          <a:lstStyle/>
+          <a:p>
+            <a:pPr algn="l" indent="0" marL="0">
+              <a:buNone/>
+            </a:pPr>
+            <a:r>
+              <a:rPr lang="en-US" sz="2200" b="1" dirty="0">
+                <a:solidFill>
+                  <a:schemeClr val="tx1"/>
+                </a:solidFill>
+              </a:rPr>
+              <a:t>유형 2</a:t>
+            </a:r>
+            <a:pPr algn="l" indent="0" marL="0">
+              <a:buNone/>
+            </a:pPr>
+            <a:r>
+              <a:rPr lang="en-US" sz="1600" dirty="0">
+                <a:solidFill>
+                  <a:schemeClr val="tx2"/>
+                </a:solidFill>
+              </a:rPr>
+              <a:t>   교정 루프, 근거 설명, 사람을 부르는 규칙표</a:t>
+            </a:r>
+            <a:endParaRPr lang="en-US" sz="1400" dirty="0"/>
+          </a:p>
+        </p:txBody>
+      </p:sp>
+      <p:sp>
+        <p:nvSpPr>
+          <p:cNvPr id="14" name="Text 12"/>
+          <p:cNvSpPr/>
+          <p:nvPr/>
+        </p:nvSpPr>
+        <p:spPr>
+          <a:xfrm>
+            <a:off x="347472" y="5257800"/>
+            <a:ext cx="457200" cy="457200"/>
+          </a:xfrm>
+          <a:prstGeom prst="ellipse">
+            <a:avLst/>
+          </a:prstGeom>
+          <a:solidFill>
+            <a:schemeClr val="bg1"/>
+          </a:solidFill>
+          <a:ln w="15875">
+            <a:solidFill>
+              <a:schemeClr val="tx1"/>
+            </a:solidFill>
+          </a:ln>
+        </p:spPr>
+        <p:txBody>
+          <a:bodyPr wrap="square" lIns="0" tIns="0" rIns="0" bIns="0" rtlCol="0" anchor="ctr"/>
+          <a:lstStyle/>
+          <a:p>
+            <a:pPr algn="ctr" indent="0" marL="0">
+              <a:buNone/>
+            </a:pPr>
+            <a:r>
+              <a:rPr lang="en-US" sz="1600" b="1" dirty="0">
+                <a:solidFill>
+                  <a:schemeClr val="tx1"/>
+                </a:solidFill>
+              </a:rPr>
+              <a:t>6</a:t>
+            </a:r>
+            <a:endParaRPr lang="en-US" sz="1600" dirty="0"/>
+          </a:p>
+        </p:txBody>
+      </p:sp>
+      <p:sp>
+        <p:nvSpPr>
+          <p:cNvPr id="15" name="Text 13"/>
+          <p:cNvSpPr txBox="1"/>
+          <p:nvPr/>
+        </p:nvSpPr>
+        <p:spPr>
+          <a:xfrm>
+            <a:off x="1078992" y="5257800"/>
+            <a:ext cx="10762488" cy="457200"/>
+          </a:xfrm>
+          <a:prstGeom prst="rect">
+            <a:avLst/>
+          </a:prstGeom>
+          <a:noFill/>
+          <a:ln/>
+        </p:spPr>
+        <p:txBody>
+          <a:bodyPr wrap="square" lIns="0" tIns="0" rIns="0" bIns="0" rtlCol="0" anchor="ctr"/>
+          <a:lstStyle/>
+          <a:p>
+            <a:pPr algn="l" indent="0" marL="0">
+              <a:buNone/>
+            </a:pPr>
+            <a:r>
+              <a:rPr lang="en-US" sz="2200" b="1" dirty="0">
+                <a:solidFill>
+                  <a:schemeClr val="tx1"/>
+                </a:solidFill>
+              </a:rPr>
+              <a:t>현장 적용 및 결론</a:t>
+            </a:r>
+            <a:pPr algn="l" indent="0" marL="0">
+              <a:buNone/>
+            </a:pPr>
+            <a:r>
+              <a:rPr lang="en-US" sz="1600" dirty="0">
+                <a:solidFill>
+                  <a:schemeClr val="tx2"/>
+                </a:solidFill>
+              </a:rPr>
+              <a:t>   누가 무엇을 하나 · 향후 과제</a:t>
+            </a:r>
+            <a:endParaRPr lang="en-US" sz="1400" dirty="0"/>
           </a:p>
         </p:txBody>
       </p:sp>
@@ -12188,8 +12434,8 @@
         </p:nvSpPr>
         <p:spPr>
           <a:xfrm>
-            <a:off x="347472" y="438912"/>
-            <a:ext cx="11430000" cy="457200"/>
+            <a:off x="347472" y="384048"/>
+            <a:ext cx="11494008" cy="457200"/>
           </a:xfrm>
           <a:prstGeom prst="rect">
             <a:avLst/>
@@ -12218,16 +12464,16 @@
       </p:sp>
       <p:sp>
         <p:nvSpPr>
-          <p:cNvPr id="3" name="Text 0"/>
+          <p:cNvPr id="3" name="Text 1"/>
           <p:cNvSpPr/>
           <p:nvPr>
-            <p:ph idx="101" type="body" hasCustomPrompt="1"/>
+            <p:ph idx="102" type="body" hasCustomPrompt="1"/>
           </p:nvPr>
         </p:nvSpPr>
         <p:spPr>
           <a:xfrm>
-            <a:off x="347472" y="1014984"/>
-            <a:ext cx="11430000" cy="365760"/>
+            <a:off x="347472" y="978408"/>
+            <a:ext cx="11494008" cy="365760"/>
           </a:xfrm>
           <a:prstGeom prst="rect">
             <a:avLst/>
@@ -12262,7 +12508,7 @@
         </p:nvSpPr>
         <p:spPr>
           <a:xfrm>
-            <a:off x="4292604" y="2395728"/>
+            <a:off x="4291548" y="2395728"/>
             <a:ext cx="886921" cy="512064"/>
           </a:xfrm>
           <a:prstGeom prst="line">
@@ -12286,7 +12532,7 @@
         </p:nvSpPr>
         <p:spPr>
           <a:xfrm>
-            <a:off x="5448769" y="3374136"/>
+            <a:off x="5447713" y="3374136"/>
             <a:ext cx="0" cy="1024128"/>
           </a:xfrm>
           <a:prstGeom prst="line">
@@ -12310,7 +12556,7 @@
         </p:nvSpPr>
         <p:spPr>
           <a:xfrm flipH="1">
-            <a:off x="4292604" y="4864608"/>
+            <a:off x="4291548" y="4864608"/>
             <a:ext cx="886921" cy="512064"/>
           </a:xfrm>
           <a:prstGeom prst="line">
@@ -12334,7 +12580,7 @@
         </p:nvSpPr>
         <p:spPr>
           <a:xfrm flipH="1" flipV="1">
-            <a:off x="2867195" y="4864608"/>
+            <a:off x="2866140" y="4864608"/>
             <a:ext cx="886921" cy="512064"/>
           </a:xfrm>
           <a:prstGeom prst="line">
@@ -12358,7 +12604,7 @@
         </p:nvSpPr>
         <p:spPr>
           <a:xfrm flipV="1">
-            <a:off x="2597951" y="3374136"/>
+            <a:off x="2596896" y="3374136"/>
             <a:ext cx="0" cy="1024128"/>
           </a:xfrm>
           <a:prstGeom prst="line">
@@ -12382,7 +12628,7 @@
         </p:nvSpPr>
         <p:spPr>
           <a:xfrm flipV="1">
-            <a:off x="2867195" y="2395728"/>
+            <a:off x="2866140" y="2395728"/>
             <a:ext cx="886921" cy="512064"/>
           </a:xfrm>
           <a:prstGeom prst="line">
@@ -12406,7 +12652,7 @@
         </p:nvSpPr>
         <p:spPr>
           <a:xfrm>
-            <a:off x="3739896" y="1956816"/>
+            <a:off x="3738841" y="1956816"/>
             <a:ext cx="566928" cy="566928"/>
           </a:xfrm>
           <a:prstGeom prst="ellipse">
@@ -12448,7 +12694,7 @@
         </p:nvSpPr>
         <p:spPr>
           <a:xfrm>
-            <a:off x="4443984" y="2057400"/>
+            <a:off x="4442929" y="2057400"/>
             <a:ext cx="2194560" cy="365760"/>
           </a:xfrm>
           <a:prstGeom prst="rect">
@@ -12484,7 +12730,7 @@
         </p:nvSpPr>
         <p:spPr>
           <a:xfrm>
-            <a:off x="5165305" y="2779776"/>
+            <a:off x="5164249" y="2779776"/>
             <a:ext cx="566928" cy="566928"/>
           </a:xfrm>
           <a:prstGeom prst="ellipse">
@@ -12526,7 +12772,7 @@
         </p:nvSpPr>
         <p:spPr>
           <a:xfrm>
-            <a:off x="5869393" y="2880360"/>
+            <a:off x="5868337" y="2880360"/>
             <a:ext cx="2194560" cy="365760"/>
           </a:xfrm>
           <a:prstGeom prst="rect">
@@ -12562,7 +12808,7 @@
         </p:nvSpPr>
         <p:spPr>
           <a:xfrm>
-            <a:off x="5165305" y="4425696"/>
+            <a:off x="5164249" y="4425696"/>
             <a:ext cx="566928" cy="566928"/>
           </a:xfrm>
           <a:prstGeom prst="ellipse">
@@ -12604,7 +12850,7 @@
         </p:nvSpPr>
         <p:spPr>
           <a:xfrm>
-            <a:off x="5869393" y="4526280"/>
+            <a:off x="5868337" y="4526280"/>
             <a:ext cx="2194560" cy="365760"/>
           </a:xfrm>
           <a:prstGeom prst="rect">
@@ -12640,7 +12886,7 @@
         </p:nvSpPr>
         <p:spPr>
           <a:xfrm>
-            <a:off x="3739896" y="5248656"/>
+            <a:off x="3738841" y="5248656"/>
             <a:ext cx="566928" cy="566928"/>
           </a:xfrm>
           <a:prstGeom prst="ellipse">
@@ -12682,7 +12928,7 @@
         </p:nvSpPr>
         <p:spPr>
           <a:xfrm>
-            <a:off x="1773936" y="5349240"/>
+            <a:off x="1772881" y="5349240"/>
             <a:ext cx="1828800" cy="365760"/>
           </a:xfrm>
           <a:prstGeom prst="rect">
@@ -12718,7 +12964,7 @@
         </p:nvSpPr>
         <p:spPr>
           <a:xfrm>
-            <a:off x="2314487" y="4425696"/>
+            <a:off x="2313432" y="4425696"/>
             <a:ext cx="566928" cy="566928"/>
           </a:xfrm>
           <a:prstGeom prst="ellipse">
@@ -12760,7 +13006,7 @@
         </p:nvSpPr>
         <p:spPr>
           <a:xfrm>
-            <a:off x="348527" y="4526280"/>
+            <a:off x="347472" y="4526280"/>
             <a:ext cx="1828800" cy="365760"/>
           </a:xfrm>
           <a:prstGeom prst="rect">
@@ -12796,7 +13042,7 @@
         </p:nvSpPr>
         <p:spPr>
           <a:xfrm>
-            <a:off x="2314487" y="2779776"/>
+            <a:off x="2313432" y="2779776"/>
             <a:ext cx="566928" cy="566928"/>
           </a:xfrm>
           <a:prstGeom prst="ellipse">
@@ -12838,7 +13084,7 @@
         </p:nvSpPr>
         <p:spPr>
           <a:xfrm>
-            <a:off x="348527" y="2880360"/>
+            <a:off x="347472" y="2880360"/>
             <a:ext cx="1828800" cy="365760"/>
           </a:xfrm>
           <a:prstGeom prst="rect">
@@ -12874,7 +13120,7 @@
         </p:nvSpPr>
         <p:spPr>
           <a:xfrm>
-            <a:off x="4306824" y="5532120"/>
+            <a:off x="4305769" y="5532120"/>
             <a:ext cx="950976" cy="0"/>
           </a:xfrm>
           <a:prstGeom prst="line">
@@ -12898,7 +13144,7 @@
         </p:nvSpPr>
         <p:spPr>
           <a:xfrm>
-            <a:off x="5349240" y="5257800"/>
+            <a:off x="5348185" y="5257800"/>
             <a:ext cx="2103120" cy="548640"/>
           </a:xfrm>
           <a:prstGeom prst="rect">
@@ -12948,8 +13194,8 @@
         </p:nvSpPr>
         <p:spPr>
           <a:xfrm>
-            <a:off x="7680960" y="1737360"/>
-            <a:ext cx="4114800" cy="548640"/>
+            <a:off x="8001000" y="1645920"/>
+            <a:ext cx="3840480" cy="548640"/>
           </a:xfrm>
           <a:prstGeom prst="rect">
             <a:avLst/>
@@ -12984,8 +13230,8 @@
         </p:nvSpPr>
         <p:spPr>
           <a:xfrm>
-            <a:off x="7680960" y="2304288"/>
-            <a:ext cx="4114800" cy="548640"/>
+            <a:off x="8001000" y="2221992"/>
+            <a:ext cx="3840480" cy="548640"/>
           </a:xfrm>
           <a:prstGeom prst="rect">
             <a:avLst/>
@@ -13020,8 +13266,8 @@
         </p:nvSpPr>
         <p:spPr>
           <a:xfrm>
-            <a:off x="7680960" y="3017520"/>
-            <a:ext cx="4114800" cy="548640"/>
+            <a:off x="8001000" y="2971800"/>
+            <a:ext cx="3840480" cy="548640"/>
           </a:xfrm>
           <a:prstGeom prst="rect">
             <a:avLst/>
@@ -13056,8 +13302,8 @@
         </p:nvSpPr>
         <p:spPr>
           <a:xfrm>
-            <a:off x="7680960" y="3584448"/>
-            <a:ext cx="4114800" cy="320040"/>
+            <a:off x="8001000" y="3547872"/>
+            <a:ext cx="3840480" cy="320040"/>
           </a:xfrm>
           <a:prstGeom prst="rect">
             <a:avLst/>
@@ -13092,8 +13338,8 @@
         </p:nvSpPr>
         <p:spPr>
           <a:xfrm>
-            <a:off x="7680960" y="4251960"/>
-            <a:ext cx="4114800" cy="1737360"/>
+            <a:off x="8001000" y="4297680"/>
+            <a:ext cx="3840480" cy="1737360"/>
           </a:xfrm>
           <a:prstGeom prst="rect">
             <a:avLst/>
@@ -13234,8 +13480,8 @@
         </p:nvSpPr>
         <p:spPr>
           <a:xfrm>
-            <a:off x="347472" y="438912"/>
-            <a:ext cx="11430000" cy="457200"/>
+            <a:off x="347472" y="384048"/>
+            <a:ext cx="11494008" cy="457200"/>
           </a:xfrm>
           <a:prstGeom prst="rect">
             <a:avLst/>
@@ -13264,16 +13510,16 @@
       </p:sp>
       <p:sp>
         <p:nvSpPr>
-          <p:cNvPr id="3" name="Text 0"/>
+          <p:cNvPr id="3" name="Text 1"/>
           <p:cNvSpPr/>
           <p:nvPr>
-            <p:ph idx="101" type="body" hasCustomPrompt="1"/>
+            <p:ph idx="102" type="body" hasCustomPrompt="1"/>
           </p:nvPr>
         </p:nvSpPr>
         <p:spPr>
           <a:xfrm>
-            <a:off x="347472" y="1014984"/>
-            <a:ext cx="11430000" cy="365760"/>
+            <a:off x="347472" y="978408"/>
+            <a:ext cx="11494008" cy="365760"/>
           </a:xfrm>
           <a:prstGeom prst="rect">
             <a:avLst/>
@@ -13308,8 +13554,8 @@
         </p:nvSpPr>
         <p:spPr>
           <a:xfrm>
-            <a:off x="457200" y="1691640"/>
-            <a:ext cx="1691640" cy="777240"/>
+            <a:off x="347472" y="1645920"/>
+            <a:ext cx="1645920" cy="777240"/>
           </a:xfrm>
           <a:prstGeom prst="rect">
             <a:avLst/>
@@ -13364,8 +13610,8 @@
         </p:nvSpPr>
         <p:spPr>
           <a:xfrm>
-            <a:off x="2468880" y="1691640"/>
-            <a:ext cx="1691640" cy="777240"/>
+            <a:off x="2267712" y="1645920"/>
+            <a:ext cx="1645920" cy="777240"/>
           </a:xfrm>
           <a:prstGeom prst="rect">
             <a:avLst/>
@@ -13420,8 +13666,8 @@
         </p:nvSpPr>
         <p:spPr>
           <a:xfrm>
-            <a:off x="4480560" y="1691640"/>
-            <a:ext cx="1691640" cy="777240"/>
+            <a:off x="4187952" y="1645920"/>
+            <a:ext cx="1645920" cy="777240"/>
           </a:xfrm>
           <a:prstGeom prst="rect">
             <a:avLst/>
@@ -13476,8 +13722,8 @@
         </p:nvSpPr>
         <p:spPr>
           <a:xfrm>
-            <a:off x="4480560" y="2880360"/>
-            <a:ext cx="1691640" cy="777240"/>
+            <a:off x="4187952" y="2834640"/>
+            <a:ext cx="1645920" cy="777240"/>
           </a:xfrm>
           <a:prstGeom prst="rect">
             <a:avLst/>
@@ -13532,8 +13778,8 @@
         </p:nvSpPr>
         <p:spPr>
           <a:xfrm>
-            <a:off x="2468880" y="2880360"/>
-            <a:ext cx="1691640" cy="777240"/>
+            <a:off x="2267712" y="2834640"/>
+            <a:ext cx="1645920" cy="777240"/>
           </a:xfrm>
           <a:prstGeom prst="rect">
             <a:avLst/>
@@ -13588,8 +13834,8 @@
         </p:nvSpPr>
         <p:spPr>
           <a:xfrm>
-            <a:off x="457200" y="2880360"/>
-            <a:ext cx="1691640" cy="777240"/>
+            <a:off x="347472" y="2834640"/>
+            <a:ext cx="1645920" cy="777240"/>
           </a:xfrm>
           <a:prstGeom prst="rect">
             <a:avLst/>
@@ -13644,8 +13890,8 @@
         </p:nvSpPr>
         <p:spPr>
           <a:xfrm>
-            <a:off x="2148840" y="2080260"/>
-            <a:ext cx="320040" cy="0"/>
+            <a:off x="1993392" y="2034540"/>
+            <a:ext cx="274320" cy="0"/>
           </a:xfrm>
           <a:prstGeom prst="line">
             <a:avLst/>
@@ -13668,8 +13914,8 @@
         </p:nvSpPr>
         <p:spPr>
           <a:xfrm>
-            <a:off x="4160520" y="2080260"/>
-            <a:ext cx="320040" cy="0"/>
+            <a:off x="3913632" y="2034540"/>
+            <a:ext cx="274320" cy="0"/>
           </a:xfrm>
           <a:prstGeom prst="line">
             <a:avLst/>
@@ -13692,7 +13938,7 @@
         </p:nvSpPr>
         <p:spPr>
           <a:xfrm>
-            <a:off x="5326380" y="2468880"/>
+            <a:off x="5010912" y="2423160"/>
             <a:ext cx="0" cy="411480"/>
           </a:xfrm>
           <a:prstGeom prst="line">
@@ -13716,8 +13962,8 @@
         </p:nvSpPr>
         <p:spPr>
           <a:xfrm flipH="1">
-            <a:off x="4160520" y="3268980"/>
-            <a:ext cx="320040" cy="0"/>
+            <a:off x="3913632" y="3223260"/>
+            <a:ext cx="274320" cy="0"/>
           </a:xfrm>
           <a:prstGeom prst="line">
             <a:avLst/>
@@ -13740,8 +13986,8 @@
         </p:nvSpPr>
         <p:spPr>
           <a:xfrm flipH="1">
-            <a:off x="2148840" y="3268980"/>
-            <a:ext cx="320040" cy="0"/>
+            <a:off x="1993392" y="3223260"/>
+            <a:ext cx="274320" cy="0"/>
           </a:xfrm>
           <a:prstGeom prst="line">
             <a:avLst/>
@@ -13764,8 +14010,8 @@
         </p:nvSpPr>
         <p:spPr>
           <a:xfrm>
-            <a:off x="457200" y="4069080"/>
-            <a:ext cx="5715000" cy="640080"/>
+            <a:off x="347472" y="4023360"/>
+            <a:ext cx="5486400" cy="640080"/>
           </a:xfrm>
           <a:prstGeom prst="rect">
             <a:avLst/>
@@ -13820,7 +14066,7 @@
         </p:nvSpPr>
         <p:spPr>
           <a:xfrm flipV="1">
-            <a:off x="1303020" y="3657600"/>
+            <a:off x="1170432" y="3611880"/>
             <a:ext cx="0" cy="411480"/>
           </a:xfrm>
           <a:prstGeom prst="line">
@@ -13844,8 +14090,8 @@
         </p:nvSpPr>
         <p:spPr>
           <a:xfrm>
-            <a:off x="457200" y="4983480"/>
-            <a:ext cx="6035040" cy="1280160"/>
+            <a:off x="347472" y="4937760"/>
+            <a:ext cx="5486400" cy="1325880"/>
           </a:xfrm>
           <a:prstGeom prst="rect">
             <a:avLst/>
@@ -13883,7 +14129,7 @@
                   <a:schemeClr val="tx1"/>
                 </a:solidFill>
               </a:rPr>
-              <a:t>어디서 · 무엇이 변했나 · 원인 후보 · 먼저 점검 · 긴급도</a:t>
+              <a:t>어디서 · 무엇이 변했나 · 원인 · 먼저 점검 · 긴급도</a:t>
             </a:r>
             <a:endParaRPr lang="en-US" sz="1400" dirty="0"/>
           </a:p>
@@ -13914,7 +14160,7 @@
                   <a:schemeClr val="tx1"/>
                 </a:solidFill>
               </a:rPr>
-              <a:t>“방금 알림은 왜 났어?” → 운전변화 알림, 등급 '관찰 강화'</a:t>
+              <a:t>“방금 알림은 왜 났어?” → 운전변화 알림, 관찰 강화</a:t>
             </a:r>
             <a:endParaRPr lang="en-US" sz="1400" dirty="0"/>
           </a:p>
@@ -13967,8 +14213,8 @@
         </p:blipFill>
         <p:spPr>
           <a:xfrm>
-            <a:off x="6812280" y="1645920"/>
-            <a:ext cx="4983480" cy="3092249"/>
+            <a:off x="6355080" y="1645920"/>
+            <a:ext cx="5486400" cy="3404311"/>
           </a:xfrm>
           <a:prstGeom prst="rect">
             <a:avLst/>
@@ -13983,8 +14229,8 @@
         </p:nvSpPr>
         <p:spPr>
           <a:xfrm>
-            <a:off x="6812280" y="1645920"/>
-            <a:ext cx="4983480" cy="3092249"/>
+            <a:off x="6355080" y="1645920"/>
+            <a:ext cx="5486400" cy="3404311"/>
           </a:xfrm>
           <a:prstGeom prst="rect">
             <a:avLst/>
@@ -14005,8 +14251,8 @@
         </p:nvSpPr>
         <p:spPr>
           <a:xfrm>
-            <a:off x="6812280" y="4811321"/>
-            <a:ext cx="4983480" cy="274320"/>
+            <a:off x="6355080" y="5123383"/>
+            <a:ext cx="5486400" cy="274320"/>
           </a:xfrm>
           <a:prstGeom prst="rect">
             <a:avLst/>
@@ -14041,8 +14287,8 @@
         </p:nvSpPr>
         <p:spPr>
           <a:xfrm>
-            <a:off x="6812280" y="5257800"/>
-            <a:ext cx="4983480" cy="640080"/>
+            <a:off x="6355080" y="5486400"/>
+            <a:ext cx="5486400" cy="365760"/>
           </a:xfrm>
           <a:prstGeom prst="rect">
             <a:avLst/>
@@ -14115,8 +14361,8 @@
         </p:nvSpPr>
         <p:spPr>
           <a:xfrm>
-            <a:off x="347472" y="438912"/>
-            <a:ext cx="11430000" cy="457200"/>
+            <a:off x="347472" y="384048"/>
+            <a:ext cx="11494008" cy="457200"/>
           </a:xfrm>
           <a:prstGeom prst="rect">
             <a:avLst/>
@@ -14145,16 +14391,16 @@
       </p:sp>
       <p:sp>
         <p:nvSpPr>
-          <p:cNvPr id="3" name="Text 0"/>
+          <p:cNvPr id="3" name="Text 1"/>
           <p:cNvSpPr/>
           <p:nvPr>
-            <p:ph idx="101" type="body" hasCustomPrompt="1"/>
+            <p:ph idx="102" type="body" hasCustomPrompt="1"/>
           </p:nvPr>
         </p:nvSpPr>
         <p:spPr>
           <a:xfrm>
-            <a:off x="347472" y="1014984"/>
-            <a:ext cx="11430000" cy="365760"/>
+            <a:off x="347472" y="978408"/>
+            <a:ext cx="11494008" cy="365760"/>
           </a:xfrm>
           <a:prstGeom prst="rect">
             <a:avLst/>
@@ -14189,7 +14435,7 @@
         </p:nvSpPr>
         <p:spPr>
           <a:xfrm flipH="1">
-            <a:off x="658310" y="2422432"/>
+            <a:off x="868622" y="2422432"/>
             <a:ext cx="146420" cy="1830256"/>
           </a:xfrm>
           <a:prstGeom prst="line">
@@ -14212,7 +14458,7 @@
         </p:nvSpPr>
         <p:spPr>
           <a:xfrm flipH="1">
-            <a:off x="460355" y="2402670"/>
+            <a:off x="670667" y="2402670"/>
             <a:ext cx="268009" cy="589620"/>
           </a:xfrm>
           <a:prstGeom prst="line">
@@ -14235,7 +14481,7 @@
         </p:nvSpPr>
         <p:spPr>
           <a:xfrm>
-            <a:off x="1051362" y="2204077"/>
+            <a:off x="1261674" y="2204077"/>
             <a:ext cx="1737756" cy="72407"/>
           </a:xfrm>
           <a:prstGeom prst="line">
@@ -14258,7 +14504,7 @@
         </p:nvSpPr>
         <p:spPr>
           <a:xfrm>
-            <a:off x="868328" y="4493240"/>
+            <a:off x="1078640" y="4493240"/>
             <a:ext cx="1189424" cy="66079"/>
           </a:xfrm>
           <a:prstGeom prst="line">
@@ -14281,7 +14527,7 @@
         </p:nvSpPr>
         <p:spPr>
           <a:xfrm flipV="1">
-            <a:off x="3235714" y="1896986"/>
+            <a:off x="3446026" y="1896986"/>
             <a:ext cx="1026652" cy="320829"/>
           </a:xfrm>
           <a:prstGeom prst="line">
@@ -14304,7 +14550,7 @@
         </p:nvSpPr>
         <p:spPr>
           <a:xfrm flipV="1">
-            <a:off x="3413924" y="3007722"/>
+            <a:off x="3624236" y="3007722"/>
             <a:ext cx="1127432" cy="431077"/>
           </a:xfrm>
           <a:prstGeom prst="line">
@@ -14327,7 +14573,7 @@
         </p:nvSpPr>
         <p:spPr>
           <a:xfrm>
-            <a:off x="3404866" y="3622673"/>
+            <a:off x="3615178" y="3622673"/>
             <a:ext cx="962668" cy="481334"/>
           </a:xfrm>
           <a:prstGeom prst="line">
@@ -14350,7 +14596,7 @@
         </p:nvSpPr>
         <p:spPr>
           <a:xfrm>
-            <a:off x="2501282" y="4648887"/>
+            <a:off x="2711594" y="4648887"/>
             <a:ext cx="849596" cy="303427"/>
           </a:xfrm>
           <a:prstGeom prst="line">
@@ -14373,7 +14619,7 @@
         </p:nvSpPr>
         <p:spPr>
           <a:xfrm flipV="1">
-            <a:off x="1917112" y="2427234"/>
+            <a:off x="2127424" y="2427234"/>
             <a:ext cx="920655" cy="723372"/>
           </a:xfrm>
           <a:prstGeom prst="line">
@@ -14396,7 +14642,7 @@
         </p:nvSpPr>
         <p:spPr>
           <a:xfrm>
-            <a:off x="1963220" y="3327131"/>
+            <a:off x="2173532" y="3327131"/>
             <a:ext cx="1011321" cy="158019"/>
           </a:xfrm>
           <a:prstGeom prst="line">
@@ -14419,7 +14665,7 @@
         </p:nvSpPr>
         <p:spPr>
           <a:xfrm>
-            <a:off x="1827410" y="3501957"/>
+            <a:off x="2037722" y="3501957"/>
             <a:ext cx="368540" cy="859927"/>
           </a:xfrm>
           <a:prstGeom prst="line">
@@ -14442,7 +14688,7 @@
         </p:nvSpPr>
         <p:spPr>
           <a:xfrm flipH="1" flipV="1">
-            <a:off x="969306" y="2370175"/>
+            <a:off x="1179618" y="2370175"/>
             <a:ext cx="621708" cy="746049"/>
           </a:xfrm>
           <a:prstGeom prst="line">
@@ -14465,7 +14711,7 @@
         </p:nvSpPr>
         <p:spPr>
           <a:xfrm>
-            <a:off x="1453896" y="3008376"/>
+            <a:off x="1664208" y="3008376"/>
             <a:ext cx="566928" cy="566928"/>
           </a:xfrm>
           <a:prstGeom prst="ellipse">
@@ -14510,7 +14756,7 @@
         </p:nvSpPr>
         <p:spPr>
           <a:xfrm>
-            <a:off x="2788920" y="2057400"/>
+            <a:off x="2999232" y="2057400"/>
             <a:ext cx="457200" cy="457200"/>
           </a:xfrm>
           <a:prstGeom prst="ellipse">
@@ -14544,7 +14790,7 @@
         </p:nvSpPr>
         <p:spPr>
           <a:xfrm>
-            <a:off x="2971800" y="3291840"/>
+            <a:off x="3182112" y="3291840"/>
             <a:ext cx="457200" cy="457200"/>
           </a:xfrm>
           <a:prstGeom prst="ellipse">
@@ -14578,7 +14824,7 @@
         </p:nvSpPr>
         <p:spPr>
           <a:xfrm>
-            <a:off x="2057400" y="4343400"/>
+            <a:off x="2267712" y="4343400"/>
             <a:ext cx="457200" cy="457200"/>
           </a:xfrm>
           <a:prstGeom prst="ellipse">
@@ -14612,7 +14858,7 @@
         </p:nvSpPr>
         <p:spPr>
           <a:xfrm>
-            <a:off x="539496" y="1911096"/>
+            <a:off x="749808" y="1911096"/>
             <a:ext cx="566928" cy="566928"/>
           </a:xfrm>
           <a:prstGeom prst="ellipse">
@@ -14654,7 +14900,7 @@
         </p:nvSpPr>
         <p:spPr>
           <a:xfrm>
-            <a:off x="4251960" y="1600200"/>
+            <a:off x="4462272" y="1600200"/>
             <a:ext cx="457200" cy="457200"/>
           </a:xfrm>
           <a:prstGeom prst="ellipse">
@@ -14690,7 +14936,7 @@
         </p:nvSpPr>
         <p:spPr>
           <a:xfrm>
-            <a:off x="4526280" y="2697480"/>
+            <a:off x="4736592" y="2697480"/>
             <a:ext cx="457200" cy="457200"/>
           </a:xfrm>
           <a:prstGeom prst="ellipse">
@@ -14726,7 +14972,7 @@
         </p:nvSpPr>
         <p:spPr>
           <a:xfrm>
-            <a:off x="4343400" y="3977640"/>
+            <a:off x="4553712" y="3977640"/>
             <a:ext cx="457200" cy="457200"/>
           </a:xfrm>
           <a:prstGeom prst="ellipse">
@@ -14762,7 +15008,7 @@
         </p:nvSpPr>
         <p:spPr>
           <a:xfrm>
-            <a:off x="3337560" y="4800600"/>
+            <a:off x="3547872" y="4800600"/>
             <a:ext cx="457200" cy="457200"/>
           </a:xfrm>
           <a:prstGeom prst="ellipse">
@@ -14798,7 +15044,7 @@
         </p:nvSpPr>
         <p:spPr>
           <a:xfrm>
-            <a:off x="411480" y="4251960"/>
+            <a:off x="621792" y="4251960"/>
             <a:ext cx="457200" cy="457200"/>
           </a:xfrm>
           <a:prstGeom prst="ellipse">
@@ -14832,7 +15078,7 @@
         </p:nvSpPr>
         <p:spPr>
           <a:xfrm>
-            <a:off x="137160" y="2971800"/>
+            <a:off x="347472" y="2971800"/>
             <a:ext cx="457200" cy="457200"/>
           </a:xfrm>
           <a:prstGeom prst="ellipse">
@@ -14866,7 +15112,7 @@
         </p:nvSpPr>
         <p:spPr>
           <a:xfrm>
-            <a:off x="457200" y="5559552"/>
+            <a:off x="347472" y="5559552"/>
             <a:ext cx="219456" cy="219456"/>
           </a:xfrm>
           <a:prstGeom prst="ellipse">
@@ -14900,7 +15146,7 @@
         </p:nvSpPr>
         <p:spPr>
           <a:xfrm>
-            <a:off x="749808" y="5522976"/>
+            <a:off x="640080" y="5522976"/>
             <a:ext cx="1097280" cy="292608"/>
           </a:xfrm>
           <a:prstGeom prst="rect">
@@ -14936,7 +15182,7 @@
         </p:nvSpPr>
         <p:spPr>
           <a:xfrm>
-            <a:off x="1828800" y="5559552"/>
+            <a:off x="1719072" y="5559552"/>
             <a:ext cx="219456" cy="219456"/>
           </a:xfrm>
           <a:prstGeom prst="ellipse">
@@ -14970,7 +15216,7 @@
         </p:nvSpPr>
         <p:spPr>
           <a:xfrm>
-            <a:off x="2121408" y="5522976"/>
+            <a:off x="2011680" y="5522976"/>
             <a:ext cx="1097280" cy="292608"/>
           </a:xfrm>
           <a:prstGeom prst="rect">
@@ -15006,7 +15252,7 @@
         </p:nvSpPr>
         <p:spPr>
           <a:xfrm>
-            <a:off x="3200400" y="5559552"/>
+            <a:off x="3090672" y="5559552"/>
             <a:ext cx="219456" cy="219456"/>
           </a:xfrm>
           <a:prstGeom prst="ellipse">
@@ -15042,7 +15288,7 @@
         </p:nvSpPr>
         <p:spPr>
           <a:xfrm>
-            <a:off x="3493008" y="5522976"/>
+            <a:off x="3383280" y="5522976"/>
             <a:ext cx="1097280" cy="292608"/>
           </a:xfrm>
           <a:prstGeom prst="rect">
@@ -15078,7 +15324,7 @@
         </p:nvSpPr>
         <p:spPr>
           <a:xfrm>
-            <a:off x="4572000" y="5559552"/>
+            <a:off x="4462272" y="5559552"/>
             <a:ext cx="219456" cy="219456"/>
           </a:xfrm>
           <a:prstGeom prst="ellipse">
@@ -15112,7 +15358,7 @@
         </p:nvSpPr>
         <p:spPr>
           <a:xfrm>
-            <a:off x="4864608" y="5522976"/>
+            <a:off x="4754880" y="5522976"/>
             <a:ext cx="1097280" cy="292608"/>
           </a:xfrm>
           <a:prstGeom prst="rect">
@@ -15148,8 +15394,8 @@
         </p:nvSpPr>
         <p:spPr>
           <a:xfrm>
-            <a:off x="457200" y="5989320"/>
-            <a:ext cx="5669280" cy="274320"/>
+            <a:off x="347472" y="5989320"/>
+            <a:ext cx="5486400" cy="274320"/>
           </a:xfrm>
           <a:prstGeom prst="rect">
             <a:avLst/>
@@ -15184,7 +15430,7 @@
         </p:nvSpPr>
         <p:spPr>
           <a:xfrm>
-            <a:off x="6309360" y="1691640"/>
+            <a:off x="6355080" y="1645920"/>
             <a:ext cx="402336" cy="402336"/>
           </a:xfrm>
           <a:prstGeom prst="ellipse">
@@ -15226,8 +15472,8 @@
         </p:nvSpPr>
         <p:spPr>
           <a:xfrm>
-            <a:off x="6903720" y="1691640"/>
-            <a:ext cx="4892040" cy="868680"/>
+            <a:off x="6940296" y="1645920"/>
+            <a:ext cx="4901184" cy="868680"/>
           </a:xfrm>
           <a:prstGeom prst="rect">
             <a:avLst/>
@@ -15282,7 +15528,7 @@
         </p:nvSpPr>
         <p:spPr>
           <a:xfrm>
-            <a:off x="6309360" y="2651760"/>
+            <a:off x="6355080" y="2606040"/>
             <a:ext cx="402336" cy="402336"/>
           </a:xfrm>
           <a:prstGeom prst="ellipse">
@@ -15324,8 +15570,8 @@
         </p:nvSpPr>
         <p:spPr>
           <a:xfrm>
-            <a:off x="6903720" y="2651760"/>
-            <a:ext cx="4892040" cy="868680"/>
+            <a:off x="6940296" y="2606040"/>
+            <a:ext cx="4901184" cy="868680"/>
           </a:xfrm>
           <a:prstGeom prst="rect">
             <a:avLst/>
@@ -15380,7 +15626,7 @@
         </p:nvSpPr>
         <p:spPr>
           <a:xfrm>
-            <a:off x="6309360" y="3611880"/>
+            <a:off x="6355080" y="3566160"/>
             <a:ext cx="402336" cy="402336"/>
           </a:xfrm>
           <a:prstGeom prst="ellipse">
@@ -15422,8 +15668,8 @@
         </p:nvSpPr>
         <p:spPr>
           <a:xfrm>
-            <a:off x="6903720" y="3611880"/>
-            <a:ext cx="4892040" cy="868680"/>
+            <a:off x="6940296" y="3566160"/>
+            <a:ext cx="4901184" cy="868680"/>
           </a:xfrm>
           <a:prstGeom prst="rect">
             <a:avLst/>
@@ -15486,7 +15732,7 @@
         </p:blipFill>
         <p:spPr>
           <a:xfrm>
-            <a:off x="6309360" y="4617720"/>
+            <a:off x="6355080" y="4572000"/>
             <a:ext cx="5120640" cy="551454"/>
           </a:xfrm>
           <a:prstGeom prst="rect">
@@ -15502,7 +15748,7 @@
         </p:nvSpPr>
         <p:spPr>
           <a:xfrm>
-            <a:off x="6309360" y="5349240"/>
+            <a:off x="6355080" y="5349240"/>
             <a:ext cx="5486400" cy="640080"/>
           </a:xfrm>
           <a:prstGeom prst="rect">
@@ -15576,8 +15822,8 @@
         </p:nvSpPr>
         <p:spPr>
           <a:xfrm>
-            <a:off x="347472" y="438912"/>
-            <a:ext cx="11430000" cy="457200"/>
+            <a:off x="347472" y="384048"/>
+            <a:ext cx="11494008" cy="457200"/>
           </a:xfrm>
           <a:prstGeom prst="rect">
             <a:avLst/>
@@ -15606,16 +15852,16 @@
       </p:sp>
       <p:sp>
         <p:nvSpPr>
-          <p:cNvPr id="3" name="Text 0"/>
+          <p:cNvPr id="3" name="Text 1"/>
           <p:cNvSpPr/>
           <p:nvPr>
-            <p:ph idx="101" type="body" hasCustomPrompt="1"/>
+            <p:ph idx="102" type="body" hasCustomPrompt="1"/>
           </p:nvPr>
         </p:nvSpPr>
         <p:spPr>
           <a:xfrm>
-            <a:off x="347472" y="1014984"/>
-            <a:ext cx="11430000" cy="365760"/>
+            <a:off x="347472" y="978408"/>
+            <a:ext cx="11494008" cy="365760"/>
           </a:xfrm>
           <a:prstGeom prst="rect">
             <a:avLst/>
@@ -15650,8 +15896,8 @@
         </p:nvSpPr>
         <p:spPr>
           <a:xfrm>
-            <a:off x="457200" y="1645920"/>
-            <a:ext cx="4937760" cy="365760"/>
+            <a:off x="347472" y="1645920"/>
+            <a:ext cx="5486400" cy="365760"/>
           </a:xfrm>
           <a:prstGeom prst="rect">
             <a:avLst/>
@@ -15686,8 +15932,8 @@
         </p:nvSpPr>
         <p:spPr>
           <a:xfrm>
-            <a:off x="457200" y="2103120"/>
-            <a:ext cx="4937760" cy="1828800"/>
+            <a:off x="347472" y="2103120"/>
+            <a:ext cx="5486400" cy="1828800"/>
           </a:xfrm>
           <a:prstGeom prst="rect">
             <a:avLst/>
@@ -15801,8 +16047,8 @@
         </p:nvSpPr>
         <p:spPr>
           <a:xfrm>
-            <a:off x="457200" y="4114800"/>
-            <a:ext cx="4937760" cy="365760"/>
+            <a:off x="347472" y="4114800"/>
+            <a:ext cx="5486400" cy="365760"/>
           </a:xfrm>
           <a:prstGeom prst="rect">
             <a:avLst/>
@@ -15837,8 +16083,8 @@
         </p:nvSpPr>
         <p:spPr>
           <a:xfrm>
-            <a:off x="457200" y="4572000"/>
-            <a:ext cx="1417320" cy="640080"/>
+            <a:off x="347472" y="4572000"/>
+            <a:ext cx="1554480" cy="640080"/>
           </a:xfrm>
           <a:prstGeom prst="rect">
             <a:avLst/>
@@ -15893,8 +16139,8 @@
         </p:nvSpPr>
         <p:spPr>
           <a:xfrm>
-            <a:off x="2148840" y="4572000"/>
-            <a:ext cx="1417320" cy="640080"/>
+            <a:off x="2313432" y="4572000"/>
+            <a:ext cx="1554480" cy="640080"/>
           </a:xfrm>
           <a:prstGeom prst="rect">
             <a:avLst/>
@@ -15949,8 +16195,8 @@
         </p:nvSpPr>
         <p:spPr>
           <a:xfrm>
-            <a:off x="3840480" y="4572000"/>
-            <a:ext cx="1417320" cy="640080"/>
+            <a:off x="4279392" y="4572000"/>
+            <a:ext cx="1554480" cy="640080"/>
           </a:xfrm>
           <a:prstGeom prst="rect">
             <a:avLst/>
@@ -16005,8 +16251,8 @@
         </p:nvSpPr>
         <p:spPr>
           <a:xfrm>
-            <a:off x="1874520" y="4892040"/>
-            <a:ext cx="274320" cy="0"/>
+            <a:off x="1901952" y="4892040"/>
+            <a:ext cx="411480" cy="0"/>
           </a:xfrm>
           <a:prstGeom prst="line">
             <a:avLst/>
@@ -16029,8 +16275,8 @@
         </p:nvSpPr>
         <p:spPr>
           <a:xfrm>
-            <a:off x="3566160" y="4892040"/>
-            <a:ext cx="274320" cy="0"/>
+            <a:off x="3867912" y="4892040"/>
+            <a:ext cx="411480" cy="0"/>
           </a:xfrm>
           <a:prstGeom prst="line">
             <a:avLst/>
@@ -16053,8 +16299,8 @@
         </p:nvSpPr>
         <p:spPr>
           <a:xfrm>
-            <a:off x="457200" y="5394960"/>
-            <a:ext cx="4937760" cy="594360"/>
+            <a:off x="347472" y="5394960"/>
+            <a:ext cx="5486400" cy="594360"/>
           </a:xfrm>
           <a:prstGeom prst="rect">
             <a:avLst/>
@@ -16109,8 +16355,8 @@
         </p:nvSpPr>
         <p:spPr>
           <a:xfrm>
-            <a:off x="5943600" y="1645920"/>
-            <a:ext cx="5852160" cy="365760"/>
+            <a:off x="6355080" y="1645920"/>
+            <a:ext cx="5486400" cy="365760"/>
           </a:xfrm>
           <a:prstGeom prst="rect">
             <a:avLst/>
@@ -16152,16 +16398,16 @@
           </p:nvPr>
         </p:nvGraphicFramePr>
         <p:xfrm>
-          <a:off x="5943600" y="2103120"/>
-          <a:ext cx="5852160" cy="914400"/>
+          <a:off x="6355080" y="2103120"/>
+          <a:ext cx="5486400" cy="914400"/>
         </p:xfrm>
         <a:graphic>
           <a:graphicData uri="http://schemas.openxmlformats.org/drawingml/2006/table">
             <a:tbl>
               <a:tblPr/>
               <a:tblGrid>
-                <a:gridCol w="1737360"/>
-                <a:gridCol w="4114800"/>
+                <a:gridCol w="1645920"/>
+                <a:gridCol w="3840480"/>
               </a:tblGrid>
               <a:tr h="411480">
                 <a:tc>
@@ -16952,8 +17198,8 @@
         </p:nvSpPr>
         <p:spPr>
           <a:xfrm>
-            <a:off x="347472" y="438912"/>
-            <a:ext cx="11430000" cy="457200"/>
+            <a:off x="347472" y="384048"/>
+            <a:ext cx="11494008" cy="457200"/>
           </a:xfrm>
           <a:prstGeom prst="rect">
             <a:avLst/>
@@ -16982,16 +17228,16 @@
       </p:sp>
       <p:sp>
         <p:nvSpPr>
-          <p:cNvPr id="3" name="Text 0"/>
+          <p:cNvPr id="3" name="Text 1"/>
           <p:cNvSpPr/>
           <p:nvPr>
-            <p:ph idx="101" type="body" hasCustomPrompt="1"/>
+            <p:ph idx="102" type="body" hasCustomPrompt="1"/>
           </p:nvPr>
         </p:nvSpPr>
         <p:spPr>
           <a:xfrm>
-            <a:off x="347472" y="1014984"/>
-            <a:ext cx="11430000" cy="365760"/>
+            <a:off x="347472" y="978408"/>
+            <a:ext cx="11494008" cy="365760"/>
           </a:xfrm>
           <a:prstGeom prst="rect">
             <a:avLst/>
@@ -17026,8 +17272,8 @@
         </p:nvSpPr>
         <p:spPr>
           <a:xfrm>
-            <a:off x="457200" y="1645920"/>
-            <a:ext cx="6400800" cy="365760"/>
+            <a:off x="347472" y="1645920"/>
+            <a:ext cx="5486400" cy="365760"/>
           </a:xfrm>
           <a:prstGeom prst="rect">
             <a:avLst/>
@@ -17069,17 +17315,17 @@
           </p:nvPr>
         </p:nvGraphicFramePr>
         <p:xfrm>
-          <a:off x="457200" y="2103120"/>
-          <a:ext cx="6309360" cy="914400"/>
+          <a:off x="347472" y="2103120"/>
+          <a:ext cx="5486400" cy="914400"/>
         </p:xfrm>
         <a:graphic>
           <a:graphicData uri="http://schemas.openxmlformats.org/drawingml/2006/table">
             <a:tbl>
               <a:tblPr/>
               <a:tblGrid>
-                <a:gridCol w="2011680"/>
-                <a:gridCol w="3200400"/>
-                <a:gridCol w="1097280"/>
+                <a:gridCol w="1828800"/>
+                <a:gridCol w="2743200"/>
+                <a:gridCol w="914400"/>
               </a:tblGrid>
               <a:tr h="438912">
                 <a:tc>
@@ -17721,8 +17967,8 @@
         </p:nvSpPr>
         <p:spPr>
           <a:xfrm>
-            <a:off x="457200" y="4434840"/>
-            <a:ext cx="6309360" cy="1188720"/>
+            <a:off x="347472" y="4526280"/>
+            <a:ext cx="5486400" cy="1188720"/>
           </a:xfrm>
           <a:prstGeom prst="rect">
             <a:avLst/>
@@ -17793,8 +18039,8 @@
           <p:nvPr/>
         </p:nvGraphicFramePr>
         <p:xfrm>
-          <a:off x="7132320" y="1600200"/>
-          <a:ext cx="4663440" cy="3840480"/>
+          <a:off x="6355080" y="1600200"/>
+          <a:ext cx="5486400" cy="3931920"/>
         </p:xfrm>
         <a:graphic xmlns:a="http://schemas.openxmlformats.org/drawingml/2006/main">
           <a:graphicData uri="http://schemas.openxmlformats.org/drawingml/2006/chart">
@@ -17810,8 +18056,8 @@
         </p:nvSpPr>
         <p:spPr>
           <a:xfrm>
-            <a:off x="457200" y="5852160"/>
-            <a:ext cx="11338560" cy="365760"/>
+            <a:off x="347472" y="5897880"/>
+            <a:ext cx="11494008" cy="365760"/>
           </a:xfrm>
           <a:prstGeom prst="rect">
             <a:avLst/>
@@ -17873,8 +18119,8 @@
         </p:nvSpPr>
         <p:spPr>
           <a:xfrm>
-            <a:off x="347472" y="438912"/>
-            <a:ext cx="11430000" cy="457200"/>
+            <a:off x="347472" y="384048"/>
+            <a:ext cx="11494008" cy="457200"/>
           </a:xfrm>
           <a:prstGeom prst="rect">
             <a:avLst/>
@@ -17903,16 +18149,16 @@
       </p:sp>
       <p:sp>
         <p:nvSpPr>
-          <p:cNvPr id="3" name="Text 0"/>
+          <p:cNvPr id="3" name="Text 1"/>
           <p:cNvSpPr/>
           <p:nvPr>
-            <p:ph idx="101" type="body" hasCustomPrompt="1"/>
+            <p:ph idx="102" type="body" hasCustomPrompt="1"/>
           </p:nvPr>
         </p:nvSpPr>
         <p:spPr>
           <a:xfrm>
-            <a:off x="347472" y="1014984"/>
-            <a:ext cx="11430000" cy="365760"/>
+            <a:off x="347472" y="978408"/>
+            <a:ext cx="11494008" cy="365760"/>
           </a:xfrm>
           <a:prstGeom prst="rect">
             <a:avLst/>
@@ -17947,8 +18193,8 @@
         </p:nvSpPr>
         <p:spPr>
           <a:xfrm>
-            <a:off x="457200" y="1645920"/>
-            <a:ext cx="5120640" cy="365760"/>
+            <a:off x="347472" y="1645920"/>
+            <a:ext cx="5486400" cy="365760"/>
           </a:xfrm>
           <a:prstGeom prst="rect">
             <a:avLst/>
@@ -17983,7 +18229,7 @@
         </p:nvSpPr>
         <p:spPr>
           <a:xfrm>
-            <a:off x="480060" y="2125980"/>
+            <a:off x="347472" y="2125980"/>
             <a:ext cx="502920" cy="502920"/>
           </a:xfrm>
           <a:prstGeom prst="ellipse">
@@ -18017,8 +18263,8 @@
         </p:nvSpPr>
         <p:spPr>
           <a:xfrm>
-            <a:off x="1188720" y="2048256"/>
-            <a:ext cx="4663440" cy="685800"/>
+            <a:off x="1078992" y="2048256"/>
+            <a:ext cx="4754880" cy="685800"/>
           </a:xfrm>
           <a:prstGeom prst="rect">
             <a:avLst/>
@@ -18087,7 +18333,7 @@
         </p:nvSpPr>
         <p:spPr>
           <a:xfrm>
-            <a:off x="480060" y="2994660"/>
+            <a:off x="347472" y="2994660"/>
             <a:ext cx="502920" cy="502920"/>
           </a:xfrm>
           <a:prstGeom prst="ellipse">
@@ -18121,8 +18367,8 @@
         </p:nvSpPr>
         <p:spPr>
           <a:xfrm>
-            <a:off x="1188720" y="2916936"/>
-            <a:ext cx="4663440" cy="685800"/>
+            <a:off x="1078992" y="2916936"/>
+            <a:ext cx="4754880" cy="685800"/>
           </a:xfrm>
           <a:prstGeom prst="rect">
             <a:avLst/>
@@ -18191,7 +18437,7 @@
         </p:nvSpPr>
         <p:spPr>
           <a:xfrm>
-            <a:off x="480060" y="3863340"/>
+            <a:off x="347472" y="3863340"/>
             <a:ext cx="502920" cy="502920"/>
           </a:xfrm>
           <a:prstGeom prst="ellipse">
@@ -18225,8 +18471,8 @@
         </p:nvSpPr>
         <p:spPr>
           <a:xfrm>
-            <a:off x="1188720" y="3785616"/>
-            <a:ext cx="4663440" cy="685800"/>
+            <a:off x="1078992" y="3785616"/>
+            <a:ext cx="4754880" cy="685800"/>
           </a:xfrm>
           <a:prstGeom prst="rect">
             <a:avLst/>
@@ -18295,7 +18541,7 @@
         </p:nvSpPr>
         <p:spPr>
           <a:xfrm>
-            <a:off x="480060" y="4732020"/>
+            <a:off x="347472" y="4732020"/>
             <a:ext cx="502920" cy="502920"/>
           </a:xfrm>
           <a:prstGeom prst="ellipse">
@@ -18329,8 +18575,8 @@
         </p:nvSpPr>
         <p:spPr>
           <a:xfrm>
-            <a:off x="1188720" y="4654296"/>
-            <a:ext cx="4663440" cy="685800"/>
+            <a:off x="1078992" y="4654296"/>
+            <a:ext cx="4754880" cy="685800"/>
           </a:xfrm>
           <a:prstGeom prst="rect">
             <a:avLst/>
@@ -18399,8 +18645,8 @@
         </p:nvSpPr>
         <p:spPr>
           <a:xfrm>
-            <a:off x="457200" y="5669280"/>
-            <a:ext cx="5303520" cy="594360"/>
+            <a:off x="347472" y="5669280"/>
+            <a:ext cx="5486400" cy="594360"/>
           </a:xfrm>
           <a:prstGeom prst="rect">
             <a:avLst/>
@@ -18455,8 +18701,8 @@
         </p:nvSpPr>
         <p:spPr>
           <a:xfrm>
-            <a:off x="6309360" y="1645920"/>
-            <a:ext cx="4572000" cy="365760"/>
+            <a:off x="6355080" y="1645920"/>
+            <a:ext cx="5486400" cy="365760"/>
           </a:xfrm>
           <a:prstGeom prst="rect">
             <a:avLst/>
@@ -18491,8 +18737,8 @@
         </p:nvSpPr>
         <p:spPr>
           <a:xfrm>
-            <a:off x="6537960" y="2606040"/>
-            <a:ext cx="0" cy="2990088"/>
+            <a:off x="6583680" y="2377440"/>
+            <a:ext cx="0" cy="3218688"/>
           </a:xfrm>
           <a:prstGeom prst="line">
             <a:avLst/>
@@ -18514,7 +18760,7 @@
         </p:nvSpPr>
         <p:spPr>
           <a:xfrm>
-            <a:off x="6309360" y="2148840"/>
+            <a:off x="6355080" y="2148840"/>
             <a:ext cx="457200" cy="457200"/>
           </a:xfrm>
           <a:prstGeom prst="ellipse">
@@ -18556,7 +18802,7 @@
         </p:nvSpPr>
         <p:spPr>
           <a:xfrm>
-            <a:off x="6995160" y="2103120"/>
+            <a:off x="7040880" y="2103120"/>
             <a:ext cx="4800600" cy="685800"/>
           </a:xfrm>
           <a:prstGeom prst="rect">
@@ -18606,7 +18852,7 @@
         </p:nvSpPr>
         <p:spPr>
           <a:xfrm>
-            <a:off x="6309360" y="2953512"/>
+            <a:off x="6355080" y="2953512"/>
             <a:ext cx="457200" cy="457200"/>
           </a:xfrm>
           <a:prstGeom prst="ellipse">
@@ -18648,7 +18894,7 @@
         </p:nvSpPr>
         <p:spPr>
           <a:xfrm>
-            <a:off x="6995160" y="2907792"/>
+            <a:off x="7040880" y="2907792"/>
             <a:ext cx="4800600" cy="685800"/>
           </a:xfrm>
           <a:prstGeom prst="rect">
@@ -18698,7 +18944,7 @@
         </p:nvSpPr>
         <p:spPr>
           <a:xfrm>
-            <a:off x="6309360" y="3758184"/>
+            <a:off x="6355080" y="3758184"/>
             <a:ext cx="457200" cy="457200"/>
           </a:xfrm>
           <a:prstGeom prst="ellipse">
@@ -18740,7 +18986,7 @@
         </p:nvSpPr>
         <p:spPr>
           <a:xfrm>
-            <a:off x="6995160" y="3712464"/>
+            <a:off x="7040880" y="3712464"/>
             <a:ext cx="4800600" cy="685800"/>
           </a:xfrm>
           <a:prstGeom prst="rect">
@@ -18790,7 +19036,7 @@
         </p:nvSpPr>
         <p:spPr>
           <a:xfrm>
-            <a:off x="6309360" y="4562856"/>
+            <a:off x="6355080" y="4562856"/>
             <a:ext cx="457200" cy="457200"/>
           </a:xfrm>
           <a:prstGeom prst="ellipse">
@@ -18832,7 +19078,7 @@
         </p:nvSpPr>
         <p:spPr>
           <a:xfrm>
-            <a:off x="6995160" y="4517136"/>
+            <a:off x="7040880" y="4517136"/>
             <a:ext cx="4800600" cy="685800"/>
           </a:xfrm>
           <a:prstGeom prst="rect">
@@ -18882,7 +19128,7 @@
         </p:nvSpPr>
         <p:spPr>
           <a:xfrm>
-            <a:off x="6309360" y="5367528"/>
+            <a:off x="6355080" y="5367528"/>
             <a:ext cx="457200" cy="457200"/>
           </a:xfrm>
           <a:prstGeom prst="ellipse">
@@ -18924,7 +19170,7 @@
         </p:nvSpPr>
         <p:spPr>
           <a:xfrm>
-            <a:off x="6995160" y="5321808"/>
+            <a:off x="7040880" y="5321808"/>
             <a:ext cx="4800600" cy="685800"/>
           </a:xfrm>
           <a:prstGeom prst="rect">
@@ -19001,8 +19247,8 @@
         </p:nvSpPr>
         <p:spPr>
           <a:xfrm>
-            <a:off x="347472" y="438912"/>
-            <a:ext cx="11430000" cy="457200"/>
+            <a:off x="347472" y="384048"/>
+            <a:ext cx="11494008" cy="457200"/>
           </a:xfrm>
           <a:prstGeom prst="rect">
             <a:avLst/>
@@ -19031,16 +19277,16 @@
       </p:sp>
       <p:sp>
         <p:nvSpPr>
-          <p:cNvPr id="3" name="Text 0"/>
+          <p:cNvPr id="3" name="Text 1"/>
           <p:cNvSpPr/>
           <p:nvPr>
-            <p:ph idx="101" type="body" hasCustomPrompt="1"/>
+            <p:ph idx="102" type="body" hasCustomPrompt="1"/>
           </p:nvPr>
         </p:nvSpPr>
         <p:spPr>
           <a:xfrm>
-            <a:off x="347472" y="1014984"/>
-            <a:ext cx="11430000" cy="365760"/>
+            <a:off x="347472" y="978408"/>
+            <a:ext cx="11494008" cy="365760"/>
           </a:xfrm>
           <a:prstGeom prst="rect">
             <a:avLst/>
@@ -19083,7 +19329,7 @@
         </p:blipFill>
         <p:spPr>
           <a:xfrm>
-            <a:off x="4498848" y="1737360"/>
+            <a:off x="4494276" y="1737360"/>
             <a:ext cx="3200400" cy="3200400"/>
           </a:xfrm>
           <a:prstGeom prst="rect">
@@ -19099,8 +19345,8 @@
         </p:nvSpPr>
         <p:spPr>
           <a:xfrm>
-            <a:off x="3657600" y="5120640"/>
-            <a:ext cx="4873752" cy="365760"/>
+            <a:off x="347472" y="5120640"/>
+            <a:ext cx="11494008" cy="365760"/>
           </a:xfrm>
           <a:prstGeom prst="rect">
             <a:avLst/>
@@ -19162,8 +19408,8 @@
         </p:nvSpPr>
         <p:spPr>
           <a:xfrm>
-            <a:off x="347472" y="438912"/>
-            <a:ext cx="11430000" cy="457200"/>
+            <a:off x="347472" y="384048"/>
+            <a:ext cx="11494008" cy="457200"/>
           </a:xfrm>
           <a:prstGeom prst="rect">
             <a:avLst/>
@@ -19192,16 +19438,16 @@
       </p:sp>
       <p:sp>
         <p:nvSpPr>
-          <p:cNvPr id="3" name="Text 0"/>
+          <p:cNvPr id="3" name="Text 1"/>
           <p:cNvSpPr/>
           <p:nvPr>
-            <p:ph idx="101" type="body" hasCustomPrompt="1"/>
+            <p:ph idx="102" type="body" hasCustomPrompt="1"/>
           </p:nvPr>
         </p:nvSpPr>
         <p:spPr>
           <a:xfrm>
-            <a:off x="347472" y="1014984"/>
-            <a:ext cx="11430000" cy="365760"/>
+            <a:off x="347472" y="978408"/>
+            <a:ext cx="11494008" cy="365760"/>
           </a:xfrm>
           <a:prstGeom prst="rect">
             <a:avLst/>
@@ -19236,7 +19482,7 @@
         </p:nvSpPr>
         <p:spPr>
           <a:xfrm>
-            <a:off x="457200" y="1645920"/>
+            <a:off x="347472" y="1645920"/>
             <a:ext cx="5486400" cy="365760"/>
           </a:xfrm>
           <a:prstGeom prst="rect">
@@ -19272,7 +19518,7 @@
         </p:nvSpPr>
         <p:spPr>
           <a:xfrm>
-            <a:off x="708660" y="2331720"/>
+            <a:off x="598932" y="2377440"/>
             <a:ext cx="0" cy="2606040"/>
           </a:xfrm>
           <a:prstGeom prst="line">
@@ -19295,7 +19541,7 @@
         </p:nvSpPr>
         <p:spPr>
           <a:xfrm>
-            <a:off x="457200" y="2080260"/>
+            <a:off x="347472" y="2125980"/>
             <a:ext cx="502920" cy="502920"/>
           </a:xfrm>
           <a:prstGeom prst="ellipse">
@@ -19337,8 +19583,8 @@
         </p:nvSpPr>
         <p:spPr>
           <a:xfrm>
-            <a:off x="1188720" y="2057400"/>
-            <a:ext cx="5943600" cy="685800"/>
+            <a:off x="1078992" y="2103120"/>
+            <a:ext cx="4754880" cy="685800"/>
           </a:xfrm>
           <a:prstGeom prst="rect">
             <a:avLst/>
@@ -19387,7 +19633,7 @@
         </p:nvSpPr>
         <p:spPr>
           <a:xfrm>
-            <a:off x="457200" y="2948940"/>
+            <a:off x="347472" y="2994660"/>
             <a:ext cx="502920" cy="502920"/>
           </a:xfrm>
           <a:prstGeom prst="ellipse">
@@ -19429,8 +19675,8 @@
         </p:nvSpPr>
         <p:spPr>
           <a:xfrm>
-            <a:off x="1188720" y="2926080"/>
-            <a:ext cx="5943600" cy="685800"/>
+            <a:off x="1078992" y="2971800"/>
+            <a:ext cx="4754880" cy="685800"/>
           </a:xfrm>
           <a:prstGeom prst="rect">
             <a:avLst/>
@@ -19479,7 +19725,7 @@
         </p:nvSpPr>
         <p:spPr>
           <a:xfrm>
-            <a:off x="457200" y="3817620"/>
+            <a:off x="347472" y="3863340"/>
             <a:ext cx="502920" cy="502920"/>
           </a:xfrm>
           <a:prstGeom prst="ellipse">
@@ -19521,8 +19767,8 @@
         </p:nvSpPr>
         <p:spPr>
           <a:xfrm>
-            <a:off x="1188720" y="3794760"/>
-            <a:ext cx="5943600" cy="685800"/>
+            <a:off x="1078992" y="3840480"/>
+            <a:ext cx="4754880" cy="685800"/>
           </a:xfrm>
           <a:prstGeom prst="rect">
             <a:avLst/>
@@ -19571,7 +19817,7 @@
         </p:nvSpPr>
         <p:spPr>
           <a:xfrm>
-            <a:off x="457200" y="4686300"/>
+            <a:off x="347472" y="4732020"/>
             <a:ext cx="502920" cy="502920"/>
           </a:xfrm>
           <a:prstGeom prst="ellipse">
@@ -19613,8 +19859,8 @@
         </p:nvSpPr>
         <p:spPr>
           <a:xfrm>
-            <a:off x="1188720" y="4663440"/>
-            <a:ext cx="5943600" cy="685800"/>
+            <a:off x="1078992" y="4709160"/>
+            <a:ext cx="4754880" cy="685800"/>
           </a:xfrm>
           <a:prstGeom prst="rect">
             <a:avLst/>
@@ -19663,8 +19909,8 @@
         </p:nvSpPr>
         <p:spPr>
           <a:xfrm>
-            <a:off x="7315200" y="1645920"/>
-            <a:ext cx="4206240" cy="365760"/>
+            <a:off x="6355080" y="1645920"/>
+            <a:ext cx="5486400" cy="365760"/>
           </a:xfrm>
           <a:prstGeom prst="rect">
             <a:avLst/>
@@ -19699,8 +19945,8 @@
         </p:nvSpPr>
         <p:spPr>
           <a:xfrm>
-            <a:off x="7315200" y="2148840"/>
-            <a:ext cx="4206240" cy="566928"/>
+            <a:off x="6355080" y="2093976"/>
+            <a:ext cx="5486400" cy="566928"/>
           </a:xfrm>
           <a:prstGeom prst="rect">
             <a:avLst/>
@@ -19741,8 +19987,8 @@
         </p:nvSpPr>
         <p:spPr>
           <a:xfrm>
-            <a:off x="9418320" y="2715768"/>
-            <a:ext cx="0" cy="347472"/>
+            <a:off x="9098280" y="2660904"/>
+            <a:ext cx="0" cy="301752"/>
           </a:xfrm>
           <a:prstGeom prst="line">
             <a:avLst/>
@@ -19765,8 +20011,8 @@
         </p:nvSpPr>
         <p:spPr>
           <a:xfrm>
-            <a:off x="7315200" y="3063240"/>
-            <a:ext cx="4206240" cy="566928"/>
+            <a:off x="6355080" y="2962656"/>
+            <a:ext cx="5486400" cy="566928"/>
           </a:xfrm>
           <a:prstGeom prst="rect">
             <a:avLst/>
@@ -19807,8 +20053,8 @@
         </p:nvSpPr>
         <p:spPr>
           <a:xfrm>
-            <a:off x="9418320" y="3630168"/>
-            <a:ext cx="0" cy="347472"/>
+            <a:off x="9098280" y="3529584"/>
+            <a:ext cx="0" cy="301752"/>
           </a:xfrm>
           <a:prstGeom prst="line">
             <a:avLst/>
@@ -19831,8 +20077,8 @@
         </p:nvSpPr>
         <p:spPr>
           <a:xfrm>
-            <a:off x="7315200" y="3977640"/>
-            <a:ext cx="4206240" cy="566928"/>
+            <a:off x="6355080" y="3831336"/>
+            <a:ext cx="5486400" cy="566928"/>
           </a:xfrm>
           <a:prstGeom prst="rect">
             <a:avLst/>
@@ -19873,8 +20119,8 @@
         </p:nvSpPr>
         <p:spPr>
           <a:xfrm>
-            <a:off x="457200" y="5806440"/>
-            <a:ext cx="11338560" cy="411480"/>
+            <a:off x="347472" y="5806440"/>
+            <a:ext cx="11494008" cy="411480"/>
           </a:xfrm>
           <a:prstGeom prst="rect">
             <a:avLst/>
@@ -20049,8 +20295,8 @@
         </p:nvSpPr>
         <p:spPr>
           <a:xfrm>
-            <a:off x="347472" y="438912"/>
-            <a:ext cx="11430000" cy="457200"/>
+            <a:off x="347472" y="384048"/>
+            <a:ext cx="11494008" cy="457200"/>
           </a:xfrm>
           <a:prstGeom prst="rect">
             <a:avLst/>
@@ -20079,16 +20325,16 @@
       </p:sp>
       <p:sp>
         <p:nvSpPr>
-          <p:cNvPr id="3" name="Text 0"/>
+          <p:cNvPr id="3" name="Text 1"/>
           <p:cNvSpPr/>
           <p:nvPr>
-            <p:ph idx="101" type="body" hasCustomPrompt="1"/>
+            <p:ph idx="102" type="body" hasCustomPrompt="1"/>
           </p:nvPr>
         </p:nvSpPr>
         <p:spPr>
           <a:xfrm>
-            <a:off x="347472" y="1014984"/>
-            <a:ext cx="11430000" cy="365760"/>
+            <a:off x="347472" y="978408"/>
+            <a:ext cx="11494008" cy="365760"/>
           </a:xfrm>
           <a:prstGeom prst="rect">
             <a:avLst/>
@@ -20123,8 +20369,8 @@
         </p:nvSpPr>
         <p:spPr>
           <a:xfrm>
-            <a:off x="996696" y="2144268"/>
-            <a:ext cx="2295144" cy="0"/>
+            <a:off x="886968" y="1915668"/>
+            <a:ext cx="2402586" cy="0"/>
           </a:xfrm>
           <a:prstGeom prst="line">
             <a:avLst/>
@@ -20147,8 +20393,8 @@
         </p:nvSpPr>
         <p:spPr>
           <a:xfrm>
-            <a:off x="3831336" y="2144268"/>
-            <a:ext cx="2295144" cy="0"/>
+            <a:off x="3829050" y="1915668"/>
+            <a:ext cx="2402586" cy="0"/>
           </a:xfrm>
           <a:prstGeom prst="line">
             <a:avLst/>
@@ -20171,8 +20417,8 @@
         </p:nvSpPr>
         <p:spPr>
           <a:xfrm>
-            <a:off x="6665976" y="2144268"/>
-            <a:ext cx="2295144" cy="0"/>
+            <a:off x="6771132" y="1915668"/>
+            <a:ext cx="2402586" cy="0"/>
           </a:xfrm>
           <a:prstGeom prst="line">
             <a:avLst/>
@@ -20195,7 +20441,7 @@
         </p:nvSpPr>
         <p:spPr>
           <a:xfrm>
-            <a:off x="457200" y="1874520"/>
+            <a:off x="347472" y="1645920"/>
             <a:ext cx="539496" cy="539496"/>
           </a:xfrm>
           <a:prstGeom prst="ellipse">
@@ -20237,8 +20483,8 @@
         </p:nvSpPr>
         <p:spPr>
           <a:xfrm>
-            <a:off x="457200" y="2651760"/>
-            <a:ext cx="2651760" cy="685800"/>
+            <a:off x="347472" y="2423160"/>
+            <a:ext cx="2667762" cy="685800"/>
           </a:xfrm>
           <a:prstGeom prst="rect">
             <a:avLst/>
@@ -20273,8 +20519,8 @@
         </p:nvSpPr>
         <p:spPr>
           <a:xfrm>
-            <a:off x="457200" y="3383280"/>
-            <a:ext cx="2651760" cy="502920"/>
+            <a:off x="347472" y="3154680"/>
+            <a:ext cx="2667762" cy="502920"/>
           </a:xfrm>
           <a:prstGeom prst="rect">
             <a:avLst/>
@@ -20309,8 +20555,8 @@
         </p:nvSpPr>
         <p:spPr>
           <a:xfrm>
-            <a:off x="457200" y="3977640"/>
-            <a:ext cx="2743200" cy="822960"/>
+            <a:off x="347472" y="3749040"/>
+            <a:ext cx="2667762" cy="822960"/>
           </a:xfrm>
           <a:prstGeom prst="rect">
             <a:avLst/>
@@ -20334,7 +20580,7 @@
                   <a:schemeClr val="tx1"/>
                 </a:solidFill>
               </a:rPr>
-              <a:t>처음 보는 정상 운전을 이상으로 오인</a:t>
+              <a:t>처음 보는 정상 운전 오인율</a:t>
             </a:r>
             <a:endParaRPr lang="en-US" sz="1300" dirty="0"/>
           </a:p>
@@ -20365,7 +20611,7 @@
         </p:nvSpPr>
         <p:spPr>
           <a:xfrm>
-            <a:off x="3291840" y="1874520"/>
+            <a:off x="3289554" y="1645920"/>
             <a:ext cx="539496" cy="539496"/>
           </a:xfrm>
           <a:prstGeom prst="ellipse">
@@ -20407,8 +20653,8 @@
         </p:nvSpPr>
         <p:spPr>
           <a:xfrm>
-            <a:off x="3291840" y="2651760"/>
-            <a:ext cx="2651760" cy="685800"/>
+            <a:off x="3289554" y="2423160"/>
+            <a:ext cx="2667762" cy="685800"/>
           </a:xfrm>
           <a:prstGeom prst="rect">
             <a:avLst/>
@@ -20443,8 +20689,8 @@
         </p:nvSpPr>
         <p:spPr>
           <a:xfrm>
-            <a:off x="3291840" y="3383280"/>
-            <a:ext cx="2651760" cy="502920"/>
+            <a:off x="3289554" y="3154680"/>
+            <a:ext cx="2667762" cy="502920"/>
           </a:xfrm>
           <a:prstGeom prst="rect">
             <a:avLst/>
@@ -20479,8 +20725,8 @@
         </p:nvSpPr>
         <p:spPr>
           <a:xfrm>
-            <a:off x="3291840" y="3977640"/>
-            <a:ext cx="2743200" cy="822960"/>
+            <a:off x="3289554" y="3749040"/>
+            <a:ext cx="2667762" cy="822960"/>
           </a:xfrm>
           <a:prstGeom prst="rect">
             <a:avLst/>
@@ -20535,7 +20781,7 @@
         </p:nvSpPr>
         <p:spPr>
           <a:xfrm>
-            <a:off x="6126480" y="1874520"/>
+            <a:off x="6231636" y="1645920"/>
             <a:ext cx="539496" cy="539496"/>
           </a:xfrm>
           <a:prstGeom prst="ellipse">
@@ -20577,8 +20823,8 @@
         </p:nvSpPr>
         <p:spPr>
           <a:xfrm>
-            <a:off x="6126480" y="2651760"/>
-            <a:ext cx="2651760" cy="685800"/>
+            <a:off x="6231636" y="2423160"/>
+            <a:ext cx="2667762" cy="685800"/>
           </a:xfrm>
           <a:prstGeom prst="rect">
             <a:avLst/>
@@ -20613,8 +20859,8 @@
         </p:nvSpPr>
         <p:spPr>
           <a:xfrm>
-            <a:off x="6126480" y="3383280"/>
-            <a:ext cx="2651760" cy="502920"/>
+            <a:off x="6231636" y="3154680"/>
+            <a:ext cx="2667762" cy="502920"/>
           </a:xfrm>
           <a:prstGeom prst="rect">
             <a:avLst/>
@@ -20649,8 +20895,8 @@
         </p:nvSpPr>
         <p:spPr>
           <a:xfrm>
-            <a:off x="6126480" y="3977640"/>
-            <a:ext cx="2743200" cy="822960"/>
+            <a:off x="6231636" y="3749040"/>
+            <a:ext cx="2667762" cy="822960"/>
           </a:xfrm>
           <a:prstGeom prst="rect">
             <a:avLst/>
@@ -20705,7 +20951,7 @@
         </p:nvSpPr>
         <p:spPr>
           <a:xfrm>
-            <a:off x="8961120" y="1874520"/>
+            <a:off x="9173718" y="1645920"/>
             <a:ext cx="539496" cy="539496"/>
           </a:xfrm>
           <a:prstGeom prst="ellipse">
@@ -20747,8 +20993,8 @@
         </p:nvSpPr>
         <p:spPr>
           <a:xfrm>
-            <a:off x="8961120" y="2651760"/>
-            <a:ext cx="2651760" cy="685800"/>
+            <a:off x="9173718" y="2423160"/>
+            <a:ext cx="2667762" cy="685800"/>
           </a:xfrm>
           <a:prstGeom prst="rect">
             <a:avLst/>
@@ -20783,8 +21029,8 @@
         </p:nvSpPr>
         <p:spPr>
           <a:xfrm>
-            <a:off x="8961120" y="3383280"/>
-            <a:ext cx="2651760" cy="502920"/>
+            <a:off x="9173718" y="3154680"/>
+            <a:ext cx="2667762" cy="502920"/>
           </a:xfrm>
           <a:prstGeom prst="rect">
             <a:avLst/>
@@ -20819,8 +21065,8 @@
         </p:nvSpPr>
         <p:spPr>
           <a:xfrm>
-            <a:off x="8961120" y="3977640"/>
-            <a:ext cx="2743200" cy="822960"/>
+            <a:off x="9173718" y="3749040"/>
+            <a:ext cx="2667762" cy="822960"/>
           </a:xfrm>
           <a:prstGeom prst="rect">
             <a:avLst/>
@@ -20875,8 +21121,8 @@
         </p:nvSpPr>
         <p:spPr>
           <a:xfrm>
-            <a:off x="457200" y="5257800"/>
-            <a:ext cx="11247120" cy="777240"/>
+            <a:off x="347472" y="5120640"/>
+            <a:ext cx="11494008" cy="777240"/>
           </a:xfrm>
           <a:prstGeom prst="rect">
             <a:avLst/>
@@ -20958,8 +21204,8 @@
         </p:nvSpPr>
         <p:spPr>
           <a:xfrm>
-            <a:off x="347472" y="438912"/>
-            <a:ext cx="11430000" cy="457200"/>
+            <a:off x="347472" y="384048"/>
+            <a:ext cx="11494008" cy="457200"/>
           </a:xfrm>
           <a:prstGeom prst="rect">
             <a:avLst/>
@@ -20988,16 +21234,16 @@
       </p:sp>
       <p:sp>
         <p:nvSpPr>
-          <p:cNvPr id="3" name="Text 0"/>
+          <p:cNvPr id="3" name="Text 1"/>
           <p:cNvSpPr/>
           <p:nvPr>
-            <p:ph idx="101" type="body" hasCustomPrompt="1"/>
+            <p:ph idx="102" type="body" hasCustomPrompt="1"/>
           </p:nvPr>
         </p:nvSpPr>
         <p:spPr>
           <a:xfrm>
-            <a:off x="347472" y="1014984"/>
-            <a:ext cx="11430000" cy="365760"/>
+            <a:off x="347472" y="978408"/>
+            <a:ext cx="11494008" cy="365760"/>
           </a:xfrm>
           <a:prstGeom prst="rect">
             <a:avLst/>
@@ -21032,7 +21278,7 @@
         </p:nvSpPr>
         <p:spPr>
           <a:xfrm>
-            <a:off x="457200" y="1783080"/>
+            <a:off x="347472" y="1645920"/>
             <a:ext cx="1828800" cy="640080"/>
           </a:xfrm>
           <a:prstGeom prst="rect">
@@ -21074,7 +21320,7 @@
         </p:nvSpPr>
         <p:spPr>
           <a:xfrm>
-            <a:off x="2743200" y="1783080"/>
+            <a:off x="2633472" y="1645920"/>
             <a:ext cx="1828800" cy="640080"/>
           </a:xfrm>
           <a:prstGeom prst="rect">
@@ -21116,7 +21362,7 @@
         </p:nvSpPr>
         <p:spPr>
           <a:xfrm>
-            <a:off x="5029200" y="1783080"/>
+            <a:off x="4919472" y="1645920"/>
             <a:ext cx="1828800" cy="640080"/>
           </a:xfrm>
           <a:prstGeom prst="rect">
@@ -21158,7 +21404,7 @@
         </p:nvSpPr>
         <p:spPr>
           <a:xfrm>
-            <a:off x="2286000" y="2103120"/>
+            <a:off x="2176272" y="1965960"/>
             <a:ext cx="457200" cy="0"/>
           </a:xfrm>
           <a:prstGeom prst="line">
@@ -21182,7 +21428,7 @@
         </p:nvSpPr>
         <p:spPr>
           <a:xfrm>
-            <a:off x="4572000" y="2103120"/>
+            <a:off x="4462272" y="1965960"/>
             <a:ext cx="457200" cy="0"/>
           </a:xfrm>
           <a:prstGeom prst="line">
@@ -21206,8 +21452,8 @@
         </p:nvSpPr>
         <p:spPr>
           <a:xfrm>
-            <a:off x="457200" y="2560320"/>
-            <a:ext cx="6400800" cy="320040"/>
+            <a:off x="347472" y="2395728"/>
+            <a:ext cx="6400800" cy="274320"/>
           </a:xfrm>
           <a:prstGeom prst="rect">
             <a:avLst/>
@@ -21242,8 +21488,8 @@
         </p:nvSpPr>
         <p:spPr>
           <a:xfrm>
-            <a:off x="457200" y="3108960"/>
-            <a:ext cx="6766560" cy="1371600"/>
+            <a:off x="347472" y="2971800"/>
+            <a:ext cx="6949440" cy="1371600"/>
           </a:xfrm>
           <a:prstGeom prst="rect">
             <a:avLst/>
@@ -21357,8 +21603,8 @@
         </p:nvSpPr>
         <p:spPr>
           <a:xfrm>
-            <a:off x="7863840" y="1691640"/>
-            <a:ext cx="3931920" cy="914400"/>
+            <a:off x="8001000" y="1554480"/>
+            <a:ext cx="3840480" cy="914400"/>
           </a:xfrm>
           <a:prstGeom prst="rect">
             <a:avLst/>
@@ -21393,8 +21639,8 @@
         </p:nvSpPr>
         <p:spPr>
           <a:xfrm>
-            <a:off x="7863840" y="2651760"/>
-            <a:ext cx="3931920" cy="548640"/>
+            <a:off x="8001000" y="2514600"/>
+            <a:ext cx="3840480" cy="548640"/>
           </a:xfrm>
           <a:prstGeom prst="rect">
             <a:avLst/>
@@ -21429,8 +21675,8 @@
         </p:nvSpPr>
         <p:spPr>
           <a:xfrm>
-            <a:off x="7863840" y="3337560"/>
-            <a:ext cx="3931920" cy="548640"/>
+            <a:off x="8001000" y="3200400"/>
+            <a:ext cx="3840480" cy="548640"/>
           </a:xfrm>
           <a:prstGeom prst="rect">
             <a:avLst/>
@@ -21465,8 +21711,8 @@
         </p:nvSpPr>
         <p:spPr>
           <a:xfrm>
-            <a:off x="7863840" y="3931920"/>
-            <a:ext cx="3931920" cy="320040"/>
+            <a:off x="8001000" y="3794760"/>
+            <a:ext cx="3840480" cy="320040"/>
           </a:xfrm>
           <a:prstGeom prst="rect">
             <a:avLst/>
@@ -21501,7 +21747,7 @@
         </p:nvSpPr>
         <p:spPr>
           <a:xfrm>
-            <a:off x="457200" y="4754880"/>
+            <a:off x="347472" y="4709160"/>
             <a:ext cx="5486400" cy="411480"/>
           </a:xfrm>
           <a:prstGeom prst="rect">
@@ -21537,7 +21783,7 @@
         </p:nvSpPr>
         <p:spPr>
           <a:xfrm>
-            <a:off x="457200" y="5257800"/>
+            <a:off x="347472" y="5212080"/>
             <a:ext cx="8229600" cy="868680"/>
           </a:xfrm>
           <a:prstGeom prst="rect">
@@ -21648,8 +21894,8 @@
         </p:nvSpPr>
         <p:spPr>
           <a:xfrm>
-            <a:off x="347472" y="438912"/>
-            <a:ext cx="11430000" cy="457200"/>
+            <a:off x="347472" y="384048"/>
+            <a:ext cx="11494008" cy="457200"/>
           </a:xfrm>
           <a:prstGeom prst="rect">
             <a:avLst/>
@@ -21678,16 +21924,16 @@
       </p:sp>
       <p:sp>
         <p:nvSpPr>
-          <p:cNvPr id="3" name="Text 0"/>
+          <p:cNvPr id="3" name="Text 1"/>
           <p:cNvSpPr/>
           <p:nvPr>
-            <p:ph idx="101" type="body" hasCustomPrompt="1"/>
+            <p:ph idx="102" type="body" hasCustomPrompt="1"/>
           </p:nvPr>
         </p:nvSpPr>
         <p:spPr>
           <a:xfrm>
-            <a:off x="347472" y="1014984"/>
-            <a:ext cx="11430000" cy="365760"/>
+            <a:off x="347472" y="978408"/>
+            <a:ext cx="11494008" cy="365760"/>
           </a:xfrm>
           <a:prstGeom prst="rect">
             <a:avLst/>
@@ -21730,8 +21976,8 @@
         </p:blipFill>
         <p:spPr>
           <a:xfrm>
-            <a:off x="594360" y="1554480"/>
-            <a:ext cx="10972800" cy="3629465"/>
+            <a:off x="347472" y="1554480"/>
+            <a:ext cx="11494008" cy="3801864"/>
           </a:xfrm>
           <a:prstGeom prst="rect">
             <a:avLst/>
@@ -21746,8 +21992,8 @@
         </p:nvSpPr>
         <p:spPr>
           <a:xfrm>
-            <a:off x="594360" y="5230368"/>
-            <a:ext cx="10972800" cy="274320"/>
+            <a:off x="347472" y="5411208"/>
+            <a:ext cx="11494008" cy="274320"/>
           </a:xfrm>
           <a:prstGeom prst="rect">
             <a:avLst/>
@@ -21782,8 +22028,8 @@
         </p:nvSpPr>
         <p:spPr>
           <a:xfrm>
-            <a:off x="594360" y="5596128"/>
-            <a:ext cx="11155680" cy="777240"/>
+            <a:off x="347472" y="5760720"/>
+            <a:ext cx="11494008" cy="594360"/>
           </a:xfrm>
           <a:prstGeom prst="rect">
             <a:avLst/>
@@ -21893,8 +22139,8 @@
         </p:nvSpPr>
         <p:spPr>
           <a:xfrm>
-            <a:off x="347472" y="438912"/>
-            <a:ext cx="11430000" cy="457200"/>
+            <a:off x="347472" y="384048"/>
+            <a:ext cx="11494008" cy="457200"/>
           </a:xfrm>
           <a:prstGeom prst="rect">
             <a:avLst/>
@@ -21923,16 +22169,16 @@
       </p:sp>
       <p:sp>
         <p:nvSpPr>
-          <p:cNvPr id="3" name="Text 0"/>
+          <p:cNvPr id="3" name="Text 1"/>
           <p:cNvSpPr/>
           <p:nvPr>
-            <p:ph idx="101" type="body" hasCustomPrompt="1"/>
+            <p:ph idx="102" type="body" hasCustomPrompt="1"/>
           </p:nvPr>
         </p:nvSpPr>
         <p:spPr>
           <a:xfrm>
-            <a:off x="347472" y="1014984"/>
-            <a:ext cx="11430000" cy="365760"/>
+            <a:off x="347472" y="978408"/>
+            <a:ext cx="11494008" cy="365760"/>
           </a:xfrm>
           <a:prstGeom prst="rect">
             <a:avLst/>
@@ -21967,7 +22213,7 @@
         </p:nvSpPr>
         <p:spPr>
           <a:xfrm>
-            <a:off x="822960" y="1600200"/>
+            <a:off x="804672" y="1645920"/>
             <a:ext cx="4206240" cy="320040"/>
           </a:xfrm>
           <a:prstGeom prst="rect">
@@ -22003,8 +22249,8 @@
         </p:nvSpPr>
         <p:spPr>
           <a:xfrm>
-            <a:off x="6309360" y="1600200"/>
-            <a:ext cx="5303520" cy="320040"/>
+            <a:off x="6355080" y="1645920"/>
+            <a:ext cx="5486400" cy="320040"/>
           </a:xfrm>
           <a:prstGeom prst="rect">
             <a:avLst/>
@@ -22039,7 +22285,7 @@
         </p:nvSpPr>
         <p:spPr>
           <a:xfrm>
-            <a:off x="402336" y="2029968"/>
+            <a:off x="347472" y="2075688"/>
             <a:ext cx="292608" cy="292608"/>
           </a:xfrm>
           <a:prstGeom prst="ellipse">
@@ -22081,8 +22327,8 @@
         </p:nvSpPr>
         <p:spPr>
           <a:xfrm>
-            <a:off x="822960" y="2011680"/>
-            <a:ext cx="4480560" cy="329184"/>
+            <a:off x="804672" y="2057400"/>
+            <a:ext cx="4544568" cy="329184"/>
           </a:xfrm>
           <a:prstGeom prst="rect">
             <a:avLst/>
@@ -22117,7 +22363,7 @@
         </p:nvSpPr>
         <p:spPr>
           <a:xfrm>
-            <a:off x="5394960" y="2176272"/>
+            <a:off x="5440680" y="2221992"/>
             <a:ext cx="731520" cy="0"/>
           </a:xfrm>
           <a:prstGeom prst="line">
@@ -22141,7 +22387,7 @@
         </p:nvSpPr>
         <p:spPr>
           <a:xfrm>
-            <a:off x="6309360" y="2011680"/>
+            <a:off x="6355080" y="2057400"/>
             <a:ext cx="5486400" cy="329184"/>
           </a:xfrm>
           <a:prstGeom prst="rect">
@@ -22177,7 +22423,7 @@
         </p:nvSpPr>
         <p:spPr>
           <a:xfrm>
-            <a:off x="402336" y="2487168"/>
+            <a:off x="347472" y="2532888"/>
             <a:ext cx="292608" cy="292608"/>
           </a:xfrm>
           <a:prstGeom prst="ellipse">
@@ -22219,8 +22465,8 @@
         </p:nvSpPr>
         <p:spPr>
           <a:xfrm>
-            <a:off x="822960" y="2468880"/>
-            <a:ext cx="4480560" cy="329184"/>
+            <a:off x="804672" y="2514600"/>
+            <a:ext cx="4544568" cy="329184"/>
           </a:xfrm>
           <a:prstGeom prst="rect">
             <a:avLst/>
@@ -22255,7 +22501,7 @@
         </p:nvSpPr>
         <p:spPr>
           <a:xfrm>
-            <a:off x="5394960" y="2633472"/>
+            <a:off x="5440680" y="2679192"/>
             <a:ext cx="731520" cy="0"/>
           </a:xfrm>
           <a:prstGeom prst="line">
@@ -22279,7 +22525,7 @@
         </p:nvSpPr>
         <p:spPr>
           <a:xfrm>
-            <a:off x="6309360" y="2468880"/>
+            <a:off x="6355080" y="2514600"/>
             <a:ext cx="5486400" cy="329184"/>
           </a:xfrm>
           <a:prstGeom prst="rect">
@@ -22315,7 +22561,7 @@
         </p:nvSpPr>
         <p:spPr>
           <a:xfrm>
-            <a:off x="402336" y="2944368"/>
+            <a:off x="347472" y="2990088"/>
             <a:ext cx="292608" cy="292608"/>
           </a:xfrm>
           <a:prstGeom prst="ellipse">
@@ -22357,8 +22603,8 @@
         </p:nvSpPr>
         <p:spPr>
           <a:xfrm>
-            <a:off x="822960" y="2926080"/>
-            <a:ext cx="4480560" cy="329184"/>
+            <a:off x="804672" y="2971800"/>
+            <a:ext cx="4544568" cy="329184"/>
           </a:xfrm>
           <a:prstGeom prst="rect">
             <a:avLst/>
@@ -22393,7 +22639,7 @@
         </p:nvSpPr>
         <p:spPr>
           <a:xfrm>
-            <a:off x="5394960" y="3090672"/>
+            <a:off x="5440680" y="3136392"/>
             <a:ext cx="731520" cy="0"/>
           </a:xfrm>
           <a:prstGeom prst="line">
@@ -22417,7 +22663,7 @@
         </p:nvSpPr>
         <p:spPr>
           <a:xfrm>
-            <a:off x="6309360" y="2926080"/>
+            <a:off x="6355080" y="2971800"/>
             <a:ext cx="5486400" cy="329184"/>
           </a:xfrm>
           <a:prstGeom prst="rect">
@@ -22453,7 +22699,7 @@
         </p:nvSpPr>
         <p:spPr>
           <a:xfrm>
-            <a:off x="402336" y="3401568"/>
+            <a:off x="347472" y="3447288"/>
             <a:ext cx="292608" cy="292608"/>
           </a:xfrm>
           <a:prstGeom prst="ellipse">
@@ -22495,8 +22741,8 @@
         </p:nvSpPr>
         <p:spPr>
           <a:xfrm>
-            <a:off x="822960" y="3383280"/>
-            <a:ext cx="4480560" cy="329184"/>
+            <a:off x="804672" y="3429000"/>
+            <a:ext cx="4544568" cy="329184"/>
           </a:xfrm>
           <a:prstGeom prst="rect">
             <a:avLst/>
@@ -22531,7 +22777,7 @@
         </p:nvSpPr>
         <p:spPr>
           <a:xfrm>
-            <a:off x="5394960" y="3547872"/>
+            <a:off x="5440680" y="3593592"/>
             <a:ext cx="731520" cy="0"/>
           </a:xfrm>
           <a:prstGeom prst="line">
@@ -22555,7 +22801,7 @@
         </p:nvSpPr>
         <p:spPr>
           <a:xfrm>
-            <a:off x="6309360" y="3383280"/>
+            <a:off x="6355080" y="3429000"/>
             <a:ext cx="5486400" cy="329184"/>
           </a:xfrm>
           <a:prstGeom prst="rect">
@@ -22591,7 +22837,7 @@
         </p:nvSpPr>
         <p:spPr>
           <a:xfrm>
-            <a:off x="402336" y="3858768"/>
+            <a:off x="347472" y="3904488"/>
             <a:ext cx="292608" cy="292608"/>
           </a:xfrm>
           <a:prstGeom prst="ellipse">
@@ -22633,8 +22879,8 @@
         </p:nvSpPr>
         <p:spPr>
           <a:xfrm>
-            <a:off x="822960" y="3840480"/>
-            <a:ext cx="4480560" cy="329184"/>
+            <a:off x="804672" y="3886200"/>
+            <a:ext cx="4544568" cy="329184"/>
           </a:xfrm>
           <a:prstGeom prst="rect">
             <a:avLst/>
@@ -22669,7 +22915,7 @@
         </p:nvSpPr>
         <p:spPr>
           <a:xfrm>
-            <a:off x="5394960" y="4005072"/>
+            <a:off x="5440680" y="4050792"/>
             <a:ext cx="731520" cy="0"/>
           </a:xfrm>
           <a:prstGeom prst="line">
@@ -22693,7 +22939,7 @@
         </p:nvSpPr>
         <p:spPr>
           <a:xfrm>
-            <a:off x="6309360" y="3840480"/>
+            <a:off x="6355080" y="3886200"/>
             <a:ext cx="5486400" cy="329184"/>
           </a:xfrm>
           <a:prstGeom prst="rect">
@@ -22729,7 +22975,7 @@
         </p:nvSpPr>
         <p:spPr>
           <a:xfrm>
-            <a:off x="402336" y="4315968"/>
+            <a:off x="347472" y="4361688"/>
             <a:ext cx="292608" cy="292608"/>
           </a:xfrm>
           <a:prstGeom prst="ellipse">
@@ -22771,8 +23017,8 @@
         </p:nvSpPr>
         <p:spPr>
           <a:xfrm>
-            <a:off x="822960" y="4297680"/>
-            <a:ext cx="4480560" cy="329184"/>
+            <a:off x="804672" y="4343400"/>
+            <a:ext cx="4544568" cy="329184"/>
           </a:xfrm>
           <a:prstGeom prst="rect">
             <a:avLst/>
@@ -22807,7 +23053,7 @@
         </p:nvSpPr>
         <p:spPr>
           <a:xfrm>
-            <a:off x="5394960" y="4462272"/>
+            <a:off x="5440680" y="4507992"/>
             <a:ext cx="731520" cy="0"/>
           </a:xfrm>
           <a:prstGeom prst="line">
@@ -22831,7 +23077,7 @@
         </p:nvSpPr>
         <p:spPr>
           <a:xfrm>
-            <a:off x="6309360" y="4297680"/>
+            <a:off x="6355080" y="4343400"/>
             <a:ext cx="5486400" cy="329184"/>
           </a:xfrm>
           <a:prstGeom prst="rect">
@@ -22867,8 +23113,8 @@
         </p:nvSpPr>
         <p:spPr>
           <a:xfrm>
-            <a:off x="457200" y="4937760"/>
-            <a:ext cx="11338560" cy="1280160"/>
+            <a:off x="347472" y="4937760"/>
+            <a:ext cx="11494008" cy="1280160"/>
           </a:xfrm>
           <a:prstGeom prst="rect">
             <a:avLst/>
@@ -22981,8 +23227,8 @@
         </p:nvSpPr>
         <p:spPr>
           <a:xfrm>
-            <a:off x="347472" y="438912"/>
-            <a:ext cx="11430000" cy="457200"/>
+            <a:off x="347472" y="384048"/>
+            <a:ext cx="11494008" cy="457200"/>
           </a:xfrm>
           <a:prstGeom prst="rect">
             <a:avLst/>
@@ -23011,16 +23257,16 @@
       </p:sp>
       <p:sp>
         <p:nvSpPr>
-          <p:cNvPr id="3" name="Text 0"/>
+          <p:cNvPr id="3" name="Text 1"/>
           <p:cNvSpPr/>
           <p:nvPr>
-            <p:ph idx="101" type="body" hasCustomPrompt="1"/>
+            <p:ph idx="102" type="body" hasCustomPrompt="1"/>
           </p:nvPr>
         </p:nvSpPr>
         <p:spPr>
           <a:xfrm>
-            <a:off x="347472" y="1014984"/>
-            <a:ext cx="11430000" cy="365760"/>
+            <a:off x="347472" y="978408"/>
+            <a:ext cx="11494008" cy="365760"/>
           </a:xfrm>
           <a:prstGeom prst="rect">
             <a:avLst/>
@@ -23055,7 +23301,7 @@
         </p:nvSpPr>
         <p:spPr>
           <a:xfrm>
-            <a:off x="502920" y="1691640"/>
+            <a:off x="347472" y="1645920"/>
             <a:ext cx="1874520" cy="868680"/>
           </a:xfrm>
           <a:prstGeom prst="rect">
@@ -23111,8 +23357,8 @@
         </p:nvSpPr>
         <p:spPr>
           <a:xfrm>
-            <a:off x="2377440" y="2125980"/>
-            <a:ext cx="457200" cy="0"/>
+            <a:off x="2221992" y="2080260"/>
+            <a:ext cx="530352" cy="0"/>
           </a:xfrm>
           <a:prstGeom prst="line">
             <a:avLst/>
@@ -23135,7 +23381,7 @@
         </p:nvSpPr>
         <p:spPr>
           <a:xfrm>
-            <a:off x="2834640" y="1691640"/>
+            <a:off x="2752344" y="1645920"/>
             <a:ext cx="1874520" cy="868680"/>
           </a:xfrm>
           <a:prstGeom prst="rect">
@@ -23193,8 +23439,8 @@
         </p:nvSpPr>
         <p:spPr>
           <a:xfrm>
-            <a:off x="4709160" y="2125980"/>
-            <a:ext cx="457200" cy="0"/>
+            <a:off x="4626864" y="2080260"/>
+            <a:ext cx="530352" cy="0"/>
           </a:xfrm>
           <a:prstGeom prst="line">
             <a:avLst/>
@@ -23217,7 +23463,7 @@
         </p:nvSpPr>
         <p:spPr>
           <a:xfrm>
-            <a:off x="5166360" y="1691640"/>
+            <a:off x="5157216" y="1645920"/>
             <a:ext cx="1874520" cy="868680"/>
           </a:xfrm>
           <a:prstGeom prst="rect">
@@ -23273,8 +23519,8 @@
         </p:nvSpPr>
         <p:spPr>
           <a:xfrm>
-            <a:off x="7040880" y="2125980"/>
-            <a:ext cx="457200" cy="0"/>
+            <a:off x="7031736" y="2080260"/>
+            <a:ext cx="530352" cy="0"/>
           </a:xfrm>
           <a:prstGeom prst="line">
             <a:avLst/>
@@ -23297,7 +23543,7 @@
         </p:nvSpPr>
         <p:spPr>
           <a:xfrm>
-            <a:off x="7498080" y="1691640"/>
+            <a:off x="7562088" y="1645920"/>
             <a:ext cx="1874520" cy="868680"/>
           </a:xfrm>
           <a:prstGeom prst="rect">
@@ -23353,8 +23599,8 @@
         </p:nvSpPr>
         <p:spPr>
           <a:xfrm>
-            <a:off x="9372600" y="2125980"/>
-            <a:ext cx="457200" cy="0"/>
+            <a:off x="9436608" y="2080260"/>
+            <a:ext cx="530352" cy="0"/>
           </a:xfrm>
           <a:prstGeom prst="line">
             <a:avLst/>
@@ -23377,7 +23623,7 @@
         </p:nvSpPr>
         <p:spPr>
           <a:xfrm>
-            <a:off x="9829800" y="1691640"/>
+            <a:off x="9966960" y="1645920"/>
             <a:ext cx="1874520" cy="868680"/>
           </a:xfrm>
           <a:prstGeom prst="rect">
@@ -23433,8 +23679,8 @@
         </p:nvSpPr>
         <p:spPr>
           <a:xfrm>
-            <a:off x="2834640" y="2971800"/>
-            <a:ext cx="6537960" cy="548640"/>
+            <a:off x="2752344" y="2926080"/>
+            <a:ext cx="6684264" cy="548640"/>
           </a:xfrm>
           <a:prstGeom prst="rect">
             <a:avLst/>
@@ -23490,7 +23736,7 @@
         </p:nvSpPr>
         <p:spPr>
           <a:xfrm>
-            <a:off x="10767060" y="2560320"/>
+            <a:off x="10904220" y="2514600"/>
             <a:ext cx="0" cy="685800"/>
           </a:xfrm>
           <a:prstGeom prst="line">
@@ -23513,8 +23759,8 @@
         </p:nvSpPr>
         <p:spPr>
           <a:xfrm flipH="1">
-            <a:off x="9372600" y="3246120"/>
-            <a:ext cx="1394460" cy="0"/>
+            <a:off x="9436608" y="3200400"/>
+            <a:ext cx="1467612" cy="0"/>
           </a:xfrm>
           <a:prstGeom prst="line">
             <a:avLst/>
@@ -23537,7 +23783,7 @@
         </p:nvSpPr>
         <p:spPr>
           <a:xfrm flipV="1">
-            <a:off x="3771900" y="2560320"/>
+            <a:off x="3689604" y="2514600"/>
             <a:ext cx="0" cy="411480"/>
           </a:xfrm>
           <a:prstGeom prst="line">
@@ -23561,8 +23807,8 @@
         </p:nvSpPr>
         <p:spPr>
           <a:xfrm>
-            <a:off x="502920" y="3840480"/>
-            <a:ext cx="4572000" cy="320040"/>
+            <a:off x="347472" y="3840480"/>
+            <a:ext cx="5486400" cy="320040"/>
           </a:xfrm>
           <a:prstGeom prst="rect">
             <a:avLst/>
@@ -23604,16 +23850,16 @@
           </p:nvPr>
         </p:nvGraphicFramePr>
         <p:xfrm>
-          <a:off x="502920" y="4251960"/>
-          <a:ext cx="5303520" cy="914400"/>
+          <a:off x="347472" y="4251960"/>
+          <a:ext cx="5486400" cy="914400"/>
         </p:xfrm>
         <a:graphic>
           <a:graphicData uri="http://schemas.openxmlformats.org/drawingml/2006/table">
             <a:tbl>
               <a:tblPr/>
               <a:tblGrid>
-                <a:gridCol w="2651760"/>
-                <a:gridCol w="2651760"/>
+                <a:gridCol w="2743200"/>
+                <a:gridCol w="2743200"/>
               </a:tblGrid>
               <a:tr h="329184">
                 <a:tc>
@@ -24049,8 +24295,8 @@
         </p:nvSpPr>
         <p:spPr>
           <a:xfrm>
-            <a:off x="6400800" y="3840480"/>
-            <a:ext cx="4572000" cy="320040"/>
+            <a:off x="6355080" y="3840480"/>
+            <a:ext cx="5486400" cy="320040"/>
           </a:xfrm>
           <a:prstGeom prst="rect">
             <a:avLst/>
@@ -24085,8 +24331,8 @@
         </p:nvSpPr>
         <p:spPr>
           <a:xfrm>
-            <a:off x="6400800" y="4297680"/>
-            <a:ext cx="5394960" cy="1737360"/>
+            <a:off x="6355080" y="4297680"/>
+            <a:ext cx="5486400" cy="1737360"/>
           </a:xfrm>
           <a:prstGeom prst="rect">
             <a:avLst/>
@@ -24258,8 +24504,8 @@
         </p:nvSpPr>
         <p:spPr>
           <a:xfrm>
-            <a:off x="347472" y="438912"/>
-            <a:ext cx="11430000" cy="457200"/>
+            <a:off x="347472" y="384048"/>
+            <a:ext cx="11494008" cy="457200"/>
           </a:xfrm>
           <a:prstGeom prst="rect">
             <a:avLst/>
@@ -24288,16 +24534,16 @@
       </p:sp>
       <p:sp>
         <p:nvSpPr>
-          <p:cNvPr id="3" name="Text 0"/>
+          <p:cNvPr id="3" name="Text 1"/>
           <p:cNvSpPr/>
           <p:nvPr>
-            <p:ph idx="101" type="body" hasCustomPrompt="1"/>
+            <p:ph idx="102" type="body" hasCustomPrompt="1"/>
           </p:nvPr>
         </p:nvSpPr>
         <p:spPr>
           <a:xfrm>
-            <a:off x="347472" y="1014984"/>
-            <a:ext cx="11430000" cy="365760"/>
+            <a:off x="347472" y="978408"/>
+            <a:ext cx="11494008" cy="365760"/>
           </a:xfrm>
           <a:prstGeom prst="rect">
             <a:avLst/>
@@ -24332,7 +24578,7 @@
         </p:nvSpPr>
         <p:spPr>
           <a:xfrm>
-            <a:off x="457200" y="2651760"/>
+            <a:off x="347472" y="2651760"/>
             <a:ext cx="1463040" cy="1005840"/>
           </a:xfrm>
           <a:prstGeom prst="rect">
@@ -24388,7 +24634,7 @@
         </p:nvSpPr>
         <p:spPr>
           <a:xfrm>
-            <a:off x="2514600" y="1600200"/>
+            <a:off x="2286000" y="1600200"/>
             <a:ext cx="7315200" cy="320040"/>
           </a:xfrm>
           <a:prstGeom prst="rect">
@@ -24424,7 +24670,7 @@
         </p:nvSpPr>
         <p:spPr>
           <a:xfrm>
-            <a:off x="2514600" y="3246120"/>
+            <a:off x="2286000" y="3246120"/>
             <a:ext cx="7315200" cy="320040"/>
           </a:xfrm>
           <a:prstGeom prst="rect">
@@ -24460,8 +24706,8 @@
         </p:nvSpPr>
         <p:spPr>
           <a:xfrm>
-            <a:off x="2514600" y="1965960"/>
-            <a:ext cx="1508760" cy="731520"/>
+            <a:off x="2286000" y="1965960"/>
+            <a:ext cx="1623060" cy="731520"/>
           </a:xfrm>
           <a:prstGeom prst="rect">
             <a:avLst/>
@@ -24518,7 +24764,7 @@
         </p:nvSpPr>
         <p:spPr>
           <a:xfrm>
-            <a:off x="4023360" y="2331720"/>
+            <a:off x="3909060" y="2331720"/>
             <a:ext cx="320040" cy="0"/>
           </a:xfrm>
           <a:prstGeom prst="line">
@@ -24542,8 +24788,8 @@
         </p:nvSpPr>
         <p:spPr>
           <a:xfrm>
-            <a:off x="4343400" y="1965960"/>
-            <a:ext cx="1508760" cy="731520"/>
+            <a:off x="4229100" y="1965960"/>
+            <a:ext cx="1623060" cy="731520"/>
           </a:xfrm>
           <a:prstGeom prst="rect">
             <a:avLst/>
@@ -24625,7 +24871,7 @@
         <p:spPr>
           <a:xfrm>
             <a:off x="6172200" y="1965960"/>
-            <a:ext cx="1508760" cy="731520"/>
+            <a:ext cx="1623060" cy="731520"/>
           </a:xfrm>
           <a:prstGeom prst="rect">
             <a:avLst/>
@@ -24682,7 +24928,7 @@
         </p:nvSpPr>
         <p:spPr>
           <a:xfrm>
-            <a:off x="7680960" y="2331720"/>
+            <a:off x="7795260" y="2331720"/>
             <a:ext cx="320040" cy="0"/>
           </a:xfrm>
           <a:prstGeom prst="line">
@@ -24706,8 +24952,8 @@
         </p:nvSpPr>
         <p:spPr>
           <a:xfrm>
-            <a:off x="8001000" y="1965960"/>
-            <a:ext cx="1508760" cy="731520"/>
+            <a:off x="8115300" y="1965960"/>
+            <a:ext cx="1623060" cy="731520"/>
           </a:xfrm>
           <a:prstGeom prst="rect">
             <a:avLst/>
@@ -24764,8 +25010,8 @@
         </p:nvSpPr>
         <p:spPr>
           <a:xfrm>
-            <a:off x="2514600" y="3611880"/>
-            <a:ext cx="2057400" cy="731520"/>
+            <a:off x="2286000" y="3611880"/>
+            <a:ext cx="2209800" cy="731520"/>
           </a:xfrm>
           <a:prstGeom prst="rect">
             <a:avLst/>
@@ -24820,7 +25066,7 @@
         </p:nvSpPr>
         <p:spPr>
           <a:xfrm>
-            <a:off x="4572000" y="3977640"/>
+            <a:off x="4495800" y="3977640"/>
             <a:ext cx="411480" cy="0"/>
           </a:xfrm>
           <a:prstGeom prst="line">
@@ -24844,8 +25090,8 @@
         </p:nvSpPr>
         <p:spPr>
           <a:xfrm>
-            <a:off x="4983480" y="3611880"/>
-            <a:ext cx="2057400" cy="731520"/>
+            <a:off x="4907280" y="3611880"/>
+            <a:ext cx="2209800" cy="731520"/>
           </a:xfrm>
           <a:prstGeom prst="rect">
             <a:avLst/>
@@ -24900,7 +25146,7 @@
         </p:nvSpPr>
         <p:spPr>
           <a:xfrm>
-            <a:off x="7040880" y="3977640"/>
+            <a:off x="7117080" y="3977640"/>
             <a:ext cx="411480" cy="0"/>
           </a:xfrm>
           <a:prstGeom prst="line">
@@ -24924,8 +25170,8 @@
         </p:nvSpPr>
         <p:spPr>
           <a:xfrm>
-            <a:off x="7452360" y="3611880"/>
-            <a:ext cx="2057400" cy="731520"/>
+            <a:off x="7528560" y="3611880"/>
+            <a:ext cx="2209800" cy="731520"/>
           </a:xfrm>
           <a:prstGeom prst="rect">
             <a:avLst/>
@@ -24980,7 +25226,7 @@
         </p:nvSpPr>
         <p:spPr>
           <a:xfrm>
-            <a:off x="10012680" y="1965960"/>
+            <a:off x="10058400" y="1965960"/>
             <a:ext cx="1783080" cy="2377440"/>
           </a:xfrm>
           <a:prstGeom prst="rect">
@@ -25050,8 +25296,8 @@
         </p:nvSpPr>
         <p:spPr>
           <a:xfrm>
-            <a:off x="1920240" y="3154680"/>
-            <a:ext cx="274320" cy="0"/>
+            <a:off x="1810512" y="3154680"/>
+            <a:ext cx="237744" cy="0"/>
           </a:xfrm>
           <a:prstGeom prst="line">
             <a:avLst/>
@@ -25073,7 +25319,7 @@
         </p:nvSpPr>
         <p:spPr>
           <a:xfrm>
-            <a:off x="2194560" y="2331720"/>
+            <a:off x="2048256" y="2331720"/>
             <a:ext cx="0" cy="1645920"/>
           </a:xfrm>
           <a:prstGeom prst="line">
@@ -25096,8 +25342,8 @@
         </p:nvSpPr>
         <p:spPr>
           <a:xfrm>
-            <a:off x="2194560" y="2331720"/>
-            <a:ext cx="320040" cy="0"/>
+            <a:off x="2048256" y="2331720"/>
+            <a:ext cx="237744" cy="0"/>
           </a:xfrm>
           <a:prstGeom prst="line">
             <a:avLst/>
@@ -25120,8 +25366,8 @@
         </p:nvSpPr>
         <p:spPr>
           <a:xfrm>
-            <a:off x="2194560" y="3977640"/>
-            <a:ext cx="320040" cy="0"/>
+            <a:off x="2048256" y="3977640"/>
+            <a:ext cx="237744" cy="0"/>
           </a:xfrm>
           <a:prstGeom prst="line">
             <a:avLst/>
@@ -25144,8 +25390,8 @@
         </p:nvSpPr>
         <p:spPr>
           <a:xfrm>
-            <a:off x="9509760" y="2331720"/>
-            <a:ext cx="502920" cy="0"/>
+            <a:off x="9738360" y="2331720"/>
+            <a:ext cx="320040" cy="0"/>
           </a:xfrm>
           <a:prstGeom prst="line">
             <a:avLst/>
@@ -25168,8 +25414,8 @@
         </p:nvSpPr>
         <p:spPr>
           <a:xfrm>
-            <a:off x="9509760" y="3977640"/>
-            <a:ext cx="502920" cy="0"/>
+            <a:off x="9738360" y="3977640"/>
+            <a:ext cx="320040" cy="0"/>
           </a:xfrm>
           <a:prstGeom prst="line">
             <a:avLst/>
@@ -25192,7 +25438,7 @@
         </p:nvSpPr>
         <p:spPr>
           <a:xfrm>
-            <a:off x="10904220" y="4343400"/>
+            <a:off x="10949940" y="4343400"/>
             <a:ext cx="0" cy="365760"/>
           </a:xfrm>
           <a:prstGeom prst="line">
@@ -25215,8 +25461,8 @@
         </p:nvSpPr>
         <p:spPr>
           <a:xfrm flipH="1">
-            <a:off x="1188720" y="4709160"/>
-            <a:ext cx="9715500" cy="0"/>
+            <a:off x="1078992" y="4709160"/>
+            <a:ext cx="9870948" cy="0"/>
           </a:xfrm>
           <a:prstGeom prst="line">
             <a:avLst/>
@@ -25238,7 +25484,7 @@
         </p:nvSpPr>
         <p:spPr>
           <a:xfrm flipV="1">
-            <a:off x="1188720" y="3657600"/>
+            <a:off x="1078992" y="3657600"/>
             <a:ext cx="0" cy="1051560"/>
           </a:xfrm>
           <a:prstGeom prst="line">
@@ -25262,8 +25508,8 @@
         </p:nvSpPr>
         <p:spPr>
           <a:xfrm>
-            <a:off x="4114800" y="4773168"/>
-            <a:ext cx="3931920" cy="274320"/>
+            <a:off x="347472" y="4773168"/>
+            <a:ext cx="11494008" cy="274320"/>
           </a:xfrm>
           <a:prstGeom prst="rect">
             <a:avLst/>
@@ -25298,8 +25544,8 @@
         </p:nvSpPr>
         <p:spPr>
           <a:xfrm>
-            <a:off x="457200" y="5212080"/>
-            <a:ext cx="11338560" cy="1097280"/>
+            <a:off x="347472" y="5212080"/>
+            <a:ext cx="11494008" cy="1097280"/>
           </a:xfrm>
           <a:prstGeom prst="rect">
             <a:avLst/>
@@ -25440,8 +25686,8 @@
         </p:nvSpPr>
         <p:spPr>
           <a:xfrm>
-            <a:off x="347472" y="438912"/>
-            <a:ext cx="11430000" cy="457200"/>
+            <a:off x="347472" y="384048"/>
+            <a:ext cx="11494008" cy="457200"/>
           </a:xfrm>
           <a:prstGeom prst="rect">
             <a:avLst/>
@@ -25470,16 +25716,16 @@
       </p:sp>
       <p:sp>
         <p:nvSpPr>
-          <p:cNvPr id="3" name="Text 0"/>
+          <p:cNvPr id="3" name="Text 1"/>
           <p:cNvSpPr/>
           <p:nvPr>
-            <p:ph idx="101" type="body" hasCustomPrompt="1"/>
+            <p:ph idx="102" type="body" hasCustomPrompt="1"/>
           </p:nvPr>
         </p:nvSpPr>
         <p:spPr>
           <a:xfrm>
-            <a:off x="347472" y="1014984"/>
-            <a:ext cx="11430000" cy="365760"/>
+            <a:off x="347472" y="978408"/>
+            <a:ext cx="11494008" cy="365760"/>
           </a:xfrm>
           <a:prstGeom prst="rect">
             <a:avLst/>
@@ -25514,7 +25760,7 @@
         </p:nvSpPr>
         <p:spPr>
           <a:xfrm>
-            <a:off x="1335024" y="2103120"/>
+            <a:off x="1005840" y="2103120"/>
             <a:ext cx="1536192" cy="0"/>
           </a:xfrm>
           <a:prstGeom prst="line">
@@ -25538,7 +25784,7 @@
         </p:nvSpPr>
         <p:spPr>
           <a:xfrm>
-            <a:off x="1335024" y="4754880"/>
+            <a:off x="1005840" y="4754880"/>
             <a:ext cx="1536192" cy="0"/>
           </a:xfrm>
           <a:prstGeom prst="line">
@@ -25562,7 +25808,7 @@
         </p:nvSpPr>
         <p:spPr>
           <a:xfrm flipH="1">
-            <a:off x="2312997" y="2356721"/>
+            <a:off x="1983813" y="2356721"/>
             <a:ext cx="677526" cy="818677"/>
           </a:xfrm>
           <a:prstGeom prst="line">
@@ -25586,7 +25832,7 @@
         </p:nvSpPr>
         <p:spPr>
           <a:xfrm>
-            <a:off x="3393470" y="2369740"/>
+            <a:off x="3064286" y="2369740"/>
             <a:ext cx="573981" cy="792640"/>
           </a:xfrm>
           <a:prstGeom prst="line">
@@ -25610,7 +25856,7 @@
         </p:nvSpPr>
         <p:spPr>
           <a:xfrm flipH="1">
-            <a:off x="4353590" y="2369740"/>
+            <a:off x="4024406" y="2369740"/>
             <a:ext cx="573981" cy="792640"/>
           </a:xfrm>
           <a:prstGeom prst="line">
@@ -25634,7 +25880,7 @@
         </p:nvSpPr>
         <p:spPr>
           <a:xfrm flipV="1">
-            <a:off x="3393470" y="3695620"/>
+            <a:off x="3064286" y="3695620"/>
             <a:ext cx="573981" cy="792640"/>
           </a:xfrm>
           <a:prstGeom prst="line">
@@ -25658,7 +25904,7 @@
         </p:nvSpPr>
         <p:spPr>
           <a:xfrm>
-            <a:off x="676656" y="1773936"/>
+            <a:off x="347472" y="1773936"/>
             <a:ext cx="658368" cy="658368"/>
           </a:xfrm>
           <a:prstGeom prst="ellipse">
@@ -25717,7 +25963,7 @@
         </p:nvSpPr>
         <p:spPr>
           <a:xfrm>
-            <a:off x="2871216" y="1773936"/>
+            <a:off x="2542032" y="1773936"/>
             <a:ext cx="658368" cy="658368"/>
           </a:xfrm>
           <a:prstGeom prst="ellipse">
@@ -25776,7 +26022,7 @@
         </p:nvSpPr>
         <p:spPr>
           <a:xfrm>
-            <a:off x="4791456" y="1773936"/>
+            <a:off x="4462272" y="1773936"/>
             <a:ext cx="658368" cy="658368"/>
           </a:xfrm>
           <a:prstGeom prst="ellipse">
@@ -25835,7 +26081,7 @@
         </p:nvSpPr>
         <p:spPr>
           <a:xfrm>
-            <a:off x="676656" y="4425696"/>
+            <a:off x="347472" y="4425696"/>
             <a:ext cx="658368" cy="658368"/>
           </a:xfrm>
           <a:prstGeom prst="ellipse">
@@ -25894,7 +26140,7 @@
         </p:nvSpPr>
         <p:spPr>
           <a:xfrm>
-            <a:off x="2871216" y="4425696"/>
+            <a:off x="2542032" y="4425696"/>
             <a:ext cx="658368" cy="658368"/>
           </a:xfrm>
           <a:prstGeom prst="ellipse">
@@ -25953,7 +26199,7 @@
         </p:nvSpPr>
         <p:spPr>
           <a:xfrm>
-            <a:off x="1773936" y="3099816"/>
+            <a:off x="1444752" y="3099816"/>
             <a:ext cx="658368" cy="658368"/>
           </a:xfrm>
           <a:prstGeom prst="ellipse">
@@ -26012,7 +26258,7 @@
         </p:nvSpPr>
         <p:spPr>
           <a:xfrm>
-            <a:off x="3831336" y="3099816"/>
+            <a:off x="3502152" y="3099816"/>
             <a:ext cx="658368" cy="658368"/>
           </a:xfrm>
           <a:prstGeom prst="ellipse">
@@ -26071,7 +26317,7 @@
         </p:nvSpPr>
         <p:spPr>
           <a:xfrm>
-            <a:off x="1325880" y="1600200"/>
+            <a:off x="996696" y="1627632"/>
             <a:ext cx="1554480" cy="274320"/>
           </a:xfrm>
           <a:prstGeom prst="rect">
@@ -26107,7 +26353,7 @@
         </p:nvSpPr>
         <p:spPr>
           <a:xfrm>
-            <a:off x="1463040" y="4443984"/>
+            <a:off x="1133856" y="4443984"/>
             <a:ext cx="1280160" cy="274320"/>
           </a:xfrm>
           <a:prstGeom prst="rect">
@@ -26143,7 +26389,7 @@
         </p:nvSpPr>
         <p:spPr>
           <a:xfrm>
-            <a:off x="448056" y="5550408"/>
+            <a:off x="347472" y="5550408"/>
             <a:ext cx="237744" cy="237744"/>
           </a:xfrm>
           <a:prstGeom prst="ellipse">
@@ -26177,7 +26423,7 @@
         </p:nvSpPr>
         <p:spPr>
           <a:xfrm>
-            <a:off x="822960" y="5532120"/>
+            <a:off x="713232" y="5532120"/>
             <a:ext cx="5120640" cy="274320"/>
           </a:xfrm>
           <a:prstGeom prst="rect">
@@ -26213,7 +26459,7 @@
         </p:nvSpPr>
         <p:spPr>
           <a:xfrm>
-            <a:off x="448056" y="5916168"/>
+            <a:off x="347472" y="5916168"/>
             <a:ext cx="237744" cy="237744"/>
           </a:xfrm>
           <a:prstGeom prst="ellipse">
@@ -26247,7 +26493,7 @@
         </p:nvSpPr>
         <p:spPr>
           <a:xfrm>
-            <a:off x="822960" y="5897880"/>
+            <a:off x="713232" y="5897880"/>
             <a:ext cx="5120640" cy="274320"/>
           </a:xfrm>
           <a:prstGeom prst="rect">
@@ -26291,7 +26537,7 @@
         </p:blipFill>
         <p:spPr>
           <a:xfrm>
-            <a:off x="6309360" y="1783080"/>
+            <a:off x="6355080" y="1783080"/>
             <a:ext cx="4754880" cy="431719"/>
           </a:xfrm>
           <a:prstGeom prst="rect">
@@ -26307,8 +26553,8 @@
         </p:nvSpPr>
         <p:spPr>
           <a:xfrm>
-            <a:off x="6309360" y="2331720"/>
-            <a:ext cx="5394960" cy="548640"/>
+            <a:off x="6355080" y="2331720"/>
+            <a:ext cx="5486400" cy="548640"/>
           </a:xfrm>
           <a:prstGeom prst="rect">
             <a:avLst/>
@@ -26351,7 +26597,7 @@
         </p:blipFill>
         <p:spPr>
           <a:xfrm>
-            <a:off x="6309360" y="3017520"/>
+            <a:off x="6355080" y="3017520"/>
             <a:ext cx="5120640" cy="716890"/>
           </a:xfrm>
           <a:prstGeom prst="rect">
@@ -26367,8 +26613,8 @@
         </p:nvSpPr>
         <p:spPr>
           <a:xfrm>
-            <a:off x="6309360" y="3822192"/>
-            <a:ext cx="5394960" cy="548640"/>
+            <a:off x="6355080" y="3822192"/>
+            <a:ext cx="5486400" cy="548640"/>
           </a:xfrm>
           <a:prstGeom prst="rect">
             <a:avLst/>
@@ -26403,8 +26649,8 @@
         </p:nvSpPr>
         <p:spPr>
           <a:xfrm>
-            <a:off x="6309360" y="4526280"/>
-            <a:ext cx="5394960" cy="548640"/>
+            <a:off x="6355080" y="4526280"/>
+            <a:ext cx="5486400" cy="548640"/>
           </a:xfrm>
           <a:prstGeom prst="rect">
             <a:avLst/>
@@ -26439,8 +26685,8 @@
         </p:nvSpPr>
         <p:spPr>
           <a:xfrm>
-            <a:off x="6309360" y="5120640"/>
-            <a:ext cx="5394960" cy="320040"/>
+            <a:off x="6355080" y="5120640"/>
+            <a:ext cx="5486400" cy="320040"/>
           </a:xfrm>
           <a:prstGeom prst="rect">
             <a:avLst/>
@@ -26475,8 +26721,8 @@
         </p:nvSpPr>
         <p:spPr>
           <a:xfrm>
-            <a:off x="6309360" y="5577840"/>
-            <a:ext cx="5394960" cy="594360"/>
+            <a:off x="6355080" y="5577840"/>
+            <a:ext cx="5486400" cy="594360"/>
           </a:xfrm>
           <a:prstGeom prst="rect">
             <a:avLst/>
